--- a/Arquitectura de Sistemas Computacionales/Clases/Clase 3 - Virtualizacion y contenedores/Presentacion.pptx
+++ b/Arquitectura de Sistemas Computacionales/Clases/Clase 3 - Virtualizacion y contenedores/Presentacion.pptx
@@ -3379,7 +3379,7 @@
                 </a:solidFill>
                 <a:latin typeface="Calibri"/>
               </a:rPr>
-              <a:t> · Teoría breve · Taller PI · Quiz/cierre.</a:t>
+              <a:t> · Teoría breve · Taller PI · cierre.</a:t>
             </a:r>
           </a:p>
           <a:p>
@@ -5380,7 +5380,7 @@
                 </a:solidFill>
                 <a:latin typeface="Calibri"/>
               </a:rPr>
-              <a:t> Quiz corto / revisión de evidencias.</a:t>
+              <a:t> Revisión de evidencias del PI.</a:t>
             </a:r>
           </a:p>
           <a:p>

--- a/Arquitectura de Sistemas Computacionales/Clases/Clase 3 - Virtualizacion y contenedores/Presentacion.pptx
+++ b/Arquitectura de Sistemas Computacionales/Clases/Clase 3 - Virtualizacion y contenedores/Presentacion.pptx
@@ -4688,7 +4688,7 @@
                 </a:solidFill>
                 <a:latin typeface="Calibri"/>
               </a:rPr>
-              <a:t>Subir evidencias al paquete CloudLite (Drive/repo) y a ExamLab domingo 23:59.</a:t>
+              <a:t>Subir evidencias al paquete CloudLite (Drive/repo) y a ExamLab (https://examlab.lovable.app/) domingo 23:59.</a:t>
             </a:r>
           </a:p>
         </p:txBody>
@@ -6544,7 +6544,7 @@
                 </a:solidFill>
                 <a:latin typeface="Calibri"/>
               </a:rPr>
-              <a:t>–   📸 [CAP: pwd-home] Home del lab · 📸 [CAP: docker-ps] `docker ps`.</a:t>
+              <a:t>–   Home del lab · `docker ps`.</a:t>
             </a:r>
           </a:p>
           <a:p>
@@ -6600,6 +6600,30 @@
           </a:p>
         </p:txBody>
       </p:sp>
+      <p:pic>
+        <p:nvPicPr>
+          <p:cNvPr id="7" name="Picture 6" descr="salida-docker-ps.png"/>
+          <p:cNvPicPr>
+            <a:picLocks noChangeAspect="1"/>
+          </p:cNvPicPr>
+          <p:nvPr/>
+        </p:nvPicPr>
+        <p:blipFill>
+          <a:blip r:embed="rId2"/>
+          <a:stretch>
+            <a:fillRect/>
+          </a:stretch>
+        </p:blipFill>
+        <p:spPr>
+          <a:xfrm>
+            <a:off x="8625535" y="5668558"/>
+            <a:ext cx="3108960" cy="732241"/>
+          </a:xfrm>
+          <a:prstGeom prst="rect">
+            <a:avLst/>
+          </a:prstGeom>
+        </p:spPr>
+      </p:pic>
     </p:spTree>
   </p:cSld>
   <p:clrMapOvr>

--- a/Arquitectura de Sistemas Computacionales/Clases/Clase 3 - Virtualizacion y contenedores/Presentacion.pptx
+++ b/Arquitectura de Sistemas Computacionales/Clases/Clase 3 - Virtualizacion y contenedores/Presentacion.pptx
@@ -4095,7 +4095,7 @@
                 </a:solidFill>
                 <a:latin typeface="Calibri"/>
               </a:rPr>
-              <a:t> Definan qué servicio contenerizan hoy (API stub o front estático del dominio).</a:t>
+              <a:t> Paso 1: decidan cual de los contenedores de CloudLite se contenerizara hoy (la API stub o el front estatico) y escriban en la seccion Contenedores del informe el nombre exacto del servicio, el puerto que expondra y la ruta de salud que responderan (por ejemplo api-citas, puerto 8080, ruta /health), verificando que ese nombre sea el mismo que usaran en el C4 de la Clase 4 y en el despliegue de la Clase 7.</a:t>
             </a:r>
           </a:p>
           <a:p>
@@ -4129,7 +4129,7 @@
                 </a:solidFill>
                 <a:latin typeface="Calibri"/>
               </a:rPr>
-              <a:t> En Play with Docker: construyan y corran el contenedor (si no carga, Killercoda como alterna).</a:t>
+              <a:t> Paso 2: en la consola Linux de ExamLab arme el contexto de build con 5 archivos (app/main.py, requirements.txt con 2 dependencias fijadas por version, Dockerfile, .dockerignore con 4 entradas) y verifique con ls -la que los 5 existen y con un grep de PASSWORD, SECRET, TOKEN y api_key que la salida sea vacia, confirmando que no hay ningun secreto en el contexto.</a:t>
             </a:r>
           </a:p>
           <a:p>
@@ -4163,7 +4163,7 @@
                 </a:solidFill>
                 <a:latin typeface="Calibri"/>
               </a:rPr>
-              <a:t> Documenten Dockerfile (y compose si aplica) en el repo/ZIP del PI.</a:t>
+              <a:t> Paso 3: escriba el Dockerfile con exactamente 7 instrucciones (FROM con tag fijo y variante slim, WORKDIR, COPY de requirements, RUN pip install --no-cache-dir, COPY del codigo, EXPOSE del puerto declarado en el paso 1, CMD) y verifique que el puerto de EXPOSE, el del CMD y el documentado en el informe sean el mismo numero; el Dockerfile se pega completo en la pregunta 2 de ExamLab.</a:t>
             </a:r>
           </a:p>
           <a:p>
@@ -4197,7 +4197,7 @@
                 </a:solidFill>
                 <a:latin typeface="Calibri"/>
               </a:rPr>
-              <a:t> Capturen evidencia (PNG) o enlace de sesión + nota de caducidad.</a:t>
+              <a:t> Paso 4: abra Play with Docker (o Killercoda si no carga), ejecute docker build -t cloudlite-api:v1 . y docker run -d -p 8080:8080 cloudlite-api:v1, compruebe con curl que la ruta de salud devuelve 200 y llene la bitacora de 5 filas comando / que esperaba / que salio / evidencia, verificando que la captura muestre a la vez el prompt del lab, la salida del docker ps y la hora del sistema.</a:t>
             </a:r>
           </a:p>
           <a:p>
@@ -4231,7 +4231,7 @@
                 </a:solidFill>
                 <a:latin typeface="Calibri"/>
               </a:rPr>
-              <a:t> Actualicen informe: sección Contenedores + enlace a diagrama de despliegue futuro.</a:t>
+              <a:t> Paso 5: complete el diagrama Mermaid del ciclo Dockerfile a contenedor, adjunte la captura del lab con su nota de caducidad y suba las 5 preguntas del taller a ExamLab (modulo Talleres) antes del domingo 23:59, verificando que la seccion Contenedores del informe cite el mismo tag de imagen cloudlite-api:v1 que aparece en la captura.</a:t>
             </a:r>
           </a:p>
         </p:txBody>

--- a/Arquitectura de Sistemas Computacionales/Clases/Clase 3 - Virtualizacion y contenedores/Presentacion.pptx
+++ b/Arquitectura de Sistemas Computacionales/Clases/Clase 3 - Virtualizacion y contenedores/Presentacion.pptx
@@ -3297,7 +3297,7 @@
                 </a:solidFill>
                 <a:latin typeface="Calibri"/>
               </a:rPr>
-              <a:t>Lab Play with Docker → stub CloudLite</a:t>
+              <a:t>Lab LabEx Docker Playground → stub CloudLite</a:t>
             </a:r>
           </a:p>
         </p:txBody>
@@ -4197,7 +4197,7 @@
                 </a:solidFill>
                 <a:latin typeface="Calibri"/>
               </a:rPr>
-              <a:t> Paso 4: abra Play with Docker (o Killercoda si no carga), ejecute docker build -t cloudlite-api:v1 . y docker run -d -p 8080:8080 cloudlite-api:v1, compruebe con curl que la ruta de salud devuelve 200 y llene la bitacora de 5 filas comando / que esperaba / que salio / evidencia, verificando que la captura muestre a la vez el prompt del lab, la salida del docker ps y la hora del sistema.</a:t>
+              <a:t> Paso 4: abra LabEx Docker Playground en labex.io con su cuenta de Google o Microsoft (o Killercoda si no carga), ejecute docker build -t cloudlite-api:v1 . y docker run -d -p 8080:8080 cloudlite-api:v1, compruebe con curl que la ruta de salud devuelve 200 y llene la bitacora de 5 filas comando / que esperaba / que salio / evidencia, verificando que la captura muestre a la vez el prompt del lab, la salida del docker ps y la hora del sistema.</a:t>
             </a:r>
           </a:p>
           <a:p>
@@ -5355,7 +5355,7 @@
                 </a:solidFill>
                 <a:latin typeface="Calibri"/>
               </a:rPr>
-              <a:t> Taller guiado PI (demo en vivo + trabajo de equipo).</a:t>
+              <a:t> Taller guiado PI (demo en vivo + avance individual).</a:t>
             </a:r>
           </a:p>
           <a:p>
@@ -5938,7 +5938,7 @@
                 </a:solidFill>
                 <a:latin typeface="Calibri"/>
               </a:rPr>
-              <a:t>Play with Docker (PWD) · alterna si no carga: Killercoda</a:t>
+              <a:t>LabEx Docker Playground · alterna si no carga: Killercoda</a:t>
             </a:r>
           </a:p>
           <a:p>
@@ -5988,7 +5988,7 @@
                 </a:solidFill>
                 <a:latin typeface="Calibri"/>
               </a:rPr>
-              <a:t>–   Equipos 2–3 · todos deben poder explicar el artefacto.</a:t>
+              <a:t>–   Individual por defecto · el docente puede autorizar equipos de 2–3; la entrega en ExamLab siempre es individual.</a:t>
             </a:r>
           </a:p>
         </p:txBody>
@@ -6494,7 +6494,7 @@
                 </a:solidFill>
                 <a:latin typeface="Calibri"/>
               </a:rPr>
-              <a:t>–   Abrir Play with Docker (labs.play-with-docker.com) → Add new instance.</a:t>
+              <a:t>–   Abrir LabEx Docker Playground (labex.io, inicie sesión con su cuenta de Google o Microsoft).</a:t>
             </a:r>
           </a:p>
           <a:p>
@@ -6560,7 +6560,7 @@
                 </a:solidFill>
                 <a:latin typeface="Calibri"/>
               </a:rPr>
-              <a:t>–   Sesion de PWD dura 4h y se autodestruye: guardar Dockerfile + capturas con timestamp antes de que expire. Si PWD esta caido: Killercoda (ubuntu/docker) como alterna.</a:t>
+              <a:t>–   La sesión de LabEx es temporal: guardar Dockerfile + capturas con timestamp antes de cerrarla. Si LabEx está caído: Killercoda (ubuntu/docker) como alterna.</a:t>
             </a:r>
           </a:p>
         </p:txBody>

--- a/Arquitectura de Sistemas Computacionales/Clases/Clase 3 - Virtualizacion y contenedores/Presentacion.pptx
+++ b/Arquitectura de Sistemas Computacionales/Clases/Clase 3 - Virtualizacion y contenedores/Presentacion.pptx
@@ -4688,7 +4688,7 @@
                 </a:solidFill>
                 <a:latin typeface="Calibri"/>
               </a:rPr>
-              <a:t>Subir evidencias al paquete CloudLite (Drive/repo) y a ExamLab (https://examlab.lovable.app/) domingo 23:59.</a:t>
+              <a:t>Subir evidencias al paquete CloudLite (Drive/repo) y a ExamLab (https://uniaj.examlab.workers.dev/) domingo 23:59.</a:t>
             </a:r>
           </a:p>
         </p:txBody>

--- a/Arquitectura de Sistemas Computacionales/Clases/Clase 3 - Virtualizacion y contenedores/Presentacion.pptx
+++ b/Arquitectura de Sistemas Computacionales/Clases/Clase 3 - Virtualizacion y contenedores/Presentacion.pptx
@@ -18,6 +18,8 @@
     <p:sldId id="266" r:id="rId17"/>
     <p:sldId id="267" r:id="rId18"/>
     <p:sldId id="268" r:id="rId19"/>
+    <p:sldId id="269" r:id="rId20"/>
+    <p:sldId id="270" r:id="rId21"/>
   </p:sldIdLst>
   <p:sldSz cx="12191695" cy="6858000" type="screen4x3"/>
   <p:notesSz cx="6858000" cy="9144000"/>
@@ -3941,7 +3943,7 @@
         <p:spPr>
           <a:xfrm>
             <a:off x="0" y="0"/>
-            <a:ext cx="12191695" cy="960120"/>
+            <a:ext cx="12191695" cy="1170432"/>
           </a:xfrm>
           <a:prstGeom prst="rect">
             <a:avLst/>
@@ -3983,7 +3985,7 @@
         </p:nvSpPr>
         <p:spPr>
           <a:xfrm>
-            <a:off x="0" y="960120"/>
+            <a:off x="0" y="1170432"/>
             <a:ext cx="12191695" cy="41148"/>
           </a:xfrm>
           <a:prstGeom prst="rect">
@@ -4027,7 +4029,7 @@
         <p:spPr>
           <a:xfrm>
             <a:off x="457200" y="164592"/>
-            <a:ext cx="11277295" cy="502920"/>
+            <a:ext cx="11277295" cy="384048"/>
           </a:xfrm>
           <a:prstGeom prst="rect">
             <a:avLst/>
@@ -4047,7 +4049,7 @@
                 </a:solidFill>
                 <a:latin typeface="Calibri"/>
               </a:rPr>
-              <a:t>Taller PI (paso a paso)</a:t>
+              <a:t>Herramientas de hoy</a:t>
             </a:r>
           </a:p>
         </p:txBody>
@@ -4060,8 +4062,8 @@
         </p:nvSpPr>
         <p:spPr>
           <a:xfrm>
-            <a:off x="457200" y="1170432"/>
-            <a:ext cx="11277295" cy="5230368"/>
+            <a:off x="457200" y="566928"/>
+            <a:ext cx="11277295" cy="411480"/>
           </a:xfrm>
           <a:prstGeom prst="rect">
             <a:avLst/>
@@ -4074,171 +4076,1041 @@
           </a:bodyPr>
           <a:lstStyle/>
           <a:p>
-            <a:pPr>
-              <a:spcAft>
-                <a:spcPts val="800"/>
-              </a:spcAft>
+            <a:r>
+              <a:rPr sz="1400" b="0" i="0">
+                <a:solidFill>
+                  <a:srgbClr val="B8D8EE"/>
+                </a:solidFill>
+                <a:latin typeface="Calibri"/>
+              </a:rPr>
+              <a:t>Gratis · navegador o free tier · sin cuenta de pago</a:t>
+            </a:r>
+          </a:p>
+        </p:txBody>
+      </p:sp>
+      <p:sp>
+        <p:nvSpPr>
+          <p:cNvPr id="6" name="Rounded Rectangle 5"/>
+          <p:cNvSpPr/>
+          <p:nvPr/>
+        </p:nvSpPr>
+        <p:spPr>
+          <a:xfrm>
+            <a:off x="457200" y="1591056"/>
+            <a:ext cx="3624986" cy="2299716"/>
+          </a:xfrm>
+          <a:prstGeom prst="roundRect">
+            <a:avLst>
+              <a:gd name="adj" fmla="val 12000"/>
+            </a:avLst>
+          </a:prstGeom>
+          <a:solidFill>
+            <a:srgbClr val="F2F2F2"/>
+          </a:solidFill>
+          <a:ln>
+            <a:noFill/>
+          </a:ln>
+        </p:spPr>
+        <p:style>
+          <a:lnRef idx="1">
+            <a:schemeClr val="accent1"/>
+          </a:lnRef>
+          <a:fillRef idx="3">
+            <a:schemeClr val="accent1"/>
+          </a:fillRef>
+          <a:effectRef idx="2">
+            <a:schemeClr val="accent1"/>
+          </a:effectRef>
+          <a:fontRef idx="minor">
+            <a:schemeClr val="lt1"/>
+          </a:fontRef>
+        </p:style>
+        <p:txBody>
+          <a:bodyPr rtlCol="0" anchor="ctr"/>
+          <a:lstStyle/>
+          <a:p>
+            <a:pPr algn="ctr"/>
+          </a:p>
+        </p:txBody>
+      </p:sp>
+      <p:sp>
+        <p:nvSpPr>
+          <p:cNvPr id="7" name="Rectangle 6"/>
+          <p:cNvSpPr/>
+          <p:nvPr/>
+        </p:nvSpPr>
+        <p:spPr>
+          <a:xfrm>
+            <a:off x="457200" y="1591056"/>
+            <a:ext cx="3624986" cy="64008"/>
+          </a:xfrm>
+          <a:prstGeom prst="rect">
+            <a:avLst/>
+          </a:prstGeom>
+          <a:solidFill>
+            <a:srgbClr val="095292"/>
+          </a:solidFill>
+          <a:ln>
+            <a:noFill/>
+          </a:ln>
+        </p:spPr>
+        <p:style>
+          <a:lnRef idx="1">
+            <a:schemeClr val="accent1"/>
+          </a:lnRef>
+          <a:fillRef idx="3">
+            <a:schemeClr val="accent1"/>
+          </a:fillRef>
+          <a:effectRef idx="2">
+            <a:schemeClr val="accent1"/>
+          </a:effectRef>
+          <a:fontRef idx="minor">
+            <a:schemeClr val="lt1"/>
+          </a:fontRef>
+        </p:style>
+        <p:txBody>
+          <a:bodyPr rtlCol="0" anchor="ctr"/>
+          <a:lstStyle/>
+          <a:p>
+            <a:pPr algn="ctr"/>
+          </a:p>
+        </p:txBody>
+      </p:sp>
+      <p:sp>
+        <p:nvSpPr>
+          <p:cNvPr id="8" name="Rectangle 7"/>
+          <p:cNvSpPr/>
+          <p:nvPr/>
+        </p:nvSpPr>
+        <p:spPr>
+          <a:xfrm>
+            <a:off x="457200" y="1655064"/>
+            <a:ext cx="3624986" cy="27432"/>
+          </a:xfrm>
+          <a:prstGeom prst="rect">
+            <a:avLst/>
+          </a:prstGeom>
+          <a:solidFill>
+            <a:srgbClr val="FFD000"/>
+          </a:solidFill>
+          <a:ln>
+            <a:noFill/>
+          </a:ln>
+        </p:spPr>
+        <p:style>
+          <a:lnRef idx="1">
+            <a:schemeClr val="accent1"/>
+          </a:lnRef>
+          <a:fillRef idx="3">
+            <a:schemeClr val="accent1"/>
+          </a:fillRef>
+          <a:effectRef idx="2">
+            <a:schemeClr val="accent1"/>
+          </a:effectRef>
+          <a:fontRef idx="minor">
+            <a:schemeClr val="lt1"/>
+          </a:fontRef>
+        </p:style>
+        <p:txBody>
+          <a:bodyPr rtlCol="0" anchor="ctr"/>
+          <a:lstStyle/>
+          <a:p>
+            <a:pPr algn="ctr"/>
+          </a:p>
+        </p:txBody>
+      </p:sp>
+      <p:pic>
+        <p:nvPicPr>
+          <p:cNvPr id="9" name="Picture 8" descr="labex.png"/>
+          <p:cNvPicPr>
+            <a:picLocks noChangeAspect="1"/>
+          </p:cNvPicPr>
+          <p:nvPr/>
+        </p:nvPicPr>
+        <p:blipFill>
+          <a:blip r:embed="rId2"/>
+          <a:stretch>
+            <a:fillRect/>
+          </a:stretch>
+        </p:blipFill>
+        <p:spPr>
+          <a:xfrm>
+            <a:off x="1659331" y="1847087"/>
+            <a:ext cx="1220724" cy="1220724"/>
+          </a:xfrm>
+          <a:prstGeom prst="rect">
+            <a:avLst/>
+          </a:prstGeom>
+        </p:spPr>
+      </p:pic>
+      <p:sp>
+        <p:nvSpPr>
+          <p:cNvPr id="10" name="TextBox 9"/>
+          <p:cNvSpPr txBox="1"/>
+          <p:nvPr/>
+        </p:nvSpPr>
+        <p:spPr>
+          <a:xfrm>
+            <a:off x="530352" y="3159251"/>
+            <a:ext cx="3478682" cy="621792"/>
+          </a:xfrm>
+          <a:prstGeom prst="rect">
+            <a:avLst/>
+          </a:prstGeom>
+          <a:noFill/>
+        </p:spPr>
+        <p:txBody>
+          <a:bodyPr wrap="square" anchor="t"/>
+          <a:lstStyle/>
+          <a:p>
+            <a:pPr algn="ctr"/>
+            <a:r>
+              <a:rPr sz="1300" b="1" i="0">
+                <a:solidFill>
+                  <a:srgbClr val="095292"/>
+                </a:solidFill>
+                <a:latin typeface="Calibri"/>
+              </a:rPr>
+              <a:t>LabEx Docker Playground</a:t>
+            </a:r>
+          </a:p>
+          <a:p>
+            <a:pPr algn="ctr">
+              <a:spcBef>
+                <a:spcPts val="200"/>
+              </a:spcBef>
             </a:pPr>
             <a:r>
-              <a:rPr sz="1600" b="1" i="0">
-                <a:solidFill>
-                  <a:srgbClr val="333333"/>
-                </a:solidFill>
-                <a:latin typeface="Calibri"/>
-              </a:rPr>
-              <a:t>1.</a:t>
-            </a:r>
-            <a:r>
-              <a:rPr sz="1600" b="0" i="0">
-                <a:solidFill>
-                  <a:srgbClr val="333333"/>
-                </a:solidFill>
-                <a:latin typeface="Calibri"/>
-              </a:rPr>
-              <a:t> Paso 1: decidan cual de los contenedores de CloudLite se contenerizara hoy (la API stub o el front estatico) y escriban en la seccion Contenedores del informe el nombre exacto del servicio, el puerto que expondra y la ruta de salud que responderan (por ejemplo api-citas, puerto 8080, ruta /health), verificando que ese nombre sea el mismo que usaran en el C4 de la Clase 4 y en el despliegue de la Clase 7.</a:t>
-            </a:r>
-          </a:p>
-          <a:p>
-            <a:pPr>
-              <a:spcAft>
-                <a:spcPts val="800"/>
-              </a:spcAft>
+              <a:rPr sz="1000" b="0" i="0">
+                <a:solidFill>
+                  <a:srgbClr val="666666"/>
+                </a:solidFill>
+                <a:latin typeface="Calibri"/>
+              </a:rPr>
+              <a:t>Lab del dia</a:t>
+            </a:r>
+          </a:p>
+        </p:txBody>
+      </p:sp>
+      <p:sp>
+        <p:nvSpPr>
+          <p:cNvPr id="11" name="Rounded Rectangle 10"/>
+          <p:cNvSpPr/>
+          <p:nvPr/>
+        </p:nvSpPr>
+        <p:spPr>
+          <a:xfrm>
+            <a:off x="4283354" y="1591056"/>
+            <a:ext cx="3624986" cy="2299716"/>
+          </a:xfrm>
+          <a:prstGeom prst="roundRect">
+            <a:avLst>
+              <a:gd name="adj" fmla="val 12000"/>
+            </a:avLst>
+          </a:prstGeom>
+          <a:solidFill>
+            <a:srgbClr val="F2F2F2"/>
+          </a:solidFill>
+          <a:ln>
+            <a:noFill/>
+          </a:ln>
+        </p:spPr>
+        <p:style>
+          <a:lnRef idx="1">
+            <a:schemeClr val="accent1"/>
+          </a:lnRef>
+          <a:fillRef idx="3">
+            <a:schemeClr val="accent1"/>
+          </a:fillRef>
+          <a:effectRef idx="2">
+            <a:schemeClr val="accent1"/>
+          </a:effectRef>
+          <a:fontRef idx="minor">
+            <a:schemeClr val="lt1"/>
+          </a:fontRef>
+        </p:style>
+        <p:txBody>
+          <a:bodyPr rtlCol="0" anchor="ctr"/>
+          <a:lstStyle/>
+          <a:p>
+            <a:pPr algn="ctr"/>
+          </a:p>
+        </p:txBody>
+      </p:sp>
+      <p:sp>
+        <p:nvSpPr>
+          <p:cNvPr id="12" name="Rectangle 11"/>
+          <p:cNvSpPr/>
+          <p:nvPr/>
+        </p:nvSpPr>
+        <p:spPr>
+          <a:xfrm>
+            <a:off x="4283354" y="1591056"/>
+            <a:ext cx="3624986" cy="64008"/>
+          </a:xfrm>
+          <a:prstGeom prst="rect">
+            <a:avLst/>
+          </a:prstGeom>
+          <a:solidFill>
+            <a:srgbClr val="095292"/>
+          </a:solidFill>
+          <a:ln>
+            <a:noFill/>
+          </a:ln>
+        </p:spPr>
+        <p:style>
+          <a:lnRef idx="1">
+            <a:schemeClr val="accent1"/>
+          </a:lnRef>
+          <a:fillRef idx="3">
+            <a:schemeClr val="accent1"/>
+          </a:fillRef>
+          <a:effectRef idx="2">
+            <a:schemeClr val="accent1"/>
+          </a:effectRef>
+          <a:fontRef idx="minor">
+            <a:schemeClr val="lt1"/>
+          </a:fontRef>
+        </p:style>
+        <p:txBody>
+          <a:bodyPr rtlCol="0" anchor="ctr"/>
+          <a:lstStyle/>
+          <a:p>
+            <a:pPr algn="ctr"/>
+          </a:p>
+        </p:txBody>
+      </p:sp>
+      <p:sp>
+        <p:nvSpPr>
+          <p:cNvPr id="13" name="Rectangle 12"/>
+          <p:cNvSpPr/>
+          <p:nvPr/>
+        </p:nvSpPr>
+        <p:spPr>
+          <a:xfrm>
+            <a:off x="4283354" y="1655064"/>
+            <a:ext cx="3624986" cy="27432"/>
+          </a:xfrm>
+          <a:prstGeom prst="rect">
+            <a:avLst/>
+          </a:prstGeom>
+          <a:solidFill>
+            <a:srgbClr val="FFD000"/>
+          </a:solidFill>
+          <a:ln>
+            <a:noFill/>
+          </a:ln>
+        </p:spPr>
+        <p:style>
+          <a:lnRef idx="1">
+            <a:schemeClr val="accent1"/>
+          </a:lnRef>
+          <a:fillRef idx="3">
+            <a:schemeClr val="accent1"/>
+          </a:fillRef>
+          <a:effectRef idx="2">
+            <a:schemeClr val="accent1"/>
+          </a:effectRef>
+          <a:fontRef idx="minor">
+            <a:schemeClr val="lt1"/>
+          </a:fontRef>
+        </p:style>
+        <p:txBody>
+          <a:bodyPr rtlCol="0" anchor="ctr"/>
+          <a:lstStyle/>
+          <a:p>
+            <a:pPr algn="ctr"/>
+          </a:p>
+        </p:txBody>
+      </p:sp>
+      <p:pic>
+        <p:nvPicPr>
+          <p:cNvPr id="14" name="Picture 13" descr="killercoda.png"/>
+          <p:cNvPicPr>
+            <a:picLocks noChangeAspect="1"/>
+          </p:cNvPicPr>
+          <p:nvPr/>
+        </p:nvPicPr>
+        <p:blipFill>
+          <a:blip r:embed="rId3"/>
+          <a:stretch>
+            <a:fillRect/>
+          </a:stretch>
+        </p:blipFill>
+        <p:spPr>
+          <a:xfrm>
+            <a:off x="5485485" y="1847087"/>
+            <a:ext cx="1220724" cy="1220724"/>
+          </a:xfrm>
+          <a:prstGeom prst="rect">
+            <a:avLst/>
+          </a:prstGeom>
+        </p:spPr>
+      </p:pic>
+      <p:sp>
+        <p:nvSpPr>
+          <p:cNvPr id="15" name="TextBox 14"/>
+          <p:cNvSpPr txBox="1"/>
+          <p:nvPr/>
+        </p:nvSpPr>
+        <p:spPr>
+          <a:xfrm>
+            <a:off x="4356506" y="3159251"/>
+            <a:ext cx="3478682" cy="621792"/>
+          </a:xfrm>
+          <a:prstGeom prst="rect">
+            <a:avLst/>
+          </a:prstGeom>
+          <a:noFill/>
+        </p:spPr>
+        <p:txBody>
+          <a:bodyPr wrap="square" anchor="t"/>
+          <a:lstStyle/>
+          <a:p>
+            <a:pPr algn="ctr"/>
+            <a:r>
+              <a:rPr sz="1300" b="1" i="0">
+                <a:solidFill>
+                  <a:srgbClr val="095292"/>
+                </a:solidFill>
+                <a:latin typeface="Calibri"/>
+              </a:rPr>
+              <a:t>Killercoda</a:t>
+            </a:r>
+          </a:p>
+          <a:p>
+            <a:pPr algn="ctr">
+              <a:spcBef>
+                <a:spcPts val="200"/>
+              </a:spcBef>
             </a:pPr>
             <a:r>
-              <a:rPr sz="1600" b="0" i="0">
-                <a:solidFill>
-                  <a:srgbClr val="333333"/>
-                </a:solidFill>
-                <a:latin typeface="Calibri"/>
-              </a:rPr>
-              <a:t>–   </a:t>
-            </a:r>
-            <a:r>
-              <a:rPr sz="1600" b="1" i="0">
-                <a:solidFill>
-                  <a:srgbClr val="333333"/>
-                </a:solidFill>
-                <a:latin typeface="Calibri"/>
-              </a:rPr>
-              <a:t>2.</a:t>
-            </a:r>
-            <a:r>
-              <a:rPr sz="1600" b="0" i="0">
-                <a:solidFill>
-                  <a:srgbClr val="333333"/>
-                </a:solidFill>
-                <a:latin typeface="Calibri"/>
-              </a:rPr>
-              <a:t> Paso 2: en la consola Linux de ExamLab arme el contexto de build con 5 archivos (app/main.py, requirements.txt con 2 dependencias fijadas por version, Dockerfile, .dockerignore con 4 entradas) y verifique con ls -la que los 5 existen y con un grep de PASSWORD, SECRET, TOKEN y api_key que la salida sea vacia, confirmando que no hay ningun secreto en el contexto.</a:t>
-            </a:r>
-          </a:p>
-          <a:p>
-            <a:pPr>
-              <a:spcAft>
-                <a:spcPts val="800"/>
-              </a:spcAft>
+              <a:rPr sz="1000" b="0" i="0">
+                <a:solidFill>
+                  <a:srgbClr val="666666"/>
+                </a:solidFill>
+                <a:latin typeface="Calibri"/>
+              </a:rPr>
+              <a:t>Alterna si no carga</a:t>
+            </a:r>
+          </a:p>
+        </p:txBody>
+      </p:sp>
+      <p:sp>
+        <p:nvSpPr>
+          <p:cNvPr id="16" name="Rounded Rectangle 15"/>
+          <p:cNvSpPr/>
+          <p:nvPr/>
+        </p:nvSpPr>
+        <p:spPr>
+          <a:xfrm>
+            <a:off x="8109508" y="1591056"/>
+            <a:ext cx="3624986" cy="2299716"/>
+          </a:xfrm>
+          <a:prstGeom prst="roundRect">
+            <a:avLst>
+              <a:gd name="adj" fmla="val 12000"/>
+            </a:avLst>
+          </a:prstGeom>
+          <a:solidFill>
+            <a:srgbClr val="F2F2F2"/>
+          </a:solidFill>
+          <a:ln>
+            <a:noFill/>
+          </a:ln>
+        </p:spPr>
+        <p:style>
+          <a:lnRef idx="1">
+            <a:schemeClr val="accent1"/>
+          </a:lnRef>
+          <a:fillRef idx="3">
+            <a:schemeClr val="accent1"/>
+          </a:fillRef>
+          <a:effectRef idx="2">
+            <a:schemeClr val="accent1"/>
+          </a:effectRef>
+          <a:fontRef idx="minor">
+            <a:schemeClr val="lt1"/>
+          </a:fontRef>
+        </p:style>
+        <p:txBody>
+          <a:bodyPr rtlCol="0" anchor="ctr"/>
+          <a:lstStyle/>
+          <a:p>
+            <a:pPr algn="ctr"/>
+          </a:p>
+        </p:txBody>
+      </p:sp>
+      <p:sp>
+        <p:nvSpPr>
+          <p:cNvPr id="17" name="Rectangle 16"/>
+          <p:cNvSpPr/>
+          <p:nvPr/>
+        </p:nvSpPr>
+        <p:spPr>
+          <a:xfrm>
+            <a:off x="8109508" y="1591056"/>
+            <a:ext cx="3624986" cy="64008"/>
+          </a:xfrm>
+          <a:prstGeom prst="rect">
+            <a:avLst/>
+          </a:prstGeom>
+          <a:solidFill>
+            <a:srgbClr val="095292"/>
+          </a:solidFill>
+          <a:ln>
+            <a:noFill/>
+          </a:ln>
+        </p:spPr>
+        <p:style>
+          <a:lnRef idx="1">
+            <a:schemeClr val="accent1"/>
+          </a:lnRef>
+          <a:fillRef idx="3">
+            <a:schemeClr val="accent1"/>
+          </a:fillRef>
+          <a:effectRef idx="2">
+            <a:schemeClr val="accent1"/>
+          </a:effectRef>
+          <a:fontRef idx="minor">
+            <a:schemeClr val="lt1"/>
+          </a:fontRef>
+        </p:style>
+        <p:txBody>
+          <a:bodyPr rtlCol="0" anchor="ctr"/>
+          <a:lstStyle/>
+          <a:p>
+            <a:pPr algn="ctr"/>
+          </a:p>
+        </p:txBody>
+      </p:sp>
+      <p:sp>
+        <p:nvSpPr>
+          <p:cNvPr id="18" name="Rectangle 17"/>
+          <p:cNvSpPr/>
+          <p:nvPr/>
+        </p:nvSpPr>
+        <p:spPr>
+          <a:xfrm>
+            <a:off x="8109508" y="1655064"/>
+            <a:ext cx="3624986" cy="27432"/>
+          </a:xfrm>
+          <a:prstGeom prst="rect">
+            <a:avLst/>
+          </a:prstGeom>
+          <a:solidFill>
+            <a:srgbClr val="FFD000"/>
+          </a:solidFill>
+          <a:ln>
+            <a:noFill/>
+          </a:ln>
+        </p:spPr>
+        <p:style>
+          <a:lnRef idx="1">
+            <a:schemeClr val="accent1"/>
+          </a:lnRef>
+          <a:fillRef idx="3">
+            <a:schemeClr val="accent1"/>
+          </a:fillRef>
+          <a:effectRef idx="2">
+            <a:schemeClr val="accent1"/>
+          </a:effectRef>
+          <a:fontRef idx="minor">
+            <a:schemeClr val="lt1"/>
+          </a:fontRef>
+        </p:style>
+        <p:txBody>
+          <a:bodyPr rtlCol="0" anchor="ctr"/>
+          <a:lstStyle/>
+          <a:p>
+            <a:pPr algn="ctr"/>
+          </a:p>
+        </p:txBody>
+      </p:sp>
+      <p:pic>
+        <p:nvPicPr>
+          <p:cNvPr id="19" name="Picture 18" descr="google_docs.png"/>
+          <p:cNvPicPr>
+            <a:picLocks noChangeAspect="1"/>
+          </p:cNvPicPr>
+          <p:nvPr/>
+        </p:nvPicPr>
+        <p:blipFill>
+          <a:blip r:embed="rId4"/>
+          <a:stretch>
+            <a:fillRect/>
+          </a:stretch>
+        </p:blipFill>
+        <p:spPr>
+          <a:xfrm>
+            <a:off x="9311640" y="1847087"/>
+            <a:ext cx="1220724" cy="1220724"/>
+          </a:xfrm>
+          <a:prstGeom prst="rect">
+            <a:avLst/>
+          </a:prstGeom>
+        </p:spPr>
+      </p:pic>
+      <p:sp>
+        <p:nvSpPr>
+          <p:cNvPr id="20" name="TextBox 19"/>
+          <p:cNvSpPr txBox="1"/>
+          <p:nvPr/>
+        </p:nvSpPr>
+        <p:spPr>
+          <a:xfrm>
+            <a:off x="8182660" y="3159251"/>
+            <a:ext cx="3478682" cy="621792"/>
+          </a:xfrm>
+          <a:prstGeom prst="rect">
+            <a:avLst/>
+          </a:prstGeom>
+          <a:noFill/>
+        </p:spPr>
+        <p:txBody>
+          <a:bodyPr wrap="square" anchor="t"/>
+          <a:lstStyle/>
+          <a:p>
+            <a:pPr algn="ctr"/>
+            <a:r>
+              <a:rPr sz="1300" b="1" i="0">
+                <a:solidFill>
+                  <a:srgbClr val="095292"/>
+                </a:solidFill>
+                <a:latin typeface="Calibri"/>
+              </a:rPr>
+              <a:t>Google Docs</a:t>
+            </a:r>
+          </a:p>
+          <a:p>
+            <a:pPr algn="ctr">
+              <a:spcBef>
+                <a:spcPts val="200"/>
+              </a:spcBef>
             </a:pPr>
             <a:r>
-              <a:rPr sz="1600" b="0" i="0">
-                <a:solidFill>
-                  <a:srgbClr val="333333"/>
-                </a:solidFill>
-                <a:latin typeface="Calibri"/>
-              </a:rPr>
-              <a:t>–   </a:t>
-            </a:r>
-            <a:r>
-              <a:rPr sz="1600" b="1" i="0">
-                <a:solidFill>
-                  <a:srgbClr val="333333"/>
-                </a:solidFill>
-                <a:latin typeface="Calibri"/>
-              </a:rPr>
-              <a:t>3.</a:t>
-            </a:r>
-            <a:r>
-              <a:rPr sz="1600" b="0" i="0">
-                <a:solidFill>
-                  <a:srgbClr val="333333"/>
-                </a:solidFill>
-                <a:latin typeface="Calibri"/>
-              </a:rPr>
-              <a:t> Paso 3: escriba el Dockerfile con exactamente 7 instrucciones (FROM con tag fijo y variante slim, WORKDIR, COPY de requirements, RUN pip install --no-cache-dir, COPY del codigo, EXPOSE del puerto declarado en el paso 1, CMD) y verifique que el puerto de EXPOSE, el del CMD y el documentado en el informe sean el mismo numero; el Dockerfile se pega completo en la pregunta 2 de ExamLab.</a:t>
-            </a:r>
-          </a:p>
-          <a:p>
-            <a:pPr>
-              <a:spcAft>
-                <a:spcPts val="800"/>
-              </a:spcAft>
+              <a:rPr sz="1000" b="0" i="0">
+                <a:solidFill>
+                  <a:srgbClr val="666666"/>
+                </a:solidFill>
+                <a:latin typeface="Calibri"/>
+              </a:rPr>
+              <a:t>Informe PI</a:t>
+            </a:r>
+          </a:p>
+        </p:txBody>
+      </p:sp>
+      <p:sp>
+        <p:nvSpPr>
+          <p:cNvPr id="21" name="Rounded Rectangle 20"/>
+          <p:cNvSpPr/>
+          <p:nvPr/>
+        </p:nvSpPr>
+        <p:spPr>
+          <a:xfrm>
+            <a:off x="2370277" y="4055364"/>
+            <a:ext cx="3624986" cy="2299716"/>
+          </a:xfrm>
+          <a:prstGeom prst="roundRect">
+            <a:avLst>
+              <a:gd name="adj" fmla="val 12000"/>
+            </a:avLst>
+          </a:prstGeom>
+          <a:solidFill>
+            <a:srgbClr val="F2F2F2"/>
+          </a:solidFill>
+          <a:ln>
+            <a:noFill/>
+          </a:ln>
+        </p:spPr>
+        <p:style>
+          <a:lnRef idx="1">
+            <a:schemeClr val="accent1"/>
+          </a:lnRef>
+          <a:fillRef idx="3">
+            <a:schemeClr val="accent1"/>
+          </a:fillRef>
+          <a:effectRef idx="2">
+            <a:schemeClr val="accent1"/>
+          </a:effectRef>
+          <a:fontRef idx="minor">
+            <a:schemeClr val="lt1"/>
+          </a:fontRef>
+        </p:style>
+        <p:txBody>
+          <a:bodyPr rtlCol="0" anchor="ctr"/>
+          <a:lstStyle/>
+          <a:p>
+            <a:pPr algn="ctr"/>
+          </a:p>
+        </p:txBody>
+      </p:sp>
+      <p:sp>
+        <p:nvSpPr>
+          <p:cNvPr id="22" name="Rectangle 21"/>
+          <p:cNvSpPr/>
+          <p:nvPr/>
+        </p:nvSpPr>
+        <p:spPr>
+          <a:xfrm>
+            <a:off x="2370277" y="4055364"/>
+            <a:ext cx="3624986" cy="64008"/>
+          </a:xfrm>
+          <a:prstGeom prst="rect">
+            <a:avLst/>
+          </a:prstGeom>
+          <a:solidFill>
+            <a:srgbClr val="095292"/>
+          </a:solidFill>
+          <a:ln>
+            <a:noFill/>
+          </a:ln>
+        </p:spPr>
+        <p:style>
+          <a:lnRef idx="1">
+            <a:schemeClr val="accent1"/>
+          </a:lnRef>
+          <a:fillRef idx="3">
+            <a:schemeClr val="accent1"/>
+          </a:fillRef>
+          <a:effectRef idx="2">
+            <a:schemeClr val="accent1"/>
+          </a:effectRef>
+          <a:fontRef idx="minor">
+            <a:schemeClr val="lt1"/>
+          </a:fontRef>
+        </p:style>
+        <p:txBody>
+          <a:bodyPr rtlCol="0" anchor="ctr"/>
+          <a:lstStyle/>
+          <a:p>
+            <a:pPr algn="ctr"/>
+          </a:p>
+        </p:txBody>
+      </p:sp>
+      <p:sp>
+        <p:nvSpPr>
+          <p:cNvPr id="23" name="Rectangle 22"/>
+          <p:cNvSpPr/>
+          <p:nvPr/>
+        </p:nvSpPr>
+        <p:spPr>
+          <a:xfrm>
+            <a:off x="2370277" y="4119372"/>
+            <a:ext cx="3624986" cy="27432"/>
+          </a:xfrm>
+          <a:prstGeom prst="rect">
+            <a:avLst/>
+          </a:prstGeom>
+          <a:solidFill>
+            <a:srgbClr val="FFD000"/>
+          </a:solidFill>
+          <a:ln>
+            <a:noFill/>
+          </a:ln>
+        </p:spPr>
+        <p:style>
+          <a:lnRef idx="1">
+            <a:schemeClr val="accent1"/>
+          </a:lnRef>
+          <a:fillRef idx="3">
+            <a:schemeClr val="accent1"/>
+          </a:fillRef>
+          <a:effectRef idx="2">
+            <a:schemeClr val="accent1"/>
+          </a:effectRef>
+          <a:fontRef idx="minor">
+            <a:schemeClr val="lt1"/>
+          </a:fontRef>
+        </p:style>
+        <p:txBody>
+          <a:bodyPr rtlCol="0" anchor="ctr"/>
+          <a:lstStyle/>
+          <a:p>
+            <a:pPr algn="ctr"/>
+          </a:p>
+        </p:txBody>
+      </p:sp>
+      <p:pic>
+        <p:nvPicPr>
+          <p:cNvPr id="24" name="Picture 23" descr="mermaid.png"/>
+          <p:cNvPicPr>
+            <a:picLocks noChangeAspect="1"/>
+          </p:cNvPicPr>
+          <p:nvPr/>
+        </p:nvPicPr>
+        <p:blipFill>
+          <a:blip r:embed="rId5"/>
+          <a:stretch>
+            <a:fillRect/>
+          </a:stretch>
+        </p:blipFill>
+        <p:spPr>
+          <a:xfrm>
+            <a:off x="3572408" y="4311396"/>
+            <a:ext cx="1220724" cy="1220724"/>
+          </a:xfrm>
+          <a:prstGeom prst="rect">
+            <a:avLst/>
+          </a:prstGeom>
+        </p:spPr>
+      </p:pic>
+      <p:sp>
+        <p:nvSpPr>
+          <p:cNvPr id="25" name="TextBox 24"/>
+          <p:cNvSpPr txBox="1"/>
+          <p:nvPr/>
+        </p:nvSpPr>
+        <p:spPr>
+          <a:xfrm>
+            <a:off x="2443429" y="5623560"/>
+            <a:ext cx="3478682" cy="621792"/>
+          </a:xfrm>
+          <a:prstGeom prst="rect">
+            <a:avLst/>
+          </a:prstGeom>
+          <a:noFill/>
+        </p:spPr>
+        <p:txBody>
+          <a:bodyPr wrap="square" anchor="t"/>
+          <a:lstStyle/>
+          <a:p>
+            <a:pPr algn="ctr"/>
+            <a:r>
+              <a:rPr sz="1300" b="1" i="0">
+                <a:solidFill>
+                  <a:srgbClr val="095292"/>
+                </a:solidFill>
+                <a:latin typeface="Calibri"/>
+              </a:rPr>
+              <a:t>Mermaid</a:t>
+            </a:r>
+          </a:p>
+          <a:p>
+            <a:pPr algn="ctr">
+              <a:spcBef>
+                <a:spcPts val="200"/>
+              </a:spcBef>
             </a:pPr>
             <a:r>
-              <a:rPr sz="1600" b="0" i="0">
-                <a:solidFill>
-                  <a:srgbClr val="333333"/>
-                </a:solidFill>
-                <a:latin typeface="Calibri"/>
-              </a:rPr>
-              <a:t>–   </a:t>
-            </a:r>
-            <a:r>
-              <a:rPr sz="1600" b="1" i="0">
-                <a:solidFill>
-                  <a:srgbClr val="333333"/>
-                </a:solidFill>
-                <a:latin typeface="Calibri"/>
-              </a:rPr>
-              <a:t>4.</a:t>
-            </a:r>
-            <a:r>
-              <a:rPr sz="1600" b="0" i="0">
-                <a:solidFill>
-                  <a:srgbClr val="333333"/>
-                </a:solidFill>
-                <a:latin typeface="Calibri"/>
-              </a:rPr>
-              <a:t> Paso 4: abra LabEx Docker Playground en labex.io con su cuenta de Google o Microsoft (o Killercoda si no carga), ejecute docker build -t cloudlite-api:v1 . y docker run -d -p 8080:8080 cloudlite-api:v1, compruebe con curl que la ruta de salud devuelve 200 y llene la bitacora de 5 filas comando / que esperaba / que salio / evidencia, verificando que la captura muestre a la vez el prompt del lab, la salida del docker ps y la hora del sistema.</a:t>
-            </a:r>
-          </a:p>
-          <a:p>
-            <a:pPr>
-              <a:spcAft>
-                <a:spcPts val="800"/>
-              </a:spcAft>
+              <a:rPr sz="1000" b="0" i="0">
+                <a:solidFill>
+                  <a:srgbClr val="666666"/>
+                </a:solidFill>
+                <a:latin typeface="Calibri"/>
+              </a:rPr>
+              <a:t>Codigo del diagrama</a:t>
+            </a:r>
+          </a:p>
+        </p:txBody>
+      </p:sp>
+      <p:sp>
+        <p:nvSpPr>
+          <p:cNvPr id="26" name="Rounded Rectangle 25"/>
+          <p:cNvSpPr/>
+          <p:nvPr/>
+        </p:nvSpPr>
+        <p:spPr>
+          <a:xfrm>
+            <a:off x="6196431" y="4055364"/>
+            <a:ext cx="3624986" cy="2299716"/>
+          </a:xfrm>
+          <a:prstGeom prst="roundRect">
+            <a:avLst>
+              <a:gd name="adj" fmla="val 12000"/>
+            </a:avLst>
+          </a:prstGeom>
+          <a:solidFill>
+            <a:srgbClr val="F2F2F2"/>
+          </a:solidFill>
+          <a:ln>
+            <a:noFill/>
+          </a:ln>
+        </p:spPr>
+        <p:style>
+          <a:lnRef idx="1">
+            <a:schemeClr val="accent1"/>
+          </a:lnRef>
+          <a:fillRef idx="3">
+            <a:schemeClr val="accent1"/>
+          </a:fillRef>
+          <a:effectRef idx="2">
+            <a:schemeClr val="accent1"/>
+          </a:effectRef>
+          <a:fontRef idx="minor">
+            <a:schemeClr val="lt1"/>
+          </a:fontRef>
+        </p:style>
+        <p:txBody>
+          <a:bodyPr rtlCol="0" anchor="ctr"/>
+          <a:lstStyle/>
+          <a:p>
+            <a:pPr algn="ctr"/>
+          </a:p>
+        </p:txBody>
+      </p:sp>
+      <p:sp>
+        <p:nvSpPr>
+          <p:cNvPr id="27" name="Rectangle 26"/>
+          <p:cNvSpPr/>
+          <p:nvPr/>
+        </p:nvSpPr>
+        <p:spPr>
+          <a:xfrm>
+            <a:off x="6196431" y="4055364"/>
+            <a:ext cx="3624986" cy="64008"/>
+          </a:xfrm>
+          <a:prstGeom prst="rect">
+            <a:avLst/>
+          </a:prstGeom>
+          <a:solidFill>
+            <a:srgbClr val="095292"/>
+          </a:solidFill>
+          <a:ln>
+            <a:noFill/>
+          </a:ln>
+        </p:spPr>
+        <p:style>
+          <a:lnRef idx="1">
+            <a:schemeClr val="accent1"/>
+          </a:lnRef>
+          <a:fillRef idx="3">
+            <a:schemeClr val="accent1"/>
+          </a:fillRef>
+          <a:effectRef idx="2">
+            <a:schemeClr val="accent1"/>
+          </a:effectRef>
+          <a:fontRef idx="minor">
+            <a:schemeClr val="lt1"/>
+          </a:fontRef>
+        </p:style>
+        <p:txBody>
+          <a:bodyPr rtlCol="0" anchor="ctr"/>
+          <a:lstStyle/>
+          <a:p>
+            <a:pPr algn="ctr"/>
+          </a:p>
+        </p:txBody>
+      </p:sp>
+      <p:sp>
+        <p:nvSpPr>
+          <p:cNvPr id="28" name="Rectangle 27"/>
+          <p:cNvSpPr/>
+          <p:nvPr/>
+        </p:nvSpPr>
+        <p:spPr>
+          <a:xfrm>
+            <a:off x="6196431" y="4119372"/>
+            <a:ext cx="3624986" cy="27432"/>
+          </a:xfrm>
+          <a:prstGeom prst="rect">
+            <a:avLst/>
+          </a:prstGeom>
+          <a:solidFill>
+            <a:srgbClr val="FFD000"/>
+          </a:solidFill>
+          <a:ln>
+            <a:noFill/>
+          </a:ln>
+        </p:spPr>
+        <p:style>
+          <a:lnRef idx="1">
+            <a:schemeClr val="accent1"/>
+          </a:lnRef>
+          <a:fillRef idx="3">
+            <a:schemeClr val="accent1"/>
+          </a:fillRef>
+          <a:effectRef idx="2">
+            <a:schemeClr val="accent1"/>
+          </a:effectRef>
+          <a:fontRef idx="minor">
+            <a:schemeClr val="lt1"/>
+          </a:fontRef>
+        </p:style>
+        <p:txBody>
+          <a:bodyPr rtlCol="0" anchor="ctr"/>
+          <a:lstStyle/>
+          <a:p>
+            <a:pPr algn="ctr"/>
+          </a:p>
+        </p:txBody>
+      </p:sp>
+      <p:pic>
+        <p:nvPicPr>
+          <p:cNvPr id="29" name="Picture 28" descr="examlab.png"/>
+          <p:cNvPicPr>
+            <a:picLocks noChangeAspect="1"/>
+          </p:cNvPicPr>
+          <p:nvPr/>
+        </p:nvPicPr>
+        <p:blipFill>
+          <a:blip r:embed="rId6"/>
+          <a:stretch>
+            <a:fillRect/>
+          </a:stretch>
+        </p:blipFill>
+        <p:spPr>
+          <a:xfrm>
+            <a:off x="7398562" y="4311396"/>
+            <a:ext cx="1220724" cy="1220724"/>
+          </a:xfrm>
+          <a:prstGeom prst="rect">
+            <a:avLst/>
+          </a:prstGeom>
+        </p:spPr>
+      </p:pic>
+      <p:sp>
+        <p:nvSpPr>
+          <p:cNvPr id="30" name="TextBox 29"/>
+          <p:cNvSpPr txBox="1"/>
+          <p:nvPr/>
+        </p:nvSpPr>
+        <p:spPr>
+          <a:xfrm>
+            <a:off x="6269583" y="5623560"/>
+            <a:ext cx="3478682" cy="621792"/>
+          </a:xfrm>
+          <a:prstGeom prst="rect">
+            <a:avLst/>
+          </a:prstGeom>
+          <a:noFill/>
+        </p:spPr>
+        <p:txBody>
+          <a:bodyPr wrap="square" anchor="t"/>
+          <a:lstStyle/>
+          <a:p>
+            <a:pPr algn="ctr"/>
+            <a:r>
+              <a:rPr sz="1300" b="1" i="0">
+                <a:solidFill>
+                  <a:srgbClr val="095292"/>
+                </a:solidFill>
+                <a:latin typeface="Calibri"/>
+              </a:rPr>
+              <a:t>ExamLab</a:t>
+            </a:r>
+          </a:p>
+          <a:p>
+            <a:pPr algn="ctr">
+              <a:spcBef>
+                <a:spcPts val="200"/>
+              </a:spcBef>
             </a:pPr>
             <a:r>
-              <a:rPr sz="1600" b="0" i="0">
-                <a:solidFill>
-                  <a:srgbClr val="333333"/>
-                </a:solidFill>
-                <a:latin typeface="Calibri"/>
-              </a:rPr>
-              <a:t>–   </a:t>
-            </a:r>
-            <a:r>
-              <a:rPr sz="1600" b="1" i="0">
-                <a:solidFill>
-                  <a:srgbClr val="333333"/>
-                </a:solidFill>
-                <a:latin typeface="Calibri"/>
-              </a:rPr>
-              <a:t>5.</a:t>
-            </a:r>
-            <a:r>
-              <a:rPr sz="1600" b="0" i="0">
-                <a:solidFill>
-                  <a:srgbClr val="333333"/>
-                </a:solidFill>
-                <a:latin typeface="Calibri"/>
-              </a:rPr>
-              <a:t> Paso 5: complete el diagrama Mermaid del ciclo Dockerfile a contenedor, adjunte la captura del lab con su nota de caducidad y suba las 5 preguntas del taller a ExamLab (modulo Talleres) antes del domingo 23:59, verificando que la seccion Contenedores del informe cite el mismo tag de imagen cloudlite-api:v1 que aparece en la captura.</a:t>
-            </a:r>
-          </a:p>
-        </p:txBody>
-      </p:sp>
-      <p:sp>
-        <p:nvSpPr>
-          <p:cNvPr id="6" name="TextBox 5"/>
+              <a:rPr sz="1000" b="0" i="0">
+                <a:solidFill>
+                  <a:srgbClr val="666666"/>
+                </a:solidFill>
+                <a:latin typeface="Calibri"/>
+              </a:rPr>
+              <a:t>Donde se entrega</a:t>
+            </a:r>
+          </a:p>
+        </p:txBody>
+      </p:sp>
+      <p:sp>
+        <p:nvSpPr>
+          <p:cNvPr id="31" name="TextBox 30"/>
           <p:cNvSpPr txBox="1"/>
           <p:nvPr/>
         </p:nvSpPr>
@@ -4306,7 +5178,7 @@
         <p:spPr>
           <a:xfrm>
             <a:off x="0" y="0"/>
-            <a:ext cx="12191695" cy="960120"/>
+            <a:ext cx="12191695" cy="1170432"/>
           </a:xfrm>
           <a:prstGeom prst="rect">
             <a:avLst/>
@@ -4348,7 +5220,7 @@
         </p:nvSpPr>
         <p:spPr>
           <a:xfrm>
-            <a:off x="0" y="960120"/>
+            <a:off x="0" y="1170432"/>
             <a:ext cx="12191695" cy="41148"/>
           </a:xfrm>
           <a:prstGeom prst="rect">
@@ -4392,7 +5264,7 @@
         <p:spPr>
           <a:xfrm>
             <a:off x="457200" y="164592"/>
-            <a:ext cx="11277295" cy="502920"/>
+            <a:ext cx="11277295" cy="384048"/>
           </a:xfrm>
           <a:prstGeom prst="rect">
             <a:avLst/>
@@ -4412,20 +5284,225 @@
                 </a:solidFill>
                 <a:latin typeface="Calibri"/>
               </a:rPr>
-              <a:t>Para continuar (PI)</a:t>
-            </a:r>
-          </a:p>
-        </p:txBody>
-      </p:sp>
-      <p:sp>
-        <p:nvSpPr>
-          <p:cNvPr id="5" name="Rounded Rectangle 4"/>
+              <a:t>Del boceto a ExamLab (diagrama)</a:t>
+            </a:r>
+          </a:p>
+        </p:txBody>
+      </p:sp>
+      <p:sp>
+        <p:nvSpPr>
+          <p:cNvPr id="5" name="TextBox 4"/>
+          <p:cNvSpPr txBox="1"/>
+          <p:nvPr/>
+        </p:nvSpPr>
+        <p:spPr>
+          <a:xfrm>
+            <a:off x="457200" y="566928"/>
+            <a:ext cx="11277295" cy="411480"/>
+          </a:xfrm>
+          <a:prstGeom prst="rect">
+            <a:avLst/>
+          </a:prstGeom>
+          <a:noFill/>
+        </p:spPr>
+        <p:txBody>
+          <a:bodyPr wrap="square">
+            <a:spAutoFit/>
+          </a:bodyPr>
+          <a:lstStyle/>
+          <a:p>
+            <a:r>
+              <a:rPr sz="1400" b="0" i="0">
+                <a:solidFill>
+                  <a:srgbClr val="B8D8EE"/>
+                </a:solidFill>
+                <a:latin typeface="Calibri"/>
+              </a:rPr>
+              <a:t>El diagrama se entrega como código Mermaid dentro de ExamLab, no como imagen</a:t>
+            </a:r>
+          </a:p>
+        </p:txBody>
+      </p:sp>
+      <p:sp>
+        <p:nvSpPr>
+          <p:cNvPr id="6" name="Rounded Rectangle 5"/>
           <p:cNvSpPr/>
           <p:nvPr/>
         </p:nvSpPr>
         <p:spPr>
           <a:xfrm>
-            <a:off x="457200" y="1261872"/>
+            <a:off x="457200" y="1659636"/>
+            <a:ext cx="11277295" cy="1051560"/>
+          </a:xfrm>
+          <a:prstGeom prst="roundRect">
+            <a:avLst>
+              <a:gd name="adj" fmla="val 12000"/>
+            </a:avLst>
+          </a:prstGeom>
+          <a:solidFill>
+            <a:srgbClr val="F2F2F2"/>
+          </a:solidFill>
+          <a:ln>
+            <a:noFill/>
+          </a:ln>
+        </p:spPr>
+        <p:style>
+          <a:lnRef idx="1">
+            <a:schemeClr val="accent1"/>
+          </a:lnRef>
+          <a:fillRef idx="3">
+            <a:schemeClr val="accent1"/>
+          </a:fillRef>
+          <a:effectRef idx="2">
+            <a:schemeClr val="accent1"/>
+          </a:effectRef>
+          <a:fontRef idx="minor">
+            <a:schemeClr val="lt1"/>
+          </a:fontRef>
+        </p:style>
+        <p:txBody>
+          <a:bodyPr rtlCol="0" anchor="ctr"/>
+          <a:lstStyle/>
+          <a:p>
+            <a:pPr algn="ctr"/>
+          </a:p>
+        </p:txBody>
+      </p:sp>
+      <p:sp>
+        <p:nvSpPr>
+          <p:cNvPr id="7" name="Rounded Rectangle 6"/>
+          <p:cNvSpPr/>
+          <p:nvPr/>
+        </p:nvSpPr>
+        <p:spPr>
+          <a:xfrm>
+            <a:off x="594360" y="1965960"/>
+            <a:ext cx="438912" cy="438912"/>
+          </a:xfrm>
+          <a:prstGeom prst="roundRect">
+            <a:avLst>
+              <a:gd name="adj" fmla="val 12000"/>
+            </a:avLst>
+          </a:prstGeom>
+          <a:solidFill>
+            <a:srgbClr val="095292"/>
+          </a:solidFill>
+          <a:ln>
+            <a:noFill/>
+          </a:ln>
+        </p:spPr>
+        <p:style>
+          <a:lnRef idx="1">
+            <a:schemeClr val="accent1"/>
+          </a:lnRef>
+          <a:fillRef idx="3">
+            <a:schemeClr val="accent1"/>
+          </a:fillRef>
+          <a:effectRef idx="2">
+            <a:schemeClr val="accent1"/>
+          </a:effectRef>
+          <a:fontRef idx="minor">
+            <a:schemeClr val="lt1"/>
+          </a:fontRef>
+        </p:style>
+        <p:txBody>
+          <a:bodyPr rtlCol="0" anchor="ctr"/>
+          <a:lstStyle/>
+          <a:p>
+            <a:pPr algn="ctr"/>
+          </a:p>
+        </p:txBody>
+      </p:sp>
+      <p:sp>
+        <p:nvSpPr>
+          <p:cNvPr id="8" name="TextBox 7"/>
+          <p:cNvSpPr txBox="1"/>
+          <p:nvPr/>
+        </p:nvSpPr>
+        <p:spPr>
+          <a:xfrm>
+            <a:off x="594360" y="1965960"/>
+            <a:ext cx="438912" cy="438912"/>
+          </a:xfrm>
+          <a:prstGeom prst="rect">
+            <a:avLst/>
+          </a:prstGeom>
+          <a:noFill/>
+        </p:spPr>
+        <p:txBody>
+          <a:bodyPr wrap="square" anchor="ctr"/>
+          <a:lstStyle/>
+          <a:p>
+            <a:pPr algn="ctr"/>
+            <a:r>
+              <a:rPr sz="1600" b="1" i="0">
+                <a:solidFill>
+                  <a:srgbClr val="FFFFFF"/>
+                </a:solidFill>
+                <a:latin typeface="Calibri"/>
+              </a:rPr>
+              <a:t>1</a:t>
+            </a:r>
+          </a:p>
+        </p:txBody>
+      </p:sp>
+      <p:sp>
+        <p:nvSpPr>
+          <p:cNvPr id="9" name="TextBox 8"/>
+          <p:cNvSpPr txBox="1"/>
+          <p:nvPr/>
+        </p:nvSpPr>
+        <p:spPr>
+          <a:xfrm>
+            <a:off x="1188720" y="1751076"/>
+            <a:ext cx="10271455" cy="886968"/>
+          </a:xfrm>
+          <a:prstGeom prst="rect">
+            <a:avLst/>
+          </a:prstGeom>
+          <a:noFill/>
+        </p:spPr>
+        <p:txBody>
+          <a:bodyPr wrap="square" anchor="ctr"/>
+          <a:lstStyle/>
+          <a:p>
+            <a:r>
+              <a:rPr sz="1500" b="1" i="0">
+                <a:solidFill>
+                  <a:srgbClr val="095292"/>
+                </a:solidFill>
+                <a:latin typeface="Calibri"/>
+              </a:rPr>
+              <a:t>Disena visual</a:t>
+            </a:r>
+          </a:p>
+          <a:p>
+            <a:pPr>
+              <a:spcBef>
+                <a:spcPts val="200"/>
+              </a:spcBef>
+            </a:pPr>
+            <a:r>
+              <a:rPr sz="1300" b="0" i="0">
+                <a:solidFill>
+                  <a:srgbClr val="333333"/>
+                </a:solidFill>
+                <a:latin typeface="Calibri"/>
+              </a:rPr>
+              <a:t>Dibuja el diagrama como quieras en Excalidraw o draw.io: es mas rapido arrastrar cajas que escribir codigo, y ahi es donde piensas el modelo.</a:t>
+            </a:r>
+          </a:p>
+        </p:txBody>
+      </p:sp>
+      <p:sp>
+        <p:nvSpPr>
+          <p:cNvPr id="10" name="Rounded Rectangle 9"/>
+          <p:cNvSpPr/>
+          <p:nvPr/>
+        </p:nvSpPr>
+        <p:spPr>
+          <a:xfrm>
+            <a:off x="457200" y="2802636"/>
             <a:ext cx="11277295" cy="1051560"/>
           </a:xfrm>
           <a:prstGeom prst="roundRect">
@@ -4464,20 +5541,22 @@
       </p:sp>
       <p:sp>
         <p:nvSpPr>
-          <p:cNvPr id="6" name="Rectangle 5"/>
+          <p:cNvPr id="11" name="Rounded Rectangle 10"/>
           <p:cNvSpPr/>
           <p:nvPr/>
         </p:nvSpPr>
         <p:spPr>
           <a:xfrm>
-            <a:off x="457200" y="1261872"/>
-            <a:ext cx="128016" cy="1051560"/>
-          </a:xfrm>
-          <a:prstGeom prst="rect">
-            <a:avLst/>
+            <a:off x="594360" y="3108960"/>
+            <a:ext cx="438912" cy="438912"/>
+          </a:xfrm>
+          <a:prstGeom prst="roundRect">
+            <a:avLst>
+              <a:gd name="adj" fmla="val 12000"/>
+            </a:avLst>
           </a:prstGeom>
           <a:solidFill>
-            <a:srgbClr val="269CCB"/>
+            <a:srgbClr val="095292"/>
           </a:solidFill>
           <a:ln>
             <a:noFill/>
@@ -4507,14 +5586,14 @@
       </p:sp>
       <p:sp>
         <p:nvSpPr>
-          <p:cNvPr id="7" name="TextBox 6"/>
+          <p:cNvPr id="12" name="TextBox 11"/>
           <p:cNvSpPr txBox="1"/>
           <p:nvPr/>
         </p:nvSpPr>
         <p:spPr>
           <a:xfrm>
-            <a:off x="777240" y="1399031"/>
-            <a:ext cx="10774375" cy="822959"/>
+            <a:off x="594360" y="3108960"/>
+            <a:ext cx="438912" cy="438912"/>
           </a:xfrm>
           <a:prstGeom prst="rect">
             <a:avLst/>
@@ -4522,48 +5601,79 @@
           <a:noFill/>
         </p:spPr>
         <p:txBody>
-          <a:bodyPr wrap="square">
-            <a:spAutoFit/>
-          </a:bodyPr>
-          <a:lstStyle/>
-          <a:p>
-            <a:r>
-              <a:rPr sz="1200" b="1" i="0">
-                <a:solidFill>
-                  <a:srgbClr val="269CCB"/>
-                </a:solidFill>
-                <a:latin typeface="Calibri"/>
-              </a:rPr>
-              <a:t>Info</a:t>
+          <a:bodyPr wrap="square" anchor="ctr"/>
+          <a:lstStyle/>
+          <a:p>
+            <a:pPr algn="ctr"/>
+            <a:r>
+              <a:rPr sz="1600" b="1" i="0">
+                <a:solidFill>
+                  <a:srgbClr val="FFFFFF"/>
+                </a:solidFill>
+                <a:latin typeface="Calibri"/>
+              </a:rPr>
+              <a:t>2</a:t>
+            </a:r>
+          </a:p>
+        </p:txBody>
+      </p:sp>
+      <p:sp>
+        <p:nvSpPr>
+          <p:cNvPr id="13" name="TextBox 12"/>
+          <p:cNvSpPr txBox="1"/>
+          <p:nvPr/>
+        </p:nvSpPr>
+        <p:spPr>
+          <a:xfrm>
+            <a:off x="1188720" y="2894076"/>
+            <a:ext cx="10271455" cy="886968"/>
+          </a:xfrm>
+          <a:prstGeom prst="rect">
+            <a:avLst/>
+          </a:prstGeom>
+          <a:noFill/>
+        </p:spPr>
+        <p:txBody>
+          <a:bodyPr wrap="square" anchor="ctr"/>
+          <a:lstStyle/>
+          <a:p>
+            <a:r>
+              <a:rPr sz="1500" b="1" i="0">
+                <a:solidFill>
+                  <a:srgbClr val="095292"/>
+                </a:solidFill>
+                <a:latin typeface="Calibri"/>
+              </a:rPr>
+              <a:t>Traduce con IA</a:t>
             </a:r>
           </a:p>
           <a:p>
             <a:pPr>
               <a:spcBef>
-                <a:spcPts val="400"/>
+                <a:spcPts val="200"/>
               </a:spcBef>
             </a:pPr>
             <a:r>
-              <a:rPr sz="1400" b="0" i="0">
+              <a:rPr sz="1300" b="0" i="0">
                 <a:solidFill>
                   <a:srgbClr val="333333"/>
                 </a:solidFill>
                 <a:latin typeface="Calibri"/>
               </a:rPr>
-              <a:t>Entregable: Dockerfile (+ compose opcional) + captura/enlace lab navegador</a:t>
-            </a:r>
-          </a:p>
-        </p:txBody>
-      </p:sp>
-      <p:sp>
-        <p:nvSpPr>
-          <p:cNvPr id="8" name="Rounded Rectangle 7"/>
+              <a:t>Copia o describe tu boceto a una IA y pidele el codigo Mermaid: «convierte este diagrama a Mermaid usando flowchart». Revisa el resultado: la IA acierta la sintaxis, no tu modelo.</a:t>
+            </a:r>
+          </a:p>
+        </p:txBody>
+      </p:sp>
+      <p:sp>
+        <p:nvSpPr>
+          <p:cNvPr id="14" name="Rounded Rectangle 13"/>
           <p:cNvSpPr/>
           <p:nvPr/>
         </p:nvSpPr>
         <p:spPr>
           <a:xfrm>
-            <a:off x="457200" y="2478024"/>
+            <a:off x="457200" y="3945636"/>
             <a:ext cx="11277295" cy="1051560"/>
           </a:xfrm>
           <a:prstGeom prst="roundRect">
@@ -4572,7 +5682,7 @@
             </a:avLst>
           </a:prstGeom>
           <a:solidFill>
-            <a:srgbClr val="FFF8E1"/>
+            <a:srgbClr val="F2F2F2"/>
           </a:solidFill>
           <a:ln>
             <a:noFill/>
@@ -4602,20 +5712,22 @@
       </p:sp>
       <p:sp>
         <p:nvSpPr>
-          <p:cNvPr id="9" name="Rectangle 8"/>
+          <p:cNvPr id="15" name="Rounded Rectangle 14"/>
           <p:cNvSpPr/>
           <p:nvPr/>
         </p:nvSpPr>
         <p:spPr>
           <a:xfrm>
-            <a:off x="457200" y="2478024"/>
-            <a:ext cx="128016" cy="1051560"/>
-          </a:xfrm>
-          <a:prstGeom prst="rect">
-            <a:avLst/>
+            <a:off x="594360" y="4251960"/>
+            <a:ext cx="438912" cy="438912"/>
+          </a:xfrm>
+          <a:prstGeom prst="roundRect">
+            <a:avLst>
+              <a:gd name="adj" fmla="val 12000"/>
+            </a:avLst>
           </a:prstGeom>
           <a:solidFill>
-            <a:srgbClr val="FFD000"/>
+            <a:srgbClr val="095292"/>
           </a:solidFill>
           <a:ln>
             <a:noFill/>
@@ -4645,14 +5757,14 @@
       </p:sp>
       <p:sp>
         <p:nvSpPr>
-          <p:cNvPr id="10" name="TextBox 9"/>
+          <p:cNvPr id="16" name="TextBox 15"/>
           <p:cNvSpPr txBox="1"/>
           <p:nvPr/>
         </p:nvSpPr>
         <p:spPr>
           <a:xfrm>
-            <a:off x="777240" y="2615184"/>
-            <a:ext cx="10774375" cy="822959"/>
+            <a:off x="594360" y="4251960"/>
+            <a:ext cx="438912" cy="438912"/>
           </a:xfrm>
           <a:prstGeom prst="rect">
             <a:avLst/>
@@ -4660,48 +5772,79 @@
           <a:noFill/>
         </p:spPr>
         <p:txBody>
-          <a:bodyPr wrap="square">
-            <a:spAutoFit/>
-          </a:bodyPr>
-          <a:lstStyle/>
-          <a:p>
-            <a:r>
-              <a:rPr sz="1200" b="1" i="0">
-                <a:solidFill>
-                  <a:srgbClr val="FFD000"/>
-                </a:solidFill>
-                <a:latin typeface="Calibri"/>
-              </a:rPr>
-              <a:t>Aclaración</a:t>
+          <a:bodyPr wrap="square" anchor="ctr"/>
+          <a:lstStyle/>
+          <a:p>
+            <a:pPr algn="ctr"/>
+            <a:r>
+              <a:rPr sz="1600" b="1" i="0">
+                <a:solidFill>
+                  <a:srgbClr val="FFFFFF"/>
+                </a:solidFill>
+                <a:latin typeface="Calibri"/>
+              </a:rPr>
+              <a:t>3</a:t>
+            </a:r>
+          </a:p>
+        </p:txBody>
+      </p:sp>
+      <p:sp>
+        <p:nvSpPr>
+          <p:cNvPr id="17" name="TextBox 16"/>
+          <p:cNvSpPr txBox="1"/>
+          <p:nvPr/>
+        </p:nvSpPr>
+        <p:spPr>
+          <a:xfrm>
+            <a:off x="1188720" y="4037076"/>
+            <a:ext cx="10271455" cy="886968"/>
+          </a:xfrm>
+          <a:prstGeom prst="rect">
+            <a:avLst/>
+          </a:prstGeom>
+          <a:noFill/>
+        </p:spPr>
+        <p:txBody>
+          <a:bodyPr wrap="square" anchor="ctr"/>
+          <a:lstStyle/>
+          <a:p>
+            <a:r>
+              <a:rPr sz="1500" b="1" i="0">
+                <a:solidFill>
+                  <a:srgbClr val="095292"/>
+                </a:solidFill>
+                <a:latin typeface="Calibri"/>
+              </a:rPr>
+              <a:t>Pega y renderiza en ExamLab</a:t>
             </a:r>
           </a:p>
           <a:p>
             <a:pPr>
               <a:spcBef>
-                <a:spcPts val="400"/>
+                <a:spcPts val="200"/>
               </a:spcBef>
             </a:pPr>
             <a:r>
-              <a:rPr sz="1400" b="0" i="0">
+              <a:rPr sz="1300" b="0" i="0">
                 <a:solidFill>
                   <a:srgbClr val="333333"/>
                 </a:solidFill>
                 <a:latin typeface="Calibri"/>
               </a:rPr>
-              <a:t>Subir evidencias al paquete CloudLite (Drive/repo) y a ExamLab (https://uniaj.examlab.workers.dev/) domingo 23:59.</a:t>
-            </a:r>
-          </a:p>
-        </p:txBody>
-      </p:sp>
-      <p:sp>
-        <p:nvSpPr>
-          <p:cNvPr id="11" name="Rounded Rectangle 10"/>
+              <a:t>Pega ese codigo en la caja de texto de la pregunta y mira como lo dibuja la plataforma. Si no renderiza, corrige ahi mismo: lo que se califica es el diagrama renderizado dentro de ExamLab.</a:t>
+            </a:r>
+          </a:p>
+        </p:txBody>
+      </p:sp>
+      <p:sp>
+        <p:nvSpPr>
+          <p:cNvPr id="18" name="Rounded Rectangle 17"/>
           <p:cNvSpPr/>
           <p:nvPr/>
         </p:nvSpPr>
         <p:spPr>
           <a:xfrm>
-            <a:off x="457200" y="3694176"/>
+            <a:off x="457200" y="5088636"/>
             <a:ext cx="11277295" cy="1051560"/>
           </a:xfrm>
           <a:prstGeom prst="roundRect">
@@ -4710,7 +5853,7 @@
             </a:avLst>
           </a:prstGeom>
           <a:solidFill>
-            <a:srgbClr val="FBE4E4"/>
+            <a:srgbClr val="E8F4FA"/>
           </a:solidFill>
           <a:ln>
             <a:noFill/>
@@ -4740,20 +5883,22 @@
       </p:sp>
       <p:sp>
         <p:nvSpPr>
-          <p:cNvPr id="12" name="Rectangle 11"/>
+          <p:cNvPr id="19" name="Rounded Rectangle 18"/>
           <p:cNvSpPr/>
           <p:nvPr/>
         </p:nvSpPr>
         <p:spPr>
           <a:xfrm>
-            <a:off x="457200" y="3694176"/>
-            <a:ext cx="128016" cy="1051560"/>
-          </a:xfrm>
-          <a:prstGeom prst="rect">
-            <a:avLst/>
+            <a:off x="594360" y="5394960"/>
+            <a:ext cx="438912" cy="438912"/>
+          </a:xfrm>
+          <a:prstGeom prst="roundRect">
+            <a:avLst>
+              <a:gd name="adj" fmla="val 12000"/>
+            </a:avLst>
           </a:prstGeom>
           <a:solidFill>
-            <a:srgbClr val="A02030"/>
+            <a:srgbClr val="095292"/>
           </a:solidFill>
           <a:ln>
             <a:noFill/>
@@ -4783,14 +5928,14 @@
       </p:sp>
       <p:sp>
         <p:nvSpPr>
-          <p:cNvPr id="13" name="TextBox 12"/>
+          <p:cNvPr id="20" name="TextBox 19"/>
           <p:cNvSpPr txBox="1"/>
           <p:nvPr/>
         </p:nvSpPr>
         <p:spPr>
           <a:xfrm>
-            <a:off x="777240" y="3831336"/>
-            <a:ext cx="10774375" cy="822959"/>
+            <a:off x="594360" y="5394960"/>
+            <a:ext cx="438912" cy="438912"/>
           </a:xfrm>
           <a:prstGeom prst="rect">
             <a:avLst/>
@@ -4798,42 +5943,73 @@
           <a:noFill/>
         </p:spPr>
         <p:txBody>
-          <a:bodyPr wrap="square">
-            <a:spAutoFit/>
-          </a:bodyPr>
-          <a:lstStyle/>
-          <a:p>
-            <a:r>
-              <a:rPr sz="1200" b="1" i="0">
-                <a:solidFill>
-                  <a:srgbClr val="A02030"/>
-                </a:solidFill>
-                <a:latin typeface="Calibri"/>
-              </a:rPr>
-              <a:t>Atención</a:t>
+          <a:bodyPr wrap="square" anchor="ctr"/>
+          <a:lstStyle/>
+          <a:p>
+            <a:pPr algn="ctr"/>
+            <a:r>
+              <a:rPr sz="1600" b="1" i="0">
+                <a:solidFill>
+                  <a:srgbClr val="FFFFFF"/>
+                </a:solidFill>
+                <a:latin typeface="Calibri"/>
+              </a:rPr>
+              <a:t>4</a:t>
+            </a:r>
+          </a:p>
+        </p:txBody>
+      </p:sp>
+      <p:sp>
+        <p:nvSpPr>
+          <p:cNvPr id="21" name="TextBox 20"/>
+          <p:cNvSpPr txBox="1"/>
+          <p:nvPr/>
+        </p:nvSpPr>
+        <p:spPr>
+          <a:xfrm>
+            <a:off x="1188720" y="5180076"/>
+            <a:ext cx="10271455" cy="886968"/>
+          </a:xfrm>
+          <a:prstGeom prst="rect">
+            <a:avLst/>
+          </a:prstGeom>
+          <a:noFill/>
+        </p:spPr>
+        <p:txBody>
+          <a:bodyPr wrap="square" anchor="ctr"/>
+          <a:lstStyle/>
+          <a:p>
+            <a:r>
+              <a:rPr sz="1500" b="1" i="0">
+                <a:solidFill>
+                  <a:srgbClr val="095292"/>
+                </a:solidFill>
+                <a:latin typeface="Calibri"/>
+              </a:rPr>
+              <a:t>Guarda el PNG para tu PI</a:t>
             </a:r>
           </a:p>
           <a:p>
             <a:pPr>
               <a:spcBef>
-                <a:spcPts val="400"/>
+                <a:spcPts val="200"/>
               </a:spcBef>
             </a:pPr>
             <a:r>
-              <a:rPr sz="1400" b="0" i="0">
+              <a:rPr sz="1300" b="0" i="0">
                 <a:solidFill>
                   <a:srgbClr val="333333"/>
                 </a:solidFill>
                 <a:latin typeface="Calibri"/>
               </a:rPr>
-              <a:t>Sin cloud de pago ni instalaciones obligatorias de hipervisores/Docker Desktop.</a:t>
-            </a:r>
-          </a:p>
-        </p:txBody>
-      </p:sp>
-      <p:sp>
-        <p:nvSpPr>
-          <p:cNvPr id="14" name="TextBox 13"/>
+              <a:t>Exporta tambien la imagen a la carpeta de tu Proyecto Integrador. Esa copia es para tu informe; no reemplaza la respuesta en la plataforma.</a:t>
+            </a:r>
+          </a:p>
+        </p:txBody>
+      </p:sp>
+      <p:sp>
+        <p:nvSpPr>
+          <p:cNvPr id="22" name="TextBox 21"/>
           <p:cNvSpPr txBox="1"/>
           <p:nvPr/>
         </p:nvSpPr>
@@ -4875,6 +6051,966 @@
 </file>
 
 <file path=ppt/slides/slide13.xml><?xml version="1.0" encoding="utf-8"?>
+<p:sld xmlns:a="http://schemas.openxmlformats.org/drawingml/2006/main" xmlns:p="http://schemas.openxmlformats.org/presentationml/2006/main" xmlns:r="http://schemas.openxmlformats.org/officeDocument/2006/relationships">
+  <p:cSld>
+    <p:bg>
+      <p:bgPr>
+        <a:solidFill>
+          <a:srgbClr val="FFFFFF"/>
+        </a:solidFill>
+        <a:effectLst/>
+      </p:bgPr>
+    </p:bg>
+    <p:spTree>
+      <p:nvGrpSpPr>
+        <p:cNvPr id="1" name=""/>
+        <p:cNvGrpSpPr/>
+        <p:nvPr/>
+      </p:nvGrpSpPr>
+      <p:grpSpPr/>
+      <p:sp>
+        <p:nvSpPr>
+          <p:cNvPr id="2" name="Rectangle 1"/>
+          <p:cNvSpPr/>
+          <p:nvPr/>
+        </p:nvSpPr>
+        <p:spPr>
+          <a:xfrm>
+            <a:off x="0" y="0"/>
+            <a:ext cx="12191695" cy="960120"/>
+          </a:xfrm>
+          <a:prstGeom prst="rect">
+            <a:avLst/>
+          </a:prstGeom>
+          <a:solidFill>
+            <a:srgbClr val="095292"/>
+          </a:solidFill>
+          <a:ln>
+            <a:noFill/>
+          </a:ln>
+        </p:spPr>
+        <p:style>
+          <a:lnRef idx="1">
+            <a:schemeClr val="accent1"/>
+          </a:lnRef>
+          <a:fillRef idx="3">
+            <a:schemeClr val="accent1"/>
+          </a:fillRef>
+          <a:effectRef idx="2">
+            <a:schemeClr val="accent1"/>
+          </a:effectRef>
+          <a:fontRef idx="minor">
+            <a:schemeClr val="lt1"/>
+          </a:fontRef>
+        </p:style>
+        <p:txBody>
+          <a:bodyPr rtlCol="0" anchor="ctr"/>
+          <a:lstStyle/>
+          <a:p>
+            <a:pPr algn="ctr"/>
+          </a:p>
+        </p:txBody>
+      </p:sp>
+      <p:sp>
+        <p:nvSpPr>
+          <p:cNvPr id="3" name="Rectangle 2"/>
+          <p:cNvSpPr/>
+          <p:nvPr/>
+        </p:nvSpPr>
+        <p:spPr>
+          <a:xfrm>
+            <a:off x="0" y="960120"/>
+            <a:ext cx="12191695" cy="41148"/>
+          </a:xfrm>
+          <a:prstGeom prst="rect">
+            <a:avLst/>
+          </a:prstGeom>
+          <a:solidFill>
+            <a:srgbClr val="FFD000"/>
+          </a:solidFill>
+          <a:ln>
+            <a:noFill/>
+          </a:ln>
+        </p:spPr>
+        <p:style>
+          <a:lnRef idx="1">
+            <a:schemeClr val="accent1"/>
+          </a:lnRef>
+          <a:fillRef idx="3">
+            <a:schemeClr val="accent1"/>
+          </a:fillRef>
+          <a:effectRef idx="2">
+            <a:schemeClr val="accent1"/>
+          </a:effectRef>
+          <a:fontRef idx="minor">
+            <a:schemeClr val="lt1"/>
+          </a:fontRef>
+        </p:style>
+        <p:txBody>
+          <a:bodyPr rtlCol="0" anchor="ctr"/>
+          <a:lstStyle/>
+          <a:p>
+            <a:pPr algn="ctr"/>
+          </a:p>
+        </p:txBody>
+      </p:sp>
+      <p:sp>
+        <p:nvSpPr>
+          <p:cNvPr id="4" name="TextBox 3"/>
+          <p:cNvSpPr txBox="1"/>
+          <p:nvPr/>
+        </p:nvSpPr>
+        <p:spPr>
+          <a:xfrm>
+            <a:off x="457200" y="164592"/>
+            <a:ext cx="11277295" cy="502920"/>
+          </a:xfrm>
+          <a:prstGeom prst="rect">
+            <a:avLst/>
+          </a:prstGeom>
+          <a:noFill/>
+        </p:spPr>
+        <p:txBody>
+          <a:bodyPr wrap="square">
+            <a:spAutoFit/>
+          </a:bodyPr>
+          <a:lstStyle/>
+          <a:p>
+            <a:r>
+              <a:rPr sz="2600" b="1" i="0">
+                <a:solidFill>
+                  <a:srgbClr val="FFFFFF"/>
+                </a:solidFill>
+                <a:latin typeface="Calibri"/>
+              </a:rPr>
+              <a:t>Taller PI (paso a paso)</a:t>
+            </a:r>
+          </a:p>
+        </p:txBody>
+      </p:sp>
+      <p:sp>
+        <p:nvSpPr>
+          <p:cNvPr id="5" name="TextBox 4"/>
+          <p:cNvSpPr txBox="1"/>
+          <p:nvPr/>
+        </p:nvSpPr>
+        <p:spPr>
+          <a:xfrm>
+            <a:off x="457200" y="1170432"/>
+            <a:ext cx="11277295" cy="5230368"/>
+          </a:xfrm>
+          <a:prstGeom prst="rect">
+            <a:avLst/>
+          </a:prstGeom>
+          <a:noFill/>
+        </p:spPr>
+        <p:txBody>
+          <a:bodyPr wrap="square">
+            <a:spAutoFit/>
+          </a:bodyPr>
+          <a:lstStyle/>
+          <a:p>
+            <a:pPr>
+              <a:spcAft>
+                <a:spcPts val="800"/>
+              </a:spcAft>
+            </a:pPr>
+            <a:r>
+              <a:rPr sz="1600" b="1" i="0">
+                <a:solidFill>
+                  <a:srgbClr val="333333"/>
+                </a:solidFill>
+                <a:latin typeface="Calibri"/>
+              </a:rPr>
+              <a:t>1.</a:t>
+            </a:r>
+            <a:r>
+              <a:rPr sz="1600" b="0" i="0">
+                <a:solidFill>
+                  <a:srgbClr val="333333"/>
+                </a:solidFill>
+                <a:latin typeface="Calibri"/>
+              </a:rPr>
+              <a:t> Paso 1: decidan cual de los contenedores de CloudLite se contenerizara hoy (la API stub o el front estatico) y escriban en la seccion Contenedores del informe el nombre exacto del servicio, el puerto que expondra y la ruta de salud que responderan (por ejemplo api-citas, puerto 8080, ruta /health), verificando que ese nombre sea el mismo que usaran en el C4 de la Clase 4 y en el despliegue de la Clase 7.</a:t>
+            </a:r>
+          </a:p>
+          <a:p>
+            <a:pPr>
+              <a:spcAft>
+                <a:spcPts val="800"/>
+              </a:spcAft>
+            </a:pPr>
+            <a:r>
+              <a:rPr sz="1600" b="0" i="0">
+                <a:solidFill>
+                  <a:srgbClr val="333333"/>
+                </a:solidFill>
+                <a:latin typeface="Calibri"/>
+              </a:rPr>
+              <a:t>–   </a:t>
+            </a:r>
+            <a:r>
+              <a:rPr sz="1600" b="1" i="0">
+                <a:solidFill>
+                  <a:srgbClr val="333333"/>
+                </a:solidFill>
+                <a:latin typeface="Calibri"/>
+              </a:rPr>
+              <a:t>2.</a:t>
+            </a:r>
+            <a:r>
+              <a:rPr sz="1600" b="0" i="0">
+                <a:solidFill>
+                  <a:srgbClr val="333333"/>
+                </a:solidFill>
+                <a:latin typeface="Calibri"/>
+              </a:rPr>
+              <a:t> Paso 2: en la consola Linux de ExamLab arme el contexto de build con 5 archivos (app/main.py, requirements.txt con 2 dependencias fijadas por version, Dockerfile, .dockerignore con 4 entradas) y verifique con ls -la que los 5 existen y con un grep de PASSWORD, SECRET, TOKEN y api_key que la salida sea vacia, confirmando que no hay ningun secreto en el contexto.</a:t>
+            </a:r>
+          </a:p>
+          <a:p>
+            <a:pPr>
+              <a:spcAft>
+                <a:spcPts val="800"/>
+              </a:spcAft>
+            </a:pPr>
+            <a:r>
+              <a:rPr sz="1600" b="0" i="0">
+                <a:solidFill>
+                  <a:srgbClr val="333333"/>
+                </a:solidFill>
+                <a:latin typeface="Calibri"/>
+              </a:rPr>
+              <a:t>–   </a:t>
+            </a:r>
+            <a:r>
+              <a:rPr sz="1600" b="1" i="0">
+                <a:solidFill>
+                  <a:srgbClr val="333333"/>
+                </a:solidFill>
+                <a:latin typeface="Calibri"/>
+              </a:rPr>
+              <a:t>3.</a:t>
+            </a:r>
+            <a:r>
+              <a:rPr sz="1600" b="0" i="0">
+                <a:solidFill>
+                  <a:srgbClr val="333333"/>
+                </a:solidFill>
+                <a:latin typeface="Calibri"/>
+              </a:rPr>
+              <a:t> Paso 3: escriba el Dockerfile con exactamente 7 instrucciones (FROM con tag fijo y variante slim, WORKDIR, COPY de requirements, RUN pip install --no-cache-dir, COPY del codigo, EXPOSE del puerto declarado en el paso 1, CMD) y verifique que el puerto de EXPOSE, el del CMD y el documentado en el informe sean el mismo numero; el Dockerfile se pega completo en la pregunta 2 de ExamLab.</a:t>
+            </a:r>
+          </a:p>
+          <a:p>
+            <a:pPr>
+              <a:spcAft>
+                <a:spcPts val="800"/>
+              </a:spcAft>
+            </a:pPr>
+            <a:r>
+              <a:rPr sz="1600" b="0" i="0">
+                <a:solidFill>
+                  <a:srgbClr val="333333"/>
+                </a:solidFill>
+                <a:latin typeface="Calibri"/>
+              </a:rPr>
+              <a:t>–   </a:t>
+            </a:r>
+            <a:r>
+              <a:rPr sz="1600" b="1" i="0">
+                <a:solidFill>
+                  <a:srgbClr val="333333"/>
+                </a:solidFill>
+                <a:latin typeface="Calibri"/>
+              </a:rPr>
+              <a:t>4.</a:t>
+            </a:r>
+            <a:r>
+              <a:rPr sz="1600" b="0" i="0">
+                <a:solidFill>
+                  <a:srgbClr val="333333"/>
+                </a:solidFill>
+                <a:latin typeface="Calibri"/>
+              </a:rPr>
+              <a:t> Paso 4: abra LabEx Docker Playground en labex.io con su cuenta de Google o Microsoft (o Killercoda si no carga), ejecute docker build -t cloudlite-api:v1 . y docker run -d -p 8080:8080 cloudlite-api:v1, compruebe con curl que la ruta de salud devuelve 200 y llene la bitacora de 5 filas comando / que esperaba / que salio / evidencia, verificando que la captura muestre a la vez el prompt del lab, la salida del docker ps y la hora del sistema.</a:t>
+            </a:r>
+          </a:p>
+          <a:p>
+            <a:pPr>
+              <a:spcAft>
+                <a:spcPts val="800"/>
+              </a:spcAft>
+            </a:pPr>
+            <a:r>
+              <a:rPr sz="1600" b="0" i="0">
+                <a:solidFill>
+                  <a:srgbClr val="333333"/>
+                </a:solidFill>
+                <a:latin typeface="Calibri"/>
+              </a:rPr>
+              <a:t>–   </a:t>
+            </a:r>
+            <a:r>
+              <a:rPr sz="1600" b="1" i="0">
+                <a:solidFill>
+                  <a:srgbClr val="333333"/>
+                </a:solidFill>
+                <a:latin typeface="Calibri"/>
+              </a:rPr>
+              <a:t>5.</a:t>
+            </a:r>
+            <a:r>
+              <a:rPr sz="1600" b="0" i="0">
+                <a:solidFill>
+                  <a:srgbClr val="333333"/>
+                </a:solidFill>
+                <a:latin typeface="Calibri"/>
+              </a:rPr>
+              <a:t> Paso 5: complete el diagrama Mermaid del ciclo Dockerfile a contenedor, adjunte la captura del lab con su nota de caducidad y suba las 5 preguntas del taller a ExamLab (modulo Talleres) antes del domingo 23:59, verificando que la seccion Contenedores del informe cite el mismo tag de imagen cloudlite-api:v1 que aparece en la captura.</a:t>
+            </a:r>
+          </a:p>
+        </p:txBody>
+      </p:sp>
+      <p:sp>
+        <p:nvSpPr>
+          <p:cNvPr id="6" name="TextBox 5"/>
+          <p:cNvSpPr txBox="1"/>
+          <p:nvPr/>
+        </p:nvSpPr>
+        <p:spPr>
+          <a:xfrm>
+            <a:off x="11185855" y="6473952"/>
+            <a:ext cx="640080" cy="274320"/>
+          </a:xfrm>
+          <a:prstGeom prst="rect">
+            <a:avLst/>
+          </a:prstGeom>
+          <a:noFill/>
+        </p:spPr>
+        <p:txBody>
+          <a:bodyPr wrap="square">
+            <a:spAutoFit/>
+          </a:bodyPr>
+          <a:lstStyle/>
+          <a:p>
+            <a:pPr algn="r"/>
+            <a:r>
+              <a:rPr sz="1100" b="0" i="0">
+                <a:solidFill>
+                  <a:srgbClr val="666666"/>
+                </a:solidFill>
+                <a:latin typeface="Calibri"/>
+              </a:rPr>
+              <a:t>13</a:t>
+            </a:r>
+          </a:p>
+        </p:txBody>
+      </p:sp>
+    </p:spTree>
+  </p:cSld>
+  <p:clrMapOvr>
+    <a:masterClrMapping/>
+  </p:clrMapOvr>
+</p:sld>
+</file>
+
+<file path=ppt/slides/slide14.xml><?xml version="1.0" encoding="utf-8"?>
+<p:sld xmlns:a="http://schemas.openxmlformats.org/drawingml/2006/main" xmlns:p="http://schemas.openxmlformats.org/presentationml/2006/main" xmlns:r="http://schemas.openxmlformats.org/officeDocument/2006/relationships">
+  <p:cSld>
+    <p:bg>
+      <p:bgPr>
+        <a:solidFill>
+          <a:srgbClr val="FFFFFF"/>
+        </a:solidFill>
+        <a:effectLst/>
+      </p:bgPr>
+    </p:bg>
+    <p:spTree>
+      <p:nvGrpSpPr>
+        <p:cNvPr id="1" name=""/>
+        <p:cNvGrpSpPr/>
+        <p:nvPr/>
+      </p:nvGrpSpPr>
+      <p:grpSpPr/>
+      <p:sp>
+        <p:nvSpPr>
+          <p:cNvPr id="2" name="Rectangle 1"/>
+          <p:cNvSpPr/>
+          <p:nvPr/>
+        </p:nvSpPr>
+        <p:spPr>
+          <a:xfrm>
+            <a:off x="0" y="0"/>
+            <a:ext cx="12191695" cy="960120"/>
+          </a:xfrm>
+          <a:prstGeom prst="rect">
+            <a:avLst/>
+          </a:prstGeom>
+          <a:solidFill>
+            <a:srgbClr val="095292"/>
+          </a:solidFill>
+          <a:ln>
+            <a:noFill/>
+          </a:ln>
+        </p:spPr>
+        <p:style>
+          <a:lnRef idx="1">
+            <a:schemeClr val="accent1"/>
+          </a:lnRef>
+          <a:fillRef idx="3">
+            <a:schemeClr val="accent1"/>
+          </a:fillRef>
+          <a:effectRef idx="2">
+            <a:schemeClr val="accent1"/>
+          </a:effectRef>
+          <a:fontRef idx="minor">
+            <a:schemeClr val="lt1"/>
+          </a:fontRef>
+        </p:style>
+        <p:txBody>
+          <a:bodyPr rtlCol="0" anchor="ctr"/>
+          <a:lstStyle/>
+          <a:p>
+            <a:pPr algn="ctr"/>
+          </a:p>
+        </p:txBody>
+      </p:sp>
+      <p:sp>
+        <p:nvSpPr>
+          <p:cNvPr id="3" name="Rectangle 2"/>
+          <p:cNvSpPr/>
+          <p:nvPr/>
+        </p:nvSpPr>
+        <p:spPr>
+          <a:xfrm>
+            <a:off x="0" y="960120"/>
+            <a:ext cx="12191695" cy="41148"/>
+          </a:xfrm>
+          <a:prstGeom prst="rect">
+            <a:avLst/>
+          </a:prstGeom>
+          <a:solidFill>
+            <a:srgbClr val="FFD000"/>
+          </a:solidFill>
+          <a:ln>
+            <a:noFill/>
+          </a:ln>
+        </p:spPr>
+        <p:style>
+          <a:lnRef idx="1">
+            <a:schemeClr val="accent1"/>
+          </a:lnRef>
+          <a:fillRef idx="3">
+            <a:schemeClr val="accent1"/>
+          </a:fillRef>
+          <a:effectRef idx="2">
+            <a:schemeClr val="accent1"/>
+          </a:effectRef>
+          <a:fontRef idx="minor">
+            <a:schemeClr val="lt1"/>
+          </a:fontRef>
+        </p:style>
+        <p:txBody>
+          <a:bodyPr rtlCol="0" anchor="ctr"/>
+          <a:lstStyle/>
+          <a:p>
+            <a:pPr algn="ctr"/>
+          </a:p>
+        </p:txBody>
+      </p:sp>
+      <p:sp>
+        <p:nvSpPr>
+          <p:cNvPr id="4" name="TextBox 3"/>
+          <p:cNvSpPr txBox="1"/>
+          <p:nvPr/>
+        </p:nvSpPr>
+        <p:spPr>
+          <a:xfrm>
+            <a:off x="457200" y="164592"/>
+            <a:ext cx="11277295" cy="502920"/>
+          </a:xfrm>
+          <a:prstGeom prst="rect">
+            <a:avLst/>
+          </a:prstGeom>
+          <a:noFill/>
+        </p:spPr>
+        <p:txBody>
+          <a:bodyPr wrap="square">
+            <a:spAutoFit/>
+          </a:bodyPr>
+          <a:lstStyle/>
+          <a:p>
+            <a:r>
+              <a:rPr sz="2600" b="1" i="0">
+                <a:solidFill>
+                  <a:srgbClr val="FFFFFF"/>
+                </a:solidFill>
+                <a:latin typeface="Calibri"/>
+              </a:rPr>
+              <a:t>Para continuar (PI)</a:t>
+            </a:r>
+          </a:p>
+        </p:txBody>
+      </p:sp>
+      <p:sp>
+        <p:nvSpPr>
+          <p:cNvPr id="5" name="Rounded Rectangle 4"/>
+          <p:cNvSpPr/>
+          <p:nvPr/>
+        </p:nvSpPr>
+        <p:spPr>
+          <a:xfrm>
+            <a:off x="457200" y="1261872"/>
+            <a:ext cx="11277295" cy="1051560"/>
+          </a:xfrm>
+          <a:prstGeom prst="roundRect">
+            <a:avLst>
+              <a:gd name="adj" fmla="val 12000"/>
+            </a:avLst>
+          </a:prstGeom>
+          <a:solidFill>
+            <a:srgbClr val="E8F4FA"/>
+          </a:solidFill>
+          <a:ln>
+            <a:noFill/>
+          </a:ln>
+        </p:spPr>
+        <p:style>
+          <a:lnRef idx="1">
+            <a:schemeClr val="accent1"/>
+          </a:lnRef>
+          <a:fillRef idx="3">
+            <a:schemeClr val="accent1"/>
+          </a:fillRef>
+          <a:effectRef idx="2">
+            <a:schemeClr val="accent1"/>
+          </a:effectRef>
+          <a:fontRef idx="minor">
+            <a:schemeClr val="lt1"/>
+          </a:fontRef>
+        </p:style>
+        <p:txBody>
+          <a:bodyPr rtlCol="0" anchor="ctr"/>
+          <a:lstStyle/>
+          <a:p>
+            <a:pPr algn="ctr"/>
+          </a:p>
+        </p:txBody>
+      </p:sp>
+      <p:sp>
+        <p:nvSpPr>
+          <p:cNvPr id="6" name="Rectangle 5"/>
+          <p:cNvSpPr/>
+          <p:nvPr/>
+        </p:nvSpPr>
+        <p:spPr>
+          <a:xfrm>
+            <a:off x="457200" y="1261872"/>
+            <a:ext cx="128016" cy="1051560"/>
+          </a:xfrm>
+          <a:prstGeom prst="rect">
+            <a:avLst/>
+          </a:prstGeom>
+          <a:solidFill>
+            <a:srgbClr val="269CCB"/>
+          </a:solidFill>
+          <a:ln>
+            <a:noFill/>
+          </a:ln>
+        </p:spPr>
+        <p:style>
+          <a:lnRef idx="1">
+            <a:schemeClr val="accent1"/>
+          </a:lnRef>
+          <a:fillRef idx="3">
+            <a:schemeClr val="accent1"/>
+          </a:fillRef>
+          <a:effectRef idx="2">
+            <a:schemeClr val="accent1"/>
+          </a:effectRef>
+          <a:fontRef idx="minor">
+            <a:schemeClr val="lt1"/>
+          </a:fontRef>
+        </p:style>
+        <p:txBody>
+          <a:bodyPr rtlCol="0" anchor="ctr"/>
+          <a:lstStyle/>
+          <a:p>
+            <a:pPr algn="ctr"/>
+          </a:p>
+        </p:txBody>
+      </p:sp>
+      <p:sp>
+        <p:nvSpPr>
+          <p:cNvPr id="7" name="TextBox 6"/>
+          <p:cNvSpPr txBox="1"/>
+          <p:nvPr/>
+        </p:nvSpPr>
+        <p:spPr>
+          <a:xfrm>
+            <a:off x="777240" y="1399031"/>
+            <a:ext cx="10774375" cy="822959"/>
+          </a:xfrm>
+          <a:prstGeom prst="rect">
+            <a:avLst/>
+          </a:prstGeom>
+          <a:noFill/>
+        </p:spPr>
+        <p:txBody>
+          <a:bodyPr wrap="square">
+            <a:spAutoFit/>
+          </a:bodyPr>
+          <a:lstStyle/>
+          <a:p>
+            <a:r>
+              <a:rPr sz="1200" b="1" i="0">
+                <a:solidFill>
+                  <a:srgbClr val="269CCB"/>
+                </a:solidFill>
+                <a:latin typeface="Calibri"/>
+              </a:rPr>
+              <a:t>Info</a:t>
+            </a:r>
+          </a:p>
+          <a:p>
+            <a:pPr>
+              <a:spcBef>
+                <a:spcPts val="400"/>
+              </a:spcBef>
+            </a:pPr>
+            <a:r>
+              <a:rPr sz="1400" b="0" i="0">
+                <a:solidFill>
+                  <a:srgbClr val="333333"/>
+                </a:solidFill>
+                <a:latin typeface="Calibri"/>
+              </a:rPr>
+              <a:t>Entregable: Dockerfile (+ compose opcional) + captura/enlace lab navegador</a:t>
+            </a:r>
+          </a:p>
+        </p:txBody>
+      </p:sp>
+      <p:sp>
+        <p:nvSpPr>
+          <p:cNvPr id="8" name="Rounded Rectangle 7"/>
+          <p:cNvSpPr/>
+          <p:nvPr/>
+        </p:nvSpPr>
+        <p:spPr>
+          <a:xfrm>
+            <a:off x="457200" y="2478024"/>
+            <a:ext cx="11277295" cy="1051560"/>
+          </a:xfrm>
+          <a:prstGeom prst="roundRect">
+            <a:avLst>
+              <a:gd name="adj" fmla="val 12000"/>
+            </a:avLst>
+          </a:prstGeom>
+          <a:solidFill>
+            <a:srgbClr val="FFF8E1"/>
+          </a:solidFill>
+          <a:ln>
+            <a:noFill/>
+          </a:ln>
+        </p:spPr>
+        <p:style>
+          <a:lnRef idx="1">
+            <a:schemeClr val="accent1"/>
+          </a:lnRef>
+          <a:fillRef idx="3">
+            <a:schemeClr val="accent1"/>
+          </a:fillRef>
+          <a:effectRef idx="2">
+            <a:schemeClr val="accent1"/>
+          </a:effectRef>
+          <a:fontRef idx="minor">
+            <a:schemeClr val="lt1"/>
+          </a:fontRef>
+        </p:style>
+        <p:txBody>
+          <a:bodyPr rtlCol="0" anchor="ctr"/>
+          <a:lstStyle/>
+          <a:p>
+            <a:pPr algn="ctr"/>
+          </a:p>
+        </p:txBody>
+      </p:sp>
+      <p:sp>
+        <p:nvSpPr>
+          <p:cNvPr id="9" name="Rectangle 8"/>
+          <p:cNvSpPr/>
+          <p:nvPr/>
+        </p:nvSpPr>
+        <p:spPr>
+          <a:xfrm>
+            <a:off x="457200" y="2478024"/>
+            <a:ext cx="128016" cy="1051560"/>
+          </a:xfrm>
+          <a:prstGeom prst="rect">
+            <a:avLst/>
+          </a:prstGeom>
+          <a:solidFill>
+            <a:srgbClr val="FFD000"/>
+          </a:solidFill>
+          <a:ln>
+            <a:noFill/>
+          </a:ln>
+        </p:spPr>
+        <p:style>
+          <a:lnRef idx="1">
+            <a:schemeClr val="accent1"/>
+          </a:lnRef>
+          <a:fillRef idx="3">
+            <a:schemeClr val="accent1"/>
+          </a:fillRef>
+          <a:effectRef idx="2">
+            <a:schemeClr val="accent1"/>
+          </a:effectRef>
+          <a:fontRef idx="minor">
+            <a:schemeClr val="lt1"/>
+          </a:fontRef>
+        </p:style>
+        <p:txBody>
+          <a:bodyPr rtlCol="0" anchor="ctr"/>
+          <a:lstStyle/>
+          <a:p>
+            <a:pPr algn="ctr"/>
+          </a:p>
+        </p:txBody>
+      </p:sp>
+      <p:sp>
+        <p:nvSpPr>
+          <p:cNvPr id="10" name="TextBox 9"/>
+          <p:cNvSpPr txBox="1"/>
+          <p:nvPr/>
+        </p:nvSpPr>
+        <p:spPr>
+          <a:xfrm>
+            <a:off x="777240" y="2615184"/>
+            <a:ext cx="10774375" cy="822959"/>
+          </a:xfrm>
+          <a:prstGeom prst="rect">
+            <a:avLst/>
+          </a:prstGeom>
+          <a:noFill/>
+        </p:spPr>
+        <p:txBody>
+          <a:bodyPr wrap="square">
+            <a:spAutoFit/>
+          </a:bodyPr>
+          <a:lstStyle/>
+          <a:p>
+            <a:r>
+              <a:rPr sz="1200" b="1" i="0">
+                <a:solidFill>
+                  <a:srgbClr val="FFD000"/>
+                </a:solidFill>
+                <a:latin typeface="Calibri"/>
+              </a:rPr>
+              <a:t>Aclaración</a:t>
+            </a:r>
+          </a:p>
+          <a:p>
+            <a:pPr>
+              <a:spcBef>
+                <a:spcPts val="400"/>
+              </a:spcBef>
+            </a:pPr>
+            <a:r>
+              <a:rPr sz="1400" b="0" i="0">
+                <a:solidFill>
+                  <a:srgbClr val="333333"/>
+                </a:solidFill>
+                <a:latin typeface="Calibri"/>
+              </a:rPr>
+              <a:t>Subir evidencias al paquete CloudLite (Drive/repo) y a ExamLab (https://uniaj.examlab.workers.dev/) domingo 23:59.</a:t>
+            </a:r>
+          </a:p>
+        </p:txBody>
+      </p:sp>
+      <p:sp>
+        <p:nvSpPr>
+          <p:cNvPr id="11" name="Rounded Rectangle 10"/>
+          <p:cNvSpPr/>
+          <p:nvPr/>
+        </p:nvSpPr>
+        <p:spPr>
+          <a:xfrm>
+            <a:off x="457200" y="3694176"/>
+            <a:ext cx="11277295" cy="1051560"/>
+          </a:xfrm>
+          <a:prstGeom prst="roundRect">
+            <a:avLst>
+              <a:gd name="adj" fmla="val 12000"/>
+            </a:avLst>
+          </a:prstGeom>
+          <a:solidFill>
+            <a:srgbClr val="FBE4E4"/>
+          </a:solidFill>
+          <a:ln>
+            <a:noFill/>
+          </a:ln>
+        </p:spPr>
+        <p:style>
+          <a:lnRef idx="1">
+            <a:schemeClr val="accent1"/>
+          </a:lnRef>
+          <a:fillRef idx="3">
+            <a:schemeClr val="accent1"/>
+          </a:fillRef>
+          <a:effectRef idx="2">
+            <a:schemeClr val="accent1"/>
+          </a:effectRef>
+          <a:fontRef idx="minor">
+            <a:schemeClr val="lt1"/>
+          </a:fontRef>
+        </p:style>
+        <p:txBody>
+          <a:bodyPr rtlCol="0" anchor="ctr"/>
+          <a:lstStyle/>
+          <a:p>
+            <a:pPr algn="ctr"/>
+          </a:p>
+        </p:txBody>
+      </p:sp>
+      <p:sp>
+        <p:nvSpPr>
+          <p:cNvPr id="12" name="Rectangle 11"/>
+          <p:cNvSpPr/>
+          <p:nvPr/>
+        </p:nvSpPr>
+        <p:spPr>
+          <a:xfrm>
+            <a:off x="457200" y="3694176"/>
+            <a:ext cx="128016" cy="1051560"/>
+          </a:xfrm>
+          <a:prstGeom prst="rect">
+            <a:avLst/>
+          </a:prstGeom>
+          <a:solidFill>
+            <a:srgbClr val="A02030"/>
+          </a:solidFill>
+          <a:ln>
+            <a:noFill/>
+          </a:ln>
+        </p:spPr>
+        <p:style>
+          <a:lnRef idx="1">
+            <a:schemeClr val="accent1"/>
+          </a:lnRef>
+          <a:fillRef idx="3">
+            <a:schemeClr val="accent1"/>
+          </a:fillRef>
+          <a:effectRef idx="2">
+            <a:schemeClr val="accent1"/>
+          </a:effectRef>
+          <a:fontRef idx="minor">
+            <a:schemeClr val="lt1"/>
+          </a:fontRef>
+        </p:style>
+        <p:txBody>
+          <a:bodyPr rtlCol="0" anchor="ctr"/>
+          <a:lstStyle/>
+          <a:p>
+            <a:pPr algn="ctr"/>
+          </a:p>
+        </p:txBody>
+      </p:sp>
+      <p:sp>
+        <p:nvSpPr>
+          <p:cNvPr id="13" name="TextBox 12"/>
+          <p:cNvSpPr txBox="1"/>
+          <p:nvPr/>
+        </p:nvSpPr>
+        <p:spPr>
+          <a:xfrm>
+            <a:off x="777240" y="3831336"/>
+            <a:ext cx="10774375" cy="822959"/>
+          </a:xfrm>
+          <a:prstGeom prst="rect">
+            <a:avLst/>
+          </a:prstGeom>
+          <a:noFill/>
+        </p:spPr>
+        <p:txBody>
+          <a:bodyPr wrap="square">
+            <a:spAutoFit/>
+          </a:bodyPr>
+          <a:lstStyle/>
+          <a:p>
+            <a:r>
+              <a:rPr sz="1200" b="1" i="0">
+                <a:solidFill>
+                  <a:srgbClr val="A02030"/>
+                </a:solidFill>
+                <a:latin typeface="Calibri"/>
+              </a:rPr>
+              <a:t>Atención</a:t>
+            </a:r>
+          </a:p>
+          <a:p>
+            <a:pPr>
+              <a:spcBef>
+                <a:spcPts val="400"/>
+              </a:spcBef>
+            </a:pPr>
+            <a:r>
+              <a:rPr sz="1400" b="0" i="0">
+                <a:solidFill>
+                  <a:srgbClr val="333333"/>
+                </a:solidFill>
+                <a:latin typeface="Calibri"/>
+              </a:rPr>
+              <a:t>Sin cloud de pago ni instalaciones obligatorias de hipervisores/Docker Desktop.</a:t>
+            </a:r>
+          </a:p>
+        </p:txBody>
+      </p:sp>
+      <p:sp>
+        <p:nvSpPr>
+          <p:cNvPr id="14" name="TextBox 13"/>
+          <p:cNvSpPr txBox="1"/>
+          <p:nvPr/>
+        </p:nvSpPr>
+        <p:spPr>
+          <a:xfrm>
+            <a:off x="11185855" y="6473952"/>
+            <a:ext cx="640080" cy="274320"/>
+          </a:xfrm>
+          <a:prstGeom prst="rect">
+            <a:avLst/>
+          </a:prstGeom>
+          <a:noFill/>
+        </p:spPr>
+        <p:txBody>
+          <a:bodyPr wrap="square">
+            <a:spAutoFit/>
+          </a:bodyPr>
+          <a:lstStyle/>
+          <a:p>
+            <a:pPr algn="r"/>
+            <a:r>
+              <a:rPr sz="1100" b="0" i="0">
+                <a:solidFill>
+                  <a:srgbClr val="666666"/>
+                </a:solidFill>
+                <a:latin typeface="Calibri"/>
+              </a:rPr>
+              <a:t>14</a:t>
+            </a:r>
+          </a:p>
+        </p:txBody>
+      </p:sp>
+    </p:spTree>
+  </p:cSld>
+  <p:clrMapOvr>
+    <a:masterClrMapping/>
+  </p:clrMapOvr>
+</p:sld>
+</file>
+
+<file path=ppt/slides/slide15.xml><?xml version="1.0" encoding="utf-8"?>
 <p:sld xmlns:a="http://schemas.openxmlformats.org/drawingml/2006/main" xmlns:p="http://schemas.openxmlformats.org/presentationml/2006/main" xmlns:r="http://schemas.openxmlformats.org/officeDocument/2006/relationships">
   <p:cSld>
     <p:bg>

--- a/Arquitectura de Sistemas Computacionales/Clases/Clase 3 - Virtualizacion y contenedores/Presentacion.pptx
+++ b/Arquitectura de Sistemas Computacionales/Clases/Clase 3 - Virtualizacion y contenedores/Presentacion.pptx
@@ -3299,7 +3299,7 @@
                 </a:solidFill>
                 <a:latin typeface="Calibri"/>
               </a:rPr>
-              <a:t>Lab LabEx Docker Playground → stub CloudLite</a:t>
+              <a:t>Lab Killercoda → stub CloudLite</a:t>
             </a:r>
           </a:p>
         </p:txBody>
@@ -4221,7 +4221,7 @@
       </p:sp>
       <p:pic>
         <p:nvPicPr>
-          <p:cNvPr id="9" name="Picture 8" descr="labex.png"/>
+          <p:cNvPr id="9" name="Picture 8" descr="killercoda.png"/>
           <p:cNvPicPr>
             <a:picLocks noChangeAspect="1"/>
           </p:cNvPicPr>
@@ -4271,7 +4271,7 @@
                 </a:solidFill>
                 <a:latin typeface="Calibri"/>
               </a:rPr>
-              <a:t>LabEx Docker Playground</a:t>
+              <a:t>Killercoda</a:t>
             </a:r>
           </a:p>
           <a:p>
@@ -4287,7 +4287,7 @@
                 </a:solidFill>
                 <a:latin typeface="Calibri"/>
               </a:rPr>
-              <a:t>Lab del dia</a:t>
+              <a:t>Lab del dia · sesion 1 h</a:t>
             </a:r>
           </a:p>
         </p:txBody>
@@ -4425,7 +4425,7 @@
       </p:sp>
       <p:pic>
         <p:nvPicPr>
-          <p:cNvPr id="14" name="Picture 13" descr="killercoda.png"/>
+          <p:cNvPr id="14" name="Picture 13" descr="labex.png"/>
           <p:cNvPicPr>
             <a:picLocks noChangeAspect="1"/>
           </p:cNvPicPr>
@@ -4475,7 +4475,7 @@
                 </a:solidFill>
                 <a:latin typeface="Calibri"/>
               </a:rPr>
-              <a:t>Killercoda</a:t>
+              <a:t>LabEx Docker Playground</a:t>
             </a:r>
           </a:p>
           <a:p>
@@ -4491,7 +4491,7 @@
                 </a:solidFill>
                 <a:latin typeface="Calibri"/>
               </a:rPr>
-              <a:t>Alterna si no carga</a:t>
+              <a:t>Alterna · 3 al dia</a:t>
             </a:r>
           </a:p>
         </p:txBody>
@@ -6333,7 +6333,7 @@
                 </a:solidFill>
                 <a:latin typeface="Calibri"/>
               </a:rPr>
-              <a:t> Paso 4: abra LabEx Docker Playground en labex.io con su cuenta de Google o Microsoft (o Killercoda si no carga), ejecute docker build -t cloudlite-api:v1 . y docker run -d -p 8080:8080 cloudlite-api:v1, compruebe con curl que la ruta de salud devuelve 200 y llene la bitacora de 5 filas comando / que esperaba / que salio / evidencia, verificando que la captura muestre a la vez el prompt del lab, la salida del docker ps y la hora del sistema.</a:t>
+              <a:t> Paso 4: abra Killercoda en killercoda.com con su cuenta gratuita y lance un escenario Ubuntu (si no carga, LabEx Docker Playground como alterna; ojo: LabEx solo da 3 sesiones al dia en el plan gratuito), ejecute docker build -t cloudlite-api:v1 . y docker run -d -p 8080:8080 cloudlite-api:v1, compruebe con curl que la ruta de salud devuelve 200 y llene la bitacora de 5 filas comando / que esperaba / que salio / evidencia, verificando que la captura muestre a la vez el prompt del lab, la salida del docker ps y la hora del sistema.</a:t>
             </a:r>
           </a:p>
           <a:p>
@@ -8074,7 +8074,7 @@
                 </a:solidFill>
                 <a:latin typeface="Calibri"/>
               </a:rPr>
-              <a:t>LabEx Docker Playground · alterna si no carga: Killercoda</a:t>
+              <a:t>Killercoda · alterna si no carga: LabEx Docker Playground</a:t>
             </a:r>
           </a:p>
           <a:p>
@@ -8630,7 +8630,25 @@
                 </a:solidFill>
                 <a:latin typeface="Calibri"/>
               </a:rPr>
-              <a:t>–   Abrir LabEx Docker Playground (labex.io, inicie sesión con su cuenta de Google o Microsoft).</a:t>
+              <a:t>–   Abrir </a:t>
+            </a:r>
+            <a:r>
+              <a:rPr sz="1600" b="1" i="0">
+                <a:solidFill>
+                  <a:srgbClr val="333333"/>
+                </a:solidFill>
+                <a:latin typeface="Calibri"/>
+              </a:rPr>
+              <a:t>Killercoda</a:t>
+            </a:r>
+            <a:r>
+              <a:rPr sz="1600" b="0" i="0">
+                <a:solidFill>
+                  <a:srgbClr val="333333"/>
+                </a:solidFill>
+                <a:latin typeface="Calibri"/>
+              </a:rPr>
+              <a:t> (killercoda.com, escenario Ubuntu) con cuenta gratuita.</a:t>
             </a:r>
           </a:p>
           <a:p>
@@ -8680,7 +8698,7 @@
                 </a:solidFill>
                 <a:latin typeface="Calibri"/>
               </a:rPr>
-              <a:t>–   Home del lab · `docker ps`.</a:t>
+              <a:t>–   `docker ps` con el contenedor arriba.</a:t>
             </a:r>
           </a:p>
           <a:p>
@@ -8696,7 +8714,95 @@
                 </a:solidFill>
                 <a:latin typeface="Calibri"/>
               </a:rPr>
-              <a:t>–   La sesión de LabEx es temporal: guardar Dockerfile + capturas con timestamp antes de cerrarla. Si LabEx está caído: Killercoda (ubuntu/docker) como alterna.</a:t>
+              <a:t>–   </a:t>
+            </a:r>
+            <a:r>
+              <a:rPr sz="1600" b="1" i="0">
+                <a:solidFill>
+                  <a:srgbClr val="333333"/>
+                </a:solidFill>
+                <a:latin typeface="Calibri"/>
+              </a:rPr>
+              <a:t>La sesión caduca a 1 h:</a:t>
+            </a:r>
+            <a:r>
+              <a:rPr sz="1600" b="0" i="0">
+                <a:solidFill>
+                  <a:srgbClr val="333333"/>
+                </a:solidFill>
+                <a:latin typeface="Calibri"/>
+              </a:rPr>
+              <a:t> el Dockerfile se escribe en </a:t>
+            </a:r>
+            <a:r>
+              <a:rPr sz="1600" b="1" i="0">
+                <a:solidFill>
+                  <a:srgbClr val="333333"/>
+                </a:solidFill>
+                <a:latin typeface="Calibri"/>
+              </a:rPr>
+              <a:t>tu</a:t>
+            </a:r>
+            <a:r>
+              <a:rPr sz="1600" b="0" i="0">
+                <a:solidFill>
+                  <a:srgbClr val="333333"/>
+                </a:solidFill>
+                <a:latin typeface="Calibri"/>
+              </a:rPr>
+              <a:t> carpeta del PI y se pega en el lab, nunca al contrario. Guarda capturas antes de cerrar.</a:t>
+            </a:r>
+          </a:p>
+          <a:p>
+            <a:pPr>
+              <a:spcAft>
+                <a:spcPts val="800"/>
+              </a:spcAft>
+            </a:pPr>
+            <a:r>
+              <a:rPr sz="1600" b="0" i="0">
+                <a:solidFill>
+                  <a:srgbClr val="333333"/>
+                </a:solidFill>
+                <a:latin typeface="Calibri"/>
+              </a:rPr>
+              <a:t>–   Si Killercoda no carga: </a:t>
+            </a:r>
+            <a:r>
+              <a:rPr sz="1600" b="1" i="0">
+                <a:solidFill>
+                  <a:srgbClr val="333333"/>
+                </a:solidFill>
+                <a:latin typeface="Calibri"/>
+              </a:rPr>
+              <a:t>LabEx Docker Playground</a:t>
+            </a:r>
+            <a:r>
+              <a:rPr sz="1600" b="0" i="0">
+                <a:solidFill>
+                  <a:srgbClr val="333333"/>
+                </a:solidFill>
+                <a:latin typeface="Calibri"/>
+              </a:rPr>
+              <a:t> como alterna (misma hora de sesión, pero solo </a:t>
+            </a:r>
+            <a:r>
+              <a:rPr sz="1600" b="1" i="0">
+                <a:solidFill>
+                  <a:srgbClr val="333333"/>
+                </a:solidFill>
+                <a:latin typeface="Calibri"/>
+              </a:rPr>
+              <a:t>3 al día</a:t>
+            </a:r>
+            <a:r>
+              <a:rPr sz="1600" b="0" i="0">
+                <a:solidFill>
+                  <a:srgbClr val="333333"/>
+                </a:solidFill>
+                <a:latin typeface="Calibri"/>
+              </a:rPr>
+              <a:t> en el plan gratuito).</a:t>
             </a:r>
           </a:p>
         </p:txBody>

--- a/Arquitectura de Sistemas Computacionales/Clases/Clase 3 - Virtualizacion y contenedores/Presentacion.pptx
+++ b/Arquitectura de Sistemas Computacionales/Clases/Clase 3 - Virtualizacion y contenedores/Presentacion.pptx
@@ -19,7 +19,6 @@
     <p:sldId id="267" r:id="rId18"/>
     <p:sldId id="268" r:id="rId19"/>
     <p:sldId id="269" r:id="rId20"/>
-    <p:sldId id="270" r:id="rId21"/>
   </p:sldIdLst>
   <p:sldSz cx="12191695" cy="6858000" type="screen4x3"/>
   <p:notesSz cx="6858000" cy="9144000"/>
@@ -4708,7 +4707,7 @@
         </p:nvSpPr>
         <p:spPr>
           <a:xfrm>
-            <a:off x="2370277" y="4055364"/>
+            <a:off x="4283354" y="4055364"/>
             <a:ext cx="3624986" cy="2299716"/>
           </a:xfrm>
           <a:prstGeom prst="roundRect">
@@ -4753,7 +4752,7 @@
         </p:nvSpPr>
         <p:spPr>
           <a:xfrm>
-            <a:off x="2370277" y="4055364"/>
+            <a:off x="4283354" y="4055364"/>
             <a:ext cx="3624986" cy="64008"/>
           </a:xfrm>
           <a:prstGeom prst="rect">
@@ -4796,7 +4795,7 @@
         </p:nvSpPr>
         <p:spPr>
           <a:xfrm>
-            <a:off x="2370277" y="4119372"/>
+            <a:off x="4283354" y="4119372"/>
             <a:ext cx="3624986" cy="27432"/>
           </a:xfrm>
           <a:prstGeom prst="rect">
@@ -4833,7 +4832,7 @@
       </p:sp>
       <p:pic>
         <p:nvPicPr>
-          <p:cNvPr id="24" name="Picture 23" descr="mermaid.png"/>
+          <p:cNvPr id="24" name="Picture 23" descr="examlab.png"/>
           <p:cNvPicPr>
             <a:picLocks noChangeAspect="1"/>
           </p:cNvPicPr>
@@ -4847,7 +4846,7 @@
         </p:blipFill>
         <p:spPr>
           <a:xfrm>
-            <a:off x="3572408" y="4311396"/>
+            <a:off x="5485485" y="4311396"/>
             <a:ext cx="1220724" cy="1220724"/>
           </a:xfrm>
           <a:prstGeom prst="rect">
@@ -4863,7 +4862,7 @@
         </p:nvSpPr>
         <p:spPr>
           <a:xfrm>
-            <a:off x="2443429" y="5623560"/>
+            <a:off x="4356506" y="5623560"/>
             <a:ext cx="3478682" cy="621792"/>
           </a:xfrm>
           <a:prstGeom prst="rect">
@@ -4883,7 +4882,7 @@
                 </a:solidFill>
                 <a:latin typeface="Calibri"/>
               </a:rPr>
-              <a:t>Mermaid</a:t>
+              <a:t>ExamLab</a:t>
             </a:r>
           </a:p>
           <a:p>
@@ -4899,210 +4898,6 @@
                 </a:solidFill>
                 <a:latin typeface="Calibri"/>
               </a:rPr>
-              <a:t>Codigo del diagrama</a:t>
-            </a:r>
-          </a:p>
-        </p:txBody>
-      </p:sp>
-      <p:sp>
-        <p:nvSpPr>
-          <p:cNvPr id="26" name="Rounded Rectangle 25"/>
-          <p:cNvSpPr/>
-          <p:nvPr/>
-        </p:nvSpPr>
-        <p:spPr>
-          <a:xfrm>
-            <a:off x="6196431" y="4055364"/>
-            <a:ext cx="3624986" cy="2299716"/>
-          </a:xfrm>
-          <a:prstGeom prst="roundRect">
-            <a:avLst>
-              <a:gd name="adj" fmla="val 12000"/>
-            </a:avLst>
-          </a:prstGeom>
-          <a:solidFill>
-            <a:srgbClr val="F2F2F2"/>
-          </a:solidFill>
-          <a:ln>
-            <a:noFill/>
-          </a:ln>
-        </p:spPr>
-        <p:style>
-          <a:lnRef idx="1">
-            <a:schemeClr val="accent1"/>
-          </a:lnRef>
-          <a:fillRef idx="3">
-            <a:schemeClr val="accent1"/>
-          </a:fillRef>
-          <a:effectRef idx="2">
-            <a:schemeClr val="accent1"/>
-          </a:effectRef>
-          <a:fontRef idx="minor">
-            <a:schemeClr val="lt1"/>
-          </a:fontRef>
-        </p:style>
-        <p:txBody>
-          <a:bodyPr rtlCol="0" anchor="ctr"/>
-          <a:lstStyle/>
-          <a:p>
-            <a:pPr algn="ctr"/>
-          </a:p>
-        </p:txBody>
-      </p:sp>
-      <p:sp>
-        <p:nvSpPr>
-          <p:cNvPr id="27" name="Rectangle 26"/>
-          <p:cNvSpPr/>
-          <p:nvPr/>
-        </p:nvSpPr>
-        <p:spPr>
-          <a:xfrm>
-            <a:off x="6196431" y="4055364"/>
-            <a:ext cx="3624986" cy="64008"/>
-          </a:xfrm>
-          <a:prstGeom prst="rect">
-            <a:avLst/>
-          </a:prstGeom>
-          <a:solidFill>
-            <a:srgbClr val="095292"/>
-          </a:solidFill>
-          <a:ln>
-            <a:noFill/>
-          </a:ln>
-        </p:spPr>
-        <p:style>
-          <a:lnRef idx="1">
-            <a:schemeClr val="accent1"/>
-          </a:lnRef>
-          <a:fillRef idx="3">
-            <a:schemeClr val="accent1"/>
-          </a:fillRef>
-          <a:effectRef idx="2">
-            <a:schemeClr val="accent1"/>
-          </a:effectRef>
-          <a:fontRef idx="minor">
-            <a:schemeClr val="lt1"/>
-          </a:fontRef>
-        </p:style>
-        <p:txBody>
-          <a:bodyPr rtlCol="0" anchor="ctr"/>
-          <a:lstStyle/>
-          <a:p>
-            <a:pPr algn="ctr"/>
-          </a:p>
-        </p:txBody>
-      </p:sp>
-      <p:sp>
-        <p:nvSpPr>
-          <p:cNvPr id="28" name="Rectangle 27"/>
-          <p:cNvSpPr/>
-          <p:nvPr/>
-        </p:nvSpPr>
-        <p:spPr>
-          <a:xfrm>
-            <a:off x="6196431" y="4119372"/>
-            <a:ext cx="3624986" cy="27432"/>
-          </a:xfrm>
-          <a:prstGeom prst="rect">
-            <a:avLst/>
-          </a:prstGeom>
-          <a:solidFill>
-            <a:srgbClr val="FFD000"/>
-          </a:solidFill>
-          <a:ln>
-            <a:noFill/>
-          </a:ln>
-        </p:spPr>
-        <p:style>
-          <a:lnRef idx="1">
-            <a:schemeClr val="accent1"/>
-          </a:lnRef>
-          <a:fillRef idx="3">
-            <a:schemeClr val="accent1"/>
-          </a:fillRef>
-          <a:effectRef idx="2">
-            <a:schemeClr val="accent1"/>
-          </a:effectRef>
-          <a:fontRef idx="minor">
-            <a:schemeClr val="lt1"/>
-          </a:fontRef>
-        </p:style>
-        <p:txBody>
-          <a:bodyPr rtlCol="0" anchor="ctr"/>
-          <a:lstStyle/>
-          <a:p>
-            <a:pPr algn="ctr"/>
-          </a:p>
-        </p:txBody>
-      </p:sp>
-      <p:pic>
-        <p:nvPicPr>
-          <p:cNvPr id="29" name="Picture 28" descr="examlab.png"/>
-          <p:cNvPicPr>
-            <a:picLocks noChangeAspect="1"/>
-          </p:cNvPicPr>
-          <p:nvPr/>
-        </p:nvPicPr>
-        <p:blipFill>
-          <a:blip r:embed="rId6"/>
-          <a:stretch>
-            <a:fillRect/>
-          </a:stretch>
-        </p:blipFill>
-        <p:spPr>
-          <a:xfrm>
-            <a:off x="7398562" y="4311396"/>
-            <a:ext cx="1220724" cy="1220724"/>
-          </a:xfrm>
-          <a:prstGeom prst="rect">
-            <a:avLst/>
-          </a:prstGeom>
-        </p:spPr>
-      </p:pic>
-      <p:sp>
-        <p:nvSpPr>
-          <p:cNvPr id="30" name="TextBox 29"/>
-          <p:cNvSpPr txBox="1"/>
-          <p:nvPr/>
-        </p:nvSpPr>
-        <p:spPr>
-          <a:xfrm>
-            <a:off x="6269583" y="5623560"/>
-            <a:ext cx="3478682" cy="621792"/>
-          </a:xfrm>
-          <a:prstGeom prst="rect">
-            <a:avLst/>
-          </a:prstGeom>
-          <a:noFill/>
-        </p:spPr>
-        <p:txBody>
-          <a:bodyPr wrap="square" anchor="t"/>
-          <a:lstStyle/>
-          <a:p>
-            <a:pPr algn="ctr"/>
-            <a:r>
-              <a:rPr sz="1300" b="1" i="0">
-                <a:solidFill>
-                  <a:srgbClr val="095292"/>
-                </a:solidFill>
-                <a:latin typeface="Calibri"/>
-              </a:rPr>
-              <a:t>ExamLab</a:t>
-            </a:r>
-          </a:p>
-          <a:p>
-            <a:pPr algn="ctr">
-              <a:spcBef>
-                <a:spcPts val="200"/>
-              </a:spcBef>
-            </a:pPr>
-            <a:r>
-              <a:rPr sz="1000" b="0" i="0">
-                <a:solidFill>
-                  <a:srgbClr val="666666"/>
-                </a:solidFill>
-                <a:latin typeface="Calibri"/>
-              </a:rPr>
               <a:t>Donde se entrega</a:t>
             </a:r>
           </a:p>
@@ -5110,7 +4905,7 @@
       </p:sp>
       <p:sp>
         <p:nvSpPr>
-          <p:cNvPr id="31" name="TextBox 30"/>
+          <p:cNvPr id="26" name="TextBox 25"/>
           <p:cNvSpPr txBox="1"/>
           <p:nvPr/>
         </p:nvSpPr>
@@ -5178,7 +4973,7 @@
         <p:spPr>
           <a:xfrm>
             <a:off x="0" y="0"/>
-            <a:ext cx="12191695" cy="1170432"/>
+            <a:ext cx="12191695" cy="960120"/>
           </a:xfrm>
           <a:prstGeom prst="rect">
             <a:avLst/>
@@ -5220,7 +5015,7 @@
         </p:nvSpPr>
         <p:spPr>
           <a:xfrm>
-            <a:off x="0" y="1170432"/>
+            <a:off x="0" y="960120"/>
             <a:ext cx="12191695" cy="41148"/>
           </a:xfrm>
           <a:prstGeom prst="rect">
@@ -5264,7 +5059,7 @@
         <p:spPr>
           <a:xfrm>
             <a:off x="457200" y="164592"/>
-            <a:ext cx="11277295" cy="384048"/>
+            <a:ext cx="11277295" cy="502920"/>
           </a:xfrm>
           <a:prstGeom prst="rect">
             <a:avLst/>
@@ -5284,7 +5079,7 @@
                 </a:solidFill>
                 <a:latin typeface="Calibri"/>
               </a:rPr>
-              <a:t>Del boceto a ExamLab (diagrama)</a:t>
+              <a:t>Taller PI (paso a paso)</a:t>
             </a:r>
           </a:p>
         </p:txBody>
@@ -5297,8 +5092,8 @@
         </p:nvSpPr>
         <p:spPr>
           <a:xfrm>
-            <a:off x="457200" y="566928"/>
-            <a:ext cx="11277295" cy="411480"/>
+            <a:off x="457200" y="1170432"/>
+            <a:ext cx="11277295" cy="5230368"/>
           </a:xfrm>
           <a:prstGeom prst="rect">
             <a:avLst/>
@@ -5311,705 +5106,137 @@
           </a:bodyPr>
           <a:lstStyle/>
           <a:p>
-            <a:r>
-              <a:rPr sz="1400" b="0" i="0">
-                <a:solidFill>
-                  <a:srgbClr val="B8D8EE"/>
-                </a:solidFill>
-                <a:latin typeface="Calibri"/>
-              </a:rPr>
-              <a:t>El diagrama se entrega como código Mermaid dentro de ExamLab, no como imagen</a:t>
-            </a:r>
-          </a:p>
-        </p:txBody>
-      </p:sp>
-      <p:sp>
-        <p:nvSpPr>
-          <p:cNvPr id="6" name="Rounded Rectangle 5"/>
-          <p:cNvSpPr/>
-          <p:nvPr/>
-        </p:nvSpPr>
-        <p:spPr>
-          <a:xfrm>
-            <a:off x="457200" y="1659636"/>
-            <a:ext cx="11277295" cy="1051560"/>
-          </a:xfrm>
-          <a:prstGeom prst="roundRect">
-            <a:avLst>
-              <a:gd name="adj" fmla="val 12000"/>
-            </a:avLst>
-          </a:prstGeom>
-          <a:solidFill>
-            <a:srgbClr val="F2F2F2"/>
-          </a:solidFill>
-          <a:ln>
-            <a:noFill/>
-          </a:ln>
-        </p:spPr>
-        <p:style>
-          <a:lnRef idx="1">
-            <a:schemeClr val="accent1"/>
-          </a:lnRef>
-          <a:fillRef idx="3">
-            <a:schemeClr val="accent1"/>
-          </a:fillRef>
-          <a:effectRef idx="2">
-            <a:schemeClr val="accent1"/>
-          </a:effectRef>
-          <a:fontRef idx="minor">
-            <a:schemeClr val="lt1"/>
-          </a:fontRef>
-        </p:style>
-        <p:txBody>
-          <a:bodyPr rtlCol="0" anchor="ctr"/>
-          <a:lstStyle/>
-          <a:p>
-            <a:pPr algn="ctr"/>
-          </a:p>
-        </p:txBody>
-      </p:sp>
-      <p:sp>
-        <p:nvSpPr>
-          <p:cNvPr id="7" name="Rounded Rectangle 6"/>
-          <p:cNvSpPr/>
-          <p:nvPr/>
-        </p:nvSpPr>
-        <p:spPr>
-          <a:xfrm>
-            <a:off x="594360" y="1965960"/>
-            <a:ext cx="438912" cy="438912"/>
-          </a:xfrm>
-          <a:prstGeom prst="roundRect">
-            <a:avLst>
-              <a:gd name="adj" fmla="val 12000"/>
-            </a:avLst>
-          </a:prstGeom>
-          <a:solidFill>
-            <a:srgbClr val="095292"/>
-          </a:solidFill>
-          <a:ln>
-            <a:noFill/>
-          </a:ln>
-        </p:spPr>
-        <p:style>
-          <a:lnRef idx="1">
-            <a:schemeClr val="accent1"/>
-          </a:lnRef>
-          <a:fillRef idx="3">
-            <a:schemeClr val="accent1"/>
-          </a:fillRef>
-          <a:effectRef idx="2">
-            <a:schemeClr val="accent1"/>
-          </a:effectRef>
-          <a:fontRef idx="minor">
-            <a:schemeClr val="lt1"/>
-          </a:fontRef>
-        </p:style>
-        <p:txBody>
-          <a:bodyPr rtlCol="0" anchor="ctr"/>
-          <a:lstStyle/>
-          <a:p>
-            <a:pPr algn="ctr"/>
-          </a:p>
-        </p:txBody>
-      </p:sp>
-      <p:sp>
-        <p:nvSpPr>
-          <p:cNvPr id="8" name="TextBox 7"/>
-          <p:cNvSpPr txBox="1"/>
-          <p:nvPr/>
-        </p:nvSpPr>
-        <p:spPr>
-          <a:xfrm>
-            <a:off x="594360" y="1965960"/>
-            <a:ext cx="438912" cy="438912"/>
-          </a:xfrm>
-          <a:prstGeom prst="rect">
-            <a:avLst/>
-          </a:prstGeom>
-          <a:noFill/>
-        </p:spPr>
-        <p:txBody>
-          <a:bodyPr wrap="square" anchor="ctr"/>
-          <a:lstStyle/>
-          <a:p>
-            <a:pPr algn="ctr"/>
+            <a:pPr>
+              <a:spcAft>
+                <a:spcPts val="800"/>
+              </a:spcAft>
+            </a:pPr>
             <a:r>
               <a:rPr sz="1600" b="1" i="0">
                 <a:solidFill>
-                  <a:srgbClr val="FFFFFF"/>
-                </a:solidFill>
-                <a:latin typeface="Calibri"/>
-              </a:rPr>
-              <a:t>1</a:t>
-            </a:r>
-          </a:p>
-        </p:txBody>
-      </p:sp>
-      <p:sp>
-        <p:nvSpPr>
-          <p:cNvPr id="9" name="TextBox 8"/>
-          <p:cNvSpPr txBox="1"/>
-          <p:nvPr/>
-        </p:nvSpPr>
-        <p:spPr>
-          <a:xfrm>
-            <a:off x="1188720" y="1751076"/>
-            <a:ext cx="10271455" cy="886968"/>
-          </a:xfrm>
-          <a:prstGeom prst="rect">
-            <a:avLst/>
-          </a:prstGeom>
-          <a:noFill/>
-        </p:spPr>
-        <p:txBody>
-          <a:bodyPr wrap="square" anchor="ctr"/>
-          <a:lstStyle/>
-          <a:p>
-            <a:r>
-              <a:rPr sz="1500" b="1" i="0">
-                <a:solidFill>
-                  <a:srgbClr val="095292"/>
-                </a:solidFill>
-                <a:latin typeface="Calibri"/>
-              </a:rPr>
-              <a:t>Disena visual</a:t>
+                  <a:srgbClr val="333333"/>
+                </a:solidFill>
+                <a:latin typeface="Calibri"/>
+              </a:rPr>
+              <a:t>1.</a:t>
+            </a:r>
+            <a:r>
+              <a:rPr sz="1600" b="0" i="0">
+                <a:solidFill>
+                  <a:srgbClr val="333333"/>
+                </a:solidFill>
+                <a:latin typeface="Calibri"/>
+              </a:rPr>
+              <a:t> Paso 1: elija en la pregunta 8 cual servicio de su C4 Context va a contenedorizar y justifiquelo en 2 o 3 frases; escriba a continuacion el Dockerfile completo con la imagen base ligera y con etiqueta fija, el COPY de dependencias antes del COPY del codigo, el EXPOSE y el CMD, verificando que no copie el .env ni ninguna clave.</a:t>
             </a:r>
           </a:p>
           <a:p>
             <a:pPr>
-              <a:spcBef>
-                <a:spcPts val="200"/>
-              </a:spcBef>
+              <a:spcAft>
+                <a:spcPts val="800"/>
+              </a:spcAft>
             </a:pPr>
             <a:r>
-              <a:rPr sz="1300" b="0" i="0">
+              <a:rPr sz="1600" b="0" i="0">
                 <a:solidFill>
                   <a:srgbClr val="333333"/>
                 </a:solidFill>
                 <a:latin typeface="Calibri"/>
               </a:rPr>
-              <a:t>Dibuja el diagrama como quieras en Excalidraw o draw.io: es mas rapido arrastrar cajas que escribir codigo, y ahi es donde piensas el modelo.</a:t>
-            </a:r>
-          </a:p>
-        </p:txBody>
-      </p:sp>
-      <p:sp>
-        <p:nvSpPr>
-          <p:cNvPr id="10" name="Rounded Rectangle 9"/>
-          <p:cNvSpPr/>
-          <p:nvPr/>
-        </p:nvSpPr>
-        <p:spPr>
-          <a:xfrm>
-            <a:off x="457200" y="2802636"/>
-            <a:ext cx="11277295" cy="1051560"/>
-          </a:xfrm>
-          <a:prstGeom prst="roundRect">
-            <a:avLst>
-              <a:gd name="adj" fmla="val 12000"/>
-            </a:avLst>
-          </a:prstGeom>
-          <a:solidFill>
-            <a:srgbClr val="E8F4FA"/>
-          </a:solidFill>
-          <a:ln>
-            <a:noFill/>
-          </a:ln>
-        </p:spPr>
-        <p:style>
-          <a:lnRef idx="1">
-            <a:schemeClr val="accent1"/>
-          </a:lnRef>
-          <a:fillRef idx="3">
-            <a:schemeClr val="accent1"/>
-          </a:fillRef>
-          <a:effectRef idx="2">
-            <a:schemeClr val="accent1"/>
-          </a:effectRef>
-          <a:fontRef idx="minor">
-            <a:schemeClr val="lt1"/>
-          </a:fontRef>
-        </p:style>
-        <p:txBody>
-          <a:bodyPr rtlCol="0" anchor="ctr"/>
-          <a:lstStyle/>
-          <a:p>
-            <a:pPr algn="ctr"/>
-          </a:p>
-        </p:txBody>
-      </p:sp>
-      <p:sp>
-        <p:nvSpPr>
-          <p:cNvPr id="11" name="Rounded Rectangle 10"/>
-          <p:cNvSpPr/>
-          <p:nvPr/>
-        </p:nvSpPr>
-        <p:spPr>
-          <a:xfrm>
-            <a:off x="594360" y="3108960"/>
-            <a:ext cx="438912" cy="438912"/>
-          </a:xfrm>
-          <a:prstGeom prst="roundRect">
-            <a:avLst>
-              <a:gd name="adj" fmla="val 12000"/>
-            </a:avLst>
-          </a:prstGeom>
-          <a:solidFill>
-            <a:srgbClr val="095292"/>
-          </a:solidFill>
-          <a:ln>
-            <a:noFill/>
-          </a:ln>
-        </p:spPr>
-        <p:style>
-          <a:lnRef idx="1">
-            <a:schemeClr val="accent1"/>
-          </a:lnRef>
-          <a:fillRef idx="3">
-            <a:schemeClr val="accent1"/>
-          </a:fillRef>
-          <a:effectRef idx="2">
-            <a:schemeClr val="accent1"/>
-          </a:effectRef>
-          <a:fontRef idx="minor">
-            <a:schemeClr val="lt1"/>
-          </a:fontRef>
-        </p:style>
-        <p:txBody>
-          <a:bodyPr rtlCol="0" anchor="ctr"/>
-          <a:lstStyle/>
-          <a:p>
-            <a:pPr algn="ctr"/>
-          </a:p>
-        </p:txBody>
-      </p:sp>
-      <p:sp>
-        <p:nvSpPr>
-          <p:cNvPr id="12" name="TextBox 11"/>
-          <p:cNvSpPr txBox="1"/>
-          <p:nvPr/>
-        </p:nvSpPr>
-        <p:spPr>
-          <a:xfrm>
-            <a:off x="594360" y="3108960"/>
-            <a:ext cx="438912" cy="438912"/>
-          </a:xfrm>
-          <a:prstGeom prst="rect">
-            <a:avLst/>
-          </a:prstGeom>
-          <a:noFill/>
-        </p:spPr>
-        <p:txBody>
-          <a:bodyPr wrap="square" anchor="ctr"/>
-          <a:lstStyle/>
-          <a:p>
-            <a:pPr algn="ctr"/>
+              <a:t>–   </a:t>
+            </a:r>
             <a:r>
               <a:rPr sz="1600" b="1" i="0">
                 <a:solidFill>
-                  <a:srgbClr val="FFFFFF"/>
-                </a:solidFill>
-                <a:latin typeface="Calibri"/>
-              </a:rPr>
-              <a:t>2</a:t>
-            </a:r>
-          </a:p>
-        </p:txBody>
-      </p:sp>
-      <p:sp>
-        <p:nvSpPr>
-          <p:cNvPr id="13" name="TextBox 12"/>
-          <p:cNvSpPr txBox="1"/>
-          <p:nvPr/>
-        </p:nvSpPr>
-        <p:spPr>
-          <a:xfrm>
-            <a:off x="1188720" y="2894076"/>
-            <a:ext cx="10271455" cy="886968"/>
-          </a:xfrm>
-          <a:prstGeom prst="rect">
-            <a:avLst/>
-          </a:prstGeom>
-          <a:noFill/>
-        </p:spPr>
-        <p:txBody>
-          <a:bodyPr wrap="square" anchor="ctr"/>
-          <a:lstStyle/>
-          <a:p>
-            <a:r>
-              <a:rPr sz="1500" b="1" i="0">
-                <a:solidFill>
-                  <a:srgbClr val="095292"/>
-                </a:solidFill>
-                <a:latin typeface="Calibri"/>
-              </a:rPr>
-              <a:t>Traduce con IA</a:t>
+                  <a:srgbClr val="333333"/>
+                </a:solidFill>
+                <a:latin typeface="Calibri"/>
+              </a:rPr>
+              <a:t>2.</a:t>
+            </a:r>
+            <a:r>
+              <a:rPr sz="1600" b="0" i="0">
+                <a:solidFill>
+                  <a:srgbClr val="333333"/>
+                </a:solidFill>
+                <a:latin typeface="Calibri"/>
+              </a:rPr>
+              <a:t> Paso 2: explique en la pregunta 9, sobre su propio Dockerfile, la diferencia entre imagen y contenedor, que instrucciones de SU archivo crean capa, por que el orden aprovecha el cache y en que se diferencia su contenedor de una maquina virtual; verifique que no escribio que un contenedor es una VM ligera.</a:t>
             </a:r>
           </a:p>
           <a:p>
             <a:pPr>
-              <a:spcBef>
-                <a:spcPts val="200"/>
-              </a:spcBef>
+              <a:spcAft>
+                <a:spcPts val="800"/>
+              </a:spcAft>
             </a:pPr>
             <a:r>
-              <a:rPr sz="1300" b="0" i="0">
+              <a:rPr sz="1600" b="0" i="0">
                 <a:solidFill>
                   <a:srgbClr val="333333"/>
                 </a:solidFill>
                 <a:latin typeface="Calibri"/>
               </a:rPr>
-              <a:t>Copia o describe tu boceto a una IA y pidele el codigo Mermaid: «convierte este diagrama a Mermaid usando flowchart». Revisa el resultado: la IA acierta la sintaxis, no tu modelo.</a:t>
-            </a:r>
-          </a:p>
-        </p:txBody>
-      </p:sp>
-      <p:sp>
-        <p:nvSpPr>
-          <p:cNvPr id="14" name="Rounded Rectangle 13"/>
-          <p:cNvSpPr/>
-          <p:nvPr/>
-        </p:nvSpPr>
-        <p:spPr>
-          <a:xfrm>
-            <a:off x="457200" y="3945636"/>
-            <a:ext cx="11277295" cy="1051560"/>
-          </a:xfrm>
-          <a:prstGeom prst="roundRect">
-            <a:avLst>
-              <a:gd name="adj" fmla="val 12000"/>
-            </a:avLst>
-          </a:prstGeom>
-          <a:solidFill>
-            <a:srgbClr val="F2F2F2"/>
-          </a:solidFill>
-          <a:ln>
-            <a:noFill/>
-          </a:ln>
-        </p:spPr>
-        <p:style>
-          <a:lnRef idx="1">
-            <a:schemeClr val="accent1"/>
-          </a:lnRef>
-          <a:fillRef idx="3">
-            <a:schemeClr val="accent1"/>
-          </a:fillRef>
-          <a:effectRef idx="2">
-            <a:schemeClr val="accent1"/>
-          </a:effectRef>
-          <a:fontRef idx="minor">
-            <a:schemeClr val="lt1"/>
-          </a:fontRef>
-        </p:style>
-        <p:txBody>
-          <a:bodyPr rtlCol="0" anchor="ctr"/>
-          <a:lstStyle/>
-          <a:p>
-            <a:pPr algn="ctr"/>
-          </a:p>
-        </p:txBody>
-      </p:sp>
-      <p:sp>
-        <p:nvSpPr>
-          <p:cNvPr id="15" name="Rounded Rectangle 14"/>
-          <p:cNvSpPr/>
-          <p:nvPr/>
-        </p:nvSpPr>
-        <p:spPr>
-          <a:xfrm>
-            <a:off x="594360" y="4251960"/>
-            <a:ext cx="438912" cy="438912"/>
-          </a:xfrm>
-          <a:prstGeom prst="roundRect">
-            <a:avLst>
-              <a:gd name="adj" fmla="val 12000"/>
-            </a:avLst>
-          </a:prstGeom>
-          <a:solidFill>
-            <a:srgbClr val="095292"/>
-          </a:solidFill>
-          <a:ln>
-            <a:noFill/>
-          </a:ln>
-        </p:spPr>
-        <p:style>
-          <a:lnRef idx="1">
-            <a:schemeClr val="accent1"/>
-          </a:lnRef>
-          <a:fillRef idx="3">
-            <a:schemeClr val="accent1"/>
-          </a:fillRef>
-          <a:effectRef idx="2">
-            <a:schemeClr val="accent1"/>
-          </a:effectRef>
-          <a:fontRef idx="minor">
-            <a:schemeClr val="lt1"/>
-          </a:fontRef>
-        </p:style>
-        <p:txBody>
-          <a:bodyPr rtlCol="0" anchor="ctr"/>
-          <a:lstStyle/>
-          <a:p>
-            <a:pPr algn="ctr"/>
-          </a:p>
-        </p:txBody>
-      </p:sp>
-      <p:sp>
-        <p:nvSpPr>
-          <p:cNvPr id="16" name="TextBox 15"/>
-          <p:cNvSpPr txBox="1"/>
-          <p:nvPr/>
-        </p:nvSpPr>
-        <p:spPr>
-          <a:xfrm>
-            <a:off x="594360" y="4251960"/>
-            <a:ext cx="438912" cy="438912"/>
-          </a:xfrm>
-          <a:prstGeom prst="rect">
-            <a:avLst/>
-          </a:prstGeom>
-          <a:noFill/>
-        </p:spPr>
-        <p:txBody>
-          <a:bodyPr wrap="square" anchor="ctr"/>
-          <a:lstStyle/>
-          <a:p>
-            <a:pPr algn="ctr"/>
+              <a:t>–   </a:t>
+            </a:r>
             <a:r>
               <a:rPr sz="1600" b="1" i="0">
                 <a:solidFill>
-                  <a:srgbClr val="FFFFFF"/>
-                </a:solidFill>
-                <a:latin typeface="Calibri"/>
-              </a:rPr>
-              <a:t>3</a:t>
-            </a:r>
-          </a:p>
-        </p:txBody>
-      </p:sp>
-      <p:sp>
-        <p:nvSpPr>
-          <p:cNvPr id="17" name="TextBox 16"/>
-          <p:cNvSpPr txBox="1"/>
-          <p:nvPr/>
-        </p:nvSpPr>
-        <p:spPr>
-          <a:xfrm>
-            <a:off x="1188720" y="4037076"/>
-            <a:ext cx="10271455" cy="886968"/>
-          </a:xfrm>
-          <a:prstGeom prst="rect">
-            <a:avLst/>
-          </a:prstGeom>
-          <a:noFill/>
-        </p:spPr>
-        <p:txBody>
-          <a:bodyPr wrap="square" anchor="ctr"/>
-          <a:lstStyle/>
-          <a:p>
-            <a:r>
-              <a:rPr sz="1500" b="1" i="0">
-                <a:solidFill>
-                  <a:srgbClr val="095292"/>
-                </a:solidFill>
-                <a:latin typeface="Calibri"/>
-              </a:rPr>
-              <a:t>Pega y renderiza en ExamLab</a:t>
+                  <a:srgbClr val="333333"/>
+                </a:solidFill>
+                <a:latin typeface="Calibri"/>
+              </a:rPr>
+              <a:t>3.</a:t>
+            </a:r>
+            <a:r>
+              <a:rPr sz="1600" b="0" i="0">
+                <a:solidFill>
+                  <a:srgbClr val="333333"/>
+                </a:solidFill>
+                <a:latin typeface="Calibri"/>
+              </a:rPr>
+              <a:t> Paso 3: describa en la pregunta 10 el ciclo completo con los comandos exactos de build y de run, explicando que lado del mapeo de puertos es el anfitrion y que lado el contenedor, y cierre con el contrato del endpoint de salud (ruta, codigo de estado y cuerpo); verifique que el puerto sea el mismo que puso en el EXPOSE.</a:t>
             </a:r>
           </a:p>
           <a:p>
             <a:pPr>
-              <a:spcBef>
-                <a:spcPts val="200"/>
-              </a:spcBef>
+              <a:spcAft>
+                <a:spcPts val="800"/>
+              </a:spcAft>
             </a:pPr>
             <a:r>
-              <a:rPr sz="1300" b="0" i="0">
+              <a:rPr sz="1600" b="0" i="0">
                 <a:solidFill>
                   <a:srgbClr val="333333"/>
                 </a:solidFill>
                 <a:latin typeface="Calibri"/>
               </a:rPr>
-              <a:t>Pega ese codigo en la caja de texto de la pregunta y mira como lo dibuja la plataforma. Si no renderiza, corrige ahi mismo: lo que se califica es el diagrama renderizado dentro de ExamLab.</a:t>
-            </a:r>
-          </a:p>
-        </p:txBody>
-      </p:sp>
-      <p:sp>
-        <p:nvSpPr>
-          <p:cNvPr id="18" name="Rounded Rectangle 17"/>
-          <p:cNvSpPr/>
-          <p:nvPr/>
-        </p:nvSpPr>
-        <p:spPr>
-          <a:xfrm>
-            <a:off x="457200" y="5088636"/>
-            <a:ext cx="11277295" cy="1051560"/>
-          </a:xfrm>
-          <a:prstGeom prst="roundRect">
-            <a:avLst>
-              <a:gd name="adj" fmla="val 12000"/>
-            </a:avLst>
-          </a:prstGeom>
-          <a:solidFill>
-            <a:srgbClr val="E8F4FA"/>
-          </a:solidFill>
-          <a:ln>
-            <a:noFill/>
-          </a:ln>
-        </p:spPr>
-        <p:style>
-          <a:lnRef idx="1">
-            <a:schemeClr val="accent1"/>
-          </a:lnRef>
-          <a:fillRef idx="3">
-            <a:schemeClr val="accent1"/>
-          </a:fillRef>
-          <a:effectRef idx="2">
-            <a:schemeClr val="accent1"/>
-          </a:effectRef>
-          <a:fontRef idx="minor">
-            <a:schemeClr val="lt1"/>
-          </a:fontRef>
-        </p:style>
-        <p:txBody>
-          <a:bodyPr rtlCol="0" anchor="ctr"/>
-          <a:lstStyle/>
-          <a:p>
-            <a:pPr algn="ctr"/>
-          </a:p>
-        </p:txBody>
-      </p:sp>
-      <p:sp>
-        <p:nvSpPr>
-          <p:cNvPr id="19" name="Rounded Rectangle 18"/>
-          <p:cNvSpPr/>
-          <p:nvPr/>
-        </p:nvSpPr>
-        <p:spPr>
-          <a:xfrm>
-            <a:off x="594360" y="5394960"/>
-            <a:ext cx="438912" cy="438912"/>
-          </a:xfrm>
-          <a:prstGeom prst="roundRect">
-            <a:avLst>
-              <a:gd name="adj" fmla="val 12000"/>
-            </a:avLst>
-          </a:prstGeom>
-          <a:solidFill>
-            <a:srgbClr val="095292"/>
-          </a:solidFill>
-          <a:ln>
-            <a:noFill/>
-          </a:ln>
-        </p:spPr>
-        <p:style>
-          <a:lnRef idx="1">
-            <a:schemeClr val="accent1"/>
-          </a:lnRef>
-          <a:fillRef idx="3">
-            <a:schemeClr val="accent1"/>
-          </a:fillRef>
-          <a:effectRef idx="2">
-            <a:schemeClr val="accent1"/>
-          </a:effectRef>
-          <a:fontRef idx="minor">
-            <a:schemeClr val="lt1"/>
-          </a:fontRef>
-        </p:style>
-        <p:txBody>
-          <a:bodyPr rtlCol="0" anchor="ctr"/>
-          <a:lstStyle/>
-          <a:p>
-            <a:pPr algn="ctr"/>
-          </a:p>
-        </p:txBody>
-      </p:sp>
-      <p:sp>
-        <p:nvSpPr>
-          <p:cNvPr id="20" name="TextBox 19"/>
-          <p:cNvSpPr txBox="1"/>
-          <p:nvPr/>
-        </p:nvSpPr>
-        <p:spPr>
-          <a:xfrm>
-            <a:off x="594360" y="5394960"/>
-            <a:ext cx="438912" cy="438912"/>
-          </a:xfrm>
-          <a:prstGeom prst="rect">
-            <a:avLst/>
-          </a:prstGeom>
-          <a:noFill/>
-        </p:spPr>
-        <p:txBody>
-          <a:bodyPr wrap="square" anchor="ctr"/>
-          <a:lstStyle/>
-          <a:p>
-            <a:pPr algn="ctr"/>
+              <a:t>–   </a:t>
+            </a:r>
             <a:r>
               <a:rPr sz="1600" b="1" i="0">
                 <a:solidFill>
-                  <a:srgbClr val="FFFFFF"/>
-                </a:solidFill>
-                <a:latin typeface="Calibri"/>
-              </a:rPr>
-              <a:t>4</a:t>
-            </a:r>
-          </a:p>
-        </p:txBody>
-      </p:sp>
-      <p:sp>
-        <p:nvSpPr>
-          <p:cNvPr id="21" name="TextBox 20"/>
-          <p:cNvSpPr txBox="1"/>
-          <p:nvPr/>
-        </p:nvSpPr>
-        <p:spPr>
-          <a:xfrm>
-            <a:off x="1188720" y="5180076"/>
-            <a:ext cx="10271455" cy="886968"/>
-          </a:xfrm>
-          <a:prstGeom prst="rect">
-            <a:avLst/>
-          </a:prstGeom>
-          <a:noFill/>
-        </p:spPr>
-        <p:txBody>
-          <a:bodyPr wrap="square" anchor="ctr"/>
-          <a:lstStyle/>
-          <a:p>
-            <a:r>
-              <a:rPr sz="1500" b="1" i="0">
-                <a:solidFill>
-                  <a:srgbClr val="095292"/>
-                </a:solidFill>
-                <a:latin typeface="Calibri"/>
-              </a:rPr>
-              <a:t>Guarda el PNG para tu PI</a:t>
-            </a:r>
-          </a:p>
-          <a:p>
-            <a:pPr>
-              <a:spcBef>
-                <a:spcPts val="200"/>
-              </a:spcBef>
-            </a:pPr>
-            <a:r>
-              <a:rPr sz="1300" b="0" i="0">
-                <a:solidFill>
                   <a:srgbClr val="333333"/>
                 </a:solidFill>
                 <a:latin typeface="Calibri"/>
               </a:rPr>
-              <a:t>Exporta tambien la imagen a la carpeta de tu Proyecto Integrador. Esa copia es para tu informe; no reemplaza la respuesta en la plataforma.</a:t>
-            </a:r>
-          </a:p>
-        </p:txBody>
-      </p:sp>
-      <p:sp>
-        <p:nvSpPr>
-          <p:cNvPr id="22" name="TextBox 21"/>
+              <a:t>4.</a:t>
+            </a:r>
+            <a:r>
+              <a:rPr sz="1600" b="0" i="0">
+                <a:solidFill>
+                  <a:srgbClr val="333333"/>
+                </a:solidFill>
+                <a:latin typeface="Calibri"/>
+              </a:rPr>
+              <a:t> Paso 4: ejecute de verdad el ciclo en Killercoda y reporte en la pregunta 11 la tabla de 5 filas con la salida real pegada textualmente, la descripcion de la captura con prompt, docker ps y hora del sistema, y una fila de incidente; recuerde que la sesion caduca a 1 hora, asi que capture la evidencia ANTES de cerrarla.</a:t>
+            </a:r>
+          </a:p>
+        </p:txBody>
+      </p:sp>
+      <p:sp>
+        <p:nvSpPr>
+          <p:cNvPr id="6" name="TextBox 5"/>
           <p:cNvSpPr txBox="1"/>
           <p:nvPr/>
         </p:nvSpPr>
@@ -6183,21 +5410,109 @@
                 </a:solidFill>
                 <a:latin typeface="Calibri"/>
               </a:rPr>
-              <a:t>Taller PI (paso a paso)</a:t>
-            </a:r>
-          </a:p>
-        </p:txBody>
-      </p:sp>
-      <p:sp>
-        <p:nvSpPr>
-          <p:cNvPr id="5" name="TextBox 4"/>
+              <a:t>Para continuar (PI)</a:t>
+            </a:r>
+          </a:p>
+        </p:txBody>
+      </p:sp>
+      <p:sp>
+        <p:nvSpPr>
+          <p:cNvPr id="5" name="Rounded Rectangle 4"/>
+          <p:cNvSpPr/>
+          <p:nvPr/>
+        </p:nvSpPr>
+        <p:spPr>
+          <a:xfrm>
+            <a:off x="457200" y="1261872"/>
+            <a:ext cx="11277295" cy="1051560"/>
+          </a:xfrm>
+          <a:prstGeom prst="roundRect">
+            <a:avLst>
+              <a:gd name="adj" fmla="val 12000"/>
+            </a:avLst>
+          </a:prstGeom>
+          <a:solidFill>
+            <a:srgbClr val="E8F4FA"/>
+          </a:solidFill>
+          <a:ln>
+            <a:noFill/>
+          </a:ln>
+        </p:spPr>
+        <p:style>
+          <a:lnRef idx="1">
+            <a:schemeClr val="accent1"/>
+          </a:lnRef>
+          <a:fillRef idx="3">
+            <a:schemeClr val="accent1"/>
+          </a:fillRef>
+          <a:effectRef idx="2">
+            <a:schemeClr val="accent1"/>
+          </a:effectRef>
+          <a:fontRef idx="minor">
+            <a:schemeClr val="lt1"/>
+          </a:fontRef>
+        </p:style>
+        <p:txBody>
+          <a:bodyPr rtlCol="0" anchor="ctr"/>
+          <a:lstStyle/>
+          <a:p>
+            <a:pPr algn="ctr"/>
+          </a:p>
+        </p:txBody>
+      </p:sp>
+      <p:sp>
+        <p:nvSpPr>
+          <p:cNvPr id="6" name="Rectangle 5"/>
+          <p:cNvSpPr/>
+          <p:nvPr/>
+        </p:nvSpPr>
+        <p:spPr>
+          <a:xfrm>
+            <a:off x="457200" y="1261872"/>
+            <a:ext cx="128016" cy="1051560"/>
+          </a:xfrm>
+          <a:prstGeom prst="rect">
+            <a:avLst/>
+          </a:prstGeom>
+          <a:solidFill>
+            <a:srgbClr val="269CCB"/>
+          </a:solidFill>
+          <a:ln>
+            <a:noFill/>
+          </a:ln>
+        </p:spPr>
+        <p:style>
+          <a:lnRef idx="1">
+            <a:schemeClr val="accent1"/>
+          </a:lnRef>
+          <a:fillRef idx="3">
+            <a:schemeClr val="accent1"/>
+          </a:fillRef>
+          <a:effectRef idx="2">
+            <a:schemeClr val="accent1"/>
+          </a:effectRef>
+          <a:fontRef idx="minor">
+            <a:schemeClr val="lt1"/>
+          </a:fontRef>
+        </p:style>
+        <p:txBody>
+          <a:bodyPr rtlCol="0" anchor="ctr"/>
+          <a:lstStyle/>
+          <a:p>
+            <a:pPr algn="ctr"/>
+          </a:p>
+        </p:txBody>
+      </p:sp>
+      <p:sp>
+        <p:nvSpPr>
+          <p:cNvPr id="7" name="TextBox 6"/>
           <p:cNvSpPr txBox="1"/>
           <p:nvPr/>
         </p:nvSpPr>
         <p:spPr>
           <a:xfrm>
-            <a:off x="457200" y="1170432"/>
-            <a:ext cx="11277295" cy="5230368"/>
+            <a:off x="777240" y="1399031"/>
+            <a:ext cx="10774375" cy="822959"/>
           </a:xfrm>
           <a:prstGeom prst="rect">
             <a:avLst/>
@@ -6210,171 +5525,313 @@
           </a:bodyPr>
           <a:lstStyle/>
           <a:p>
+            <a:r>
+              <a:rPr sz="1200" b="1" i="0">
+                <a:solidFill>
+                  <a:srgbClr val="269CCB"/>
+                </a:solidFill>
+                <a:latin typeface="Calibri"/>
+              </a:rPr>
+              <a:t>Info</a:t>
+            </a:r>
+          </a:p>
+          <a:p>
             <a:pPr>
-              <a:spcAft>
-                <a:spcPts val="800"/>
-              </a:spcAft>
+              <a:spcBef>
+                <a:spcPts val="400"/>
+              </a:spcBef>
             </a:pPr>
             <a:r>
-              <a:rPr sz="1600" b="1" i="0">
+              <a:rPr sz="1400" b="0" i="0">
                 <a:solidFill>
                   <a:srgbClr val="333333"/>
                 </a:solidFill>
                 <a:latin typeface="Calibri"/>
               </a:rPr>
-              <a:t>1.</a:t>
-            </a:r>
-            <a:r>
-              <a:rPr sz="1600" b="0" i="0">
+              <a:t>Entregable: Dockerfile (+ compose opcional) + captura/enlace lab navegador</a:t>
+            </a:r>
+          </a:p>
+        </p:txBody>
+      </p:sp>
+      <p:sp>
+        <p:nvSpPr>
+          <p:cNvPr id="8" name="Rounded Rectangle 7"/>
+          <p:cNvSpPr/>
+          <p:nvPr/>
+        </p:nvSpPr>
+        <p:spPr>
+          <a:xfrm>
+            <a:off x="457200" y="2478024"/>
+            <a:ext cx="11277295" cy="1051560"/>
+          </a:xfrm>
+          <a:prstGeom prst="roundRect">
+            <a:avLst>
+              <a:gd name="adj" fmla="val 12000"/>
+            </a:avLst>
+          </a:prstGeom>
+          <a:solidFill>
+            <a:srgbClr val="FFF8E1"/>
+          </a:solidFill>
+          <a:ln>
+            <a:noFill/>
+          </a:ln>
+        </p:spPr>
+        <p:style>
+          <a:lnRef idx="1">
+            <a:schemeClr val="accent1"/>
+          </a:lnRef>
+          <a:fillRef idx="3">
+            <a:schemeClr val="accent1"/>
+          </a:fillRef>
+          <a:effectRef idx="2">
+            <a:schemeClr val="accent1"/>
+          </a:effectRef>
+          <a:fontRef idx="minor">
+            <a:schemeClr val="lt1"/>
+          </a:fontRef>
+        </p:style>
+        <p:txBody>
+          <a:bodyPr rtlCol="0" anchor="ctr"/>
+          <a:lstStyle/>
+          <a:p>
+            <a:pPr algn="ctr"/>
+          </a:p>
+        </p:txBody>
+      </p:sp>
+      <p:sp>
+        <p:nvSpPr>
+          <p:cNvPr id="9" name="Rectangle 8"/>
+          <p:cNvSpPr/>
+          <p:nvPr/>
+        </p:nvSpPr>
+        <p:spPr>
+          <a:xfrm>
+            <a:off x="457200" y="2478024"/>
+            <a:ext cx="128016" cy="1051560"/>
+          </a:xfrm>
+          <a:prstGeom prst="rect">
+            <a:avLst/>
+          </a:prstGeom>
+          <a:solidFill>
+            <a:srgbClr val="FFD000"/>
+          </a:solidFill>
+          <a:ln>
+            <a:noFill/>
+          </a:ln>
+        </p:spPr>
+        <p:style>
+          <a:lnRef idx="1">
+            <a:schemeClr val="accent1"/>
+          </a:lnRef>
+          <a:fillRef idx="3">
+            <a:schemeClr val="accent1"/>
+          </a:fillRef>
+          <a:effectRef idx="2">
+            <a:schemeClr val="accent1"/>
+          </a:effectRef>
+          <a:fontRef idx="minor">
+            <a:schemeClr val="lt1"/>
+          </a:fontRef>
+        </p:style>
+        <p:txBody>
+          <a:bodyPr rtlCol="0" anchor="ctr"/>
+          <a:lstStyle/>
+          <a:p>
+            <a:pPr algn="ctr"/>
+          </a:p>
+        </p:txBody>
+      </p:sp>
+      <p:sp>
+        <p:nvSpPr>
+          <p:cNvPr id="10" name="TextBox 9"/>
+          <p:cNvSpPr txBox="1"/>
+          <p:nvPr/>
+        </p:nvSpPr>
+        <p:spPr>
+          <a:xfrm>
+            <a:off x="777240" y="2615184"/>
+            <a:ext cx="10774375" cy="822959"/>
+          </a:xfrm>
+          <a:prstGeom prst="rect">
+            <a:avLst/>
+          </a:prstGeom>
+          <a:noFill/>
+        </p:spPr>
+        <p:txBody>
+          <a:bodyPr wrap="square">
+            <a:spAutoFit/>
+          </a:bodyPr>
+          <a:lstStyle/>
+          <a:p>
+            <a:r>
+              <a:rPr sz="1200" b="1" i="0">
+                <a:solidFill>
+                  <a:srgbClr val="FFD000"/>
+                </a:solidFill>
+                <a:latin typeface="Calibri"/>
+              </a:rPr>
+              <a:t>Aclaración</a:t>
+            </a:r>
+          </a:p>
+          <a:p>
+            <a:pPr>
+              <a:spcBef>
+                <a:spcPts val="400"/>
+              </a:spcBef>
+            </a:pPr>
+            <a:r>
+              <a:rPr sz="1400" b="0" i="0">
                 <a:solidFill>
                   <a:srgbClr val="333333"/>
                 </a:solidFill>
                 <a:latin typeface="Calibri"/>
               </a:rPr>
-              <a:t> Paso 1: decidan cual de los contenedores de CloudLite se contenerizara hoy (la API stub o el front estatico) y escriban en la seccion Contenedores del informe el nombre exacto del servicio, el puerto que expondra y la ruta de salud que responderan (por ejemplo api-citas, puerto 8080, ruta /health), verificando que ese nombre sea el mismo que usaran en el C4 de la Clase 4 y en el despliegue de la Clase 7.</a:t>
+              <a:t>Subir evidencias al paquete CloudLite (Drive/repo) y a ExamLab (https://uniaj.examlab.workers.dev/) domingo 23:59.</a:t>
+            </a:r>
+          </a:p>
+        </p:txBody>
+      </p:sp>
+      <p:sp>
+        <p:nvSpPr>
+          <p:cNvPr id="11" name="Rounded Rectangle 10"/>
+          <p:cNvSpPr/>
+          <p:nvPr/>
+        </p:nvSpPr>
+        <p:spPr>
+          <a:xfrm>
+            <a:off x="457200" y="3694176"/>
+            <a:ext cx="11277295" cy="1051560"/>
+          </a:xfrm>
+          <a:prstGeom prst="roundRect">
+            <a:avLst>
+              <a:gd name="adj" fmla="val 12000"/>
+            </a:avLst>
+          </a:prstGeom>
+          <a:solidFill>
+            <a:srgbClr val="FBE4E4"/>
+          </a:solidFill>
+          <a:ln>
+            <a:noFill/>
+          </a:ln>
+        </p:spPr>
+        <p:style>
+          <a:lnRef idx="1">
+            <a:schemeClr val="accent1"/>
+          </a:lnRef>
+          <a:fillRef idx="3">
+            <a:schemeClr val="accent1"/>
+          </a:fillRef>
+          <a:effectRef idx="2">
+            <a:schemeClr val="accent1"/>
+          </a:effectRef>
+          <a:fontRef idx="minor">
+            <a:schemeClr val="lt1"/>
+          </a:fontRef>
+        </p:style>
+        <p:txBody>
+          <a:bodyPr rtlCol="0" anchor="ctr"/>
+          <a:lstStyle/>
+          <a:p>
+            <a:pPr algn="ctr"/>
+          </a:p>
+        </p:txBody>
+      </p:sp>
+      <p:sp>
+        <p:nvSpPr>
+          <p:cNvPr id="12" name="Rectangle 11"/>
+          <p:cNvSpPr/>
+          <p:nvPr/>
+        </p:nvSpPr>
+        <p:spPr>
+          <a:xfrm>
+            <a:off x="457200" y="3694176"/>
+            <a:ext cx="128016" cy="1051560"/>
+          </a:xfrm>
+          <a:prstGeom prst="rect">
+            <a:avLst/>
+          </a:prstGeom>
+          <a:solidFill>
+            <a:srgbClr val="A02030"/>
+          </a:solidFill>
+          <a:ln>
+            <a:noFill/>
+          </a:ln>
+        </p:spPr>
+        <p:style>
+          <a:lnRef idx="1">
+            <a:schemeClr val="accent1"/>
+          </a:lnRef>
+          <a:fillRef idx="3">
+            <a:schemeClr val="accent1"/>
+          </a:fillRef>
+          <a:effectRef idx="2">
+            <a:schemeClr val="accent1"/>
+          </a:effectRef>
+          <a:fontRef idx="minor">
+            <a:schemeClr val="lt1"/>
+          </a:fontRef>
+        </p:style>
+        <p:txBody>
+          <a:bodyPr rtlCol="0" anchor="ctr"/>
+          <a:lstStyle/>
+          <a:p>
+            <a:pPr algn="ctr"/>
+          </a:p>
+        </p:txBody>
+      </p:sp>
+      <p:sp>
+        <p:nvSpPr>
+          <p:cNvPr id="13" name="TextBox 12"/>
+          <p:cNvSpPr txBox="1"/>
+          <p:nvPr/>
+        </p:nvSpPr>
+        <p:spPr>
+          <a:xfrm>
+            <a:off x="777240" y="3831336"/>
+            <a:ext cx="10774375" cy="822959"/>
+          </a:xfrm>
+          <a:prstGeom prst="rect">
+            <a:avLst/>
+          </a:prstGeom>
+          <a:noFill/>
+        </p:spPr>
+        <p:txBody>
+          <a:bodyPr wrap="square">
+            <a:spAutoFit/>
+          </a:bodyPr>
+          <a:lstStyle/>
+          <a:p>
+            <a:r>
+              <a:rPr sz="1200" b="1" i="0">
+                <a:solidFill>
+                  <a:srgbClr val="A02030"/>
+                </a:solidFill>
+                <a:latin typeface="Calibri"/>
+              </a:rPr>
+              <a:t>Atención</a:t>
             </a:r>
           </a:p>
           <a:p>
             <a:pPr>
-              <a:spcAft>
-                <a:spcPts val="800"/>
-              </a:spcAft>
+              <a:spcBef>
+                <a:spcPts val="400"/>
+              </a:spcBef>
             </a:pPr>
             <a:r>
-              <a:rPr sz="1600" b="0" i="0">
+              <a:rPr sz="1400" b="0" i="0">
                 <a:solidFill>
                   <a:srgbClr val="333333"/>
                 </a:solidFill>
                 <a:latin typeface="Calibri"/>
               </a:rPr>
-              <a:t>–   </a:t>
-            </a:r>
-            <a:r>
-              <a:rPr sz="1600" b="1" i="0">
-                <a:solidFill>
-                  <a:srgbClr val="333333"/>
-                </a:solidFill>
-                <a:latin typeface="Calibri"/>
-              </a:rPr>
-              <a:t>2.</a:t>
-            </a:r>
-            <a:r>
-              <a:rPr sz="1600" b="0" i="0">
-                <a:solidFill>
-                  <a:srgbClr val="333333"/>
-                </a:solidFill>
-                <a:latin typeface="Calibri"/>
-              </a:rPr>
-              <a:t> Paso 2: en la consola Linux de ExamLab arme el contexto de build con 5 archivos (app/main.py, requirements.txt con 2 dependencias fijadas por version, Dockerfile, .dockerignore con 4 entradas) y verifique con ls -la que los 5 existen y con un grep de PASSWORD, SECRET, TOKEN y api_key que la salida sea vacia, confirmando que no hay ningun secreto en el contexto.</a:t>
-            </a:r>
-          </a:p>
-          <a:p>
-            <a:pPr>
-              <a:spcAft>
-                <a:spcPts val="800"/>
-              </a:spcAft>
-            </a:pPr>
-            <a:r>
-              <a:rPr sz="1600" b="0" i="0">
-                <a:solidFill>
-                  <a:srgbClr val="333333"/>
-                </a:solidFill>
-                <a:latin typeface="Calibri"/>
-              </a:rPr>
-              <a:t>–   </a:t>
-            </a:r>
-            <a:r>
-              <a:rPr sz="1600" b="1" i="0">
-                <a:solidFill>
-                  <a:srgbClr val="333333"/>
-                </a:solidFill>
-                <a:latin typeface="Calibri"/>
-              </a:rPr>
-              <a:t>3.</a:t>
-            </a:r>
-            <a:r>
-              <a:rPr sz="1600" b="0" i="0">
-                <a:solidFill>
-                  <a:srgbClr val="333333"/>
-                </a:solidFill>
-                <a:latin typeface="Calibri"/>
-              </a:rPr>
-              <a:t> Paso 3: escriba el Dockerfile con exactamente 7 instrucciones (FROM con tag fijo y variante slim, WORKDIR, COPY de requirements, RUN pip install --no-cache-dir, COPY del codigo, EXPOSE del puerto declarado en el paso 1, CMD) y verifique que el puerto de EXPOSE, el del CMD y el documentado en el informe sean el mismo numero; el Dockerfile se pega completo en la pregunta 2 de ExamLab.</a:t>
-            </a:r>
-          </a:p>
-          <a:p>
-            <a:pPr>
-              <a:spcAft>
-                <a:spcPts val="800"/>
-              </a:spcAft>
-            </a:pPr>
-            <a:r>
-              <a:rPr sz="1600" b="0" i="0">
-                <a:solidFill>
-                  <a:srgbClr val="333333"/>
-                </a:solidFill>
-                <a:latin typeface="Calibri"/>
-              </a:rPr>
-              <a:t>–   </a:t>
-            </a:r>
-            <a:r>
-              <a:rPr sz="1600" b="1" i="0">
-                <a:solidFill>
-                  <a:srgbClr val="333333"/>
-                </a:solidFill>
-                <a:latin typeface="Calibri"/>
-              </a:rPr>
-              <a:t>4.</a:t>
-            </a:r>
-            <a:r>
-              <a:rPr sz="1600" b="0" i="0">
-                <a:solidFill>
-                  <a:srgbClr val="333333"/>
-                </a:solidFill>
-                <a:latin typeface="Calibri"/>
-              </a:rPr>
-              <a:t> Paso 4: abra Killercoda en killercoda.com con su cuenta gratuita y lance un escenario Ubuntu (si no carga, LabEx Docker Playground como alterna; ojo: LabEx solo da 3 sesiones al dia en el plan gratuito), ejecute docker build -t cloudlite-api:v1 . y docker run -d -p 8080:8080 cloudlite-api:v1, compruebe con curl que la ruta de salud devuelve 200 y llene la bitacora de 5 filas comando / que esperaba / que salio / evidencia, verificando que la captura muestre a la vez el prompt del lab, la salida del docker ps y la hora del sistema.</a:t>
-            </a:r>
-          </a:p>
-          <a:p>
-            <a:pPr>
-              <a:spcAft>
-                <a:spcPts val="800"/>
-              </a:spcAft>
-            </a:pPr>
-            <a:r>
-              <a:rPr sz="1600" b="0" i="0">
-                <a:solidFill>
-                  <a:srgbClr val="333333"/>
-                </a:solidFill>
-                <a:latin typeface="Calibri"/>
-              </a:rPr>
-              <a:t>–   </a:t>
-            </a:r>
-            <a:r>
-              <a:rPr sz="1600" b="1" i="0">
-                <a:solidFill>
-                  <a:srgbClr val="333333"/>
-                </a:solidFill>
-                <a:latin typeface="Calibri"/>
-              </a:rPr>
-              <a:t>5.</a:t>
-            </a:r>
-            <a:r>
-              <a:rPr sz="1600" b="0" i="0">
-                <a:solidFill>
-                  <a:srgbClr val="333333"/>
-                </a:solidFill>
-                <a:latin typeface="Calibri"/>
-              </a:rPr>
-              <a:t> Paso 5: complete el diagrama Mermaid del ciclo Dockerfile a contenedor, adjunte la captura del lab con su nota de caducidad y suba las 5 preguntas del taller a ExamLab (modulo Talleres) antes del domingo 23:59, verificando que la seccion Contenedores del informe cite el mismo tag de imagen cloudlite-api:v1 que aparece en la captura.</a:t>
-            </a:r>
-          </a:p>
-        </p:txBody>
-      </p:sp>
-      <p:sp>
-        <p:nvSpPr>
-          <p:cNvPr id="6" name="TextBox 5"/>
+              <a:t>Sin cloud de pago ni instalaciones obligatorias de hipervisores/Docker Desktop.</a:t>
+            </a:r>
+          </a:p>
+        </p:txBody>
+      </p:sp>
+      <p:sp>
+        <p:nvSpPr>
+          <p:cNvPr id="14" name="TextBox 13"/>
           <p:cNvSpPr txBox="1"/>
           <p:nvPr/>
         </p:nvSpPr>
@@ -6416,601 +5873,6 @@
 </file>
 
 <file path=ppt/slides/slide14.xml><?xml version="1.0" encoding="utf-8"?>
-<p:sld xmlns:a="http://schemas.openxmlformats.org/drawingml/2006/main" xmlns:p="http://schemas.openxmlformats.org/presentationml/2006/main" xmlns:r="http://schemas.openxmlformats.org/officeDocument/2006/relationships">
-  <p:cSld>
-    <p:bg>
-      <p:bgPr>
-        <a:solidFill>
-          <a:srgbClr val="FFFFFF"/>
-        </a:solidFill>
-        <a:effectLst/>
-      </p:bgPr>
-    </p:bg>
-    <p:spTree>
-      <p:nvGrpSpPr>
-        <p:cNvPr id="1" name=""/>
-        <p:cNvGrpSpPr/>
-        <p:nvPr/>
-      </p:nvGrpSpPr>
-      <p:grpSpPr/>
-      <p:sp>
-        <p:nvSpPr>
-          <p:cNvPr id="2" name="Rectangle 1"/>
-          <p:cNvSpPr/>
-          <p:nvPr/>
-        </p:nvSpPr>
-        <p:spPr>
-          <a:xfrm>
-            <a:off x="0" y="0"/>
-            <a:ext cx="12191695" cy="960120"/>
-          </a:xfrm>
-          <a:prstGeom prst="rect">
-            <a:avLst/>
-          </a:prstGeom>
-          <a:solidFill>
-            <a:srgbClr val="095292"/>
-          </a:solidFill>
-          <a:ln>
-            <a:noFill/>
-          </a:ln>
-        </p:spPr>
-        <p:style>
-          <a:lnRef idx="1">
-            <a:schemeClr val="accent1"/>
-          </a:lnRef>
-          <a:fillRef idx="3">
-            <a:schemeClr val="accent1"/>
-          </a:fillRef>
-          <a:effectRef idx="2">
-            <a:schemeClr val="accent1"/>
-          </a:effectRef>
-          <a:fontRef idx="minor">
-            <a:schemeClr val="lt1"/>
-          </a:fontRef>
-        </p:style>
-        <p:txBody>
-          <a:bodyPr rtlCol="0" anchor="ctr"/>
-          <a:lstStyle/>
-          <a:p>
-            <a:pPr algn="ctr"/>
-          </a:p>
-        </p:txBody>
-      </p:sp>
-      <p:sp>
-        <p:nvSpPr>
-          <p:cNvPr id="3" name="Rectangle 2"/>
-          <p:cNvSpPr/>
-          <p:nvPr/>
-        </p:nvSpPr>
-        <p:spPr>
-          <a:xfrm>
-            <a:off x="0" y="960120"/>
-            <a:ext cx="12191695" cy="41148"/>
-          </a:xfrm>
-          <a:prstGeom prst="rect">
-            <a:avLst/>
-          </a:prstGeom>
-          <a:solidFill>
-            <a:srgbClr val="FFD000"/>
-          </a:solidFill>
-          <a:ln>
-            <a:noFill/>
-          </a:ln>
-        </p:spPr>
-        <p:style>
-          <a:lnRef idx="1">
-            <a:schemeClr val="accent1"/>
-          </a:lnRef>
-          <a:fillRef idx="3">
-            <a:schemeClr val="accent1"/>
-          </a:fillRef>
-          <a:effectRef idx="2">
-            <a:schemeClr val="accent1"/>
-          </a:effectRef>
-          <a:fontRef idx="minor">
-            <a:schemeClr val="lt1"/>
-          </a:fontRef>
-        </p:style>
-        <p:txBody>
-          <a:bodyPr rtlCol="0" anchor="ctr"/>
-          <a:lstStyle/>
-          <a:p>
-            <a:pPr algn="ctr"/>
-          </a:p>
-        </p:txBody>
-      </p:sp>
-      <p:sp>
-        <p:nvSpPr>
-          <p:cNvPr id="4" name="TextBox 3"/>
-          <p:cNvSpPr txBox="1"/>
-          <p:nvPr/>
-        </p:nvSpPr>
-        <p:spPr>
-          <a:xfrm>
-            <a:off x="457200" y="164592"/>
-            <a:ext cx="11277295" cy="502920"/>
-          </a:xfrm>
-          <a:prstGeom prst="rect">
-            <a:avLst/>
-          </a:prstGeom>
-          <a:noFill/>
-        </p:spPr>
-        <p:txBody>
-          <a:bodyPr wrap="square">
-            <a:spAutoFit/>
-          </a:bodyPr>
-          <a:lstStyle/>
-          <a:p>
-            <a:r>
-              <a:rPr sz="2600" b="1" i="0">
-                <a:solidFill>
-                  <a:srgbClr val="FFFFFF"/>
-                </a:solidFill>
-                <a:latin typeface="Calibri"/>
-              </a:rPr>
-              <a:t>Para continuar (PI)</a:t>
-            </a:r>
-          </a:p>
-        </p:txBody>
-      </p:sp>
-      <p:sp>
-        <p:nvSpPr>
-          <p:cNvPr id="5" name="Rounded Rectangle 4"/>
-          <p:cNvSpPr/>
-          <p:nvPr/>
-        </p:nvSpPr>
-        <p:spPr>
-          <a:xfrm>
-            <a:off x="457200" y="1261872"/>
-            <a:ext cx="11277295" cy="1051560"/>
-          </a:xfrm>
-          <a:prstGeom prst="roundRect">
-            <a:avLst>
-              <a:gd name="adj" fmla="val 12000"/>
-            </a:avLst>
-          </a:prstGeom>
-          <a:solidFill>
-            <a:srgbClr val="E8F4FA"/>
-          </a:solidFill>
-          <a:ln>
-            <a:noFill/>
-          </a:ln>
-        </p:spPr>
-        <p:style>
-          <a:lnRef idx="1">
-            <a:schemeClr val="accent1"/>
-          </a:lnRef>
-          <a:fillRef idx="3">
-            <a:schemeClr val="accent1"/>
-          </a:fillRef>
-          <a:effectRef idx="2">
-            <a:schemeClr val="accent1"/>
-          </a:effectRef>
-          <a:fontRef idx="minor">
-            <a:schemeClr val="lt1"/>
-          </a:fontRef>
-        </p:style>
-        <p:txBody>
-          <a:bodyPr rtlCol="0" anchor="ctr"/>
-          <a:lstStyle/>
-          <a:p>
-            <a:pPr algn="ctr"/>
-          </a:p>
-        </p:txBody>
-      </p:sp>
-      <p:sp>
-        <p:nvSpPr>
-          <p:cNvPr id="6" name="Rectangle 5"/>
-          <p:cNvSpPr/>
-          <p:nvPr/>
-        </p:nvSpPr>
-        <p:spPr>
-          <a:xfrm>
-            <a:off x="457200" y="1261872"/>
-            <a:ext cx="128016" cy="1051560"/>
-          </a:xfrm>
-          <a:prstGeom prst="rect">
-            <a:avLst/>
-          </a:prstGeom>
-          <a:solidFill>
-            <a:srgbClr val="269CCB"/>
-          </a:solidFill>
-          <a:ln>
-            <a:noFill/>
-          </a:ln>
-        </p:spPr>
-        <p:style>
-          <a:lnRef idx="1">
-            <a:schemeClr val="accent1"/>
-          </a:lnRef>
-          <a:fillRef idx="3">
-            <a:schemeClr val="accent1"/>
-          </a:fillRef>
-          <a:effectRef idx="2">
-            <a:schemeClr val="accent1"/>
-          </a:effectRef>
-          <a:fontRef idx="minor">
-            <a:schemeClr val="lt1"/>
-          </a:fontRef>
-        </p:style>
-        <p:txBody>
-          <a:bodyPr rtlCol="0" anchor="ctr"/>
-          <a:lstStyle/>
-          <a:p>
-            <a:pPr algn="ctr"/>
-          </a:p>
-        </p:txBody>
-      </p:sp>
-      <p:sp>
-        <p:nvSpPr>
-          <p:cNvPr id="7" name="TextBox 6"/>
-          <p:cNvSpPr txBox="1"/>
-          <p:nvPr/>
-        </p:nvSpPr>
-        <p:spPr>
-          <a:xfrm>
-            <a:off x="777240" y="1399031"/>
-            <a:ext cx="10774375" cy="822959"/>
-          </a:xfrm>
-          <a:prstGeom prst="rect">
-            <a:avLst/>
-          </a:prstGeom>
-          <a:noFill/>
-        </p:spPr>
-        <p:txBody>
-          <a:bodyPr wrap="square">
-            <a:spAutoFit/>
-          </a:bodyPr>
-          <a:lstStyle/>
-          <a:p>
-            <a:r>
-              <a:rPr sz="1200" b="1" i="0">
-                <a:solidFill>
-                  <a:srgbClr val="269CCB"/>
-                </a:solidFill>
-                <a:latin typeface="Calibri"/>
-              </a:rPr>
-              <a:t>Info</a:t>
-            </a:r>
-          </a:p>
-          <a:p>
-            <a:pPr>
-              <a:spcBef>
-                <a:spcPts val="400"/>
-              </a:spcBef>
-            </a:pPr>
-            <a:r>
-              <a:rPr sz="1400" b="0" i="0">
-                <a:solidFill>
-                  <a:srgbClr val="333333"/>
-                </a:solidFill>
-                <a:latin typeface="Calibri"/>
-              </a:rPr>
-              <a:t>Entregable: Dockerfile (+ compose opcional) + captura/enlace lab navegador</a:t>
-            </a:r>
-          </a:p>
-        </p:txBody>
-      </p:sp>
-      <p:sp>
-        <p:nvSpPr>
-          <p:cNvPr id="8" name="Rounded Rectangle 7"/>
-          <p:cNvSpPr/>
-          <p:nvPr/>
-        </p:nvSpPr>
-        <p:spPr>
-          <a:xfrm>
-            <a:off x="457200" y="2478024"/>
-            <a:ext cx="11277295" cy="1051560"/>
-          </a:xfrm>
-          <a:prstGeom prst="roundRect">
-            <a:avLst>
-              <a:gd name="adj" fmla="val 12000"/>
-            </a:avLst>
-          </a:prstGeom>
-          <a:solidFill>
-            <a:srgbClr val="FFF8E1"/>
-          </a:solidFill>
-          <a:ln>
-            <a:noFill/>
-          </a:ln>
-        </p:spPr>
-        <p:style>
-          <a:lnRef idx="1">
-            <a:schemeClr val="accent1"/>
-          </a:lnRef>
-          <a:fillRef idx="3">
-            <a:schemeClr val="accent1"/>
-          </a:fillRef>
-          <a:effectRef idx="2">
-            <a:schemeClr val="accent1"/>
-          </a:effectRef>
-          <a:fontRef idx="minor">
-            <a:schemeClr val="lt1"/>
-          </a:fontRef>
-        </p:style>
-        <p:txBody>
-          <a:bodyPr rtlCol="0" anchor="ctr"/>
-          <a:lstStyle/>
-          <a:p>
-            <a:pPr algn="ctr"/>
-          </a:p>
-        </p:txBody>
-      </p:sp>
-      <p:sp>
-        <p:nvSpPr>
-          <p:cNvPr id="9" name="Rectangle 8"/>
-          <p:cNvSpPr/>
-          <p:nvPr/>
-        </p:nvSpPr>
-        <p:spPr>
-          <a:xfrm>
-            <a:off x="457200" y="2478024"/>
-            <a:ext cx="128016" cy="1051560"/>
-          </a:xfrm>
-          <a:prstGeom prst="rect">
-            <a:avLst/>
-          </a:prstGeom>
-          <a:solidFill>
-            <a:srgbClr val="FFD000"/>
-          </a:solidFill>
-          <a:ln>
-            <a:noFill/>
-          </a:ln>
-        </p:spPr>
-        <p:style>
-          <a:lnRef idx="1">
-            <a:schemeClr val="accent1"/>
-          </a:lnRef>
-          <a:fillRef idx="3">
-            <a:schemeClr val="accent1"/>
-          </a:fillRef>
-          <a:effectRef idx="2">
-            <a:schemeClr val="accent1"/>
-          </a:effectRef>
-          <a:fontRef idx="minor">
-            <a:schemeClr val="lt1"/>
-          </a:fontRef>
-        </p:style>
-        <p:txBody>
-          <a:bodyPr rtlCol="0" anchor="ctr"/>
-          <a:lstStyle/>
-          <a:p>
-            <a:pPr algn="ctr"/>
-          </a:p>
-        </p:txBody>
-      </p:sp>
-      <p:sp>
-        <p:nvSpPr>
-          <p:cNvPr id="10" name="TextBox 9"/>
-          <p:cNvSpPr txBox="1"/>
-          <p:nvPr/>
-        </p:nvSpPr>
-        <p:spPr>
-          <a:xfrm>
-            <a:off x="777240" y="2615184"/>
-            <a:ext cx="10774375" cy="822959"/>
-          </a:xfrm>
-          <a:prstGeom prst="rect">
-            <a:avLst/>
-          </a:prstGeom>
-          <a:noFill/>
-        </p:spPr>
-        <p:txBody>
-          <a:bodyPr wrap="square">
-            <a:spAutoFit/>
-          </a:bodyPr>
-          <a:lstStyle/>
-          <a:p>
-            <a:r>
-              <a:rPr sz="1200" b="1" i="0">
-                <a:solidFill>
-                  <a:srgbClr val="FFD000"/>
-                </a:solidFill>
-                <a:latin typeface="Calibri"/>
-              </a:rPr>
-              <a:t>Aclaración</a:t>
-            </a:r>
-          </a:p>
-          <a:p>
-            <a:pPr>
-              <a:spcBef>
-                <a:spcPts val="400"/>
-              </a:spcBef>
-            </a:pPr>
-            <a:r>
-              <a:rPr sz="1400" b="0" i="0">
-                <a:solidFill>
-                  <a:srgbClr val="333333"/>
-                </a:solidFill>
-                <a:latin typeface="Calibri"/>
-              </a:rPr>
-              <a:t>Subir evidencias al paquete CloudLite (Drive/repo) y a ExamLab (https://uniaj.examlab.workers.dev/) domingo 23:59.</a:t>
-            </a:r>
-          </a:p>
-        </p:txBody>
-      </p:sp>
-      <p:sp>
-        <p:nvSpPr>
-          <p:cNvPr id="11" name="Rounded Rectangle 10"/>
-          <p:cNvSpPr/>
-          <p:nvPr/>
-        </p:nvSpPr>
-        <p:spPr>
-          <a:xfrm>
-            <a:off x="457200" y="3694176"/>
-            <a:ext cx="11277295" cy="1051560"/>
-          </a:xfrm>
-          <a:prstGeom prst="roundRect">
-            <a:avLst>
-              <a:gd name="adj" fmla="val 12000"/>
-            </a:avLst>
-          </a:prstGeom>
-          <a:solidFill>
-            <a:srgbClr val="FBE4E4"/>
-          </a:solidFill>
-          <a:ln>
-            <a:noFill/>
-          </a:ln>
-        </p:spPr>
-        <p:style>
-          <a:lnRef idx="1">
-            <a:schemeClr val="accent1"/>
-          </a:lnRef>
-          <a:fillRef idx="3">
-            <a:schemeClr val="accent1"/>
-          </a:fillRef>
-          <a:effectRef idx="2">
-            <a:schemeClr val="accent1"/>
-          </a:effectRef>
-          <a:fontRef idx="minor">
-            <a:schemeClr val="lt1"/>
-          </a:fontRef>
-        </p:style>
-        <p:txBody>
-          <a:bodyPr rtlCol="0" anchor="ctr"/>
-          <a:lstStyle/>
-          <a:p>
-            <a:pPr algn="ctr"/>
-          </a:p>
-        </p:txBody>
-      </p:sp>
-      <p:sp>
-        <p:nvSpPr>
-          <p:cNvPr id="12" name="Rectangle 11"/>
-          <p:cNvSpPr/>
-          <p:nvPr/>
-        </p:nvSpPr>
-        <p:spPr>
-          <a:xfrm>
-            <a:off x="457200" y="3694176"/>
-            <a:ext cx="128016" cy="1051560"/>
-          </a:xfrm>
-          <a:prstGeom prst="rect">
-            <a:avLst/>
-          </a:prstGeom>
-          <a:solidFill>
-            <a:srgbClr val="A02030"/>
-          </a:solidFill>
-          <a:ln>
-            <a:noFill/>
-          </a:ln>
-        </p:spPr>
-        <p:style>
-          <a:lnRef idx="1">
-            <a:schemeClr val="accent1"/>
-          </a:lnRef>
-          <a:fillRef idx="3">
-            <a:schemeClr val="accent1"/>
-          </a:fillRef>
-          <a:effectRef idx="2">
-            <a:schemeClr val="accent1"/>
-          </a:effectRef>
-          <a:fontRef idx="minor">
-            <a:schemeClr val="lt1"/>
-          </a:fontRef>
-        </p:style>
-        <p:txBody>
-          <a:bodyPr rtlCol="0" anchor="ctr"/>
-          <a:lstStyle/>
-          <a:p>
-            <a:pPr algn="ctr"/>
-          </a:p>
-        </p:txBody>
-      </p:sp>
-      <p:sp>
-        <p:nvSpPr>
-          <p:cNvPr id="13" name="TextBox 12"/>
-          <p:cNvSpPr txBox="1"/>
-          <p:nvPr/>
-        </p:nvSpPr>
-        <p:spPr>
-          <a:xfrm>
-            <a:off x="777240" y="3831336"/>
-            <a:ext cx="10774375" cy="822959"/>
-          </a:xfrm>
-          <a:prstGeom prst="rect">
-            <a:avLst/>
-          </a:prstGeom>
-          <a:noFill/>
-        </p:spPr>
-        <p:txBody>
-          <a:bodyPr wrap="square">
-            <a:spAutoFit/>
-          </a:bodyPr>
-          <a:lstStyle/>
-          <a:p>
-            <a:r>
-              <a:rPr sz="1200" b="1" i="0">
-                <a:solidFill>
-                  <a:srgbClr val="A02030"/>
-                </a:solidFill>
-                <a:latin typeface="Calibri"/>
-              </a:rPr>
-              <a:t>Atención</a:t>
-            </a:r>
-          </a:p>
-          <a:p>
-            <a:pPr>
-              <a:spcBef>
-                <a:spcPts val="400"/>
-              </a:spcBef>
-            </a:pPr>
-            <a:r>
-              <a:rPr sz="1400" b="0" i="0">
-                <a:solidFill>
-                  <a:srgbClr val="333333"/>
-                </a:solidFill>
-                <a:latin typeface="Calibri"/>
-              </a:rPr>
-              <a:t>Sin cloud de pago ni instalaciones obligatorias de hipervisores/Docker Desktop.</a:t>
-            </a:r>
-          </a:p>
-        </p:txBody>
-      </p:sp>
-      <p:sp>
-        <p:nvSpPr>
-          <p:cNvPr id="14" name="TextBox 13"/>
-          <p:cNvSpPr txBox="1"/>
-          <p:nvPr/>
-        </p:nvSpPr>
-        <p:spPr>
-          <a:xfrm>
-            <a:off x="11185855" y="6473952"/>
-            <a:ext cx="640080" cy="274320"/>
-          </a:xfrm>
-          <a:prstGeom prst="rect">
-            <a:avLst/>
-          </a:prstGeom>
-          <a:noFill/>
-        </p:spPr>
-        <p:txBody>
-          <a:bodyPr wrap="square">
-            <a:spAutoFit/>
-          </a:bodyPr>
-          <a:lstStyle/>
-          <a:p>
-            <a:pPr algn="r"/>
-            <a:r>
-              <a:rPr sz="1100" b="0" i="0">
-                <a:solidFill>
-                  <a:srgbClr val="666666"/>
-                </a:solidFill>
-                <a:latin typeface="Calibri"/>
-              </a:rPr>
-              <a:t>14</a:t>
-            </a:r>
-          </a:p>
-        </p:txBody>
-      </p:sp>
-    </p:spTree>
-  </p:cSld>
-  <p:clrMapOvr>
-    <a:masterClrMapping/>
-  </p:clrMapOvr>
-</p:sld>
-</file>
-
-<file path=ppt/slides/slide15.xml><?xml version="1.0" encoding="utf-8"?>
 <p:sld xmlns:a="http://schemas.openxmlformats.org/drawingml/2006/main" xmlns:p="http://schemas.openxmlformats.org/presentationml/2006/main" xmlns:r="http://schemas.openxmlformats.org/officeDocument/2006/relationships">
   <p:cSld>
     <p:bg>

--- a/Arquitectura de Sistemas Computacionales/Clases/Clase 3 - Virtualizacion y contenedores/Presentacion.pptx
+++ b/Arquitectura de Sistemas Computacionales/Clases/Clase 3 - Virtualizacion y contenedores/Presentacion.pptx
@@ -7526,7 +7526,7 @@
                 </a:solidFill>
                 <a:latin typeface="Calibri"/>
               </a:rPr>
-              <a:t>–   `docker run` de un nginx/hello y luego </a:t>
+              <a:t>–   «docker run» de un nginx/hello y luego </a:t>
             </a:r>
             <a:r>
               <a:rPr sz="1600" b="1" i="0">
@@ -7560,7 +7560,7 @@
                 </a:solidFill>
                 <a:latin typeface="Calibri"/>
               </a:rPr>
-              <a:t>–   `docker ps` con el contenedor arriba.</a:t>
+              <a:t>–   «docker ps» con el contenedor arriba.</a:t>
             </a:r>
           </a:p>
           <a:p>

--- a/Arquitectura de Sistemas Computacionales/Clases/Clase 3 - Virtualizacion y contenedores/Presentacion.pptx
+++ b/Arquitectura de Sistemas Computacionales/Clases/Clase 3 - Virtualizacion y contenedores/Presentacion.pptx
@@ -19,6 +19,7 @@
     <p:sldId id="267" r:id="rId18"/>
     <p:sldId id="268" r:id="rId19"/>
     <p:sldId id="269" r:id="rId20"/>
+    <p:sldId id="270" r:id="rId21"/>
   </p:sldIdLst>
   <p:sldSz cx="12191695" cy="6858000" type="screen4x3"/>
   <p:notesSz cx="6858000" cy="9144000"/>
@@ -3577,7 +3578,7 @@
                 </a:solidFill>
                 <a:latin typeface="Calibri"/>
               </a:rPr>
-              <a:t>Dockerfile minimo del stub CloudLite</a:t>
+              <a:t>Maquina virtual vs contenedor — que cambia de verdad</a:t>
             </a:r>
           </a:p>
         </p:txBody>
@@ -3591,7 +3592,7 @@
         <p:spPr>
           <a:xfrm>
             <a:off x="457200" y="1261872"/>
-            <a:ext cx="11277295" cy="4773168"/>
+            <a:ext cx="5478627" cy="5093208"/>
           </a:xfrm>
           <a:prstGeom prst="roundRect">
             <a:avLst>
@@ -3599,7 +3600,7 @@
             </a:avLst>
           </a:prstGeom>
           <a:solidFill>
-            <a:srgbClr val="1E2A38"/>
+            <a:srgbClr val="FBE4E4"/>
           </a:solidFill>
           <a:ln>
             <a:noFill/>
@@ -3636,7 +3637,260 @@
         <p:spPr>
           <a:xfrm>
             <a:off x="457200" y="1261872"/>
-            <a:ext cx="11277295" cy="320040"/>
+            <a:ext cx="5478627" cy="502920"/>
+          </a:xfrm>
+          <a:prstGeom prst="rect">
+            <a:avLst/>
+          </a:prstGeom>
+          <a:solidFill>
+            <a:srgbClr val="A02030"/>
+          </a:solidFill>
+          <a:ln>
+            <a:noFill/>
+          </a:ln>
+        </p:spPr>
+        <p:style>
+          <a:lnRef idx="1">
+            <a:schemeClr val="accent1"/>
+          </a:lnRef>
+          <a:fillRef idx="3">
+            <a:schemeClr val="accent1"/>
+          </a:fillRef>
+          <a:effectRef idx="2">
+            <a:schemeClr val="accent1"/>
+          </a:effectRef>
+          <a:fontRef idx="minor">
+            <a:schemeClr val="lt1"/>
+          </a:fontRef>
+        </p:style>
+        <p:txBody>
+          <a:bodyPr rtlCol="0" anchor="ctr"/>
+          <a:lstStyle/>
+          <a:p>
+            <a:pPr algn="ctr"/>
+          </a:p>
+        </p:txBody>
+      </p:sp>
+      <p:sp>
+        <p:nvSpPr>
+          <p:cNvPr id="7" name="TextBox 6"/>
+          <p:cNvSpPr txBox="1"/>
+          <p:nvPr/>
+        </p:nvSpPr>
+        <p:spPr>
+          <a:xfrm>
+            <a:off x="594360" y="1353312"/>
+            <a:ext cx="5204307" cy="365760"/>
+          </a:xfrm>
+          <a:prstGeom prst="rect">
+            <a:avLst/>
+          </a:prstGeom>
+          <a:noFill/>
+        </p:spPr>
+        <p:txBody>
+          <a:bodyPr wrap="square" anchor="ctr"/>
+          <a:lstStyle/>
+          <a:p>
+            <a:pPr algn="ctr"/>
+            <a:r>
+              <a:rPr sz="1600" b="1" i="0">
+                <a:solidFill>
+                  <a:srgbClr val="FFFFFF"/>
+                </a:solidFill>
+                <a:latin typeface="Calibri"/>
+              </a:rPr>
+              <a:t>Maquina virtual</a:t>
+            </a:r>
+          </a:p>
+        </p:txBody>
+      </p:sp>
+      <p:sp>
+        <p:nvSpPr>
+          <p:cNvPr id="8" name="TextBox 7"/>
+          <p:cNvSpPr txBox="1"/>
+          <p:nvPr/>
+        </p:nvSpPr>
+        <p:spPr>
+          <a:xfrm>
+            <a:off x="621792" y="1901952"/>
+            <a:ext cx="5158587" cy="4498848"/>
+          </a:xfrm>
+          <a:prstGeom prst="rect">
+            <a:avLst/>
+          </a:prstGeom>
+          <a:noFill/>
+        </p:spPr>
+        <p:txBody>
+          <a:bodyPr wrap="square">
+            <a:spAutoFit/>
+          </a:bodyPr>
+          <a:lstStyle/>
+          <a:p>
+            <a:pPr>
+              <a:spcAft>
+                <a:spcPts val="800"/>
+              </a:spcAft>
+            </a:pPr>
+            <a:r>
+              <a:rPr sz="1500" b="0" i="0">
+                <a:solidFill>
+                  <a:srgbClr val="333333"/>
+                </a:solidFill>
+                <a:latin typeface="Calibri"/>
+              </a:rPr>
+              <a:t>–   Cada instancia trae un </a:t>
+            </a:r>
+            <a:r>
+              <a:rPr sz="1500" b="1" i="0">
+                <a:solidFill>
+                  <a:srgbClr val="333333"/>
+                </a:solidFill>
+                <a:latin typeface="Calibri"/>
+              </a:rPr>
+              <a:t>SO completo</a:t>
+            </a:r>
+            <a:r>
+              <a:rPr sz="1500" b="0" i="0">
+                <a:solidFill>
+                  <a:srgbClr val="333333"/>
+                </a:solidFill>
+                <a:latin typeface="Calibri"/>
+              </a:rPr>
+              <a:t> (kernel propio)</a:t>
+            </a:r>
+          </a:p>
+          <a:p>
+            <a:pPr>
+              <a:spcAft>
+                <a:spcPts val="800"/>
+              </a:spcAft>
+            </a:pPr>
+            <a:r>
+              <a:rPr sz="1500" b="0" i="0">
+                <a:solidFill>
+                  <a:srgbClr val="333333"/>
+                </a:solidFill>
+                <a:latin typeface="Calibri"/>
+              </a:rPr>
+              <a:t>–   Aislamiento fuerte a nivel de hardware virtual</a:t>
+            </a:r>
+          </a:p>
+          <a:p>
+            <a:pPr>
+              <a:spcAft>
+                <a:spcPts val="800"/>
+              </a:spcAft>
+            </a:pPr>
+            <a:r>
+              <a:rPr sz="1500" b="0" i="0">
+                <a:solidFill>
+                  <a:srgbClr val="333333"/>
+                </a:solidFill>
+                <a:latin typeface="Calibri"/>
+              </a:rPr>
+              <a:t>–   Arranque en </a:t>
+            </a:r>
+            <a:r>
+              <a:rPr sz="1500" b="1" i="0">
+                <a:solidFill>
+                  <a:srgbClr val="333333"/>
+                </a:solidFill>
+                <a:latin typeface="Calibri"/>
+              </a:rPr>
+              <a:t>minutos</a:t>
+            </a:r>
+            <a:r>
+              <a:rPr sz="1500" b="0" i="0">
+                <a:solidFill>
+                  <a:srgbClr val="333333"/>
+                </a:solidFill>
+                <a:latin typeface="Calibri"/>
+              </a:rPr>
+              <a:t>, tamaño en </a:t>
+            </a:r>
+            <a:r>
+              <a:rPr sz="1500" b="1" i="0">
+                <a:solidFill>
+                  <a:srgbClr val="333333"/>
+                </a:solidFill>
+                <a:latin typeface="Calibri"/>
+              </a:rPr>
+              <a:t>GB</a:t>
+            </a:r>
+          </a:p>
+          <a:p>
+            <a:pPr>
+              <a:spcAft>
+                <a:spcPts val="800"/>
+              </a:spcAft>
+            </a:pPr>
+            <a:r>
+              <a:rPr sz="1500" b="0" i="0">
+                <a:solidFill>
+                  <a:srgbClr val="333333"/>
+                </a:solidFill>
+                <a:latin typeface="Calibri"/>
+              </a:rPr>
+              <a:t>–   Util cuando se necesitan SO distintos</a:t>
+            </a:r>
+          </a:p>
+        </p:txBody>
+      </p:sp>
+      <p:sp>
+        <p:nvSpPr>
+          <p:cNvPr id="9" name="Rounded Rectangle 8"/>
+          <p:cNvSpPr/>
+          <p:nvPr/>
+        </p:nvSpPr>
+        <p:spPr>
+          <a:xfrm>
+            <a:off x="6255867" y="1261872"/>
+            <a:ext cx="5478627" cy="5093208"/>
+          </a:xfrm>
+          <a:prstGeom prst="roundRect">
+            <a:avLst>
+              <a:gd name="adj" fmla="val 12000"/>
+            </a:avLst>
+          </a:prstGeom>
+          <a:solidFill>
+            <a:srgbClr val="E8F4FA"/>
+          </a:solidFill>
+          <a:ln>
+            <a:noFill/>
+          </a:ln>
+        </p:spPr>
+        <p:style>
+          <a:lnRef idx="1">
+            <a:schemeClr val="accent1"/>
+          </a:lnRef>
+          <a:fillRef idx="3">
+            <a:schemeClr val="accent1"/>
+          </a:fillRef>
+          <a:effectRef idx="2">
+            <a:schemeClr val="accent1"/>
+          </a:effectRef>
+          <a:fontRef idx="minor">
+            <a:schemeClr val="lt1"/>
+          </a:fontRef>
+        </p:style>
+        <p:txBody>
+          <a:bodyPr rtlCol="0" anchor="ctr"/>
+          <a:lstStyle/>
+          <a:p>
+            <a:pPr algn="ctr"/>
+          </a:p>
+        </p:txBody>
+      </p:sp>
+      <p:sp>
+        <p:nvSpPr>
+          <p:cNvPr id="10" name="Rectangle 9"/>
+          <p:cNvSpPr/>
+          <p:nvPr/>
+        </p:nvSpPr>
+        <p:spPr>
+          <a:xfrm>
+            <a:off x="6255867" y="1261872"/>
+            <a:ext cx="5478627" cy="502920"/>
           </a:xfrm>
           <a:prstGeom prst="rect">
             <a:avLst/>
@@ -3672,14 +3926,14 @@
       </p:sp>
       <p:sp>
         <p:nvSpPr>
-          <p:cNvPr id="7" name="TextBox 6"/>
+          <p:cNvPr id="11" name="TextBox 10"/>
           <p:cNvSpPr txBox="1"/>
           <p:nvPr/>
         </p:nvSpPr>
         <p:spPr>
           <a:xfrm>
-            <a:off x="685800" y="1307592"/>
-            <a:ext cx="10820095" cy="256032"/>
+            <a:off x="6393027" y="1353312"/>
+            <a:ext cx="5204307" cy="365760"/>
           </a:xfrm>
           <a:prstGeom prst="rect">
             <a:avLst/>
@@ -3690,28 +3944,29 @@
           <a:bodyPr wrap="square" anchor="ctr"/>
           <a:lstStyle/>
           <a:p>
-            <a:r>
-              <a:rPr sz="1000" b="1" i="0">
-                <a:solidFill>
-                  <a:srgbClr val="269CCB"/>
-                </a:solidFill>
-                <a:latin typeface="Calibri"/>
-              </a:rPr>
-              <a:t>● ● ●</a:t>
-            </a:r>
-          </a:p>
-        </p:txBody>
-      </p:sp>
-      <p:sp>
-        <p:nvSpPr>
-          <p:cNvPr id="8" name="TextBox 7"/>
+            <a:pPr algn="ctr"/>
+            <a:r>
+              <a:rPr sz="1600" b="1" i="0">
+                <a:solidFill>
+                  <a:srgbClr val="FFFFFF"/>
+                </a:solidFill>
+                <a:latin typeface="Calibri"/>
+              </a:rPr>
+              <a:t>Contenedor</a:t>
+            </a:r>
+          </a:p>
+        </p:txBody>
+      </p:sp>
+      <p:sp>
+        <p:nvSpPr>
+          <p:cNvPr id="12" name="TextBox 11"/>
           <p:cNvSpPr txBox="1"/>
           <p:nvPr/>
         </p:nvSpPr>
         <p:spPr>
           <a:xfrm>
-            <a:off x="777240" y="1719072"/>
-            <a:ext cx="10637215" cy="4133087"/>
+            <a:off x="6420459" y="1901952"/>
+            <a:ext cx="5158587" cy="4498848"/>
           </a:xfrm>
           <a:prstGeom prst="rect">
             <a:avLst/>
@@ -3726,155 +3981,117 @@
           <a:p>
             <a:pPr>
               <a:spcAft>
-                <a:spcPts val="400"/>
+                <a:spcPts val="800"/>
               </a:spcAft>
             </a:pPr>
             <a:r>
-              <a:rPr sz="1400" b="0" i="0">
-                <a:solidFill>
-                  <a:srgbClr val="FFFFFF"/>
-                </a:solidFill>
-                <a:latin typeface="Calibri"/>
-              </a:rPr>
-              <a:t>FROM node:20-alpine          # base slim: arranca rapido, pesa poco</a:t>
+              <a:rPr sz="1500" b="0" i="0">
+                <a:solidFill>
+                  <a:srgbClr val="333333"/>
+                </a:solidFill>
+                <a:latin typeface="Calibri"/>
+              </a:rPr>
+              <a:t>–   </a:t>
+            </a:r>
+            <a:r>
+              <a:rPr sz="1500" b="1" i="0">
+                <a:solidFill>
+                  <a:srgbClr val="333333"/>
+                </a:solidFill>
+                <a:latin typeface="Calibri"/>
+              </a:rPr>
+              <a:t>Comparte el kernel</a:t>
+            </a:r>
+            <a:r>
+              <a:rPr sz="1500" b="0" i="0">
+                <a:solidFill>
+                  <a:srgbClr val="333333"/>
+                </a:solidFill>
+                <a:latin typeface="Calibri"/>
+              </a:rPr>
+              <a:t> del anfitrion</a:t>
             </a:r>
           </a:p>
           <a:p>
             <a:pPr>
               <a:spcAft>
-                <a:spcPts val="400"/>
+                <a:spcPts val="800"/>
               </a:spcAft>
             </a:pPr>
             <a:r>
-              <a:rPr sz="1400" b="0" i="0">
-                <a:solidFill>
-                  <a:srgbClr val="FFFFFF"/>
-                </a:solidFill>
-                <a:latin typeface="Calibri"/>
-              </a:rPr>
-              <a:t>WORKDIR /app</a:t>
+              <a:rPr sz="1500" b="0" i="0">
+                <a:solidFill>
+                  <a:srgbClr val="333333"/>
+                </a:solidFill>
+                <a:latin typeface="Calibri"/>
+              </a:rPr>
+              <a:t>–   Empaqueta solo app + dependencias</a:t>
             </a:r>
           </a:p>
           <a:p>
             <a:pPr>
               <a:spcAft>
-                <a:spcPts val="400"/>
+                <a:spcPts val="800"/>
               </a:spcAft>
             </a:pPr>
             <a:r>
-              <a:rPr sz="1400" b="0" i="0">
-                <a:solidFill>
-                  <a:srgbClr val="FFFFFF"/>
-                </a:solidFill>
-                <a:latin typeface="Calibri"/>
-              </a:rPr>
-              <a:t>COPY package*.json ./</a:t>
+              <a:rPr sz="1500" b="0" i="0">
+                <a:solidFill>
+                  <a:srgbClr val="333333"/>
+                </a:solidFill>
+                <a:latin typeface="Calibri"/>
+              </a:rPr>
+              <a:t>–   Arranque en </a:t>
+            </a:r>
+            <a:r>
+              <a:rPr sz="1500" b="1" i="0">
+                <a:solidFill>
+                  <a:srgbClr val="333333"/>
+                </a:solidFill>
+                <a:latin typeface="Calibri"/>
+              </a:rPr>
+              <a:t>segundos</a:t>
+            </a:r>
+            <a:r>
+              <a:rPr sz="1500" b="0" i="0">
+                <a:solidFill>
+                  <a:srgbClr val="333333"/>
+                </a:solidFill>
+                <a:latin typeface="Calibri"/>
+              </a:rPr>
+              <a:t>, tamaño en </a:t>
+            </a:r>
+            <a:r>
+              <a:rPr sz="1500" b="1" i="0">
+                <a:solidFill>
+                  <a:srgbClr val="333333"/>
+                </a:solidFill>
+                <a:latin typeface="Calibri"/>
+              </a:rPr>
+              <a:t>MB</a:t>
             </a:r>
           </a:p>
           <a:p>
             <a:pPr>
               <a:spcAft>
-                <a:spcPts val="400"/>
+                <a:spcPts val="800"/>
               </a:spcAft>
             </a:pPr>
             <a:r>
-              <a:rPr sz="1400" b="0" i="0">
-                <a:solidFill>
-                  <a:srgbClr val="FFFFFF"/>
-                </a:solidFill>
-                <a:latin typeface="Calibri"/>
-              </a:rPr>
-              <a:t>RUN npm ci --omit=dev</a:t>
-            </a:r>
-          </a:p>
-          <a:p>
-            <a:pPr>
-              <a:spcAft>
-                <a:spcPts val="400"/>
-              </a:spcAft>
-            </a:pPr>
-            <a:r>
-              <a:rPr sz="1400" b="0" i="0">
-                <a:solidFill>
-                  <a:srgbClr val="FFFFFF"/>
-                </a:solidFill>
-                <a:latin typeface="Calibri"/>
-              </a:rPr>
-              <a:t>COPY . .</a:t>
-            </a:r>
-          </a:p>
-          <a:p>
-            <a:pPr>
-              <a:spcAft>
-                <a:spcPts val="400"/>
-              </a:spcAft>
-            </a:pPr>
-            <a:r>
-              <a:rPr sz="1400" b="0" i="0">
-                <a:solidFill>
-                  <a:srgbClr val="FFFFFF"/>
-                </a:solidFill>
-                <a:latin typeface="Calibri"/>
-              </a:rPr>
-              <a:t>EXPOSE 8080                  # el puerto que documentan en el C4</a:t>
-            </a:r>
-          </a:p>
-          <a:p>
-            <a:pPr>
-              <a:spcAft>
-                <a:spcPts val="400"/>
-              </a:spcAft>
-            </a:pPr>
-            <a:r>
-              <a:rPr sz="1400" b="0" i="0">
-                <a:solidFill>
-                  <a:srgbClr val="FFFFFF"/>
-                </a:solidFill>
-                <a:latin typeface="Calibri"/>
-              </a:rPr>
-              <a:t>CMD ["node", "server.js"]    # UN proceso principal por contenedor</a:t>
-            </a:r>
-          </a:p>
-        </p:txBody>
-      </p:sp>
-      <p:sp>
-        <p:nvSpPr>
-          <p:cNvPr id="9" name="TextBox 8"/>
-          <p:cNvSpPr txBox="1"/>
-          <p:nvPr/>
-        </p:nvSpPr>
-        <p:spPr>
-          <a:xfrm>
-            <a:off x="457200" y="6080760"/>
-            <a:ext cx="11277295" cy="320040"/>
-          </a:xfrm>
-          <a:prstGeom prst="rect">
-            <a:avLst/>
-          </a:prstGeom>
-          <a:noFill/>
-        </p:spPr>
-        <p:txBody>
-          <a:bodyPr wrap="square">
-            <a:spAutoFit/>
-          </a:bodyPr>
-          <a:lstStyle/>
-          <a:p>
-            <a:pPr algn="ctr"/>
-            <a:r>
-              <a:rPr sz="1200" b="0" i="1">
-                <a:solidFill>
-                  <a:srgbClr val="666666"/>
-                </a:solidFill>
-                <a:latin typeface="Calibri"/>
-              </a:rPr>
-              <a:t>Nunca COPY de un .env con secretos: queda en las capas de la imagen para siempre.</a:t>
-            </a:r>
-          </a:p>
-        </p:txBody>
-      </p:sp>
-      <p:sp>
-        <p:nvSpPr>
-          <p:cNvPr id="10" name="TextBox 9"/>
+              <a:rPr sz="1500" b="0" i="0">
+                <a:solidFill>
+                  <a:srgbClr val="333333"/>
+                </a:solidFill>
+                <a:latin typeface="Calibri"/>
+              </a:rPr>
+              <a:t>–   Util para desplegar el mismo servicio muchas veces</a:t>
+            </a:r>
+          </a:p>
+        </p:txBody>
+      </p:sp>
+      <p:sp>
+        <p:nvSpPr>
+          <p:cNvPr id="13" name="TextBox 12"/>
           <p:cNvSpPr txBox="1"/>
           <p:nvPr/>
         </p:nvSpPr>
@@ -3942,7 +4159,7 @@
         <p:spPr>
           <a:xfrm>
             <a:off x="0" y="0"/>
-            <a:ext cx="12191695" cy="1170432"/>
+            <a:ext cx="12191695" cy="960120"/>
           </a:xfrm>
           <a:prstGeom prst="rect">
             <a:avLst/>
@@ -3984,7 +4201,7 @@
         </p:nvSpPr>
         <p:spPr>
           <a:xfrm>
-            <a:off x="0" y="1170432"/>
+            <a:off x="0" y="960120"/>
             <a:ext cx="12191695" cy="41148"/>
           </a:xfrm>
           <a:prstGeom prst="rect">
@@ -4028,7 +4245,7 @@
         <p:spPr>
           <a:xfrm>
             <a:off x="457200" y="164592"/>
-            <a:ext cx="11277295" cy="384048"/>
+            <a:ext cx="11277295" cy="502920"/>
           </a:xfrm>
           <a:prstGeom prst="rect">
             <a:avLst/>
@@ -4048,55 +4265,21 @@
                 </a:solidFill>
                 <a:latin typeface="Calibri"/>
               </a:rPr>
-              <a:t>Herramientas de hoy</a:t>
-            </a:r>
-          </a:p>
-        </p:txBody>
-      </p:sp>
-      <p:sp>
-        <p:nvSpPr>
-          <p:cNvPr id="5" name="TextBox 4"/>
-          <p:cNvSpPr txBox="1"/>
-          <p:nvPr/>
-        </p:nvSpPr>
-        <p:spPr>
-          <a:xfrm>
-            <a:off x="457200" y="566928"/>
-            <a:ext cx="11277295" cy="411480"/>
-          </a:xfrm>
-          <a:prstGeom prst="rect">
-            <a:avLst/>
-          </a:prstGeom>
-          <a:noFill/>
-        </p:spPr>
-        <p:txBody>
-          <a:bodyPr wrap="square">
-            <a:spAutoFit/>
-          </a:bodyPr>
-          <a:lstStyle/>
-          <a:p>
-            <a:r>
-              <a:rPr sz="1400" b="0" i="0">
-                <a:solidFill>
-                  <a:srgbClr val="B8D8EE"/>
-                </a:solidFill>
-                <a:latin typeface="Calibri"/>
-              </a:rPr>
-              <a:t>Gratis · navegador o free tier · sin cuenta de pago</a:t>
-            </a:r>
-          </a:p>
-        </p:txBody>
-      </p:sp>
-      <p:sp>
-        <p:nvSpPr>
-          <p:cNvPr id="6" name="Rounded Rectangle 5"/>
+              <a:t>Dockerfile minimo del stub CloudLite</a:t>
+            </a:r>
+          </a:p>
+        </p:txBody>
+      </p:sp>
+      <p:sp>
+        <p:nvSpPr>
+          <p:cNvPr id="5" name="Rounded Rectangle 4"/>
           <p:cNvSpPr/>
           <p:nvPr/>
         </p:nvSpPr>
         <p:spPr>
           <a:xfrm>
-            <a:off x="457200" y="1591056"/>
-            <a:ext cx="3624986" cy="2299716"/>
+            <a:off x="457200" y="1261872"/>
+            <a:ext cx="11277295" cy="4773168"/>
           </a:xfrm>
           <a:prstGeom prst="roundRect">
             <a:avLst>
@@ -4104,7 +4287,7 @@
             </a:avLst>
           </a:prstGeom>
           <a:solidFill>
-            <a:srgbClr val="F2F2F2"/>
+            <a:srgbClr val="1E2A38"/>
           </a:solidFill>
           <a:ln>
             <a:noFill/>
@@ -4134,14 +4317,14 @@
       </p:sp>
       <p:sp>
         <p:nvSpPr>
-          <p:cNvPr id="7" name="Rectangle 6"/>
+          <p:cNvPr id="6" name="Rectangle 5"/>
           <p:cNvSpPr/>
           <p:nvPr/>
         </p:nvSpPr>
         <p:spPr>
           <a:xfrm>
-            <a:off x="457200" y="1591056"/>
-            <a:ext cx="3624986" cy="64008"/>
+            <a:off x="457200" y="1261872"/>
+            <a:ext cx="11277295" cy="320040"/>
           </a:xfrm>
           <a:prstGeom prst="rect">
             <a:avLst/>
@@ -4177,735 +4360,321 @@
       </p:sp>
       <p:sp>
         <p:nvSpPr>
-          <p:cNvPr id="8" name="Rectangle 7"/>
-          <p:cNvSpPr/>
-          <p:nvPr/>
-        </p:nvSpPr>
-        <p:spPr>
-          <a:xfrm>
-            <a:off x="457200" y="1655064"/>
-            <a:ext cx="3624986" cy="27432"/>
-          </a:xfrm>
-          <a:prstGeom prst="rect">
-            <a:avLst/>
-          </a:prstGeom>
-          <a:solidFill>
-            <a:srgbClr val="FFD000"/>
-          </a:solidFill>
-          <a:ln>
-            <a:noFill/>
-          </a:ln>
-        </p:spPr>
-        <p:style>
-          <a:lnRef idx="1">
-            <a:schemeClr val="accent1"/>
-          </a:lnRef>
-          <a:fillRef idx="3">
-            <a:schemeClr val="accent1"/>
-          </a:fillRef>
-          <a:effectRef idx="2">
-            <a:schemeClr val="accent1"/>
-          </a:effectRef>
-          <a:fontRef idx="minor">
-            <a:schemeClr val="lt1"/>
-          </a:fontRef>
-        </p:style>
-        <p:txBody>
-          <a:bodyPr rtlCol="0" anchor="ctr"/>
+          <p:cNvPr id="7" name="TextBox 6"/>
+          <p:cNvSpPr txBox="1"/>
+          <p:nvPr/>
+        </p:nvSpPr>
+        <p:spPr>
+          <a:xfrm>
+            <a:off x="685800" y="1307592"/>
+            <a:ext cx="10820095" cy="256032"/>
+          </a:xfrm>
+          <a:prstGeom prst="rect">
+            <a:avLst/>
+          </a:prstGeom>
+          <a:noFill/>
+        </p:spPr>
+        <p:txBody>
+          <a:bodyPr wrap="square" anchor="ctr"/>
+          <a:lstStyle/>
+          <a:p>
+            <a:r>
+              <a:rPr sz="1000" b="1" i="0">
+                <a:solidFill>
+                  <a:srgbClr val="269CCB"/>
+                </a:solidFill>
+                <a:latin typeface="Calibri"/>
+              </a:rPr>
+              <a:t>● ● ●</a:t>
+            </a:r>
+          </a:p>
+        </p:txBody>
+      </p:sp>
+      <p:sp>
+        <p:nvSpPr>
+          <p:cNvPr id="8" name="TextBox 7"/>
+          <p:cNvSpPr txBox="1"/>
+          <p:nvPr/>
+        </p:nvSpPr>
+        <p:spPr>
+          <a:xfrm>
+            <a:off x="777240" y="1719072"/>
+            <a:ext cx="10637215" cy="4133087"/>
+          </a:xfrm>
+          <a:prstGeom prst="rect">
+            <a:avLst/>
+          </a:prstGeom>
+          <a:noFill/>
+        </p:spPr>
+        <p:txBody>
+          <a:bodyPr wrap="square">
+            <a:spAutoFit/>
+          </a:bodyPr>
+          <a:lstStyle/>
+          <a:p>
+            <a:pPr>
+              <a:spcAft>
+                <a:spcPts val="400"/>
+              </a:spcAft>
+            </a:pPr>
+            <a:r>
+              <a:rPr sz="1400" b="0" i="0">
+                <a:solidFill>
+                  <a:srgbClr val="FFFFFF"/>
+                </a:solidFill>
+                <a:latin typeface="Calibri"/>
+              </a:rPr>
+              <a:t>FROM node:20-alpine          # base ligera y etiqueta FIJA: nunca latest</a:t>
+            </a:r>
+          </a:p>
+          <a:p>
+            <a:pPr>
+              <a:spcAft>
+                <a:spcPts val="400"/>
+              </a:spcAft>
+            </a:pPr>
+            <a:r>
+              <a:rPr sz="1400" b="0" i="0">
+                <a:solidFill>
+                  <a:srgbClr val="FFFFFF"/>
+                </a:solidFill>
+                <a:latin typeface="Calibri"/>
+              </a:rPr>
+              <a:t>WORKDIR /app</a:t>
+            </a:r>
+          </a:p>
+          <a:p>
+            <a:pPr>
+              <a:spcAft>
+                <a:spcPts val="400"/>
+              </a:spcAft>
+            </a:pPr>
+            <a:r>
+              <a:rPr sz="1400" b="0" i="0">
+                <a:solidFill>
+                  <a:srgbClr val="FFFFFF"/>
+                </a:solidFill>
+                <a:latin typeface="Calibri"/>
+              </a:rPr>
+              <a:t>COPY package*.json ./        # dependencias PRIMERO: cambian poco</a:t>
+            </a:r>
+          </a:p>
+          <a:p>
+            <a:pPr>
+              <a:spcAft>
+                <a:spcPts val="400"/>
+              </a:spcAft>
+            </a:pPr>
+            <a:r>
+              <a:rPr sz="1400" b="0" i="0">
+                <a:solidFill>
+                  <a:srgbClr val="FFFFFF"/>
+                </a:solidFill>
+                <a:latin typeface="Calibri"/>
+              </a:rPr>
+              <a:t>RUN npm ci --omit=dev        # se instalan DENTRO de la imagen</a:t>
+            </a:r>
+          </a:p>
+          <a:p>
+            <a:pPr>
+              <a:spcAft>
+                <a:spcPts val="400"/>
+              </a:spcAft>
+            </a:pPr>
+            <a:r>
+              <a:rPr sz="1400" b="0" i="0">
+                <a:solidFill>
+                  <a:srgbClr val="FFFFFF"/>
+                </a:solidFill>
+                <a:latin typeface="Calibri"/>
+              </a:rPr>
+              <a:t>COPY . .                     # el codigo despues: cambia en cada commit</a:t>
+            </a:r>
+          </a:p>
+          <a:p>
+            <a:pPr>
+              <a:spcAft>
+                <a:spcPts val="400"/>
+              </a:spcAft>
+            </a:pPr>
+            <a:r>
+              <a:rPr sz="1400" b="0" i="0">
+                <a:solidFill>
+                  <a:srgbClr val="FFFFFF"/>
+                </a:solidFill>
+                <a:latin typeface="Calibri"/>
+              </a:rPr>
+              <a:t>EXPOSE 8080                  # documenta el puerto; NO lo publica</a:t>
+            </a:r>
+          </a:p>
+          <a:p>
+            <a:pPr>
+              <a:spcAft>
+                <a:spcPts val="400"/>
+              </a:spcAft>
+            </a:pPr>
+            <a:r>
+              <a:rPr sz="1400" b="0" i="0">
+                <a:solidFill>
+                  <a:srgbClr val="FFFFFF"/>
+                </a:solidFill>
+                <a:latin typeface="Calibri"/>
+              </a:rPr>
+              <a:t>CMD ["node", "server.js"]    # UN proceso principal por contenedor</a:t>
+            </a:r>
+          </a:p>
+          <a:p>
+            <a:pPr>
+              <a:spcAft>
+                <a:spcPts val="400"/>
+              </a:spcAft>
+            </a:pPr>
+            <a:r>
+              <a:rPr sz="1400" b="0" i="0">
+                <a:solidFill>
+                  <a:srgbClr val="FFFFFF"/>
+                </a:solidFill>
+                <a:latin typeface="Calibri"/>
+              </a:rPr>
+              <a:t/>
+            </a:r>
+          </a:p>
+          <a:p>
+            <a:pPr>
+              <a:spcAft>
+                <a:spcPts val="400"/>
+              </a:spcAft>
+            </a:pPr>
+            <a:r>
+              <a:rPr sz="1400" b="0" i="0">
+                <a:solidFill>
+                  <a:srgbClr val="FFFFFF"/>
+                </a:solidFill>
+                <a:latin typeface="Calibri"/>
+              </a:rPr>
+              <a:t># .dockerignore  &lt;- archivo aparte, en la misma carpeta que el Dockerfile.</a:t>
+            </a:r>
+          </a:p>
+          <a:p>
+            <a:pPr>
+              <a:spcAft>
+                <a:spcPts val="400"/>
+              </a:spcAft>
+            </a:pPr>
+            <a:r>
+              <a:rPr sz="1400" b="0" i="0">
+                <a:solidFill>
+                  <a:srgbClr val="FFFFFF"/>
+                </a:solidFill>
+                <a:latin typeface="Calibri"/>
+              </a:rPr>
+              <a:t># Sin el, el COPY . . de arriba se lleva el .env a las capas de la imagen.</a:t>
+            </a:r>
+          </a:p>
+          <a:p>
+            <a:pPr>
+              <a:spcAft>
+                <a:spcPts val="400"/>
+              </a:spcAft>
+            </a:pPr>
+            <a:r>
+              <a:rPr sz="1400" b="0" i="0">
+                <a:solidFill>
+                  <a:srgbClr val="FFFFFF"/>
+                </a:solidFill>
+                <a:latin typeface="Calibri"/>
+              </a:rPr>
+              <a:t>node_modules</a:t>
+            </a:r>
+          </a:p>
+          <a:p>
+            <a:pPr>
+              <a:spcAft>
+                <a:spcPts val="400"/>
+              </a:spcAft>
+            </a:pPr>
+            <a:r>
+              <a:rPr sz="1400" b="0" i="0">
+                <a:solidFill>
+                  <a:srgbClr val="FFFFFF"/>
+                </a:solidFill>
+                <a:latin typeface="Calibri"/>
+              </a:rPr>
+              <a:t>.env</a:t>
+            </a:r>
+          </a:p>
+          <a:p>
+            <a:pPr>
+              <a:spcAft>
+                <a:spcPts val="400"/>
+              </a:spcAft>
+            </a:pPr>
+            <a:r>
+              <a:rPr sz="1400" b="0" i="0">
+                <a:solidFill>
+                  <a:srgbClr val="FFFFFF"/>
+                </a:solidFill>
+                <a:latin typeface="Calibri"/>
+              </a:rPr>
+              <a:t>.env.*</a:t>
+            </a:r>
+          </a:p>
+          <a:p>
+            <a:pPr>
+              <a:spcAft>
+                <a:spcPts val="400"/>
+              </a:spcAft>
+            </a:pPr>
+            <a:r>
+              <a:rPr sz="1400" b="0" i="0">
+                <a:solidFill>
+                  <a:srgbClr val="FFFFFF"/>
+                </a:solidFill>
+                <a:latin typeface="Calibri"/>
+              </a:rPr>
+              <a:t>.git</a:t>
+            </a:r>
+          </a:p>
+        </p:txBody>
+      </p:sp>
+      <p:sp>
+        <p:nvSpPr>
+          <p:cNvPr id="9" name="TextBox 8"/>
+          <p:cNvSpPr txBox="1"/>
+          <p:nvPr/>
+        </p:nvSpPr>
+        <p:spPr>
+          <a:xfrm>
+            <a:off x="457200" y="6080760"/>
+            <a:ext cx="11277295" cy="320040"/>
+          </a:xfrm>
+          <a:prstGeom prst="rect">
+            <a:avLst/>
+          </a:prstGeom>
+          <a:noFill/>
+        </p:spPr>
+        <p:txBody>
+          <a:bodyPr wrap="square">
+            <a:spAutoFit/>
+          </a:bodyPr>
           <a:lstStyle/>
           <a:p>
             <a:pPr algn="ctr"/>
-          </a:p>
-        </p:txBody>
-      </p:sp>
-      <p:pic>
-        <p:nvPicPr>
-          <p:cNvPr id="9" name="Picture 8" descr="killercoda.png"/>
-          <p:cNvPicPr>
-            <a:picLocks noChangeAspect="1"/>
-          </p:cNvPicPr>
-          <p:nvPr/>
-        </p:nvPicPr>
-        <p:blipFill>
-          <a:blip r:embed="rId2"/>
-          <a:stretch>
-            <a:fillRect/>
-          </a:stretch>
-        </p:blipFill>
-        <p:spPr>
-          <a:xfrm>
-            <a:off x="1659331" y="1847087"/>
-            <a:ext cx="1220724" cy="1220724"/>
-          </a:xfrm>
-          <a:prstGeom prst="rect">
-            <a:avLst/>
-          </a:prstGeom>
-        </p:spPr>
-      </p:pic>
+            <a:r>
+              <a:rPr sz="1200" b="0" i="1">
+                <a:solidFill>
+                  <a:srgbClr val="666666"/>
+                </a:solidFill>
+                <a:latin typeface="Calibri"/>
+              </a:rPr>
+              <a:t>EXPOSE, CMD y el «-p» del run llevan el MISMO puerto. Y el «COPY . .» solo es seguro con «.dockerignore» al lado.</a:t>
+            </a:r>
+          </a:p>
+        </p:txBody>
+      </p:sp>
       <p:sp>
         <p:nvSpPr>
           <p:cNvPr id="10" name="TextBox 9"/>
-          <p:cNvSpPr txBox="1"/>
-          <p:nvPr/>
-        </p:nvSpPr>
-        <p:spPr>
-          <a:xfrm>
-            <a:off x="530352" y="3159251"/>
-            <a:ext cx="3478682" cy="621792"/>
-          </a:xfrm>
-          <a:prstGeom prst="rect">
-            <a:avLst/>
-          </a:prstGeom>
-          <a:noFill/>
-        </p:spPr>
-        <p:txBody>
-          <a:bodyPr wrap="square" anchor="t"/>
-          <a:lstStyle/>
-          <a:p>
-            <a:pPr algn="ctr"/>
-            <a:r>
-              <a:rPr sz="1300" b="1" i="0">
-                <a:solidFill>
-                  <a:srgbClr val="095292"/>
-                </a:solidFill>
-                <a:latin typeface="Calibri"/>
-              </a:rPr>
-              <a:t>Killercoda</a:t>
-            </a:r>
-          </a:p>
-          <a:p>
-            <a:pPr algn="ctr">
-              <a:spcBef>
-                <a:spcPts val="200"/>
-              </a:spcBef>
-            </a:pPr>
-            <a:r>
-              <a:rPr sz="1000" b="0" i="0">
-                <a:solidFill>
-                  <a:srgbClr val="666666"/>
-                </a:solidFill>
-                <a:latin typeface="Calibri"/>
-              </a:rPr>
-              <a:t>Lab del dia · sesion 1 h</a:t>
-            </a:r>
-          </a:p>
-        </p:txBody>
-      </p:sp>
-      <p:sp>
-        <p:nvSpPr>
-          <p:cNvPr id="11" name="Rounded Rectangle 10"/>
-          <p:cNvSpPr/>
-          <p:nvPr/>
-        </p:nvSpPr>
-        <p:spPr>
-          <a:xfrm>
-            <a:off x="4283354" y="1591056"/>
-            <a:ext cx="3624986" cy="2299716"/>
-          </a:xfrm>
-          <a:prstGeom prst="roundRect">
-            <a:avLst>
-              <a:gd name="adj" fmla="val 12000"/>
-            </a:avLst>
-          </a:prstGeom>
-          <a:solidFill>
-            <a:srgbClr val="F2F2F2"/>
-          </a:solidFill>
-          <a:ln>
-            <a:noFill/>
-          </a:ln>
-        </p:spPr>
-        <p:style>
-          <a:lnRef idx="1">
-            <a:schemeClr val="accent1"/>
-          </a:lnRef>
-          <a:fillRef idx="3">
-            <a:schemeClr val="accent1"/>
-          </a:fillRef>
-          <a:effectRef idx="2">
-            <a:schemeClr val="accent1"/>
-          </a:effectRef>
-          <a:fontRef idx="minor">
-            <a:schemeClr val="lt1"/>
-          </a:fontRef>
-        </p:style>
-        <p:txBody>
-          <a:bodyPr rtlCol="0" anchor="ctr"/>
-          <a:lstStyle/>
-          <a:p>
-            <a:pPr algn="ctr"/>
-          </a:p>
-        </p:txBody>
-      </p:sp>
-      <p:sp>
-        <p:nvSpPr>
-          <p:cNvPr id="12" name="Rectangle 11"/>
-          <p:cNvSpPr/>
-          <p:nvPr/>
-        </p:nvSpPr>
-        <p:spPr>
-          <a:xfrm>
-            <a:off x="4283354" y="1591056"/>
-            <a:ext cx="3624986" cy="64008"/>
-          </a:xfrm>
-          <a:prstGeom prst="rect">
-            <a:avLst/>
-          </a:prstGeom>
-          <a:solidFill>
-            <a:srgbClr val="095292"/>
-          </a:solidFill>
-          <a:ln>
-            <a:noFill/>
-          </a:ln>
-        </p:spPr>
-        <p:style>
-          <a:lnRef idx="1">
-            <a:schemeClr val="accent1"/>
-          </a:lnRef>
-          <a:fillRef idx="3">
-            <a:schemeClr val="accent1"/>
-          </a:fillRef>
-          <a:effectRef idx="2">
-            <a:schemeClr val="accent1"/>
-          </a:effectRef>
-          <a:fontRef idx="minor">
-            <a:schemeClr val="lt1"/>
-          </a:fontRef>
-        </p:style>
-        <p:txBody>
-          <a:bodyPr rtlCol="0" anchor="ctr"/>
-          <a:lstStyle/>
-          <a:p>
-            <a:pPr algn="ctr"/>
-          </a:p>
-        </p:txBody>
-      </p:sp>
-      <p:sp>
-        <p:nvSpPr>
-          <p:cNvPr id="13" name="Rectangle 12"/>
-          <p:cNvSpPr/>
-          <p:nvPr/>
-        </p:nvSpPr>
-        <p:spPr>
-          <a:xfrm>
-            <a:off x="4283354" y="1655064"/>
-            <a:ext cx="3624986" cy="27432"/>
-          </a:xfrm>
-          <a:prstGeom prst="rect">
-            <a:avLst/>
-          </a:prstGeom>
-          <a:solidFill>
-            <a:srgbClr val="FFD000"/>
-          </a:solidFill>
-          <a:ln>
-            <a:noFill/>
-          </a:ln>
-        </p:spPr>
-        <p:style>
-          <a:lnRef idx="1">
-            <a:schemeClr val="accent1"/>
-          </a:lnRef>
-          <a:fillRef idx="3">
-            <a:schemeClr val="accent1"/>
-          </a:fillRef>
-          <a:effectRef idx="2">
-            <a:schemeClr val="accent1"/>
-          </a:effectRef>
-          <a:fontRef idx="minor">
-            <a:schemeClr val="lt1"/>
-          </a:fontRef>
-        </p:style>
-        <p:txBody>
-          <a:bodyPr rtlCol="0" anchor="ctr"/>
-          <a:lstStyle/>
-          <a:p>
-            <a:pPr algn="ctr"/>
-          </a:p>
-        </p:txBody>
-      </p:sp>
-      <p:pic>
-        <p:nvPicPr>
-          <p:cNvPr id="14" name="Picture 13" descr="labex.png"/>
-          <p:cNvPicPr>
-            <a:picLocks noChangeAspect="1"/>
-          </p:cNvPicPr>
-          <p:nvPr/>
-        </p:nvPicPr>
-        <p:blipFill>
-          <a:blip r:embed="rId3"/>
-          <a:stretch>
-            <a:fillRect/>
-          </a:stretch>
-        </p:blipFill>
-        <p:spPr>
-          <a:xfrm>
-            <a:off x="5485485" y="1847087"/>
-            <a:ext cx="1220724" cy="1220724"/>
-          </a:xfrm>
-          <a:prstGeom prst="rect">
-            <a:avLst/>
-          </a:prstGeom>
-        </p:spPr>
-      </p:pic>
-      <p:sp>
-        <p:nvSpPr>
-          <p:cNvPr id="15" name="TextBox 14"/>
-          <p:cNvSpPr txBox="1"/>
-          <p:nvPr/>
-        </p:nvSpPr>
-        <p:spPr>
-          <a:xfrm>
-            <a:off x="4356506" y="3159251"/>
-            <a:ext cx="3478682" cy="621792"/>
-          </a:xfrm>
-          <a:prstGeom prst="rect">
-            <a:avLst/>
-          </a:prstGeom>
-          <a:noFill/>
-        </p:spPr>
-        <p:txBody>
-          <a:bodyPr wrap="square" anchor="t"/>
-          <a:lstStyle/>
-          <a:p>
-            <a:pPr algn="ctr"/>
-            <a:r>
-              <a:rPr sz="1300" b="1" i="0">
-                <a:solidFill>
-                  <a:srgbClr val="095292"/>
-                </a:solidFill>
-                <a:latin typeface="Calibri"/>
-              </a:rPr>
-              <a:t>LabEx Docker Playground</a:t>
-            </a:r>
-          </a:p>
-          <a:p>
-            <a:pPr algn="ctr">
-              <a:spcBef>
-                <a:spcPts val="200"/>
-              </a:spcBef>
-            </a:pPr>
-            <a:r>
-              <a:rPr sz="1000" b="0" i="0">
-                <a:solidFill>
-                  <a:srgbClr val="666666"/>
-                </a:solidFill>
-                <a:latin typeface="Calibri"/>
-              </a:rPr>
-              <a:t>Alterna · 3 al dia</a:t>
-            </a:r>
-          </a:p>
-        </p:txBody>
-      </p:sp>
-      <p:sp>
-        <p:nvSpPr>
-          <p:cNvPr id="16" name="Rounded Rectangle 15"/>
-          <p:cNvSpPr/>
-          <p:nvPr/>
-        </p:nvSpPr>
-        <p:spPr>
-          <a:xfrm>
-            <a:off x="8109508" y="1591056"/>
-            <a:ext cx="3624986" cy="2299716"/>
-          </a:xfrm>
-          <a:prstGeom prst="roundRect">
-            <a:avLst>
-              <a:gd name="adj" fmla="val 12000"/>
-            </a:avLst>
-          </a:prstGeom>
-          <a:solidFill>
-            <a:srgbClr val="F2F2F2"/>
-          </a:solidFill>
-          <a:ln>
-            <a:noFill/>
-          </a:ln>
-        </p:spPr>
-        <p:style>
-          <a:lnRef idx="1">
-            <a:schemeClr val="accent1"/>
-          </a:lnRef>
-          <a:fillRef idx="3">
-            <a:schemeClr val="accent1"/>
-          </a:fillRef>
-          <a:effectRef idx="2">
-            <a:schemeClr val="accent1"/>
-          </a:effectRef>
-          <a:fontRef idx="minor">
-            <a:schemeClr val="lt1"/>
-          </a:fontRef>
-        </p:style>
-        <p:txBody>
-          <a:bodyPr rtlCol="0" anchor="ctr"/>
-          <a:lstStyle/>
-          <a:p>
-            <a:pPr algn="ctr"/>
-          </a:p>
-        </p:txBody>
-      </p:sp>
-      <p:sp>
-        <p:nvSpPr>
-          <p:cNvPr id="17" name="Rectangle 16"/>
-          <p:cNvSpPr/>
-          <p:nvPr/>
-        </p:nvSpPr>
-        <p:spPr>
-          <a:xfrm>
-            <a:off x="8109508" y="1591056"/>
-            <a:ext cx="3624986" cy="64008"/>
-          </a:xfrm>
-          <a:prstGeom prst="rect">
-            <a:avLst/>
-          </a:prstGeom>
-          <a:solidFill>
-            <a:srgbClr val="095292"/>
-          </a:solidFill>
-          <a:ln>
-            <a:noFill/>
-          </a:ln>
-        </p:spPr>
-        <p:style>
-          <a:lnRef idx="1">
-            <a:schemeClr val="accent1"/>
-          </a:lnRef>
-          <a:fillRef idx="3">
-            <a:schemeClr val="accent1"/>
-          </a:fillRef>
-          <a:effectRef idx="2">
-            <a:schemeClr val="accent1"/>
-          </a:effectRef>
-          <a:fontRef idx="minor">
-            <a:schemeClr val="lt1"/>
-          </a:fontRef>
-        </p:style>
-        <p:txBody>
-          <a:bodyPr rtlCol="0" anchor="ctr"/>
-          <a:lstStyle/>
-          <a:p>
-            <a:pPr algn="ctr"/>
-          </a:p>
-        </p:txBody>
-      </p:sp>
-      <p:sp>
-        <p:nvSpPr>
-          <p:cNvPr id="18" name="Rectangle 17"/>
-          <p:cNvSpPr/>
-          <p:nvPr/>
-        </p:nvSpPr>
-        <p:spPr>
-          <a:xfrm>
-            <a:off x="8109508" y="1655064"/>
-            <a:ext cx="3624986" cy="27432"/>
-          </a:xfrm>
-          <a:prstGeom prst="rect">
-            <a:avLst/>
-          </a:prstGeom>
-          <a:solidFill>
-            <a:srgbClr val="FFD000"/>
-          </a:solidFill>
-          <a:ln>
-            <a:noFill/>
-          </a:ln>
-        </p:spPr>
-        <p:style>
-          <a:lnRef idx="1">
-            <a:schemeClr val="accent1"/>
-          </a:lnRef>
-          <a:fillRef idx="3">
-            <a:schemeClr val="accent1"/>
-          </a:fillRef>
-          <a:effectRef idx="2">
-            <a:schemeClr val="accent1"/>
-          </a:effectRef>
-          <a:fontRef idx="minor">
-            <a:schemeClr val="lt1"/>
-          </a:fontRef>
-        </p:style>
-        <p:txBody>
-          <a:bodyPr rtlCol="0" anchor="ctr"/>
-          <a:lstStyle/>
-          <a:p>
-            <a:pPr algn="ctr"/>
-          </a:p>
-        </p:txBody>
-      </p:sp>
-      <p:pic>
-        <p:nvPicPr>
-          <p:cNvPr id="19" name="Picture 18" descr="google_docs.png"/>
-          <p:cNvPicPr>
-            <a:picLocks noChangeAspect="1"/>
-          </p:cNvPicPr>
-          <p:nvPr/>
-        </p:nvPicPr>
-        <p:blipFill>
-          <a:blip r:embed="rId4"/>
-          <a:stretch>
-            <a:fillRect/>
-          </a:stretch>
-        </p:blipFill>
-        <p:spPr>
-          <a:xfrm>
-            <a:off x="9311640" y="1847087"/>
-            <a:ext cx="1220724" cy="1220724"/>
-          </a:xfrm>
-          <a:prstGeom prst="rect">
-            <a:avLst/>
-          </a:prstGeom>
-        </p:spPr>
-      </p:pic>
-      <p:sp>
-        <p:nvSpPr>
-          <p:cNvPr id="20" name="TextBox 19"/>
-          <p:cNvSpPr txBox="1"/>
-          <p:nvPr/>
-        </p:nvSpPr>
-        <p:spPr>
-          <a:xfrm>
-            <a:off x="8182660" y="3159251"/>
-            <a:ext cx="3478682" cy="621792"/>
-          </a:xfrm>
-          <a:prstGeom prst="rect">
-            <a:avLst/>
-          </a:prstGeom>
-          <a:noFill/>
-        </p:spPr>
-        <p:txBody>
-          <a:bodyPr wrap="square" anchor="t"/>
-          <a:lstStyle/>
-          <a:p>
-            <a:pPr algn="ctr"/>
-            <a:r>
-              <a:rPr sz="1300" b="1" i="0">
-                <a:solidFill>
-                  <a:srgbClr val="095292"/>
-                </a:solidFill>
-                <a:latin typeface="Calibri"/>
-              </a:rPr>
-              <a:t>Google Docs</a:t>
-            </a:r>
-          </a:p>
-          <a:p>
-            <a:pPr algn="ctr">
-              <a:spcBef>
-                <a:spcPts val="200"/>
-              </a:spcBef>
-            </a:pPr>
-            <a:r>
-              <a:rPr sz="1000" b="0" i="0">
-                <a:solidFill>
-                  <a:srgbClr val="666666"/>
-                </a:solidFill>
-                <a:latin typeface="Calibri"/>
-              </a:rPr>
-              <a:t>Informe PI</a:t>
-            </a:r>
-          </a:p>
-        </p:txBody>
-      </p:sp>
-      <p:sp>
-        <p:nvSpPr>
-          <p:cNvPr id="21" name="Rounded Rectangle 20"/>
-          <p:cNvSpPr/>
-          <p:nvPr/>
-        </p:nvSpPr>
-        <p:spPr>
-          <a:xfrm>
-            <a:off x="4283354" y="4055364"/>
-            <a:ext cx="3624986" cy="2299716"/>
-          </a:xfrm>
-          <a:prstGeom prst="roundRect">
-            <a:avLst>
-              <a:gd name="adj" fmla="val 12000"/>
-            </a:avLst>
-          </a:prstGeom>
-          <a:solidFill>
-            <a:srgbClr val="F2F2F2"/>
-          </a:solidFill>
-          <a:ln>
-            <a:noFill/>
-          </a:ln>
-        </p:spPr>
-        <p:style>
-          <a:lnRef idx="1">
-            <a:schemeClr val="accent1"/>
-          </a:lnRef>
-          <a:fillRef idx="3">
-            <a:schemeClr val="accent1"/>
-          </a:fillRef>
-          <a:effectRef idx="2">
-            <a:schemeClr val="accent1"/>
-          </a:effectRef>
-          <a:fontRef idx="minor">
-            <a:schemeClr val="lt1"/>
-          </a:fontRef>
-        </p:style>
-        <p:txBody>
-          <a:bodyPr rtlCol="0" anchor="ctr"/>
-          <a:lstStyle/>
-          <a:p>
-            <a:pPr algn="ctr"/>
-          </a:p>
-        </p:txBody>
-      </p:sp>
-      <p:sp>
-        <p:nvSpPr>
-          <p:cNvPr id="22" name="Rectangle 21"/>
-          <p:cNvSpPr/>
-          <p:nvPr/>
-        </p:nvSpPr>
-        <p:spPr>
-          <a:xfrm>
-            <a:off x="4283354" y="4055364"/>
-            <a:ext cx="3624986" cy="64008"/>
-          </a:xfrm>
-          <a:prstGeom prst="rect">
-            <a:avLst/>
-          </a:prstGeom>
-          <a:solidFill>
-            <a:srgbClr val="095292"/>
-          </a:solidFill>
-          <a:ln>
-            <a:noFill/>
-          </a:ln>
-        </p:spPr>
-        <p:style>
-          <a:lnRef idx="1">
-            <a:schemeClr val="accent1"/>
-          </a:lnRef>
-          <a:fillRef idx="3">
-            <a:schemeClr val="accent1"/>
-          </a:fillRef>
-          <a:effectRef idx="2">
-            <a:schemeClr val="accent1"/>
-          </a:effectRef>
-          <a:fontRef idx="minor">
-            <a:schemeClr val="lt1"/>
-          </a:fontRef>
-        </p:style>
-        <p:txBody>
-          <a:bodyPr rtlCol="0" anchor="ctr"/>
-          <a:lstStyle/>
-          <a:p>
-            <a:pPr algn="ctr"/>
-          </a:p>
-        </p:txBody>
-      </p:sp>
-      <p:sp>
-        <p:nvSpPr>
-          <p:cNvPr id="23" name="Rectangle 22"/>
-          <p:cNvSpPr/>
-          <p:nvPr/>
-        </p:nvSpPr>
-        <p:spPr>
-          <a:xfrm>
-            <a:off x="4283354" y="4119372"/>
-            <a:ext cx="3624986" cy="27432"/>
-          </a:xfrm>
-          <a:prstGeom prst="rect">
-            <a:avLst/>
-          </a:prstGeom>
-          <a:solidFill>
-            <a:srgbClr val="FFD000"/>
-          </a:solidFill>
-          <a:ln>
-            <a:noFill/>
-          </a:ln>
-        </p:spPr>
-        <p:style>
-          <a:lnRef idx="1">
-            <a:schemeClr val="accent1"/>
-          </a:lnRef>
-          <a:fillRef idx="3">
-            <a:schemeClr val="accent1"/>
-          </a:fillRef>
-          <a:effectRef idx="2">
-            <a:schemeClr val="accent1"/>
-          </a:effectRef>
-          <a:fontRef idx="minor">
-            <a:schemeClr val="lt1"/>
-          </a:fontRef>
-        </p:style>
-        <p:txBody>
-          <a:bodyPr rtlCol="0" anchor="ctr"/>
-          <a:lstStyle/>
-          <a:p>
-            <a:pPr algn="ctr"/>
-          </a:p>
-        </p:txBody>
-      </p:sp>
-      <p:pic>
-        <p:nvPicPr>
-          <p:cNvPr id="24" name="Picture 23" descr="examlab.png"/>
-          <p:cNvPicPr>
-            <a:picLocks noChangeAspect="1"/>
-          </p:cNvPicPr>
-          <p:nvPr/>
-        </p:nvPicPr>
-        <p:blipFill>
-          <a:blip r:embed="rId5"/>
-          <a:stretch>
-            <a:fillRect/>
-          </a:stretch>
-        </p:blipFill>
-        <p:spPr>
-          <a:xfrm>
-            <a:off x="5485485" y="4311396"/>
-            <a:ext cx="1220724" cy="1220724"/>
-          </a:xfrm>
-          <a:prstGeom prst="rect">
-            <a:avLst/>
-          </a:prstGeom>
-        </p:spPr>
-      </p:pic>
-      <p:sp>
-        <p:nvSpPr>
-          <p:cNvPr id="25" name="TextBox 24"/>
-          <p:cNvSpPr txBox="1"/>
-          <p:nvPr/>
-        </p:nvSpPr>
-        <p:spPr>
-          <a:xfrm>
-            <a:off x="4356506" y="5623560"/>
-            <a:ext cx="3478682" cy="621792"/>
-          </a:xfrm>
-          <a:prstGeom prst="rect">
-            <a:avLst/>
-          </a:prstGeom>
-          <a:noFill/>
-        </p:spPr>
-        <p:txBody>
-          <a:bodyPr wrap="square" anchor="t"/>
-          <a:lstStyle/>
-          <a:p>
-            <a:pPr algn="ctr"/>
-            <a:r>
-              <a:rPr sz="1300" b="1" i="0">
-                <a:solidFill>
-                  <a:srgbClr val="095292"/>
-                </a:solidFill>
-                <a:latin typeface="Calibri"/>
-              </a:rPr>
-              <a:t>ExamLab</a:t>
-            </a:r>
-          </a:p>
-          <a:p>
-            <a:pPr algn="ctr">
-              <a:spcBef>
-                <a:spcPts val="200"/>
-              </a:spcBef>
-            </a:pPr>
-            <a:r>
-              <a:rPr sz="1000" b="0" i="0">
-                <a:solidFill>
-                  <a:srgbClr val="666666"/>
-                </a:solidFill>
-                <a:latin typeface="Calibri"/>
-              </a:rPr>
-              <a:t>Donde se entrega</a:t>
-            </a:r>
-          </a:p>
-        </p:txBody>
-      </p:sp>
-      <p:sp>
-        <p:nvSpPr>
-          <p:cNvPr id="26" name="TextBox 25"/>
           <p:cNvSpPr txBox="1"/>
           <p:nvPr/>
         </p:nvSpPr>
@@ -4973,7 +4742,7 @@
         <p:spPr>
           <a:xfrm>
             <a:off x="0" y="0"/>
-            <a:ext cx="12191695" cy="960120"/>
+            <a:ext cx="12191695" cy="1170432"/>
           </a:xfrm>
           <a:prstGeom prst="rect">
             <a:avLst/>
@@ -5015,7 +4784,7 @@
         </p:nvSpPr>
         <p:spPr>
           <a:xfrm>
-            <a:off x="0" y="960120"/>
+            <a:off x="0" y="1170432"/>
             <a:ext cx="12191695" cy="41148"/>
           </a:xfrm>
           <a:prstGeom prst="rect">
@@ -5059,7 +4828,7 @@
         <p:spPr>
           <a:xfrm>
             <a:off x="457200" y="164592"/>
-            <a:ext cx="11277295" cy="502920"/>
+            <a:ext cx="11277295" cy="384048"/>
           </a:xfrm>
           <a:prstGeom prst="rect">
             <a:avLst/>
@@ -5079,7 +4848,7 @@
                 </a:solidFill>
                 <a:latin typeface="Calibri"/>
               </a:rPr>
-              <a:t>Taller PI (paso a paso)</a:t>
+              <a:t>Herramientas de hoy</a:t>
             </a:r>
           </a:p>
         </p:txBody>
@@ -5092,8 +4861,8 @@
         </p:nvSpPr>
         <p:spPr>
           <a:xfrm>
-            <a:off x="457200" y="1170432"/>
-            <a:ext cx="11277295" cy="5230368"/>
+            <a:off x="457200" y="566928"/>
+            <a:ext cx="11277295" cy="411480"/>
           </a:xfrm>
           <a:prstGeom prst="rect">
             <a:avLst/>
@@ -5106,137 +4875,837 @@
           </a:bodyPr>
           <a:lstStyle/>
           <a:p>
-            <a:pPr>
-              <a:spcAft>
-                <a:spcPts val="800"/>
-              </a:spcAft>
+            <a:r>
+              <a:rPr sz="1400" b="0" i="0">
+                <a:solidFill>
+                  <a:srgbClr val="B8D8EE"/>
+                </a:solidFill>
+                <a:latin typeface="Calibri"/>
+              </a:rPr>
+              <a:t>Gratis · navegador o free tier · sin cuenta de pago</a:t>
+            </a:r>
+          </a:p>
+        </p:txBody>
+      </p:sp>
+      <p:sp>
+        <p:nvSpPr>
+          <p:cNvPr id="6" name="Rounded Rectangle 5"/>
+          <p:cNvSpPr/>
+          <p:nvPr/>
+        </p:nvSpPr>
+        <p:spPr>
+          <a:xfrm>
+            <a:off x="457200" y="1591056"/>
+            <a:ext cx="3624986" cy="2299716"/>
+          </a:xfrm>
+          <a:prstGeom prst="roundRect">
+            <a:avLst>
+              <a:gd name="adj" fmla="val 12000"/>
+            </a:avLst>
+          </a:prstGeom>
+          <a:solidFill>
+            <a:srgbClr val="F2F2F2"/>
+          </a:solidFill>
+          <a:ln>
+            <a:noFill/>
+          </a:ln>
+        </p:spPr>
+        <p:style>
+          <a:lnRef idx="1">
+            <a:schemeClr val="accent1"/>
+          </a:lnRef>
+          <a:fillRef idx="3">
+            <a:schemeClr val="accent1"/>
+          </a:fillRef>
+          <a:effectRef idx="2">
+            <a:schemeClr val="accent1"/>
+          </a:effectRef>
+          <a:fontRef idx="minor">
+            <a:schemeClr val="lt1"/>
+          </a:fontRef>
+        </p:style>
+        <p:txBody>
+          <a:bodyPr rtlCol="0" anchor="ctr"/>
+          <a:lstStyle/>
+          <a:p>
+            <a:pPr algn="ctr"/>
+          </a:p>
+        </p:txBody>
+      </p:sp>
+      <p:sp>
+        <p:nvSpPr>
+          <p:cNvPr id="7" name="Rectangle 6"/>
+          <p:cNvSpPr/>
+          <p:nvPr/>
+        </p:nvSpPr>
+        <p:spPr>
+          <a:xfrm>
+            <a:off x="457200" y="1591056"/>
+            <a:ext cx="3624986" cy="64008"/>
+          </a:xfrm>
+          <a:prstGeom prst="rect">
+            <a:avLst/>
+          </a:prstGeom>
+          <a:solidFill>
+            <a:srgbClr val="095292"/>
+          </a:solidFill>
+          <a:ln>
+            <a:noFill/>
+          </a:ln>
+        </p:spPr>
+        <p:style>
+          <a:lnRef idx="1">
+            <a:schemeClr val="accent1"/>
+          </a:lnRef>
+          <a:fillRef idx="3">
+            <a:schemeClr val="accent1"/>
+          </a:fillRef>
+          <a:effectRef idx="2">
+            <a:schemeClr val="accent1"/>
+          </a:effectRef>
+          <a:fontRef idx="minor">
+            <a:schemeClr val="lt1"/>
+          </a:fontRef>
+        </p:style>
+        <p:txBody>
+          <a:bodyPr rtlCol="0" anchor="ctr"/>
+          <a:lstStyle/>
+          <a:p>
+            <a:pPr algn="ctr"/>
+          </a:p>
+        </p:txBody>
+      </p:sp>
+      <p:sp>
+        <p:nvSpPr>
+          <p:cNvPr id="8" name="Rectangle 7"/>
+          <p:cNvSpPr/>
+          <p:nvPr/>
+        </p:nvSpPr>
+        <p:spPr>
+          <a:xfrm>
+            <a:off x="457200" y="1655064"/>
+            <a:ext cx="3624986" cy="27432"/>
+          </a:xfrm>
+          <a:prstGeom prst="rect">
+            <a:avLst/>
+          </a:prstGeom>
+          <a:solidFill>
+            <a:srgbClr val="FFD000"/>
+          </a:solidFill>
+          <a:ln>
+            <a:noFill/>
+          </a:ln>
+        </p:spPr>
+        <p:style>
+          <a:lnRef idx="1">
+            <a:schemeClr val="accent1"/>
+          </a:lnRef>
+          <a:fillRef idx="3">
+            <a:schemeClr val="accent1"/>
+          </a:fillRef>
+          <a:effectRef idx="2">
+            <a:schemeClr val="accent1"/>
+          </a:effectRef>
+          <a:fontRef idx="minor">
+            <a:schemeClr val="lt1"/>
+          </a:fontRef>
+        </p:style>
+        <p:txBody>
+          <a:bodyPr rtlCol="0" anchor="ctr"/>
+          <a:lstStyle/>
+          <a:p>
+            <a:pPr algn="ctr"/>
+          </a:p>
+        </p:txBody>
+      </p:sp>
+      <p:pic>
+        <p:nvPicPr>
+          <p:cNvPr id="9" name="Picture 8" descr="killercoda.png"/>
+          <p:cNvPicPr>
+            <a:picLocks noChangeAspect="1"/>
+          </p:cNvPicPr>
+          <p:nvPr/>
+        </p:nvPicPr>
+        <p:blipFill>
+          <a:blip r:embed="rId2"/>
+          <a:stretch>
+            <a:fillRect/>
+          </a:stretch>
+        </p:blipFill>
+        <p:spPr>
+          <a:xfrm>
+            <a:off x="1659331" y="1847087"/>
+            <a:ext cx="1220724" cy="1220724"/>
+          </a:xfrm>
+          <a:prstGeom prst="rect">
+            <a:avLst/>
+          </a:prstGeom>
+        </p:spPr>
+      </p:pic>
+      <p:sp>
+        <p:nvSpPr>
+          <p:cNvPr id="10" name="TextBox 9"/>
+          <p:cNvSpPr txBox="1"/>
+          <p:nvPr/>
+        </p:nvSpPr>
+        <p:spPr>
+          <a:xfrm>
+            <a:off x="530352" y="3159251"/>
+            <a:ext cx="3478682" cy="621792"/>
+          </a:xfrm>
+          <a:prstGeom prst="rect">
+            <a:avLst/>
+          </a:prstGeom>
+          <a:noFill/>
+        </p:spPr>
+        <p:txBody>
+          <a:bodyPr wrap="square" anchor="t"/>
+          <a:lstStyle/>
+          <a:p>
+            <a:pPr algn="ctr"/>
+            <a:r>
+              <a:rPr sz="1300" b="1" i="0">
+                <a:solidFill>
+                  <a:srgbClr val="095292"/>
+                </a:solidFill>
+                <a:latin typeface="Calibri"/>
+              </a:rPr>
+              <a:t>Killercoda</a:t>
+            </a:r>
+          </a:p>
+          <a:p>
+            <a:pPr algn="ctr">
+              <a:spcBef>
+                <a:spcPts val="200"/>
+              </a:spcBef>
             </a:pPr>
             <a:r>
-              <a:rPr sz="1600" b="1" i="0">
-                <a:solidFill>
-                  <a:srgbClr val="333333"/>
-                </a:solidFill>
-                <a:latin typeface="Calibri"/>
-              </a:rPr>
-              <a:t>1.</a:t>
-            </a:r>
-            <a:r>
-              <a:rPr sz="1600" b="0" i="0">
-                <a:solidFill>
-                  <a:srgbClr val="333333"/>
-                </a:solidFill>
-                <a:latin typeface="Calibri"/>
-              </a:rPr>
-              <a:t> Paso 1: elija en la pregunta 8 cual servicio de su C4 Context va a contenedorizar y justifiquelo en 2 o 3 frases; escriba a continuacion el Dockerfile completo con la imagen base ligera y con etiqueta fija, el COPY de dependencias antes del COPY del codigo, el EXPOSE y el CMD, verificando que no copie el .env ni ninguna clave.</a:t>
-            </a:r>
-          </a:p>
-          <a:p>
-            <a:pPr>
-              <a:spcAft>
-                <a:spcPts val="800"/>
-              </a:spcAft>
+              <a:rPr sz="1000" b="0" i="0">
+                <a:solidFill>
+                  <a:srgbClr val="666666"/>
+                </a:solidFill>
+                <a:latin typeface="Calibri"/>
+              </a:rPr>
+              <a:t>Lab del dia · sesion 1 h</a:t>
+            </a:r>
+          </a:p>
+        </p:txBody>
+      </p:sp>
+      <p:sp>
+        <p:nvSpPr>
+          <p:cNvPr id="11" name="Rounded Rectangle 10"/>
+          <p:cNvSpPr/>
+          <p:nvPr/>
+        </p:nvSpPr>
+        <p:spPr>
+          <a:xfrm>
+            <a:off x="4283354" y="1591056"/>
+            <a:ext cx="3624986" cy="2299716"/>
+          </a:xfrm>
+          <a:prstGeom prst="roundRect">
+            <a:avLst>
+              <a:gd name="adj" fmla="val 12000"/>
+            </a:avLst>
+          </a:prstGeom>
+          <a:solidFill>
+            <a:srgbClr val="F2F2F2"/>
+          </a:solidFill>
+          <a:ln>
+            <a:noFill/>
+          </a:ln>
+        </p:spPr>
+        <p:style>
+          <a:lnRef idx="1">
+            <a:schemeClr val="accent1"/>
+          </a:lnRef>
+          <a:fillRef idx="3">
+            <a:schemeClr val="accent1"/>
+          </a:fillRef>
+          <a:effectRef idx="2">
+            <a:schemeClr val="accent1"/>
+          </a:effectRef>
+          <a:fontRef idx="minor">
+            <a:schemeClr val="lt1"/>
+          </a:fontRef>
+        </p:style>
+        <p:txBody>
+          <a:bodyPr rtlCol="0" anchor="ctr"/>
+          <a:lstStyle/>
+          <a:p>
+            <a:pPr algn="ctr"/>
+          </a:p>
+        </p:txBody>
+      </p:sp>
+      <p:sp>
+        <p:nvSpPr>
+          <p:cNvPr id="12" name="Rectangle 11"/>
+          <p:cNvSpPr/>
+          <p:nvPr/>
+        </p:nvSpPr>
+        <p:spPr>
+          <a:xfrm>
+            <a:off x="4283354" y="1591056"/>
+            <a:ext cx="3624986" cy="64008"/>
+          </a:xfrm>
+          <a:prstGeom prst="rect">
+            <a:avLst/>
+          </a:prstGeom>
+          <a:solidFill>
+            <a:srgbClr val="095292"/>
+          </a:solidFill>
+          <a:ln>
+            <a:noFill/>
+          </a:ln>
+        </p:spPr>
+        <p:style>
+          <a:lnRef idx="1">
+            <a:schemeClr val="accent1"/>
+          </a:lnRef>
+          <a:fillRef idx="3">
+            <a:schemeClr val="accent1"/>
+          </a:fillRef>
+          <a:effectRef idx="2">
+            <a:schemeClr val="accent1"/>
+          </a:effectRef>
+          <a:fontRef idx="minor">
+            <a:schemeClr val="lt1"/>
+          </a:fontRef>
+        </p:style>
+        <p:txBody>
+          <a:bodyPr rtlCol="0" anchor="ctr"/>
+          <a:lstStyle/>
+          <a:p>
+            <a:pPr algn="ctr"/>
+          </a:p>
+        </p:txBody>
+      </p:sp>
+      <p:sp>
+        <p:nvSpPr>
+          <p:cNvPr id="13" name="Rectangle 12"/>
+          <p:cNvSpPr/>
+          <p:nvPr/>
+        </p:nvSpPr>
+        <p:spPr>
+          <a:xfrm>
+            <a:off x="4283354" y="1655064"/>
+            <a:ext cx="3624986" cy="27432"/>
+          </a:xfrm>
+          <a:prstGeom prst="rect">
+            <a:avLst/>
+          </a:prstGeom>
+          <a:solidFill>
+            <a:srgbClr val="FFD000"/>
+          </a:solidFill>
+          <a:ln>
+            <a:noFill/>
+          </a:ln>
+        </p:spPr>
+        <p:style>
+          <a:lnRef idx="1">
+            <a:schemeClr val="accent1"/>
+          </a:lnRef>
+          <a:fillRef idx="3">
+            <a:schemeClr val="accent1"/>
+          </a:fillRef>
+          <a:effectRef idx="2">
+            <a:schemeClr val="accent1"/>
+          </a:effectRef>
+          <a:fontRef idx="minor">
+            <a:schemeClr val="lt1"/>
+          </a:fontRef>
+        </p:style>
+        <p:txBody>
+          <a:bodyPr rtlCol="0" anchor="ctr"/>
+          <a:lstStyle/>
+          <a:p>
+            <a:pPr algn="ctr"/>
+          </a:p>
+        </p:txBody>
+      </p:sp>
+      <p:pic>
+        <p:nvPicPr>
+          <p:cNvPr id="14" name="Picture 13" descr="labex.png"/>
+          <p:cNvPicPr>
+            <a:picLocks noChangeAspect="1"/>
+          </p:cNvPicPr>
+          <p:nvPr/>
+        </p:nvPicPr>
+        <p:blipFill>
+          <a:blip r:embed="rId3"/>
+          <a:stretch>
+            <a:fillRect/>
+          </a:stretch>
+        </p:blipFill>
+        <p:spPr>
+          <a:xfrm>
+            <a:off x="5485485" y="1847087"/>
+            <a:ext cx="1220724" cy="1220724"/>
+          </a:xfrm>
+          <a:prstGeom prst="rect">
+            <a:avLst/>
+          </a:prstGeom>
+        </p:spPr>
+      </p:pic>
+      <p:sp>
+        <p:nvSpPr>
+          <p:cNvPr id="15" name="TextBox 14"/>
+          <p:cNvSpPr txBox="1"/>
+          <p:nvPr/>
+        </p:nvSpPr>
+        <p:spPr>
+          <a:xfrm>
+            <a:off x="4356506" y="3159251"/>
+            <a:ext cx="3478682" cy="621792"/>
+          </a:xfrm>
+          <a:prstGeom prst="rect">
+            <a:avLst/>
+          </a:prstGeom>
+          <a:noFill/>
+        </p:spPr>
+        <p:txBody>
+          <a:bodyPr wrap="square" anchor="t"/>
+          <a:lstStyle/>
+          <a:p>
+            <a:pPr algn="ctr"/>
+            <a:r>
+              <a:rPr sz="1300" b="1" i="0">
+                <a:solidFill>
+                  <a:srgbClr val="095292"/>
+                </a:solidFill>
+                <a:latin typeface="Calibri"/>
+              </a:rPr>
+              <a:t>LabEx Docker Playground</a:t>
+            </a:r>
+          </a:p>
+          <a:p>
+            <a:pPr algn="ctr">
+              <a:spcBef>
+                <a:spcPts val="200"/>
+              </a:spcBef>
             </a:pPr>
             <a:r>
-              <a:rPr sz="1600" b="0" i="0">
-                <a:solidFill>
-                  <a:srgbClr val="333333"/>
-                </a:solidFill>
-                <a:latin typeface="Calibri"/>
-              </a:rPr>
-              <a:t>–   </a:t>
-            </a:r>
-            <a:r>
-              <a:rPr sz="1600" b="1" i="0">
-                <a:solidFill>
-                  <a:srgbClr val="333333"/>
-                </a:solidFill>
-                <a:latin typeface="Calibri"/>
-              </a:rPr>
-              <a:t>2.</a:t>
-            </a:r>
-            <a:r>
-              <a:rPr sz="1600" b="0" i="0">
-                <a:solidFill>
-                  <a:srgbClr val="333333"/>
-                </a:solidFill>
-                <a:latin typeface="Calibri"/>
-              </a:rPr>
-              <a:t> Paso 2: explique en la pregunta 9, sobre su propio Dockerfile, la diferencia entre imagen y contenedor, que instrucciones de SU archivo crean capa, por que el orden aprovecha el cache y en que se diferencia su contenedor de una maquina virtual; verifique que no escribio que un contenedor es una VM ligera.</a:t>
-            </a:r>
-          </a:p>
-          <a:p>
-            <a:pPr>
-              <a:spcAft>
-                <a:spcPts val="800"/>
-              </a:spcAft>
+              <a:rPr sz="1000" b="0" i="0">
+                <a:solidFill>
+                  <a:srgbClr val="666666"/>
+                </a:solidFill>
+                <a:latin typeface="Calibri"/>
+              </a:rPr>
+              <a:t>Alterna · 3 al dia</a:t>
+            </a:r>
+          </a:p>
+        </p:txBody>
+      </p:sp>
+      <p:sp>
+        <p:nvSpPr>
+          <p:cNvPr id="16" name="Rounded Rectangle 15"/>
+          <p:cNvSpPr/>
+          <p:nvPr/>
+        </p:nvSpPr>
+        <p:spPr>
+          <a:xfrm>
+            <a:off x="8109508" y="1591056"/>
+            <a:ext cx="3624986" cy="2299716"/>
+          </a:xfrm>
+          <a:prstGeom prst="roundRect">
+            <a:avLst>
+              <a:gd name="adj" fmla="val 12000"/>
+            </a:avLst>
+          </a:prstGeom>
+          <a:solidFill>
+            <a:srgbClr val="F2F2F2"/>
+          </a:solidFill>
+          <a:ln>
+            <a:noFill/>
+          </a:ln>
+        </p:spPr>
+        <p:style>
+          <a:lnRef idx="1">
+            <a:schemeClr val="accent1"/>
+          </a:lnRef>
+          <a:fillRef idx="3">
+            <a:schemeClr val="accent1"/>
+          </a:fillRef>
+          <a:effectRef idx="2">
+            <a:schemeClr val="accent1"/>
+          </a:effectRef>
+          <a:fontRef idx="minor">
+            <a:schemeClr val="lt1"/>
+          </a:fontRef>
+        </p:style>
+        <p:txBody>
+          <a:bodyPr rtlCol="0" anchor="ctr"/>
+          <a:lstStyle/>
+          <a:p>
+            <a:pPr algn="ctr"/>
+          </a:p>
+        </p:txBody>
+      </p:sp>
+      <p:sp>
+        <p:nvSpPr>
+          <p:cNvPr id="17" name="Rectangle 16"/>
+          <p:cNvSpPr/>
+          <p:nvPr/>
+        </p:nvSpPr>
+        <p:spPr>
+          <a:xfrm>
+            <a:off x="8109508" y="1591056"/>
+            <a:ext cx="3624986" cy="64008"/>
+          </a:xfrm>
+          <a:prstGeom prst="rect">
+            <a:avLst/>
+          </a:prstGeom>
+          <a:solidFill>
+            <a:srgbClr val="095292"/>
+          </a:solidFill>
+          <a:ln>
+            <a:noFill/>
+          </a:ln>
+        </p:spPr>
+        <p:style>
+          <a:lnRef idx="1">
+            <a:schemeClr val="accent1"/>
+          </a:lnRef>
+          <a:fillRef idx="3">
+            <a:schemeClr val="accent1"/>
+          </a:fillRef>
+          <a:effectRef idx="2">
+            <a:schemeClr val="accent1"/>
+          </a:effectRef>
+          <a:fontRef idx="minor">
+            <a:schemeClr val="lt1"/>
+          </a:fontRef>
+        </p:style>
+        <p:txBody>
+          <a:bodyPr rtlCol="0" anchor="ctr"/>
+          <a:lstStyle/>
+          <a:p>
+            <a:pPr algn="ctr"/>
+          </a:p>
+        </p:txBody>
+      </p:sp>
+      <p:sp>
+        <p:nvSpPr>
+          <p:cNvPr id="18" name="Rectangle 17"/>
+          <p:cNvSpPr/>
+          <p:nvPr/>
+        </p:nvSpPr>
+        <p:spPr>
+          <a:xfrm>
+            <a:off x="8109508" y="1655064"/>
+            <a:ext cx="3624986" cy="27432"/>
+          </a:xfrm>
+          <a:prstGeom prst="rect">
+            <a:avLst/>
+          </a:prstGeom>
+          <a:solidFill>
+            <a:srgbClr val="FFD000"/>
+          </a:solidFill>
+          <a:ln>
+            <a:noFill/>
+          </a:ln>
+        </p:spPr>
+        <p:style>
+          <a:lnRef idx="1">
+            <a:schemeClr val="accent1"/>
+          </a:lnRef>
+          <a:fillRef idx="3">
+            <a:schemeClr val="accent1"/>
+          </a:fillRef>
+          <a:effectRef idx="2">
+            <a:schemeClr val="accent1"/>
+          </a:effectRef>
+          <a:fontRef idx="minor">
+            <a:schemeClr val="lt1"/>
+          </a:fontRef>
+        </p:style>
+        <p:txBody>
+          <a:bodyPr rtlCol="0" anchor="ctr"/>
+          <a:lstStyle/>
+          <a:p>
+            <a:pPr algn="ctr"/>
+          </a:p>
+        </p:txBody>
+      </p:sp>
+      <p:pic>
+        <p:nvPicPr>
+          <p:cNvPr id="19" name="Picture 18" descr="google_docs.png"/>
+          <p:cNvPicPr>
+            <a:picLocks noChangeAspect="1"/>
+          </p:cNvPicPr>
+          <p:nvPr/>
+        </p:nvPicPr>
+        <p:blipFill>
+          <a:blip r:embed="rId4"/>
+          <a:stretch>
+            <a:fillRect/>
+          </a:stretch>
+        </p:blipFill>
+        <p:spPr>
+          <a:xfrm>
+            <a:off x="9311640" y="1847087"/>
+            <a:ext cx="1220724" cy="1220724"/>
+          </a:xfrm>
+          <a:prstGeom prst="rect">
+            <a:avLst/>
+          </a:prstGeom>
+        </p:spPr>
+      </p:pic>
+      <p:sp>
+        <p:nvSpPr>
+          <p:cNvPr id="20" name="TextBox 19"/>
+          <p:cNvSpPr txBox="1"/>
+          <p:nvPr/>
+        </p:nvSpPr>
+        <p:spPr>
+          <a:xfrm>
+            <a:off x="8182660" y="3159251"/>
+            <a:ext cx="3478682" cy="621792"/>
+          </a:xfrm>
+          <a:prstGeom prst="rect">
+            <a:avLst/>
+          </a:prstGeom>
+          <a:noFill/>
+        </p:spPr>
+        <p:txBody>
+          <a:bodyPr wrap="square" anchor="t"/>
+          <a:lstStyle/>
+          <a:p>
+            <a:pPr algn="ctr"/>
+            <a:r>
+              <a:rPr sz="1300" b="1" i="0">
+                <a:solidFill>
+                  <a:srgbClr val="095292"/>
+                </a:solidFill>
+                <a:latin typeface="Calibri"/>
+              </a:rPr>
+              <a:t>Google Docs</a:t>
+            </a:r>
+          </a:p>
+          <a:p>
+            <a:pPr algn="ctr">
+              <a:spcBef>
+                <a:spcPts val="200"/>
+              </a:spcBef>
             </a:pPr>
             <a:r>
-              <a:rPr sz="1600" b="0" i="0">
-                <a:solidFill>
-                  <a:srgbClr val="333333"/>
-                </a:solidFill>
-                <a:latin typeface="Calibri"/>
-              </a:rPr>
-              <a:t>–   </a:t>
-            </a:r>
-            <a:r>
-              <a:rPr sz="1600" b="1" i="0">
-                <a:solidFill>
-                  <a:srgbClr val="333333"/>
-                </a:solidFill>
-                <a:latin typeface="Calibri"/>
-              </a:rPr>
-              <a:t>3.</a:t>
-            </a:r>
-            <a:r>
-              <a:rPr sz="1600" b="0" i="0">
-                <a:solidFill>
-                  <a:srgbClr val="333333"/>
-                </a:solidFill>
-                <a:latin typeface="Calibri"/>
-              </a:rPr>
-              <a:t> Paso 3: describa en la pregunta 10 el ciclo completo con los comandos exactos de build y de run, explicando que lado del mapeo de puertos es el anfitrion y que lado el contenedor, y cierre con el contrato del endpoint de salud (ruta, codigo de estado y cuerpo); verifique que el puerto sea el mismo que puso en el EXPOSE.</a:t>
-            </a:r>
-          </a:p>
-          <a:p>
-            <a:pPr>
-              <a:spcAft>
-                <a:spcPts val="800"/>
-              </a:spcAft>
+              <a:rPr sz="1000" b="0" i="0">
+                <a:solidFill>
+                  <a:srgbClr val="666666"/>
+                </a:solidFill>
+                <a:latin typeface="Calibri"/>
+              </a:rPr>
+              <a:t>Informe PI</a:t>
+            </a:r>
+          </a:p>
+        </p:txBody>
+      </p:sp>
+      <p:sp>
+        <p:nvSpPr>
+          <p:cNvPr id="21" name="Rounded Rectangle 20"/>
+          <p:cNvSpPr/>
+          <p:nvPr/>
+        </p:nvSpPr>
+        <p:spPr>
+          <a:xfrm>
+            <a:off x="4283354" y="4055364"/>
+            <a:ext cx="3624986" cy="2299716"/>
+          </a:xfrm>
+          <a:prstGeom prst="roundRect">
+            <a:avLst>
+              <a:gd name="adj" fmla="val 12000"/>
+            </a:avLst>
+          </a:prstGeom>
+          <a:solidFill>
+            <a:srgbClr val="F2F2F2"/>
+          </a:solidFill>
+          <a:ln>
+            <a:noFill/>
+          </a:ln>
+        </p:spPr>
+        <p:style>
+          <a:lnRef idx="1">
+            <a:schemeClr val="accent1"/>
+          </a:lnRef>
+          <a:fillRef idx="3">
+            <a:schemeClr val="accent1"/>
+          </a:fillRef>
+          <a:effectRef idx="2">
+            <a:schemeClr val="accent1"/>
+          </a:effectRef>
+          <a:fontRef idx="minor">
+            <a:schemeClr val="lt1"/>
+          </a:fontRef>
+        </p:style>
+        <p:txBody>
+          <a:bodyPr rtlCol="0" anchor="ctr"/>
+          <a:lstStyle/>
+          <a:p>
+            <a:pPr algn="ctr"/>
+          </a:p>
+        </p:txBody>
+      </p:sp>
+      <p:sp>
+        <p:nvSpPr>
+          <p:cNvPr id="22" name="Rectangle 21"/>
+          <p:cNvSpPr/>
+          <p:nvPr/>
+        </p:nvSpPr>
+        <p:spPr>
+          <a:xfrm>
+            <a:off x="4283354" y="4055364"/>
+            <a:ext cx="3624986" cy="64008"/>
+          </a:xfrm>
+          <a:prstGeom prst="rect">
+            <a:avLst/>
+          </a:prstGeom>
+          <a:solidFill>
+            <a:srgbClr val="095292"/>
+          </a:solidFill>
+          <a:ln>
+            <a:noFill/>
+          </a:ln>
+        </p:spPr>
+        <p:style>
+          <a:lnRef idx="1">
+            <a:schemeClr val="accent1"/>
+          </a:lnRef>
+          <a:fillRef idx="3">
+            <a:schemeClr val="accent1"/>
+          </a:fillRef>
+          <a:effectRef idx="2">
+            <a:schemeClr val="accent1"/>
+          </a:effectRef>
+          <a:fontRef idx="minor">
+            <a:schemeClr val="lt1"/>
+          </a:fontRef>
+        </p:style>
+        <p:txBody>
+          <a:bodyPr rtlCol="0" anchor="ctr"/>
+          <a:lstStyle/>
+          <a:p>
+            <a:pPr algn="ctr"/>
+          </a:p>
+        </p:txBody>
+      </p:sp>
+      <p:sp>
+        <p:nvSpPr>
+          <p:cNvPr id="23" name="Rectangle 22"/>
+          <p:cNvSpPr/>
+          <p:nvPr/>
+        </p:nvSpPr>
+        <p:spPr>
+          <a:xfrm>
+            <a:off x="4283354" y="4119372"/>
+            <a:ext cx="3624986" cy="27432"/>
+          </a:xfrm>
+          <a:prstGeom prst="rect">
+            <a:avLst/>
+          </a:prstGeom>
+          <a:solidFill>
+            <a:srgbClr val="FFD000"/>
+          </a:solidFill>
+          <a:ln>
+            <a:noFill/>
+          </a:ln>
+        </p:spPr>
+        <p:style>
+          <a:lnRef idx="1">
+            <a:schemeClr val="accent1"/>
+          </a:lnRef>
+          <a:fillRef idx="3">
+            <a:schemeClr val="accent1"/>
+          </a:fillRef>
+          <a:effectRef idx="2">
+            <a:schemeClr val="accent1"/>
+          </a:effectRef>
+          <a:fontRef idx="minor">
+            <a:schemeClr val="lt1"/>
+          </a:fontRef>
+        </p:style>
+        <p:txBody>
+          <a:bodyPr rtlCol="0" anchor="ctr"/>
+          <a:lstStyle/>
+          <a:p>
+            <a:pPr algn="ctr"/>
+          </a:p>
+        </p:txBody>
+      </p:sp>
+      <p:pic>
+        <p:nvPicPr>
+          <p:cNvPr id="24" name="Picture 23" descr="examlab.png"/>
+          <p:cNvPicPr>
+            <a:picLocks noChangeAspect="1"/>
+          </p:cNvPicPr>
+          <p:nvPr/>
+        </p:nvPicPr>
+        <p:blipFill>
+          <a:blip r:embed="rId5"/>
+          <a:stretch>
+            <a:fillRect/>
+          </a:stretch>
+        </p:blipFill>
+        <p:spPr>
+          <a:xfrm>
+            <a:off x="5485485" y="4311396"/>
+            <a:ext cx="1220724" cy="1220724"/>
+          </a:xfrm>
+          <a:prstGeom prst="rect">
+            <a:avLst/>
+          </a:prstGeom>
+        </p:spPr>
+      </p:pic>
+      <p:sp>
+        <p:nvSpPr>
+          <p:cNvPr id="25" name="TextBox 24"/>
+          <p:cNvSpPr txBox="1"/>
+          <p:nvPr/>
+        </p:nvSpPr>
+        <p:spPr>
+          <a:xfrm>
+            <a:off x="4356506" y="5623560"/>
+            <a:ext cx="3478682" cy="621792"/>
+          </a:xfrm>
+          <a:prstGeom prst="rect">
+            <a:avLst/>
+          </a:prstGeom>
+          <a:noFill/>
+        </p:spPr>
+        <p:txBody>
+          <a:bodyPr wrap="square" anchor="t"/>
+          <a:lstStyle/>
+          <a:p>
+            <a:pPr algn="ctr"/>
+            <a:r>
+              <a:rPr sz="1300" b="1" i="0">
+                <a:solidFill>
+                  <a:srgbClr val="095292"/>
+                </a:solidFill>
+                <a:latin typeface="Calibri"/>
+              </a:rPr>
+              <a:t>ExamLab</a:t>
+            </a:r>
+          </a:p>
+          <a:p>
+            <a:pPr algn="ctr">
+              <a:spcBef>
+                <a:spcPts val="200"/>
+              </a:spcBef>
             </a:pPr>
             <a:r>
-              <a:rPr sz="1600" b="0" i="0">
-                <a:solidFill>
-                  <a:srgbClr val="333333"/>
-                </a:solidFill>
-                <a:latin typeface="Calibri"/>
-              </a:rPr>
-              <a:t>–   </a:t>
-            </a:r>
-            <a:r>
-              <a:rPr sz="1600" b="1" i="0">
-                <a:solidFill>
-                  <a:srgbClr val="333333"/>
-                </a:solidFill>
-                <a:latin typeface="Calibri"/>
-              </a:rPr>
-              <a:t>4.</a:t>
-            </a:r>
-            <a:r>
-              <a:rPr sz="1600" b="0" i="0">
-                <a:solidFill>
-                  <a:srgbClr val="333333"/>
-                </a:solidFill>
-                <a:latin typeface="Calibri"/>
-              </a:rPr>
-              <a:t> Paso 4: ejecute de verdad el ciclo en Killercoda y reporte en la pregunta 11 la tabla de 5 filas con la salida real pegada textualmente, la descripcion de la captura con prompt, docker ps y hora del sistema, y una fila de incidente; recuerde que la sesion caduca a 1 hora, asi que capture la evidencia ANTES de cerrarla.</a:t>
-            </a:r>
-          </a:p>
-        </p:txBody>
-      </p:sp>
-      <p:sp>
-        <p:nvSpPr>
-          <p:cNvPr id="6" name="TextBox 5"/>
+              <a:rPr sz="1000" b="0" i="0">
+                <a:solidFill>
+                  <a:srgbClr val="666666"/>
+                </a:solidFill>
+                <a:latin typeface="Calibri"/>
+              </a:rPr>
+              <a:t>Donde se entrega</a:t>
+            </a:r>
+          </a:p>
+        </p:txBody>
+      </p:sp>
+      <p:sp>
+        <p:nvSpPr>
+          <p:cNvPr id="26" name="TextBox 25"/>
           <p:cNvSpPr txBox="1"/>
           <p:nvPr/>
         </p:nvSpPr>
@@ -5410,109 +5879,21 @@
                 </a:solidFill>
                 <a:latin typeface="Calibri"/>
               </a:rPr>
-              <a:t>Para continuar (PI)</a:t>
-            </a:r>
-          </a:p>
-        </p:txBody>
-      </p:sp>
-      <p:sp>
-        <p:nvSpPr>
-          <p:cNvPr id="5" name="Rounded Rectangle 4"/>
-          <p:cNvSpPr/>
-          <p:nvPr/>
-        </p:nvSpPr>
-        <p:spPr>
-          <a:xfrm>
-            <a:off x="457200" y="1261872"/>
-            <a:ext cx="11277295" cy="1051560"/>
-          </a:xfrm>
-          <a:prstGeom prst="roundRect">
-            <a:avLst>
-              <a:gd name="adj" fmla="val 12000"/>
-            </a:avLst>
-          </a:prstGeom>
-          <a:solidFill>
-            <a:srgbClr val="E8F4FA"/>
-          </a:solidFill>
-          <a:ln>
-            <a:noFill/>
-          </a:ln>
-        </p:spPr>
-        <p:style>
-          <a:lnRef idx="1">
-            <a:schemeClr val="accent1"/>
-          </a:lnRef>
-          <a:fillRef idx="3">
-            <a:schemeClr val="accent1"/>
-          </a:fillRef>
-          <a:effectRef idx="2">
-            <a:schemeClr val="accent1"/>
-          </a:effectRef>
-          <a:fontRef idx="minor">
-            <a:schemeClr val="lt1"/>
-          </a:fontRef>
-        </p:style>
-        <p:txBody>
-          <a:bodyPr rtlCol="0" anchor="ctr"/>
-          <a:lstStyle/>
-          <a:p>
-            <a:pPr algn="ctr"/>
-          </a:p>
-        </p:txBody>
-      </p:sp>
-      <p:sp>
-        <p:nvSpPr>
-          <p:cNvPr id="6" name="Rectangle 5"/>
-          <p:cNvSpPr/>
-          <p:nvPr/>
-        </p:nvSpPr>
-        <p:spPr>
-          <a:xfrm>
-            <a:off x="457200" y="1261872"/>
-            <a:ext cx="128016" cy="1051560"/>
-          </a:xfrm>
-          <a:prstGeom prst="rect">
-            <a:avLst/>
-          </a:prstGeom>
-          <a:solidFill>
-            <a:srgbClr val="269CCB"/>
-          </a:solidFill>
-          <a:ln>
-            <a:noFill/>
-          </a:ln>
-        </p:spPr>
-        <p:style>
-          <a:lnRef idx="1">
-            <a:schemeClr val="accent1"/>
-          </a:lnRef>
-          <a:fillRef idx="3">
-            <a:schemeClr val="accent1"/>
-          </a:fillRef>
-          <a:effectRef idx="2">
-            <a:schemeClr val="accent1"/>
-          </a:effectRef>
-          <a:fontRef idx="minor">
-            <a:schemeClr val="lt1"/>
-          </a:fontRef>
-        </p:style>
-        <p:txBody>
-          <a:bodyPr rtlCol="0" anchor="ctr"/>
-          <a:lstStyle/>
-          <a:p>
-            <a:pPr algn="ctr"/>
-          </a:p>
-        </p:txBody>
-      </p:sp>
-      <p:sp>
-        <p:nvSpPr>
-          <p:cNvPr id="7" name="TextBox 6"/>
+              <a:t>Taller PI (paso a paso)</a:t>
+            </a:r>
+          </a:p>
+        </p:txBody>
+      </p:sp>
+      <p:sp>
+        <p:nvSpPr>
+          <p:cNvPr id="5" name="TextBox 4"/>
           <p:cNvSpPr txBox="1"/>
           <p:nvPr/>
         </p:nvSpPr>
         <p:spPr>
           <a:xfrm>
-            <a:off x="777240" y="1399031"/>
-            <a:ext cx="10774375" cy="822959"/>
+            <a:off x="457200" y="1170432"/>
+            <a:ext cx="11277295" cy="5230368"/>
           </a:xfrm>
           <a:prstGeom prst="rect">
             <a:avLst/>
@@ -5525,313 +5906,137 @@
           </a:bodyPr>
           <a:lstStyle/>
           <a:p>
-            <a:r>
-              <a:rPr sz="1200" b="1" i="0">
-                <a:solidFill>
-                  <a:srgbClr val="269CCB"/>
-                </a:solidFill>
-                <a:latin typeface="Calibri"/>
-              </a:rPr>
-              <a:t>Info</a:t>
-            </a:r>
-          </a:p>
-          <a:p>
             <a:pPr>
-              <a:spcBef>
-                <a:spcPts val="400"/>
-              </a:spcBef>
+              <a:spcAft>
+                <a:spcPts val="800"/>
+              </a:spcAft>
             </a:pPr>
             <a:r>
-              <a:rPr sz="1400" b="0" i="0">
-                <a:solidFill>
-                  <a:srgbClr val="333333"/>
-                </a:solidFill>
-                <a:latin typeface="Calibri"/>
-              </a:rPr>
-              <a:t>Entregable: Dockerfile (+ compose opcional) + captura/enlace lab navegador</a:t>
-            </a:r>
-          </a:p>
-        </p:txBody>
-      </p:sp>
-      <p:sp>
-        <p:nvSpPr>
-          <p:cNvPr id="8" name="Rounded Rectangle 7"/>
-          <p:cNvSpPr/>
-          <p:nvPr/>
-        </p:nvSpPr>
-        <p:spPr>
-          <a:xfrm>
-            <a:off x="457200" y="2478024"/>
-            <a:ext cx="11277295" cy="1051560"/>
-          </a:xfrm>
-          <a:prstGeom prst="roundRect">
-            <a:avLst>
-              <a:gd name="adj" fmla="val 12000"/>
-            </a:avLst>
-          </a:prstGeom>
-          <a:solidFill>
-            <a:srgbClr val="FFF8E1"/>
-          </a:solidFill>
-          <a:ln>
-            <a:noFill/>
-          </a:ln>
-        </p:spPr>
-        <p:style>
-          <a:lnRef idx="1">
-            <a:schemeClr val="accent1"/>
-          </a:lnRef>
-          <a:fillRef idx="3">
-            <a:schemeClr val="accent1"/>
-          </a:fillRef>
-          <a:effectRef idx="2">
-            <a:schemeClr val="accent1"/>
-          </a:effectRef>
-          <a:fontRef idx="minor">
-            <a:schemeClr val="lt1"/>
-          </a:fontRef>
-        </p:style>
-        <p:txBody>
-          <a:bodyPr rtlCol="0" anchor="ctr"/>
-          <a:lstStyle/>
-          <a:p>
-            <a:pPr algn="ctr"/>
-          </a:p>
-        </p:txBody>
-      </p:sp>
-      <p:sp>
-        <p:nvSpPr>
-          <p:cNvPr id="9" name="Rectangle 8"/>
-          <p:cNvSpPr/>
-          <p:nvPr/>
-        </p:nvSpPr>
-        <p:spPr>
-          <a:xfrm>
-            <a:off x="457200" y="2478024"/>
-            <a:ext cx="128016" cy="1051560"/>
-          </a:xfrm>
-          <a:prstGeom prst="rect">
-            <a:avLst/>
-          </a:prstGeom>
-          <a:solidFill>
-            <a:srgbClr val="FFD000"/>
-          </a:solidFill>
-          <a:ln>
-            <a:noFill/>
-          </a:ln>
-        </p:spPr>
-        <p:style>
-          <a:lnRef idx="1">
-            <a:schemeClr val="accent1"/>
-          </a:lnRef>
-          <a:fillRef idx="3">
-            <a:schemeClr val="accent1"/>
-          </a:fillRef>
-          <a:effectRef idx="2">
-            <a:schemeClr val="accent1"/>
-          </a:effectRef>
-          <a:fontRef idx="minor">
-            <a:schemeClr val="lt1"/>
-          </a:fontRef>
-        </p:style>
-        <p:txBody>
-          <a:bodyPr rtlCol="0" anchor="ctr"/>
-          <a:lstStyle/>
-          <a:p>
-            <a:pPr algn="ctr"/>
-          </a:p>
-        </p:txBody>
-      </p:sp>
-      <p:sp>
-        <p:nvSpPr>
-          <p:cNvPr id="10" name="TextBox 9"/>
-          <p:cNvSpPr txBox="1"/>
-          <p:nvPr/>
-        </p:nvSpPr>
-        <p:spPr>
-          <a:xfrm>
-            <a:off x="777240" y="2615184"/>
-            <a:ext cx="10774375" cy="822959"/>
-          </a:xfrm>
-          <a:prstGeom prst="rect">
-            <a:avLst/>
-          </a:prstGeom>
-          <a:noFill/>
-        </p:spPr>
-        <p:txBody>
-          <a:bodyPr wrap="square">
-            <a:spAutoFit/>
-          </a:bodyPr>
-          <a:lstStyle/>
-          <a:p>
-            <a:r>
-              <a:rPr sz="1200" b="1" i="0">
-                <a:solidFill>
-                  <a:srgbClr val="FFD000"/>
-                </a:solidFill>
-                <a:latin typeface="Calibri"/>
-              </a:rPr>
-              <a:t>Aclaración</a:t>
+              <a:rPr sz="1600" b="1" i="0">
+                <a:solidFill>
+                  <a:srgbClr val="333333"/>
+                </a:solidFill>
+                <a:latin typeface="Calibri"/>
+              </a:rPr>
+              <a:t>1.</a:t>
+            </a:r>
+            <a:r>
+              <a:rPr sz="1600" b="0" i="0">
+                <a:solidFill>
+                  <a:srgbClr val="333333"/>
+                </a:solidFill>
+                <a:latin typeface="Calibri"/>
+              </a:rPr>
+              <a:t> Paso 1: elija en la pregunta 8 cual servicio de su C4 Context va a contenedorizar y justifiquelo en 2 o 3 frases; escriba a continuacion el Dockerfile completo con la imagen base ligera y con etiqueta fija, el COPY de dependencias antes del COPY del codigo, el EXPOSE y el CMD, verificando que no copie el .env ni ninguna clave.</a:t>
             </a:r>
           </a:p>
           <a:p>
             <a:pPr>
-              <a:spcBef>
-                <a:spcPts val="400"/>
-              </a:spcBef>
+              <a:spcAft>
+                <a:spcPts val="800"/>
+              </a:spcAft>
             </a:pPr>
             <a:r>
-              <a:rPr sz="1400" b="0" i="0">
-                <a:solidFill>
-                  <a:srgbClr val="333333"/>
-                </a:solidFill>
-                <a:latin typeface="Calibri"/>
-              </a:rPr>
-              <a:t>Subir evidencias al paquete CloudLite (Drive/repo) y a ExamLab (https://uniaj.examlab.workers.dev/) domingo 23:59.</a:t>
-            </a:r>
-          </a:p>
-        </p:txBody>
-      </p:sp>
-      <p:sp>
-        <p:nvSpPr>
-          <p:cNvPr id="11" name="Rounded Rectangle 10"/>
-          <p:cNvSpPr/>
-          <p:nvPr/>
-        </p:nvSpPr>
-        <p:spPr>
-          <a:xfrm>
-            <a:off x="457200" y="3694176"/>
-            <a:ext cx="11277295" cy="1051560"/>
-          </a:xfrm>
-          <a:prstGeom prst="roundRect">
-            <a:avLst>
-              <a:gd name="adj" fmla="val 12000"/>
-            </a:avLst>
-          </a:prstGeom>
-          <a:solidFill>
-            <a:srgbClr val="FBE4E4"/>
-          </a:solidFill>
-          <a:ln>
-            <a:noFill/>
-          </a:ln>
-        </p:spPr>
-        <p:style>
-          <a:lnRef idx="1">
-            <a:schemeClr val="accent1"/>
-          </a:lnRef>
-          <a:fillRef idx="3">
-            <a:schemeClr val="accent1"/>
-          </a:fillRef>
-          <a:effectRef idx="2">
-            <a:schemeClr val="accent1"/>
-          </a:effectRef>
-          <a:fontRef idx="minor">
-            <a:schemeClr val="lt1"/>
-          </a:fontRef>
-        </p:style>
-        <p:txBody>
-          <a:bodyPr rtlCol="0" anchor="ctr"/>
-          <a:lstStyle/>
-          <a:p>
-            <a:pPr algn="ctr"/>
-          </a:p>
-        </p:txBody>
-      </p:sp>
-      <p:sp>
-        <p:nvSpPr>
-          <p:cNvPr id="12" name="Rectangle 11"/>
-          <p:cNvSpPr/>
-          <p:nvPr/>
-        </p:nvSpPr>
-        <p:spPr>
-          <a:xfrm>
-            <a:off x="457200" y="3694176"/>
-            <a:ext cx="128016" cy="1051560"/>
-          </a:xfrm>
-          <a:prstGeom prst="rect">
-            <a:avLst/>
-          </a:prstGeom>
-          <a:solidFill>
-            <a:srgbClr val="A02030"/>
-          </a:solidFill>
-          <a:ln>
-            <a:noFill/>
-          </a:ln>
-        </p:spPr>
-        <p:style>
-          <a:lnRef idx="1">
-            <a:schemeClr val="accent1"/>
-          </a:lnRef>
-          <a:fillRef idx="3">
-            <a:schemeClr val="accent1"/>
-          </a:fillRef>
-          <a:effectRef idx="2">
-            <a:schemeClr val="accent1"/>
-          </a:effectRef>
-          <a:fontRef idx="minor">
-            <a:schemeClr val="lt1"/>
-          </a:fontRef>
-        </p:style>
-        <p:txBody>
-          <a:bodyPr rtlCol="0" anchor="ctr"/>
-          <a:lstStyle/>
-          <a:p>
-            <a:pPr algn="ctr"/>
-          </a:p>
-        </p:txBody>
-      </p:sp>
-      <p:sp>
-        <p:nvSpPr>
-          <p:cNvPr id="13" name="TextBox 12"/>
-          <p:cNvSpPr txBox="1"/>
-          <p:nvPr/>
-        </p:nvSpPr>
-        <p:spPr>
-          <a:xfrm>
-            <a:off x="777240" y="3831336"/>
-            <a:ext cx="10774375" cy="822959"/>
-          </a:xfrm>
-          <a:prstGeom prst="rect">
-            <a:avLst/>
-          </a:prstGeom>
-          <a:noFill/>
-        </p:spPr>
-        <p:txBody>
-          <a:bodyPr wrap="square">
-            <a:spAutoFit/>
-          </a:bodyPr>
-          <a:lstStyle/>
-          <a:p>
-            <a:r>
-              <a:rPr sz="1200" b="1" i="0">
-                <a:solidFill>
-                  <a:srgbClr val="A02030"/>
-                </a:solidFill>
-                <a:latin typeface="Calibri"/>
-              </a:rPr>
-              <a:t>Atención</a:t>
+              <a:rPr sz="1600" b="0" i="0">
+                <a:solidFill>
+                  <a:srgbClr val="333333"/>
+                </a:solidFill>
+                <a:latin typeface="Calibri"/>
+              </a:rPr>
+              <a:t>–   </a:t>
+            </a:r>
+            <a:r>
+              <a:rPr sz="1600" b="1" i="0">
+                <a:solidFill>
+                  <a:srgbClr val="333333"/>
+                </a:solidFill>
+                <a:latin typeface="Calibri"/>
+              </a:rPr>
+              <a:t>2.</a:t>
+            </a:r>
+            <a:r>
+              <a:rPr sz="1600" b="0" i="0">
+                <a:solidFill>
+                  <a:srgbClr val="333333"/>
+                </a:solidFill>
+                <a:latin typeface="Calibri"/>
+              </a:rPr>
+              <a:t> Paso 2: explique en la pregunta 9, sobre su propio Dockerfile, la diferencia entre imagen y contenedor, que instrucciones de SU archivo crean capa, por que el orden aprovecha el cache y en que se diferencia su contenedor de una maquina virtual; verifique que no escribio que un contenedor es una VM ligera.</a:t>
             </a:r>
           </a:p>
           <a:p>
             <a:pPr>
-              <a:spcBef>
-                <a:spcPts val="400"/>
-              </a:spcBef>
+              <a:spcAft>
+                <a:spcPts val="800"/>
+              </a:spcAft>
             </a:pPr>
             <a:r>
-              <a:rPr sz="1400" b="0" i="0">
-                <a:solidFill>
-                  <a:srgbClr val="333333"/>
-                </a:solidFill>
-                <a:latin typeface="Calibri"/>
-              </a:rPr>
-              <a:t>Sin cloud de pago ni instalaciones obligatorias de hipervisores/Docker Desktop.</a:t>
-            </a:r>
-          </a:p>
-        </p:txBody>
-      </p:sp>
-      <p:sp>
-        <p:nvSpPr>
-          <p:cNvPr id="14" name="TextBox 13"/>
+              <a:rPr sz="1600" b="0" i="0">
+                <a:solidFill>
+                  <a:srgbClr val="333333"/>
+                </a:solidFill>
+                <a:latin typeface="Calibri"/>
+              </a:rPr>
+              <a:t>–   </a:t>
+            </a:r>
+            <a:r>
+              <a:rPr sz="1600" b="1" i="0">
+                <a:solidFill>
+                  <a:srgbClr val="333333"/>
+                </a:solidFill>
+                <a:latin typeface="Calibri"/>
+              </a:rPr>
+              <a:t>3.</a:t>
+            </a:r>
+            <a:r>
+              <a:rPr sz="1600" b="0" i="0">
+                <a:solidFill>
+                  <a:srgbClr val="333333"/>
+                </a:solidFill>
+                <a:latin typeface="Calibri"/>
+              </a:rPr>
+              <a:t> Paso 3: describa en la pregunta 10 el ciclo completo con los comandos exactos de build y de run, explicando que lado del mapeo de puertos es el anfitrion y que lado el contenedor, y cierre con el contrato del endpoint de salud (ruta, codigo de estado y cuerpo); verifique que el puerto sea el mismo que puso en el EXPOSE.</a:t>
+            </a:r>
+          </a:p>
+          <a:p>
+            <a:pPr>
+              <a:spcAft>
+                <a:spcPts val="800"/>
+              </a:spcAft>
+            </a:pPr>
+            <a:r>
+              <a:rPr sz="1600" b="0" i="0">
+                <a:solidFill>
+                  <a:srgbClr val="333333"/>
+                </a:solidFill>
+                <a:latin typeface="Calibri"/>
+              </a:rPr>
+              <a:t>–   </a:t>
+            </a:r>
+            <a:r>
+              <a:rPr sz="1600" b="1" i="0">
+                <a:solidFill>
+                  <a:srgbClr val="333333"/>
+                </a:solidFill>
+                <a:latin typeface="Calibri"/>
+              </a:rPr>
+              <a:t>4.</a:t>
+            </a:r>
+            <a:r>
+              <a:rPr sz="1600" b="0" i="0">
+                <a:solidFill>
+                  <a:srgbClr val="333333"/>
+                </a:solidFill>
+                <a:latin typeface="Calibri"/>
+              </a:rPr>
+              <a:t> Paso 4: ejecute de verdad el ciclo en Killercoda y reporte en la pregunta 11 la tabla de 5 filas con la salida real pegada textualmente, la descripcion de la captura con prompt, docker ps y hora del sistema, y una fila de incidente; recuerde que la sesion caduca a 1 hora, asi que capture la evidencia ANTES de cerrarla.</a:t>
+            </a:r>
+          </a:p>
+        </p:txBody>
+      </p:sp>
+      <p:sp>
+        <p:nvSpPr>
+          <p:cNvPr id="6" name="TextBox 5"/>
           <p:cNvSpPr txBox="1"/>
           <p:nvPr/>
         </p:nvSpPr>
@@ -5899,6 +6104,601 @@
         <p:spPr>
           <a:xfrm>
             <a:off x="0" y="0"/>
+            <a:ext cx="12191695" cy="960120"/>
+          </a:xfrm>
+          <a:prstGeom prst="rect">
+            <a:avLst/>
+          </a:prstGeom>
+          <a:solidFill>
+            <a:srgbClr val="095292"/>
+          </a:solidFill>
+          <a:ln>
+            <a:noFill/>
+          </a:ln>
+        </p:spPr>
+        <p:style>
+          <a:lnRef idx="1">
+            <a:schemeClr val="accent1"/>
+          </a:lnRef>
+          <a:fillRef idx="3">
+            <a:schemeClr val="accent1"/>
+          </a:fillRef>
+          <a:effectRef idx="2">
+            <a:schemeClr val="accent1"/>
+          </a:effectRef>
+          <a:fontRef idx="minor">
+            <a:schemeClr val="lt1"/>
+          </a:fontRef>
+        </p:style>
+        <p:txBody>
+          <a:bodyPr rtlCol="0" anchor="ctr"/>
+          <a:lstStyle/>
+          <a:p>
+            <a:pPr algn="ctr"/>
+          </a:p>
+        </p:txBody>
+      </p:sp>
+      <p:sp>
+        <p:nvSpPr>
+          <p:cNvPr id="3" name="Rectangle 2"/>
+          <p:cNvSpPr/>
+          <p:nvPr/>
+        </p:nvSpPr>
+        <p:spPr>
+          <a:xfrm>
+            <a:off x="0" y="960120"/>
+            <a:ext cx="12191695" cy="41148"/>
+          </a:xfrm>
+          <a:prstGeom prst="rect">
+            <a:avLst/>
+          </a:prstGeom>
+          <a:solidFill>
+            <a:srgbClr val="FFD000"/>
+          </a:solidFill>
+          <a:ln>
+            <a:noFill/>
+          </a:ln>
+        </p:spPr>
+        <p:style>
+          <a:lnRef idx="1">
+            <a:schemeClr val="accent1"/>
+          </a:lnRef>
+          <a:fillRef idx="3">
+            <a:schemeClr val="accent1"/>
+          </a:fillRef>
+          <a:effectRef idx="2">
+            <a:schemeClr val="accent1"/>
+          </a:effectRef>
+          <a:fontRef idx="minor">
+            <a:schemeClr val="lt1"/>
+          </a:fontRef>
+        </p:style>
+        <p:txBody>
+          <a:bodyPr rtlCol="0" anchor="ctr"/>
+          <a:lstStyle/>
+          <a:p>
+            <a:pPr algn="ctr"/>
+          </a:p>
+        </p:txBody>
+      </p:sp>
+      <p:sp>
+        <p:nvSpPr>
+          <p:cNvPr id="4" name="TextBox 3"/>
+          <p:cNvSpPr txBox="1"/>
+          <p:nvPr/>
+        </p:nvSpPr>
+        <p:spPr>
+          <a:xfrm>
+            <a:off x="457200" y="164592"/>
+            <a:ext cx="11277295" cy="502920"/>
+          </a:xfrm>
+          <a:prstGeom prst="rect">
+            <a:avLst/>
+          </a:prstGeom>
+          <a:noFill/>
+        </p:spPr>
+        <p:txBody>
+          <a:bodyPr wrap="square">
+            <a:spAutoFit/>
+          </a:bodyPr>
+          <a:lstStyle/>
+          <a:p>
+            <a:r>
+              <a:rPr sz="2600" b="1" i="0">
+                <a:solidFill>
+                  <a:srgbClr val="FFFFFF"/>
+                </a:solidFill>
+                <a:latin typeface="Calibri"/>
+              </a:rPr>
+              <a:t>Para continuar (PI)</a:t>
+            </a:r>
+          </a:p>
+        </p:txBody>
+      </p:sp>
+      <p:sp>
+        <p:nvSpPr>
+          <p:cNvPr id="5" name="Rounded Rectangle 4"/>
+          <p:cNvSpPr/>
+          <p:nvPr/>
+        </p:nvSpPr>
+        <p:spPr>
+          <a:xfrm>
+            <a:off x="457200" y="1261872"/>
+            <a:ext cx="11277295" cy="1051560"/>
+          </a:xfrm>
+          <a:prstGeom prst="roundRect">
+            <a:avLst>
+              <a:gd name="adj" fmla="val 12000"/>
+            </a:avLst>
+          </a:prstGeom>
+          <a:solidFill>
+            <a:srgbClr val="E8F4FA"/>
+          </a:solidFill>
+          <a:ln>
+            <a:noFill/>
+          </a:ln>
+        </p:spPr>
+        <p:style>
+          <a:lnRef idx="1">
+            <a:schemeClr val="accent1"/>
+          </a:lnRef>
+          <a:fillRef idx="3">
+            <a:schemeClr val="accent1"/>
+          </a:fillRef>
+          <a:effectRef idx="2">
+            <a:schemeClr val="accent1"/>
+          </a:effectRef>
+          <a:fontRef idx="minor">
+            <a:schemeClr val="lt1"/>
+          </a:fontRef>
+        </p:style>
+        <p:txBody>
+          <a:bodyPr rtlCol="0" anchor="ctr"/>
+          <a:lstStyle/>
+          <a:p>
+            <a:pPr algn="ctr"/>
+          </a:p>
+        </p:txBody>
+      </p:sp>
+      <p:sp>
+        <p:nvSpPr>
+          <p:cNvPr id="6" name="Rectangle 5"/>
+          <p:cNvSpPr/>
+          <p:nvPr/>
+        </p:nvSpPr>
+        <p:spPr>
+          <a:xfrm>
+            <a:off x="457200" y="1261872"/>
+            <a:ext cx="128016" cy="1051560"/>
+          </a:xfrm>
+          <a:prstGeom prst="rect">
+            <a:avLst/>
+          </a:prstGeom>
+          <a:solidFill>
+            <a:srgbClr val="269CCB"/>
+          </a:solidFill>
+          <a:ln>
+            <a:noFill/>
+          </a:ln>
+        </p:spPr>
+        <p:style>
+          <a:lnRef idx="1">
+            <a:schemeClr val="accent1"/>
+          </a:lnRef>
+          <a:fillRef idx="3">
+            <a:schemeClr val="accent1"/>
+          </a:fillRef>
+          <a:effectRef idx="2">
+            <a:schemeClr val="accent1"/>
+          </a:effectRef>
+          <a:fontRef idx="minor">
+            <a:schemeClr val="lt1"/>
+          </a:fontRef>
+        </p:style>
+        <p:txBody>
+          <a:bodyPr rtlCol="0" anchor="ctr"/>
+          <a:lstStyle/>
+          <a:p>
+            <a:pPr algn="ctr"/>
+          </a:p>
+        </p:txBody>
+      </p:sp>
+      <p:sp>
+        <p:nvSpPr>
+          <p:cNvPr id="7" name="TextBox 6"/>
+          <p:cNvSpPr txBox="1"/>
+          <p:nvPr/>
+        </p:nvSpPr>
+        <p:spPr>
+          <a:xfrm>
+            <a:off x="777240" y="1399031"/>
+            <a:ext cx="10774375" cy="822959"/>
+          </a:xfrm>
+          <a:prstGeom prst="rect">
+            <a:avLst/>
+          </a:prstGeom>
+          <a:noFill/>
+        </p:spPr>
+        <p:txBody>
+          <a:bodyPr wrap="square">
+            <a:spAutoFit/>
+          </a:bodyPr>
+          <a:lstStyle/>
+          <a:p>
+            <a:r>
+              <a:rPr sz="1200" b="1" i="0">
+                <a:solidFill>
+                  <a:srgbClr val="269CCB"/>
+                </a:solidFill>
+                <a:latin typeface="Calibri"/>
+              </a:rPr>
+              <a:t>Info</a:t>
+            </a:r>
+          </a:p>
+          <a:p>
+            <a:pPr>
+              <a:spcBef>
+                <a:spcPts val="400"/>
+              </a:spcBef>
+            </a:pPr>
+            <a:r>
+              <a:rPr sz="1400" b="0" i="0">
+                <a:solidFill>
+                  <a:srgbClr val="333333"/>
+                </a:solidFill>
+                <a:latin typeface="Calibri"/>
+              </a:rPr>
+              <a:t>Entregable: Dockerfile del stub + bitácora de 5 comandos con la salida real + captura del lab</a:t>
+            </a:r>
+          </a:p>
+        </p:txBody>
+      </p:sp>
+      <p:sp>
+        <p:nvSpPr>
+          <p:cNvPr id="8" name="Rounded Rectangle 7"/>
+          <p:cNvSpPr/>
+          <p:nvPr/>
+        </p:nvSpPr>
+        <p:spPr>
+          <a:xfrm>
+            <a:off x="457200" y="2478024"/>
+            <a:ext cx="11277295" cy="1051560"/>
+          </a:xfrm>
+          <a:prstGeom prst="roundRect">
+            <a:avLst>
+              <a:gd name="adj" fmla="val 12000"/>
+            </a:avLst>
+          </a:prstGeom>
+          <a:solidFill>
+            <a:srgbClr val="FFF8E1"/>
+          </a:solidFill>
+          <a:ln>
+            <a:noFill/>
+          </a:ln>
+        </p:spPr>
+        <p:style>
+          <a:lnRef idx="1">
+            <a:schemeClr val="accent1"/>
+          </a:lnRef>
+          <a:fillRef idx="3">
+            <a:schemeClr val="accent1"/>
+          </a:fillRef>
+          <a:effectRef idx="2">
+            <a:schemeClr val="accent1"/>
+          </a:effectRef>
+          <a:fontRef idx="minor">
+            <a:schemeClr val="lt1"/>
+          </a:fontRef>
+        </p:style>
+        <p:txBody>
+          <a:bodyPr rtlCol="0" anchor="ctr"/>
+          <a:lstStyle/>
+          <a:p>
+            <a:pPr algn="ctr"/>
+          </a:p>
+        </p:txBody>
+      </p:sp>
+      <p:sp>
+        <p:nvSpPr>
+          <p:cNvPr id="9" name="Rectangle 8"/>
+          <p:cNvSpPr/>
+          <p:nvPr/>
+        </p:nvSpPr>
+        <p:spPr>
+          <a:xfrm>
+            <a:off x="457200" y="2478024"/>
+            <a:ext cx="128016" cy="1051560"/>
+          </a:xfrm>
+          <a:prstGeom prst="rect">
+            <a:avLst/>
+          </a:prstGeom>
+          <a:solidFill>
+            <a:srgbClr val="FFD000"/>
+          </a:solidFill>
+          <a:ln>
+            <a:noFill/>
+          </a:ln>
+        </p:spPr>
+        <p:style>
+          <a:lnRef idx="1">
+            <a:schemeClr val="accent1"/>
+          </a:lnRef>
+          <a:fillRef idx="3">
+            <a:schemeClr val="accent1"/>
+          </a:fillRef>
+          <a:effectRef idx="2">
+            <a:schemeClr val="accent1"/>
+          </a:effectRef>
+          <a:fontRef idx="minor">
+            <a:schemeClr val="lt1"/>
+          </a:fontRef>
+        </p:style>
+        <p:txBody>
+          <a:bodyPr rtlCol="0" anchor="ctr"/>
+          <a:lstStyle/>
+          <a:p>
+            <a:pPr algn="ctr"/>
+          </a:p>
+        </p:txBody>
+      </p:sp>
+      <p:sp>
+        <p:nvSpPr>
+          <p:cNvPr id="10" name="TextBox 9"/>
+          <p:cNvSpPr txBox="1"/>
+          <p:nvPr/>
+        </p:nvSpPr>
+        <p:spPr>
+          <a:xfrm>
+            <a:off x="777240" y="2615184"/>
+            <a:ext cx="10774375" cy="822959"/>
+          </a:xfrm>
+          <a:prstGeom prst="rect">
+            <a:avLst/>
+          </a:prstGeom>
+          <a:noFill/>
+        </p:spPr>
+        <p:txBody>
+          <a:bodyPr wrap="square">
+            <a:spAutoFit/>
+          </a:bodyPr>
+          <a:lstStyle/>
+          <a:p>
+            <a:r>
+              <a:rPr sz="1200" b="1" i="0">
+                <a:solidFill>
+                  <a:srgbClr val="FFD000"/>
+                </a:solidFill>
+                <a:latin typeface="Calibri"/>
+              </a:rPr>
+              <a:t>Aclaración</a:t>
+            </a:r>
+          </a:p>
+          <a:p>
+            <a:pPr>
+              <a:spcBef>
+                <a:spcPts val="400"/>
+              </a:spcBef>
+            </a:pPr>
+            <a:r>
+              <a:rPr sz="1400" b="0" i="0">
+                <a:solidFill>
+                  <a:srgbClr val="333333"/>
+                </a:solidFill>
+                <a:latin typeface="Calibri"/>
+              </a:rPr>
+              <a:t>Subir evidencias al paquete CloudLite (Drive/repo) y a ExamLab (https://uniaj.examlab.workers.dev/) domingo 23:59.</a:t>
+            </a:r>
+          </a:p>
+        </p:txBody>
+      </p:sp>
+      <p:sp>
+        <p:nvSpPr>
+          <p:cNvPr id="11" name="Rounded Rectangle 10"/>
+          <p:cNvSpPr/>
+          <p:nvPr/>
+        </p:nvSpPr>
+        <p:spPr>
+          <a:xfrm>
+            <a:off x="457200" y="3694176"/>
+            <a:ext cx="11277295" cy="1051560"/>
+          </a:xfrm>
+          <a:prstGeom prst="roundRect">
+            <a:avLst>
+              <a:gd name="adj" fmla="val 12000"/>
+            </a:avLst>
+          </a:prstGeom>
+          <a:solidFill>
+            <a:srgbClr val="FBE4E4"/>
+          </a:solidFill>
+          <a:ln>
+            <a:noFill/>
+          </a:ln>
+        </p:spPr>
+        <p:style>
+          <a:lnRef idx="1">
+            <a:schemeClr val="accent1"/>
+          </a:lnRef>
+          <a:fillRef idx="3">
+            <a:schemeClr val="accent1"/>
+          </a:fillRef>
+          <a:effectRef idx="2">
+            <a:schemeClr val="accent1"/>
+          </a:effectRef>
+          <a:fontRef idx="minor">
+            <a:schemeClr val="lt1"/>
+          </a:fontRef>
+        </p:style>
+        <p:txBody>
+          <a:bodyPr rtlCol="0" anchor="ctr"/>
+          <a:lstStyle/>
+          <a:p>
+            <a:pPr algn="ctr"/>
+          </a:p>
+        </p:txBody>
+      </p:sp>
+      <p:sp>
+        <p:nvSpPr>
+          <p:cNvPr id="12" name="Rectangle 11"/>
+          <p:cNvSpPr/>
+          <p:nvPr/>
+        </p:nvSpPr>
+        <p:spPr>
+          <a:xfrm>
+            <a:off x="457200" y="3694176"/>
+            <a:ext cx="128016" cy="1051560"/>
+          </a:xfrm>
+          <a:prstGeom prst="rect">
+            <a:avLst/>
+          </a:prstGeom>
+          <a:solidFill>
+            <a:srgbClr val="A02030"/>
+          </a:solidFill>
+          <a:ln>
+            <a:noFill/>
+          </a:ln>
+        </p:spPr>
+        <p:style>
+          <a:lnRef idx="1">
+            <a:schemeClr val="accent1"/>
+          </a:lnRef>
+          <a:fillRef idx="3">
+            <a:schemeClr val="accent1"/>
+          </a:fillRef>
+          <a:effectRef idx="2">
+            <a:schemeClr val="accent1"/>
+          </a:effectRef>
+          <a:fontRef idx="minor">
+            <a:schemeClr val="lt1"/>
+          </a:fontRef>
+        </p:style>
+        <p:txBody>
+          <a:bodyPr rtlCol="0" anchor="ctr"/>
+          <a:lstStyle/>
+          <a:p>
+            <a:pPr algn="ctr"/>
+          </a:p>
+        </p:txBody>
+      </p:sp>
+      <p:sp>
+        <p:nvSpPr>
+          <p:cNvPr id="13" name="TextBox 12"/>
+          <p:cNvSpPr txBox="1"/>
+          <p:nvPr/>
+        </p:nvSpPr>
+        <p:spPr>
+          <a:xfrm>
+            <a:off x="777240" y="3831336"/>
+            <a:ext cx="10774375" cy="822959"/>
+          </a:xfrm>
+          <a:prstGeom prst="rect">
+            <a:avLst/>
+          </a:prstGeom>
+          <a:noFill/>
+        </p:spPr>
+        <p:txBody>
+          <a:bodyPr wrap="square">
+            <a:spAutoFit/>
+          </a:bodyPr>
+          <a:lstStyle/>
+          <a:p>
+            <a:r>
+              <a:rPr sz="1200" b="1" i="0">
+                <a:solidFill>
+                  <a:srgbClr val="A02030"/>
+                </a:solidFill>
+                <a:latin typeface="Calibri"/>
+              </a:rPr>
+              <a:t>Atención</a:t>
+            </a:r>
+          </a:p>
+          <a:p>
+            <a:pPr>
+              <a:spcBef>
+                <a:spcPts val="400"/>
+              </a:spcBef>
+            </a:pPr>
+            <a:r>
+              <a:rPr sz="1400" b="0" i="0">
+                <a:solidFill>
+                  <a:srgbClr val="333333"/>
+                </a:solidFill>
+                <a:latin typeface="Calibri"/>
+              </a:rPr>
+              <a:t>Sin cloud de pago ni instalaciones obligatorias de hipervisores/Docker Desktop.</a:t>
+            </a:r>
+          </a:p>
+        </p:txBody>
+      </p:sp>
+      <p:sp>
+        <p:nvSpPr>
+          <p:cNvPr id="14" name="TextBox 13"/>
+          <p:cNvSpPr txBox="1"/>
+          <p:nvPr/>
+        </p:nvSpPr>
+        <p:spPr>
+          <a:xfrm>
+            <a:off x="11185855" y="6473952"/>
+            <a:ext cx="640080" cy="274320"/>
+          </a:xfrm>
+          <a:prstGeom prst="rect">
+            <a:avLst/>
+          </a:prstGeom>
+          <a:noFill/>
+        </p:spPr>
+        <p:txBody>
+          <a:bodyPr wrap="square">
+            <a:spAutoFit/>
+          </a:bodyPr>
+          <a:lstStyle/>
+          <a:p>
+            <a:pPr algn="r"/>
+            <a:r>
+              <a:rPr sz="1100" b="0" i="0">
+                <a:solidFill>
+                  <a:srgbClr val="666666"/>
+                </a:solidFill>
+                <a:latin typeface="Calibri"/>
+              </a:rPr>
+              <a:t>14</a:t>
+            </a:r>
+          </a:p>
+        </p:txBody>
+      </p:sp>
+    </p:spTree>
+  </p:cSld>
+  <p:clrMapOvr>
+    <a:masterClrMapping/>
+  </p:clrMapOvr>
+</p:sld>
+</file>
+
+<file path=ppt/slides/slide15.xml><?xml version="1.0" encoding="utf-8"?>
+<p:sld xmlns:a="http://schemas.openxmlformats.org/drawingml/2006/main" xmlns:p="http://schemas.openxmlformats.org/presentationml/2006/main" xmlns:r="http://schemas.openxmlformats.org/officeDocument/2006/relationships">
+  <p:cSld>
+    <p:bg>
+      <p:bgPr>
+        <a:solidFill>
+          <a:srgbClr val="FFFFFF"/>
+        </a:solidFill>
+        <a:effectLst/>
+      </p:bgPr>
+    </p:bg>
+    <p:spTree>
+      <p:nvGrpSpPr>
+        <p:cNvPr id="1" name=""/>
+        <p:cNvGrpSpPr/>
+        <p:nvPr/>
+      </p:nvGrpSpPr>
+      <p:grpSpPr/>
+      <p:sp>
+        <p:nvSpPr>
+          <p:cNvPr id="2" name="Rectangle 1"/>
+          <p:cNvSpPr/>
+          <p:nvPr/>
+        </p:nvSpPr>
+        <p:spPr>
+          <a:xfrm>
+            <a:off x="0" y="0"/>
             <a:ext cx="12191695" cy="164592"/>
           </a:xfrm>
           <a:prstGeom prst="rect">
@@ -6040,7 +6840,7 @@
                 </a:solidFill>
                 <a:latin typeface="Calibri"/>
               </a:rPr>
-              <a:t>Evidencia: Dockerfile (+ compose opcional) + captura/enlace lab navegador</a:t>
+              <a:t>Evidencia: Dockerfile del stub + bitácora de 5 comandos con la salida real + captura del lab</a:t>
             </a:r>
           </a:p>
           <a:p>
@@ -6673,7 +7473,41 @@
                 </a:solidFill>
                 <a:latin typeface="Calibri"/>
               </a:rPr>
-              <a:t>–   Dejar evidencia PI: Dockerfile del stub CloudLite + captura.</a:t>
+              <a:t>–   Publicar el puerto y verificar el servicio con un </a:t>
+            </a:r>
+            <a:r>
+              <a:rPr sz="1600" b="1" i="0">
+                <a:solidFill>
+                  <a:srgbClr val="333333"/>
+                </a:solidFill>
+                <a:latin typeface="Calibri"/>
+              </a:rPr>
+              <a:t>endpoint de salud</a:t>
+            </a:r>
+            <a:r>
+              <a:rPr sz="1600" b="0" i="0">
+                <a:solidFill>
+                  <a:srgbClr val="333333"/>
+                </a:solidFill>
+                <a:latin typeface="Calibri"/>
+              </a:rPr>
+              <a:t> (ruta, código, cuerpo).</a:t>
+            </a:r>
+          </a:p>
+          <a:p>
+            <a:pPr>
+              <a:spcAft>
+                <a:spcPts val="800"/>
+              </a:spcAft>
+            </a:pPr>
+            <a:r>
+              <a:rPr sz="1600" b="0" i="0">
+                <a:solidFill>
+                  <a:srgbClr val="333333"/>
+                </a:solidFill>
+                <a:latin typeface="Calibri"/>
+              </a:rPr>
+              <a:t>–   Dejar evidencia PI: Dockerfile del stub CloudLite + bitácora + captura.</a:t>
             </a:r>
           </a:p>
         </p:txBody>
@@ -6911,7 +7745,7 @@
                 </a:solidFill>
                 <a:latin typeface="Calibri"/>
               </a:rPr>
-              <a:t> Dockerfile (+ compose opcional) + captura/enlace lab navegador</a:t>
+              <a:t> Dockerfile del stub + bitácora de 5 comandos con la salida real + captura del lab</a:t>
             </a:r>
           </a:p>
           <a:p>
@@ -7720,8 +8554,8 @@
         </p:blipFill>
         <p:spPr>
           <a:xfrm>
-            <a:off x="8625535" y="5668558"/>
-            <a:ext cx="3108960" cy="732241"/>
+            <a:off x="8625535" y="5457008"/>
+            <a:ext cx="3108960" cy="943791"/>
           </a:xfrm>
           <a:prstGeom prst="rect">
             <a:avLst/>
@@ -7908,7 +8742,61 @@
                 </a:solidFill>
                 <a:latin typeface="Calibri"/>
               </a:rPr>
-              <a:t>–   FROM imagen base ligera → COPY → EXPOSE → CMD.</a:t>
+              <a:t>–   Siete instrucciones: </a:t>
+            </a:r>
+            <a:r>
+              <a:rPr sz="1600" b="1" i="0">
+                <a:solidFill>
+                  <a:srgbClr val="333333"/>
+                </a:solidFill>
+                <a:latin typeface="Calibri"/>
+              </a:rPr>
+              <a:t>FROM · WORKDIR · COPY</a:t>
+            </a:r>
+            <a:r>
+              <a:rPr sz="1600" b="0" i="0">
+                <a:solidFill>
+                  <a:srgbClr val="333333"/>
+                </a:solidFill>
+                <a:latin typeface="Calibri"/>
+              </a:rPr>
+              <a:t> de dependencias </a:t>
+            </a:r>
+            <a:r>
+              <a:rPr sz="1600" b="1" i="0">
+                <a:solidFill>
+                  <a:srgbClr val="333333"/>
+                </a:solidFill>
+                <a:latin typeface="Calibri"/>
+              </a:rPr>
+              <a:t>· RUN · COPY</a:t>
+            </a:r>
+            <a:r>
+              <a:rPr sz="1600" b="0" i="0">
+                <a:solidFill>
+                  <a:srgbClr val="333333"/>
+                </a:solidFill>
+                <a:latin typeface="Calibri"/>
+              </a:rPr>
+              <a:t> del código </a:t>
+            </a:r>
+            <a:r>
+              <a:rPr sz="1600" b="1" i="0">
+                <a:solidFill>
+                  <a:srgbClr val="333333"/>
+                </a:solidFill>
+                <a:latin typeface="Calibri"/>
+              </a:rPr>
+              <a:t>· EXPOSE · CMD</a:t>
+            </a:r>
+            <a:r>
+              <a:rPr sz="1600" b="0" i="0">
+                <a:solidFill>
+                  <a:srgbClr val="333333"/>
+                </a:solidFill>
+                <a:latin typeface="Calibri"/>
+              </a:rPr>
+              <a:t>.</a:t>
             </a:r>
           </a:p>
           <a:p>
@@ -7924,7 +8812,25 @@
                 </a:solidFill>
                 <a:latin typeface="Calibri"/>
               </a:rPr>
-              <a:t>–   No secretos en la imagen. Un proceso principal por contenedor (regla práctica).</a:t>
+              <a:t>–   «FROM» con </a:t>
+            </a:r>
+            <a:r>
+              <a:rPr sz="1600" b="1" i="0">
+                <a:solidFill>
+                  <a:srgbClr val="333333"/>
+                </a:solidFill>
+                <a:latin typeface="Calibri"/>
+              </a:rPr>
+              <a:t>etiqueta fija</a:t>
+            </a:r>
+            <a:r>
+              <a:rPr sz="1600" b="0" i="0">
+                <a:solidFill>
+                  <a:srgbClr val="333333"/>
+                </a:solidFill>
+                <a:latin typeface="Calibri"/>
+              </a:rPr>
+              <a:t> («node:20-alpine», «python:3.12-slim»): con «latest», la imagen de hoy no es la de mañana.</a:t>
             </a:r>
           </a:p>
           <a:p>
@@ -7940,7 +8846,127 @@
                 </a:solidFill>
                 <a:latin typeface="Calibri"/>
               </a:rPr>
-              <a:t>–   Compose (opcional): API + fake DB solo si aporta al diagrama.</a:t>
+              <a:t>–   Dependencias </a:t>
+            </a:r>
+            <a:r>
+              <a:rPr sz="1600" b="1" i="0">
+                <a:solidFill>
+                  <a:srgbClr val="333333"/>
+                </a:solidFill>
+                <a:latin typeface="Calibri"/>
+              </a:rPr>
+              <a:t>antes</a:t>
+            </a:r>
+            <a:r>
+              <a:rPr sz="1600" b="0" i="0">
+                <a:solidFill>
+                  <a:srgbClr val="333333"/>
+                </a:solidFill>
+                <a:latin typeface="Calibri"/>
+              </a:rPr>
+              <a:t> que el código: así cambiar una línea no reinstala nada (es la caché por capas).</a:t>
+            </a:r>
+          </a:p>
+          <a:p>
+            <a:pPr>
+              <a:spcAft>
+                <a:spcPts val="800"/>
+              </a:spcAft>
+            </a:pPr>
+            <a:r>
+              <a:rPr sz="1600" b="0" i="0">
+                <a:solidFill>
+                  <a:srgbClr val="333333"/>
+                </a:solidFill>
+                <a:latin typeface="Calibri"/>
+              </a:rPr>
+              <a:t>–   </a:t>
+            </a:r>
+            <a:r>
+              <a:rPr sz="1600" b="1" i="0">
+                <a:solidFill>
+                  <a:srgbClr val="333333"/>
+                </a:solidFill>
+                <a:latin typeface="Calibri"/>
+              </a:rPr>
+              <a:t>Nunca un secreto en la imagen:</a:t>
+            </a:r>
+            <a:r>
+              <a:rPr sz="1600" b="0" i="0">
+                <a:solidFill>
+                  <a:srgbClr val="333333"/>
+                </a:solidFill>
+                <a:latin typeface="Calibri"/>
+              </a:rPr>
+              <a:t> las capas se acumulan y «docker history» las lee aunque el archivo se borre después.</a:t>
+            </a:r>
+          </a:p>
+          <a:p>
+            <a:pPr>
+              <a:spcAft>
+                <a:spcPts val="800"/>
+              </a:spcAft>
+            </a:pPr>
+            <a:r>
+              <a:rPr sz="1600" b="0" i="0">
+                <a:solidFill>
+                  <a:srgbClr val="333333"/>
+                </a:solidFill>
+                <a:latin typeface="Calibri"/>
+              </a:rPr>
+              <a:t>–   Si haces «COPY . .», va con un </a:t>
+            </a:r>
+            <a:r>
+              <a:rPr sz="1600" b="1" i="0">
+                <a:solidFill>
+                  <a:srgbClr val="333333"/>
+                </a:solidFill>
+                <a:latin typeface="Calibri"/>
+              </a:rPr>
+              <a:t>«.dockerignore»</a:t>
+            </a:r>
+            <a:r>
+              <a:rPr sz="1600" b="0" i="0">
+                <a:solidFill>
+                  <a:srgbClr val="333333"/>
+                </a:solidFill>
+                <a:latin typeface="Calibri"/>
+              </a:rPr>
+              <a:t> al lado («.env», «node_modules», «.git») — y se menciona en la entrega.</a:t>
+            </a:r>
+          </a:p>
+          <a:p>
+            <a:pPr>
+              <a:spcAft>
+                <a:spcPts val="800"/>
+              </a:spcAft>
+            </a:pPr>
+            <a:r>
+              <a:rPr sz="1600" b="0" i="0">
+                <a:solidFill>
+                  <a:srgbClr val="333333"/>
+                </a:solidFill>
+                <a:latin typeface="Calibri"/>
+              </a:rPr>
+              <a:t>–   «EXPOSE» </a:t>
+            </a:r>
+            <a:r>
+              <a:rPr sz="1600" b="1" i="0">
+                <a:solidFill>
+                  <a:srgbClr val="333333"/>
+                </a:solidFill>
+                <a:latin typeface="Calibri"/>
+              </a:rPr>
+              <a:t>documenta</a:t>
+            </a:r>
+            <a:r>
+              <a:rPr sz="1600" b="0" i="0">
+                <a:solidFill>
+                  <a:srgbClr val="333333"/>
+                </a:solidFill>
+                <a:latin typeface="Calibri"/>
+              </a:rPr>
+              <a:t>, no publica. Publicar es el «-p» del «docker run».</a:t>
             </a:r>
           </a:p>
         </p:txBody>
@@ -8015,7 +9041,7 @@
         <p:spPr>
           <a:xfrm>
             <a:off x="0" y="0"/>
-            <a:ext cx="12191695" cy="1170432"/>
+            <a:ext cx="12191695" cy="960120"/>
           </a:xfrm>
           <a:prstGeom prst="rect">
             <a:avLst/>
@@ -8057,7 +9083,7 @@
         </p:nvSpPr>
         <p:spPr>
           <a:xfrm>
-            <a:off x="0" y="1170432"/>
+            <a:off x="0" y="960120"/>
             <a:ext cx="12191695" cy="41148"/>
           </a:xfrm>
           <a:prstGeom prst="rect">
@@ -8101,7 +9127,7 @@
         <p:spPr>
           <a:xfrm>
             <a:off x="457200" y="164592"/>
-            <a:ext cx="11277295" cy="384048"/>
+            <a:ext cx="11277295" cy="502920"/>
           </a:xfrm>
           <a:prstGeom prst="rect">
             <a:avLst/>
@@ -8121,7 +9147,7 @@
                 </a:solidFill>
                 <a:latin typeface="Calibri"/>
               </a:rPr>
-              <a:t>Máquinas virtuales vs. contenedores</a:t>
+              <a:t>Construir, correr y verificar el contenedor</a:t>
             </a:r>
           </a:p>
         </p:txBody>
@@ -8134,8 +9160,8 @@
         </p:nvSpPr>
         <p:spPr>
           <a:xfrm>
-            <a:off x="457200" y="566928"/>
-            <a:ext cx="11277295" cy="411480"/>
+            <a:off x="457200" y="1170432"/>
+            <a:ext cx="11277295" cy="5230368"/>
           </a:xfrm>
           <a:prstGeom prst="rect">
             <a:avLst/>
@@ -8148,707 +9174,322 @@
           </a:bodyPr>
           <a:lstStyle/>
           <a:p>
-            <a:r>
-              <a:rPr sz="1400" b="0" i="0">
-                <a:solidFill>
-                  <a:srgbClr val="B8D8EE"/>
-                </a:solidFill>
-                <a:latin typeface="Calibri"/>
-              </a:rPr>
-              <a:t>Misma capacidad de cómputo, distinto nivel de aislamiento</a:t>
-            </a:r>
-          </a:p>
-        </p:txBody>
-      </p:sp>
-      <p:sp>
-        <p:nvSpPr>
-          <p:cNvPr id="6" name="Rounded Rectangle 5"/>
-          <p:cNvSpPr/>
-          <p:nvPr/>
-        </p:nvSpPr>
-        <p:spPr>
-          <a:xfrm>
-            <a:off x="822960" y="1417320"/>
-            <a:ext cx="3931920" cy="457200"/>
-          </a:xfrm>
-          <a:prstGeom prst="roundRect">
-            <a:avLst>
-              <a:gd name="adj" fmla="val 12000"/>
-            </a:avLst>
-          </a:prstGeom>
-          <a:solidFill>
-            <a:srgbClr val="095292"/>
-          </a:solidFill>
-          <a:ln>
-            <a:noFill/>
-          </a:ln>
-        </p:spPr>
-        <p:style>
-          <a:lnRef idx="1">
-            <a:schemeClr val="accent1"/>
-          </a:lnRef>
-          <a:fillRef idx="3">
-            <a:schemeClr val="accent1"/>
-          </a:fillRef>
-          <a:effectRef idx="2">
-            <a:schemeClr val="accent1"/>
-          </a:effectRef>
-          <a:fontRef idx="minor">
-            <a:schemeClr val="lt1"/>
-          </a:fontRef>
-        </p:style>
-        <p:txBody>
-          <a:bodyPr rtlCol="0" anchor="ctr" wrap="square"/>
-          <a:lstStyle/>
-          <a:p>
-            <a:pPr algn="ctr"/>
-            <a:r>
-              <a:rPr sz="1200" b="1" i="0">
-                <a:solidFill>
-                  <a:srgbClr val="FFFFFF"/>
-                </a:solidFill>
-                <a:latin typeface="Calibri"/>
-              </a:rPr>
-              <a:t>Máquinas virtuales</a:t>
-            </a:r>
-          </a:p>
-        </p:txBody>
-      </p:sp>
-      <p:sp>
-        <p:nvSpPr>
-          <p:cNvPr id="7" name="Rounded Rectangle 6"/>
-          <p:cNvSpPr/>
-          <p:nvPr/>
-        </p:nvSpPr>
-        <p:spPr>
-          <a:xfrm>
-            <a:off x="822960" y="2057400"/>
-            <a:ext cx="3931920" cy="594360"/>
-          </a:xfrm>
-          <a:prstGeom prst="roundRect">
-            <a:avLst>
-              <a:gd name="adj" fmla="val 12000"/>
-            </a:avLst>
-          </a:prstGeom>
-          <a:solidFill>
-            <a:srgbClr val="333333"/>
-          </a:solidFill>
-          <a:ln>
-            <a:noFill/>
-          </a:ln>
-        </p:spPr>
-        <p:style>
-          <a:lnRef idx="1">
-            <a:schemeClr val="accent1"/>
-          </a:lnRef>
-          <a:fillRef idx="3">
-            <a:schemeClr val="accent1"/>
-          </a:fillRef>
-          <a:effectRef idx="2">
-            <a:schemeClr val="accent1"/>
-          </a:effectRef>
-          <a:fontRef idx="minor">
-            <a:schemeClr val="lt1"/>
-          </a:fontRef>
-        </p:style>
-        <p:txBody>
-          <a:bodyPr rtlCol="0" anchor="ctr" wrap="square"/>
-          <a:lstStyle/>
-          <a:p>
-            <a:pPr algn="ctr"/>
-            <a:r>
-              <a:rPr sz="1300" b="1" i="0">
-                <a:solidFill>
-                  <a:srgbClr val="FFFFFF"/>
-                </a:solidFill>
-                <a:latin typeface="Calibri"/>
-              </a:rPr>
-              <a:t>Hardware físico</a:t>
-            </a:r>
-          </a:p>
-        </p:txBody>
-      </p:sp>
-      <p:sp>
-        <p:nvSpPr>
-          <p:cNvPr id="8" name="Rounded Rectangle 7"/>
-          <p:cNvSpPr/>
-          <p:nvPr/>
-        </p:nvSpPr>
-        <p:spPr>
-          <a:xfrm>
-            <a:off x="822960" y="2697480"/>
-            <a:ext cx="3931920" cy="594360"/>
-          </a:xfrm>
-          <a:prstGeom prst="roundRect">
-            <a:avLst>
-              <a:gd name="adj" fmla="val 12000"/>
-            </a:avLst>
-          </a:prstGeom>
-          <a:solidFill>
-            <a:srgbClr val="269CCB"/>
-          </a:solidFill>
-          <a:ln>
-            <a:noFill/>
-          </a:ln>
-        </p:spPr>
-        <p:style>
-          <a:lnRef idx="1">
-            <a:schemeClr val="accent1"/>
-          </a:lnRef>
-          <a:fillRef idx="3">
-            <a:schemeClr val="accent1"/>
-          </a:fillRef>
-          <a:effectRef idx="2">
-            <a:schemeClr val="accent1"/>
-          </a:effectRef>
-          <a:fontRef idx="minor">
-            <a:schemeClr val="lt1"/>
-          </a:fontRef>
-        </p:style>
-        <p:txBody>
-          <a:bodyPr rtlCol="0" anchor="ctr" wrap="square"/>
-          <a:lstStyle/>
-          <a:p>
-            <a:pPr algn="ctr"/>
-            <a:r>
-              <a:rPr sz="1300" b="1" i="0">
-                <a:solidFill>
-                  <a:srgbClr val="FFFFFF"/>
-                </a:solidFill>
-                <a:latin typeface="Calibri"/>
-              </a:rPr>
-              <a:t>Hipervisor</a:t>
-            </a:r>
-          </a:p>
-        </p:txBody>
-      </p:sp>
-      <p:sp>
-        <p:nvSpPr>
-          <p:cNvPr id="9" name="Rounded Rectangle 8"/>
-          <p:cNvSpPr/>
-          <p:nvPr/>
-        </p:nvSpPr>
-        <p:spPr>
-          <a:xfrm>
-            <a:off x="822960" y="3337560"/>
-            <a:ext cx="1874519" cy="640080"/>
-          </a:xfrm>
-          <a:prstGeom prst="roundRect">
-            <a:avLst>
-              <a:gd name="adj" fmla="val 12000"/>
-            </a:avLst>
-          </a:prstGeom>
-          <a:solidFill>
-            <a:srgbClr val="269CCB"/>
-          </a:solidFill>
-          <a:ln>
-            <a:noFill/>
-          </a:ln>
-        </p:spPr>
-        <p:style>
-          <a:lnRef idx="1">
-            <a:schemeClr val="accent1"/>
-          </a:lnRef>
-          <a:fillRef idx="3">
-            <a:schemeClr val="accent1"/>
-          </a:fillRef>
-          <a:effectRef idx="2">
-            <a:schemeClr val="accent1"/>
-          </a:effectRef>
-          <a:fontRef idx="minor">
-            <a:schemeClr val="lt1"/>
-          </a:fontRef>
-        </p:style>
-        <p:txBody>
-          <a:bodyPr rtlCol="0" anchor="ctr" wrap="square"/>
-          <a:lstStyle/>
-          <a:p>
-            <a:pPr algn="ctr"/>
-            <a:r>
-              <a:rPr sz="1100" b="1" i="0">
-                <a:solidFill>
-                  <a:srgbClr val="FFFFFF"/>
-                </a:solidFill>
-                <a:latin typeface="Calibri"/>
-              </a:rPr>
-              <a:t>SO invitado A
-(completo)</a:t>
-            </a:r>
-          </a:p>
-        </p:txBody>
-      </p:sp>
-      <p:sp>
-        <p:nvSpPr>
-          <p:cNvPr id="10" name="Rounded Rectangle 9"/>
-          <p:cNvSpPr/>
-          <p:nvPr/>
-        </p:nvSpPr>
-        <p:spPr>
-          <a:xfrm>
-            <a:off x="2880360" y="3337560"/>
-            <a:ext cx="1874519" cy="640080"/>
-          </a:xfrm>
-          <a:prstGeom prst="roundRect">
-            <a:avLst>
-              <a:gd name="adj" fmla="val 12000"/>
-            </a:avLst>
-          </a:prstGeom>
-          <a:solidFill>
-            <a:srgbClr val="269CCB"/>
-          </a:solidFill>
-          <a:ln>
-            <a:noFill/>
-          </a:ln>
-        </p:spPr>
-        <p:style>
-          <a:lnRef idx="1">
-            <a:schemeClr val="accent1"/>
-          </a:lnRef>
-          <a:fillRef idx="3">
-            <a:schemeClr val="accent1"/>
-          </a:fillRef>
-          <a:effectRef idx="2">
-            <a:schemeClr val="accent1"/>
-          </a:effectRef>
-          <a:fontRef idx="minor">
-            <a:schemeClr val="lt1"/>
-          </a:fontRef>
-        </p:style>
-        <p:txBody>
-          <a:bodyPr rtlCol="0" anchor="ctr" wrap="square"/>
-          <a:lstStyle/>
-          <a:p>
-            <a:pPr algn="ctr"/>
-            <a:r>
-              <a:rPr sz="1100" b="1" i="0">
-                <a:solidFill>
-                  <a:srgbClr val="FFFFFF"/>
-                </a:solidFill>
-                <a:latin typeface="Calibri"/>
-              </a:rPr>
-              <a:t>SO invitado B
-(completo)</a:t>
-            </a:r>
-          </a:p>
-        </p:txBody>
-      </p:sp>
-      <p:sp>
-        <p:nvSpPr>
-          <p:cNvPr id="11" name="Rounded Rectangle 10"/>
-          <p:cNvSpPr/>
-          <p:nvPr/>
-        </p:nvSpPr>
-        <p:spPr>
-          <a:xfrm>
-            <a:off x="822960" y="4023360"/>
-            <a:ext cx="1874519" cy="548640"/>
-          </a:xfrm>
-          <a:prstGeom prst="roundRect">
-            <a:avLst>
-              <a:gd name="adj" fmla="val 12000"/>
-            </a:avLst>
-          </a:prstGeom>
-          <a:solidFill>
-            <a:srgbClr val="FFD000"/>
-          </a:solidFill>
-          <a:ln>
-            <a:noFill/>
-          </a:ln>
-        </p:spPr>
-        <p:style>
-          <a:lnRef idx="1">
-            <a:schemeClr val="accent1"/>
-          </a:lnRef>
-          <a:fillRef idx="3">
-            <a:schemeClr val="accent1"/>
-          </a:fillRef>
-          <a:effectRef idx="2">
-            <a:schemeClr val="accent1"/>
-          </a:effectRef>
-          <a:fontRef idx="minor">
-            <a:schemeClr val="lt1"/>
-          </a:fontRef>
-        </p:style>
-        <p:txBody>
-          <a:bodyPr rtlCol="0" anchor="ctr" wrap="square"/>
-          <a:lstStyle/>
-          <a:p>
-            <a:pPr algn="ctr"/>
-            <a:r>
-              <a:rPr sz="1300" b="1" i="0">
-                <a:solidFill>
-                  <a:srgbClr val="095292"/>
-                </a:solidFill>
-                <a:latin typeface="Calibri"/>
-              </a:rPr>
-              <a:t>App A</a:t>
-            </a:r>
-          </a:p>
-        </p:txBody>
-      </p:sp>
-      <p:sp>
-        <p:nvSpPr>
-          <p:cNvPr id="12" name="Rounded Rectangle 11"/>
-          <p:cNvSpPr/>
-          <p:nvPr/>
-        </p:nvSpPr>
-        <p:spPr>
-          <a:xfrm>
-            <a:off x="2880360" y="4023360"/>
-            <a:ext cx="1874519" cy="548640"/>
-          </a:xfrm>
-          <a:prstGeom prst="roundRect">
-            <a:avLst>
-              <a:gd name="adj" fmla="val 12000"/>
-            </a:avLst>
-          </a:prstGeom>
-          <a:solidFill>
-            <a:srgbClr val="FFD000"/>
-          </a:solidFill>
-          <a:ln>
-            <a:noFill/>
-          </a:ln>
-        </p:spPr>
-        <p:style>
-          <a:lnRef idx="1">
-            <a:schemeClr val="accent1"/>
-          </a:lnRef>
-          <a:fillRef idx="3">
-            <a:schemeClr val="accent1"/>
-          </a:fillRef>
-          <a:effectRef idx="2">
-            <a:schemeClr val="accent1"/>
-          </a:effectRef>
-          <a:fontRef idx="minor">
-            <a:schemeClr val="lt1"/>
-          </a:fontRef>
-        </p:style>
-        <p:txBody>
-          <a:bodyPr rtlCol="0" anchor="ctr" wrap="square"/>
-          <a:lstStyle/>
-          <a:p>
-            <a:pPr algn="ctr"/>
-            <a:r>
-              <a:rPr sz="1300" b="1" i="0">
-                <a:solidFill>
-                  <a:srgbClr val="095292"/>
-                </a:solidFill>
-                <a:latin typeface="Calibri"/>
-              </a:rPr>
-              <a:t>App B</a:t>
-            </a:r>
-          </a:p>
-        </p:txBody>
-      </p:sp>
-      <p:sp>
-        <p:nvSpPr>
-          <p:cNvPr id="13" name="Rounded Rectangle 12"/>
-          <p:cNvSpPr/>
-          <p:nvPr/>
-        </p:nvSpPr>
-        <p:spPr>
-          <a:xfrm>
-            <a:off x="7315200" y="1417320"/>
-            <a:ext cx="3931920" cy="457200"/>
-          </a:xfrm>
-          <a:prstGeom prst="roundRect">
-            <a:avLst>
-              <a:gd name="adj" fmla="val 12000"/>
-            </a:avLst>
-          </a:prstGeom>
-          <a:solidFill>
-            <a:srgbClr val="095292"/>
-          </a:solidFill>
-          <a:ln>
-            <a:noFill/>
-          </a:ln>
-        </p:spPr>
-        <p:style>
-          <a:lnRef idx="1">
-            <a:schemeClr val="accent1"/>
-          </a:lnRef>
-          <a:fillRef idx="3">
-            <a:schemeClr val="accent1"/>
-          </a:fillRef>
-          <a:effectRef idx="2">
-            <a:schemeClr val="accent1"/>
-          </a:effectRef>
-          <a:fontRef idx="minor">
-            <a:schemeClr val="lt1"/>
-          </a:fontRef>
-        </p:style>
-        <p:txBody>
-          <a:bodyPr rtlCol="0" anchor="ctr" wrap="square"/>
-          <a:lstStyle/>
-          <a:p>
-            <a:pPr algn="ctr"/>
-            <a:r>
-              <a:rPr sz="1200" b="1" i="0">
-                <a:solidFill>
-                  <a:srgbClr val="FFFFFF"/>
-                </a:solidFill>
-                <a:latin typeface="Calibri"/>
-              </a:rPr>
-              <a:t>Contenedores</a:t>
-            </a:r>
-          </a:p>
-        </p:txBody>
-      </p:sp>
-      <p:sp>
-        <p:nvSpPr>
-          <p:cNvPr id="14" name="Rounded Rectangle 13"/>
-          <p:cNvSpPr/>
-          <p:nvPr/>
-        </p:nvSpPr>
-        <p:spPr>
-          <a:xfrm>
-            <a:off x="7315200" y="2057400"/>
-            <a:ext cx="3931920" cy="594360"/>
-          </a:xfrm>
-          <a:prstGeom prst="roundRect">
-            <a:avLst>
-              <a:gd name="adj" fmla="val 12000"/>
-            </a:avLst>
-          </a:prstGeom>
-          <a:solidFill>
-            <a:srgbClr val="333333"/>
-          </a:solidFill>
-          <a:ln>
-            <a:noFill/>
-          </a:ln>
-        </p:spPr>
-        <p:style>
-          <a:lnRef idx="1">
-            <a:schemeClr val="accent1"/>
-          </a:lnRef>
-          <a:fillRef idx="3">
-            <a:schemeClr val="accent1"/>
-          </a:fillRef>
-          <a:effectRef idx="2">
-            <a:schemeClr val="accent1"/>
-          </a:effectRef>
-          <a:fontRef idx="minor">
-            <a:schemeClr val="lt1"/>
-          </a:fontRef>
-        </p:style>
-        <p:txBody>
-          <a:bodyPr rtlCol="0" anchor="ctr" wrap="square"/>
-          <a:lstStyle/>
-          <a:p>
-            <a:pPr algn="ctr"/>
-            <a:r>
-              <a:rPr sz="1300" b="1" i="0">
-                <a:solidFill>
-                  <a:srgbClr val="FFFFFF"/>
-                </a:solidFill>
-                <a:latin typeface="Calibri"/>
-              </a:rPr>
-              <a:t>Hardware físico</a:t>
-            </a:r>
-          </a:p>
-        </p:txBody>
-      </p:sp>
-      <p:sp>
-        <p:nvSpPr>
-          <p:cNvPr id="15" name="Rounded Rectangle 14"/>
-          <p:cNvSpPr/>
-          <p:nvPr/>
-        </p:nvSpPr>
-        <p:spPr>
-          <a:xfrm>
-            <a:off x="7315200" y="2697480"/>
-            <a:ext cx="3931920" cy="594360"/>
-          </a:xfrm>
-          <a:prstGeom prst="roundRect">
-            <a:avLst>
-              <a:gd name="adj" fmla="val 12000"/>
-            </a:avLst>
-          </a:prstGeom>
-          <a:solidFill>
-            <a:srgbClr val="269CCB"/>
-          </a:solidFill>
-          <a:ln>
-            <a:noFill/>
-          </a:ln>
-        </p:spPr>
-        <p:style>
-          <a:lnRef idx="1">
-            <a:schemeClr val="accent1"/>
-          </a:lnRef>
-          <a:fillRef idx="3">
-            <a:schemeClr val="accent1"/>
-          </a:fillRef>
-          <a:effectRef idx="2">
-            <a:schemeClr val="accent1"/>
-          </a:effectRef>
-          <a:fontRef idx="minor">
-            <a:schemeClr val="lt1"/>
-          </a:fontRef>
-        </p:style>
-        <p:txBody>
-          <a:bodyPr rtlCol="0" anchor="ctr" wrap="square"/>
-          <a:lstStyle/>
-          <a:p>
-            <a:pPr algn="ctr"/>
-            <a:r>
-              <a:rPr sz="1050" b="1" i="0">
-                <a:solidFill>
-                  <a:srgbClr val="FFFFFF"/>
-                </a:solidFill>
-                <a:latin typeface="Calibri"/>
-              </a:rPr>
-              <a:t>SO anfitrión + motor de contenedores (kernel compartido)</a:t>
-            </a:r>
-          </a:p>
-        </p:txBody>
-      </p:sp>
-      <p:sp>
-        <p:nvSpPr>
-          <p:cNvPr id="16" name="Rounded Rectangle 15"/>
-          <p:cNvSpPr/>
-          <p:nvPr/>
-        </p:nvSpPr>
-        <p:spPr>
-          <a:xfrm>
-            <a:off x="7315200" y="3337560"/>
-            <a:ext cx="1874519" cy="640080"/>
-          </a:xfrm>
-          <a:prstGeom prst="roundRect">
-            <a:avLst>
-              <a:gd name="adj" fmla="val 12000"/>
-            </a:avLst>
-          </a:prstGeom>
-          <a:solidFill>
-            <a:srgbClr val="FFD000"/>
-          </a:solidFill>
-          <a:ln>
-            <a:noFill/>
-          </a:ln>
-        </p:spPr>
-        <p:style>
-          <a:lnRef idx="1">
-            <a:schemeClr val="accent1"/>
-          </a:lnRef>
-          <a:fillRef idx="3">
-            <a:schemeClr val="accent1"/>
-          </a:fillRef>
-          <a:effectRef idx="2">
-            <a:schemeClr val="accent1"/>
-          </a:effectRef>
-          <a:fontRef idx="minor">
-            <a:schemeClr val="lt1"/>
-          </a:fontRef>
-        </p:style>
-        <p:txBody>
-          <a:bodyPr rtlCol="0" anchor="ctr" wrap="square"/>
-          <a:lstStyle/>
-          <a:p>
-            <a:pPr algn="ctr"/>
-            <a:r>
-              <a:rPr sz="1100" b="1" i="0">
-                <a:solidFill>
-                  <a:srgbClr val="095292"/>
-                </a:solidFill>
-                <a:latin typeface="Calibri"/>
-              </a:rPr>
-              <a:t>Contenedor A
-(App A)</a:t>
-            </a:r>
-          </a:p>
-        </p:txBody>
-      </p:sp>
-      <p:sp>
-        <p:nvSpPr>
-          <p:cNvPr id="17" name="Rounded Rectangle 16"/>
-          <p:cNvSpPr/>
-          <p:nvPr/>
-        </p:nvSpPr>
-        <p:spPr>
-          <a:xfrm>
-            <a:off x="9372600" y="3337560"/>
-            <a:ext cx="1874519" cy="640080"/>
-          </a:xfrm>
-          <a:prstGeom prst="roundRect">
-            <a:avLst>
-              <a:gd name="adj" fmla="val 12000"/>
-            </a:avLst>
-          </a:prstGeom>
-          <a:solidFill>
-            <a:srgbClr val="FFD000"/>
-          </a:solidFill>
-          <a:ln>
-            <a:noFill/>
-          </a:ln>
-        </p:spPr>
-        <p:style>
-          <a:lnRef idx="1">
-            <a:schemeClr val="accent1"/>
-          </a:lnRef>
-          <a:fillRef idx="3">
-            <a:schemeClr val="accent1"/>
-          </a:fillRef>
-          <a:effectRef idx="2">
-            <a:schemeClr val="accent1"/>
-          </a:effectRef>
-          <a:fontRef idx="minor">
-            <a:schemeClr val="lt1"/>
-          </a:fontRef>
-        </p:style>
-        <p:txBody>
-          <a:bodyPr rtlCol="0" anchor="ctr" wrap="square"/>
-          <a:lstStyle/>
-          <a:p>
-            <a:pPr algn="ctr"/>
-            <a:r>
-              <a:rPr sz="1100" b="1" i="0">
-                <a:solidFill>
-                  <a:srgbClr val="095292"/>
-                </a:solidFill>
-                <a:latin typeface="Calibri"/>
-              </a:rPr>
-              <a:t>Contenedor B
-(App B)</a:t>
-            </a:r>
-          </a:p>
-        </p:txBody>
-      </p:sp>
-      <p:sp>
-        <p:nvSpPr>
-          <p:cNvPr id="18" name="TextBox 17"/>
-          <p:cNvSpPr txBox="1"/>
-          <p:nvPr/>
-        </p:nvSpPr>
-        <p:spPr>
-          <a:xfrm>
-            <a:off x="457200" y="6263640"/>
-            <a:ext cx="11277295" cy="411480"/>
-          </a:xfrm>
-          <a:prstGeom prst="rect">
-            <a:avLst/>
-          </a:prstGeom>
-          <a:noFill/>
-        </p:spPr>
-        <p:txBody>
-          <a:bodyPr wrap="square">
-            <a:spAutoFit/>
-          </a:bodyPr>
-          <a:lstStyle/>
-          <a:p>
-            <a:r>
-              <a:rPr sz="1100" b="0" i="1">
-                <a:solidFill>
-                  <a:srgbClr val="666666"/>
-                </a:solidFill>
-                <a:latin typeface="Calibri"/>
-              </a:rPr>
-              <a:t>VM: cada instancia carga un SO completo (aislamiento fuerte, más pesado). Contenedor: comparte el kernel del anfitrión y solo empaqueta app + dependencias (arranca en segundos, pesa MB no GB).</a:t>
-            </a:r>
-          </a:p>
-        </p:txBody>
-      </p:sp>
-      <p:sp>
-        <p:nvSpPr>
-          <p:cNvPr id="19" name="TextBox 18"/>
+            <a:pPr>
+              <a:spcAft>
+                <a:spcPts val="800"/>
+              </a:spcAft>
+            </a:pPr>
+            <a:r>
+              <a:rPr sz="1600" b="0" i="0">
+                <a:solidFill>
+                  <a:srgbClr val="333333"/>
+                </a:solidFill>
+                <a:latin typeface="Calibri"/>
+              </a:rPr>
+              <a:t>–   </a:t>
+            </a:r>
+            <a:r>
+              <a:rPr sz="1600" b="1" i="0">
+                <a:solidFill>
+                  <a:srgbClr val="333333"/>
+                </a:solidFill>
+                <a:latin typeface="Calibri"/>
+              </a:rPr>
+              <a:t>Construir:</a:t>
+            </a:r>
+            <a:r>
+              <a:rPr sz="1600" b="0" i="0">
+                <a:solidFill>
+                  <a:srgbClr val="333333"/>
+                </a:solidFill>
+                <a:latin typeface="Calibri"/>
+              </a:rPr>
+              <a:t> «docker build -t cloudlite-api:0.1.0 .» — nombre </a:t>
+            </a:r>
+            <a:r>
+              <a:rPr sz="1600" b="1" i="0">
+                <a:solidFill>
+                  <a:srgbClr val="333333"/>
+                </a:solidFill>
+                <a:latin typeface="Calibri"/>
+              </a:rPr>
+              <a:t>y</a:t>
+            </a:r>
+            <a:r>
+              <a:rPr sz="1600" b="0" i="0">
+                <a:solidFill>
+                  <a:srgbClr val="333333"/>
+                </a:solidFill>
+                <a:latin typeface="Calibri"/>
+              </a:rPr>
+              <a:t> etiqueta; sin etiqueta vale la mitad.</a:t>
+            </a:r>
+          </a:p>
+          <a:p>
+            <a:pPr>
+              <a:spcAft>
+                <a:spcPts val="800"/>
+              </a:spcAft>
+            </a:pPr>
+            <a:r>
+              <a:rPr sz="1600" b="0" i="0">
+                <a:solidFill>
+                  <a:srgbClr val="333333"/>
+                </a:solidFill>
+                <a:latin typeface="Calibri"/>
+              </a:rPr>
+              <a:t>–   </a:t>
+            </a:r>
+            <a:r>
+              <a:rPr sz="1600" b="1" i="0">
+                <a:solidFill>
+                  <a:srgbClr val="333333"/>
+                </a:solidFill>
+                <a:latin typeface="Calibri"/>
+              </a:rPr>
+              <a:t>Correr:</a:t>
+            </a:r>
+            <a:r>
+              <a:rPr sz="1600" b="0" i="0">
+                <a:solidFill>
+                  <a:srgbClr val="333333"/>
+                </a:solidFill>
+                <a:latin typeface="Calibri"/>
+              </a:rPr>
+              <a:t> «docker run -d -p 8081:8080 --name api cloudlite-api:0.1.0».</a:t>
+            </a:r>
+          </a:p>
+          <a:p>
+            <a:pPr>
+              <a:spcAft>
+                <a:spcPts val="800"/>
+              </a:spcAft>
+            </a:pPr>
+            <a:r>
+              <a:rPr sz="1600" b="0" i="0">
+                <a:solidFill>
+                  <a:srgbClr val="333333"/>
+                </a:solidFill>
+                <a:latin typeface="Calibri"/>
+              </a:rPr>
+              <a:t>–   En «-p 8081:8080» la </a:t>
+            </a:r>
+            <a:r>
+              <a:rPr sz="1600" b="1" i="0">
+                <a:solidFill>
+                  <a:srgbClr val="333333"/>
+                </a:solidFill>
+                <a:latin typeface="Calibri"/>
+              </a:rPr>
+              <a:t>izquierda es el anfitrión</a:t>
+            </a:r>
+            <a:r>
+              <a:rPr sz="1600" b="0" i="0">
+                <a:solidFill>
+                  <a:srgbClr val="333333"/>
+                </a:solidFill>
+                <a:latin typeface="Calibri"/>
+              </a:rPr>
+              <a:t> (por donde entras tú) y la </a:t>
+            </a:r>
+            <a:r>
+              <a:rPr sz="1600" b="1" i="0">
+                <a:solidFill>
+                  <a:srgbClr val="333333"/>
+                </a:solidFill>
+                <a:latin typeface="Calibri"/>
+              </a:rPr>
+              <a:t>derecha es el contenedor</a:t>
+            </a:r>
+            <a:r>
+              <a:rPr sz="1600" b="0" i="0">
+                <a:solidFill>
+                  <a:srgbClr val="333333"/>
+                </a:solidFill>
+                <a:latin typeface="Calibri"/>
+              </a:rPr>
+              <a:t> (la del «EXPOSE»).</a:t>
+            </a:r>
+          </a:p>
+          <a:p>
+            <a:pPr>
+              <a:spcAft>
+                <a:spcPts val="800"/>
+              </a:spcAft>
+            </a:pPr>
+            <a:r>
+              <a:rPr sz="1600" b="0" i="0">
+                <a:solidFill>
+                  <a:srgbClr val="333333"/>
+                </a:solidFill>
+                <a:latin typeface="Calibri"/>
+              </a:rPr>
+              <a:t>–   </a:t>
+            </a:r>
+            <a:r>
+              <a:rPr sz="1600" b="1" i="0">
+                <a:solidFill>
+                  <a:srgbClr val="333333"/>
+                </a:solidFill>
+                <a:latin typeface="Calibri"/>
+              </a:rPr>
+              <a:t>Si los inviertes,</a:t>
+            </a:r>
+            <a:r>
+              <a:rPr sz="1600" b="0" i="0">
+                <a:solidFill>
+                  <a:srgbClr val="333333"/>
+                </a:solidFill>
+                <a:latin typeface="Calibri"/>
+              </a:rPr>
+              <a:t> «docker ps» muestra el contenedor </a:t>
+            </a:r>
+            <a:r>
+              <a:rPr sz="1600" b="1" i="0">
+                <a:solidFill>
+                  <a:srgbClr val="333333"/>
+                </a:solidFill>
+                <a:latin typeface="Calibri"/>
+              </a:rPr>
+              <a:t>Up</a:t>
+            </a:r>
+            <a:r>
+              <a:rPr sz="1600" b="0" i="0">
+                <a:solidFill>
+                  <a:srgbClr val="333333"/>
+                </a:solidFill>
+                <a:latin typeface="Calibri"/>
+              </a:rPr>
+              <a:t> y la petición muere sin respuesta: el síntoma no dice la causa.</a:t>
+            </a:r>
+          </a:p>
+          <a:p>
+            <a:pPr>
+              <a:spcAft>
+                <a:spcPts val="800"/>
+              </a:spcAft>
+            </a:pPr>
+            <a:r>
+              <a:rPr sz="1600" b="0" i="0">
+                <a:solidFill>
+                  <a:srgbClr val="333333"/>
+                </a:solidFill>
+                <a:latin typeface="Calibri"/>
+              </a:rPr>
+              <a:t>–   </a:t>
+            </a:r>
+            <a:r>
+              <a:rPr sz="1600" b="1" i="0">
+                <a:solidFill>
+                  <a:srgbClr val="333333"/>
+                </a:solidFill>
+                <a:latin typeface="Calibri"/>
+              </a:rPr>
+              <a:t>Verificar:</a:t>
+            </a:r>
+            <a:r>
+              <a:rPr sz="1600" b="0" i="0">
+                <a:solidFill>
+                  <a:srgbClr val="333333"/>
+                </a:solidFill>
+                <a:latin typeface="Calibri"/>
+              </a:rPr>
+              <a:t> el contrato de salud son </a:t>
+            </a:r>
+            <a:r>
+              <a:rPr sz="1600" b="1" i="0">
+                <a:solidFill>
+                  <a:srgbClr val="333333"/>
+                </a:solidFill>
+                <a:latin typeface="Calibri"/>
+              </a:rPr>
+              <a:t>tres</a:t>
+            </a:r>
+            <a:r>
+              <a:rPr sz="1600" b="0" i="0">
+                <a:solidFill>
+                  <a:srgbClr val="333333"/>
+                </a:solidFill>
+                <a:latin typeface="Calibri"/>
+              </a:rPr>
+              <a:t> datos — </a:t>
+            </a:r>
+            <a:r>
+              <a:rPr sz="1600" b="1" i="0">
+                <a:solidFill>
+                  <a:srgbClr val="333333"/>
+                </a:solidFill>
+                <a:latin typeface="Calibri"/>
+              </a:rPr>
+              <a:t>ruta</a:t>
+            </a:r>
+            <a:r>
+              <a:rPr sz="1600" b="0" i="0">
+                <a:solidFill>
+                  <a:srgbClr val="333333"/>
+                </a:solidFill>
+                <a:latin typeface="Calibri"/>
+              </a:rPr>
+              <a:t> («GET /health»), </a:t>
+            </a:r>
+            <a:r>
+              <a:rPr sz="1600" b="1" i="0">
+                <a:solidFill>
+                  <a:srgbClr val="333333"/>
+                </a:solidFill>
+                <a:latin typeface="Calibri"/>
+              </a:rPr>
+              <a:t>código</a:t>
+            </a:r>
+            <a:r>
+              <a:rPr sz="1600" b="0" i="0">
+                <a:solidFill>
+                  <a:srgbClr val="333333"/>
+                </a:solidFill>
+                <a:latin typeface="Calibri"/>
+              </a:rPr>
+              <a:t> («200» vivo · «503» sin base) y </a:t>
+            </a:r>
+            <a:r>
+              <a:rPr sz="1600" b="1" i="0">
+                <a:solidFill>
+                  <a:srgbClr val="333333"/>
+                </a:solidFill>
+                <a:latin typeface="Calibri"/>
+              </a:rPr>
+              <a:t>cuerpo</a:t>
+            </a:r>
+            <a:r>
+              <a:rPr sz="1600" b="0" i="0">
+                <a:solidFill>
+                  <a:srgbClr val="333333"/>
+                </a:solidFill>
+                <a:latin typeface="Calibri"/>
+              </a:rPr>
+              <a:t> con su formato.</a:t>
+            </a:r>
+          </a:p>
+          <a:p>
+            <a:pPr>
+              <a:spcAft>
+                <a:spcPts val="800"/>
+              </a:spcAft>
+            </a:pPr>
+            <a:r>
+              <a:rPr sz="1600" b="0" i="0">
+                <a:solidFill>
+                  <a:srgbClr val="333333"/>
+                </a:solidFill>
+                <a:latin typeface="Calibri"/>
+              </a:rPr>
+              <a:t>–   Un «200» con cuerpo vacío no distingue «vivo» de «vivo pero roto»: el cuerpo lleva al menos un campo verificable.</a:t>
+            </a:r>
+          </a:p>
+        </p:txBody>
+      </p:sp>
+      <p:sp>
+        <p:nvSpPr>
+          <p:cNvPr id="6" name="TextBox 5"/>
           <p:cNvSpPr txBox="1"/>
           <p:nvPr/>
         </p:nvSpPr>
@@ -8916,7 +9557,7 @@
         <p:spPr>
           <a:xfrm>
             <a:off x="0" y="0"/>
-            <a:ext cx="12191695" cy="960120"/>
+            <a:ext cx="12191695" cy="1170432"/>
           </a:xfrm>
           <a:prstGeom prst="rect">
             <a:avLst/>
@@ -8958,7 +9599,7 @@
         </p:nvSpPr>
         <p:spPr>
           <a:xfrm>
-            <a:off x="0" y="960120"/>
+            <a:off x="0" y="1170432"/>
             <a:ext cx="12191695" cy="41148"/>
           </a:xfrm>
           <a:prstGeom prst="rect">
@@ -9002,7 +9643,7 @@
         <p:spPr>
           <a:xfrm>
             <a:off x="457200" y="164592"/>
-            <a:ext cx="11277295" cy="502920"/>
+            <a:ext cx="11277295" cy="384048"/>
           </a:xfrm>
           <a:prstGeom prst="rect">
             <a:avLst/>
@@ -9022,322 +9663,60 @@
                 </a:solidFill>
                 <a:latin typeface="Calibri"/>
               </a:rPr>
-              <a:t>Maquina virtual vs contenedor — que cambia de verdad</a:t>
-            </a:r>
-          </a:p>
-        </p:txBody>
-      </p:sp>
-      <p:sp>
-        <p:nvSpPr>
-          <p:cNvPr id="5" name="Rounded Rectangle 4"/>
+              <a:t>Máquinas virtuales vs. contenedores</a:t>
+            </a:r>
+          </a:p>
+        </p:txBody>
+      </p:sp>
+      <p:sp>
+        <p:nvSpPr>
+          <p:cNvPr id="5" name="TextBox 4"/>
+          <p:cNvSpPr txBox="1"/>
+          <p:nvPr/>
+        </p:nvSpPr>
+        <p:spPr>
+          <a:xfrm>
+            <a:off x="457200" y="566928"/>
+            <a:ext cx="11277295" cy="411480"/>
+          </a:xfrm>
+          <a:prstGeom prst="rect">
+            <a:avLst/>
+          </a:prstGeom>
+          <a:noFill/>
+        </p:spPr>
+        <p:txBody>
+          <a:bodyPr wrap="square">
+            <a:spAutoFit/>
+          </a:bodyPr>
+          <a:lstStyle/>
+          <a:p>
+            <a:r>
+              <a:rPr sz="1400" b="0" i="0">
+                <a:solidFill>
+                  <a:srgbClr val="B8D8EE"/>
+                </a:solidFill>
+                <a:latin typeface="Calibri"/>
+              </a:rPr>
+              <a:t>Misma capacidad de cómputo, distinto nivel de aislamiento</a:t>
+            </a:r>
+          </a:p>
+        </p:txBody>
+      </p:sp>
+      <p:sp>
+        <p:nvSpPr>
+          <p:cNvPr id="6" name="Rounded Rectangle 5"/>
           <p:cNvSpPr/>
           <p:nvPr/>
         </p:nvSpPr>
         <p:spPr>
           <a:xfrm>
-            <a:off x="457200" y="1261872"/>
-            <a:ext cx="5478627" cy="5093208"/>
+            <a:off x="822960" y="1417320"/>
+            <a:ext cx="3931920" cy="457200"/>
           </a:xfrm>
           <a:prstGeom prst="roundRect">
             <a:avLst>
               <a:gd name="adj" fmla="val 12000"/>
             </a:avLst>
-          </a:prstGeom>
-          <a:solidFill>
-            <a:srgbClr val="FBE4E4"/>
-          </a:solidFill>
-          <a:ln>
-            <a:noFill/>
-          </a:ln>
-        </p:spPr>
-        <p:style>
-          <a:lnRef idx="1">
-            <a:schemeClr val="accent1"/>
-          </a:lnRef>
-          <a:fillRef idx="3">
-            <a:schemeClr val="accent1"/>
-          </a:fillRef>
-          <a:effectRef idx="2">
-            <a:schemeClr val="accent1"/>
-          </a:effectRef>
-          <a:fontRef idx="minor">
-            <a:schemeClr val="lt1"/>
-          </a:fontRef>
-        </p:style>
-        <p:txBody>
-          <a:bodyPr rtlCol="0" anchor="ctr"/>
-          <a:lstStyle/>
-          <a:p>
-            <a:pPr algn="ctr"/>
-          </a:p>
-        </p:txBody>
-      </p:sp>
-      <p:sp>
-        <p:nvSpPr>
-          <p:cNvPr id="6" name="Rectangle 5"/>
-          <p:cNvSpPr/>
-          <p:nvPr/>
-        </p:nvSpPr>
-        <p:spPr>
-          <a:xfrm>
-            <a:off x="457200" y="1261872"/>
-            <a:ext cx="5478627" cy="502920"/>
-          </a:xfrm>
-          <a:prstGeom prst="rect">
-            <a:avLst/>
-          </a:prstGeom>
-          <a:solidFill>
-            <a:srgbClr val="A02030"/>
-          </a:solidFill>
-          <a:ln>
-            <a:noFill/>
-          </a:ln>
-        </p:spPr>
-        <p:style>
-          <a:lnRef idx="1">
-            <a:schemeClr val="accent1"/>
-          </a:lnRef>
-          <a:fillRef idx="3">
-            <a:schemeClr val="accent1"/>
-          </a:fillRef>
-          <a:effectRef idx="2">
-            <a:schemeClr val="accent1"/>
-          </a:effectRef>
-          <a:fontRef idx="minor">
-            <a:schemeClr val="lt1"/>
-          </a:fontRef>
-        </p:style>
-        <p:txBody>
-          <a:bodyPr rtlCol="0" anchor="ctr"/>
-          <a:lstStyle/>
-          <a:p>
-            <a:pPr algn="ctr"/>
-          </a:p>
-        </p:txBody>
-      </p:sp>
-      <p:sp>
-        <p:nvSpPr>
-          <p:cNvPr id="7" name="TextBox 6"/>
-          <p:cNvSpPr txBox="1"/>
-          <p:nvPr/>
-        </p:nvSpPr>
-        <p:spPr>
-          <a:xfrm>
-            <a:off x="594360" y="1353312"/>
-            <a:ext cx="5204307" cy="365760"/>
-          </a:xfrm>
-          <a:prstGeom prst="rect">
-            <a:avLst/>
-          </a:prstGeom>
-          <a:noFill/>
-        </p:spPr>
-        <p:txBody>
-          <a:bodyPr wrap="square" anchor="ctr"/>
-          <a:lstStyle/>
-          <a:p>
-            <a:pPr algn="ctr"/>
-            <a:r>
-              <a:rPr sz="1600" b="1" i="0">
-                <a:solidFill>
-                  <a:srgbClr val="FFFFFF"/>
-                </a:solidFill>
-                <a:latin typeface="Calibri"/>
-              </a:rPr>
-              <a:t>Maquina virtual</a:t>
-            </a:r>
-          </a:p>
-        </p:txBody>
-      </p:sp>
-      <p:sp>
-        <p:nvSpPr>
-          <p:cNvPr id="8" name="TextBox 7"/>
-          <p:cNvSpPr txBox="1"/>
-          <p:nvPr/>
-        </p:nvSpPr>
-        <p:spPr>
-          <a:xfrm>
-            <a:off x="621792" y="1901952"/>
-            <a:ext cx="5158587" cy="4498848"/>
-          </a:xfrm>
-          <a:prstGeom prst="rect">
-            <a:avLst/>
-          </a:prstGeom>
-          <a:noFill/>
-        </p:spPr>
-        <p:txBody>
-          <a:bodyPr wrap="square">
-            <a:spAutoFit/>
-          </a:bodyPr>
-          <a:lstStyle/>
-          <a:p>
-            <a:pPr>
-              <a:spcAft>
-                <a:spcPts val="800"/>
-              </a:spcAft>
-            </a:pPr>
-            <a:r>
-              <a:rPr sz="1500" b="0" i="0">
-                <a:solidFill>
-                  <a:srgbClr val="333333"/>
-                </a:solidFill>
-                <a:latin typeface="Calibri"/>
-              </a:rPr>
-              <a:t>–   Cada instancia trae un </a:t>
-            </a:r>
-            <a:r>
-              <a:rPr sz="1500" b="1" i="0">
-                <a:solidFill>
-                  <a:srgbClr val="333333"/>
-                </a:solidFill>
-                <a:latin typeface="Calibri"/>
-              </a:rPr>
-              <a:t>SO completo</a:t>
-            </a:r>
-            <a:r>
-              <a:rPr sz="1500" b="0" i="0">
-                <a:solidFill>
-                  <a:srgbClr val="333333"/>
-                </a:solidFill>
-                <a:latin typeface="Calibri"/>
-              </a:rPr>
-              <a:t> (kernel propio)</a:t>
-            </a:r>
-          </a:p>
-          <a:p>
-            <a:pPr>
-              <a:spcAft>
-                <a:spcPts val="800"/>
-              </a:spcAft>
-            </a:pPr>
-            <a:r>
-              <a:rPr sz="1500" b="0" i="0">
-                <a:solidFill>
-                  <a:srgbClr val="333333"/>
-                </a:solidFill>
-                <a:latin typeface="Calibri"/>
-              </a:rPr>
-              <a:t>–   Aislamiento fuerte a nivel de hardware virtual</a:t>
-            </a:r>
-          </a:p>
-          <a:p>
-            <a:pPr>
-              <a:spcAft>
-                <a:spcPts val="800"/>
-              </a:spcAft>
-            </a:pPr>
-            <a:r>
-              <a:rPr sz="1500" b="0" i="0">
-                <a:solidFill>
-                  <a:srgbClr val="333333"/>
-                </a:solidFill>
-                <a:latin typeface="Calibri"/>
-              </a:rPr>
-              <a:t>–   Arranque en </a:t>
-            </a:r>
-            <a:r>
-              <a:rPr sz="1500" b="1" i="0">
-                <a:solidFill>
-                  <a:srgbClr val="333333"/>
-                </a:solidFill>
-                <a:latin typeface="Calibri"/>
-              </a:rPr>
-              <a:t>minutos</a:t>
-            </a:r>
-            <a:r>
-              <a:rPr sz="1500" b="0" i="0">
-                <a:solidFill>
-                  <a:srgbClr val="333333"/>
-                </a:solidFill>
-                <a:latin typeface="Calibri"/>
-              </a:rPr>
-              <a:t>, tamaño en </a:t>
-            </a:r>
-            <a:r>
-              <a:rPr sz="1500" b="1" i="0">
-                <a:solidFill>
-                  <a:srgbClr val="333333"/>
-                </a:solidFill>
-                <a:latin typeface="Calibri"/>
-              </a:rPr>
-              <a:t>GB</a:t>
-            </a:r>
-          </a:p>
-          <a:p>
-            <a:pPr>
-              <a:spcAft>
-                <a:spcPts val="800"/>
-              </a:spcAft>
-            </a:pPr>
-            <a:r>
-              <a:rPr sz="1500" b="0" i="0">
-                <a:solidFill>
-                  <a:srgbClr val="333333"/>
-                </a:solidFill>
-                <a:latin typeface="Calibri"/>
-              </a:rPr>
-              <a:t>–   Util cuando se necesitan SO distintos</a:t>
-            </a:r>
-          </a:p>
-        </p:txBody>
-      </p:sp>
-      <p:sp>
-        <p:nvSpPr>
-          <p:cNvPr id="9" name="Rounded Rectangle 8"/>
-          <p:cNvSpPr/>
-          <p:nvPr/>
-        </p:nvSpPr>
-        <p:spPr>
-          <a:xfrm>
-            <a:off x="6255867" y="1261872"/>
-            <a:ext cx="5478627" cy="5093208"/>
-          </a:xfrm>
-          <a:prstGeom prst="roundRect">
-            <a:avLst>
-              <a:gd name="adj" fmla="val 12000"/>
-            </a:avLst>
-          </a:prstGeom>
-          <a:solidFill>
-            <a:srgbClr val="E8F4FA"/>
-          </a:solidFill>
-          <a:ln>
-            <a:noFill/>
-          </a:ln>
-        </p:spPr>
-        <p:style>
-          <a:lnRef idx="1">
-            <a:schemeClr val="accent1"/>
-          </a:lnRef>
-          <a:fillRef idx="3">
-            <a:schemeClr val="accent1"/>
-          </a:fillRef>
-          <a:effectRef idx="2">
-            <a:schemeClr val="accent1"/>
-          </a:effectRef>
-          <a:fontRef idx="minor">
-            <a:schemeClr val="lt1"/>
-          </a:fontRef>
-        </p:style>
-        <p:txBody>
-          <a:bodyPr rtlCol="0" anchor="ctr"/>
-          <a:lstStyle/>
-          <a:p>
-            <a:pPr algn="ctr"/>
-          </a:p>
-        </p:txBody>
-      </p:sp>
-      <p:sp>
-        <p:nvSpPr>
-          <p:cNvPr id="10" name="Rectangle 9"/>
-          <p:cNvSpPr/>
-          <p:nvPr/>
-        </p:nvSpPr>
-        <p:spPr>
-          <a:xfrm>
-            <a:off x="6255867" y="1261872"/>
-            <a:ext cx="5478627" cy="502920"/>
-          </a:xfrm>
-          <a:prstGeom prst="rect">
-            <a:avLst/>
           </a:prstGeom>
           <a:solidFill>
             <a:srgbClr val="095292"/>
@@ -9361,56 +9740,630 @@
           </a:fontRef>
         </p:style>
         <p:txBody>
-          <a:bodyPr rtlCol="0" anchor="ctr"/>
+          <a:bodyPr rtlCol="0" anchor="ctr" wrap="square"/>
           <a:lstStyle/>
           <a:p>
             <a:pPr algn="ctr"/>
-          </a:p>
-        </p:txBody>
-      </p:sp>
-      <p:sp>
-        <p:nvSpPr>
-          <p:cNvPr id="11" name="TextBox 10"/>
+            <a:r>
+              <a:rPr sz="1200" b="1" i="0">
+                <a:solidFill>
+                  <a:srgbClr val="FFFFFF"/>
+                </a:solidFill>
+                <a:latin typeface="Calibri"/>
+              </a:rPr>
+              <a:t>Máquinas virtuales</a:t>
+            </a:r>
+          </a:p>
+        </p:txBody>
+      </p:sp>
+      <p:sp>
+        <p:nvSpPr>
+          <p:cNvPr id="7" name="Rounded Rectangle 6"/>
+          <p:cNvSpPr/>
+          <p:nvPr/>
+        </p:nvSpPr>
+        <p:spPr>
+          <a:xfrm>
+            <a:off x="822960" y="2057400"/>
+            <a:ext cx="3931920" cy="594360"/>
+          </a:xfrm>
+          <a:prstGeom prst="roundRect">
+            <a:avLst>
+              <a:gd name="adj" fmla="val 12000"/>
+            </a:avLst>
+          </a:prstGeom>
+          <a:solidFill>
+            <a:srgbClr val="333333"/>
+          </a:solidFill>
+          <a:ln>
+            <a:noFill/>
+          </a:ln>
+        </p:spPr>
+        <p:style>
+          <a:lnRef idx="1">
+            <a:schemeClr val="accent1"/>
+          </a:lnRef>
+          <a:fillRef idx="3">
+            <a:schemeClr val="accent1"/>
+          </a:fillRef>
+          <a:effectRef idx="2">
+            <a:schemeClr val="accent1"/>
+          </a:effectRef>
+          <a:fontRef idx="minor">
+            <a:schemeClr val="lt1"/>
+          </a:fontRef>
+        </p:style>
+        <p:txBody>
+          <a:bodyPr rtlCol="0" anchor="ctr" wrap="square"/>
+          <a:lstStyle/>
+          <a:p>
+            <a:pPr algn="ctr"/>
+            <a:r>
+              <a:rPr sz="1300" b="1" i="0">
+                <a:solidFill>
+                  <a:srgbClr val="FFFFFF"/>
+                </a:solidFill>
+                <a:latin typeface="Calibri"/>
+              </a:rPr>
+              <a:t>Hardware físico</a:t>
+            </a:r>
+          </a:p>
+        </p:txBody>
+      </p:sp>
+      <p:sp>
+        <p:nvSpPr>
+          <p:cNvPr id="8" name="Rounded Rectangle 7"/>
+          <p:cNvSpPr/>
+          <p:nvPr/>
+        </p:nvSpPr>
+        <p:spPr>
+          <a:xfrm>
+            <a:off x="822960" y="2697480"/>
+            <a:ext cx="3931920" cy="594360"/>
+          </a:xfrm>
+          <a:prstGeom prst="roundRect">
+            <a:avLst>
+              <a:gd name="adj" fmla="val 12000"/>
+            </a:avLst>
+          </a:prstGeom>
+          <a:solidFill>
+            <a:srgbClr val="269CCB"/>
+          </a:solidFill>
+          <a:ln>
+            <a:noFill/>
+          </a:ln>
+        </p:spPr>
+        <p:style>
+          <a:lnRef idx="1">
+            <a:schemeClr val="accent1"/>
+          </a:lnRef>
+          <a:fillRef idx="3">
+            <a:schemeClr val="accent1"/>
+          </a:fillRef>
+          <a:effectRef idx="2">
+            <a:schemeClr val="accent1"/>
+          </a:effectRef>
+          <a:fontRef idx="minor">
+            <a:schemeClr val="lt1"/>
+          </a:fontRef>
+        </p:style>
+        <p:txBody>
+          <a:bodyPr rtlCol="0" anchor="ctr" wrap="square"/>
+          <a:lstStyle/>
+          <a:p>
+            <a:pPr algn="ctr"/>
+            <a:r>
+              <a:rPr sz="1300" b="1" i="0">
+                <a:solidFill>
+                  <a:srgbClr val="FFFFFF"/>
+                </a:solidFill>
+                <a:latin typeface="Calibri"/>
+              </a:rPr>
+              <a:t>Hipervisor</a:t>
+            </a:r>
+          </a:p>
+        </p:txBody>
+      </p:sp>
+      <p:sp>
+        <p:nvSpPr>
+          <p:cNvPr id="9" name="Rounded Rectangle 8"/>
+          <p:cNvSpPr/>
+          <p:nvPr/>
+        </p:nvSpPr>
+        <p:spPr>
+          <a:xfrm>
+            <a:off x="822960" y="3337560"/>
+            <a:ext cx="1874519" cy="640080"/>
+          </a:xfrm>
+          <a:prstGeom prst="roundRect">
+            <a:avLst>
+              <a:gd name="adj" fmla="val 12000"/>
+            </a:avLst>
+          </a:prstGeom>
+          <a:solidFill>
+            <a:srgbClr val="269CCB"/>
+          </a:solidFill>
+          <a:ln>
+            <a:noFill/>
+          </a:ln>
+        </p:spPr>
+        <p:style>
+          <a:lnRef idx="1">
+            <a:schemeClr val="accent1"/>
+          </a:lnRef>
+          <a:fillRef idx="3">
+            <a:schemeClr val="accent1"/>
+          </a:fillRef>
+          <a:effectRef idx="2">
+            <a:schemeClr val="accent1"/>
+          </a:effectRef>
+          <a:fontRef idx="minor">
+            <a:schemeClr val="lt1"/>
+          </a:fontRef>
+        </p:style>
+        <p:txBody>
+          <a:bodyPr rtlCol="0" anchor="ctr" wrap="square"/>
+          <a:lstStyle/>
+          <a:p>
+            <a:pPr algn="ctr"/>
+            <a:r>
+              <a:rPr sz="1100" b="1" i="0">
+                <a:solidFill>
+                  <a:srgbClr val="FFFFFF"/>
+                </a:solidFill>
+                <a:latin typeface="Calibri"/>
+              </a:rPr>
+              <a:t>SO invitado A
+(completo)</a:t>
+            </a:r>
+          </a:p>
+        </p:txBody>
+      </p:sp>
+      <p:sp>
+        <p:nvSpPr>
+          <p:cNvPr id="10" name="Rounded Rectangle 9"/>
+          <p:cNvSpPr/>
+          <p:nvPr/>
+        </p:nvSpPr>
+        <p:spPr>
+          <a:xfrm>
+            <a:off x="2880360" y="3337560"/>
+            <a:ext cx="1874519" cy="640080"/>
+          </a:xfrm>
+          <a:prstGeom prst="roundRect">
+            <a:avLst>
+              <a:gd name="adj" fmla="val 12000"/>
+            </a:avLst>
+          </a:prstGeom>
+          <a:solidFill>
+            <a:srgbClr val="269CCB"/>
+          </a:solidFill>
+          <a:ln>
+            <a:noFill/>
+          </a:ln>
+        </p:spPr>
+        <p:style>
+          <a:lnRef idx="1">
+            <a:schemeClr val="accent1"/>
+          </a:lnRef>
+          <a:fillRef idx="3">
+            <a:schemeClr val="accent1"/>
+          </a:fillRef>
+          <a:effectRef idx="2">
+            <a:schemeClr val="accent1"/>
+          </a:effectRef>
+          <a:fontRef idx="minor">
+            <a:schemeClr val="lt1"/>
+          </a:fontRef>
+        </p:style>
+        <p:txBody>
+          <a:bodyPr rtlCol="0" anchor="ctr" wrap="square"/>
+          <a:lstStyle/>
+          <a:p>
+            <a:pPr algn="ctr"/>
+            <a:r>
+              <a:rPr sz="1100" b="1" i="0">
+                <a:solidFill>
+                  <a:srgbClr val="FFFFFF"/>
+                </a:solidFill>
+                <a:latin typeface="Calibri"/>
+              </a:rPr>
+              <a:t>SO invitado B
+(completo)</a:t>
+            </a:r>
+          </a:p>
+        </p:txBody>
+      </p:sp>
+      <p:sp>
+        <p:nvSpPr>
+          <p:cNvPr id="11" name="Rounded Rectangle 10"/>
+          <p:cNvSpPr/>
+          <p:nvPr/>
+        </p:nvSpPr>
+        <p:spPr>
+          <a:xfrm>
+            <a:off x="822960" y="4023360"/>
+            <a:ext cx="1874519" cy="548640"/>
+          </a:xfrm>
+          <a:prstGeom prst="roundRect">
+            <a:avLst>
+              <a:gd name="adj" fmla="val 12000"/>
+            </a:avLst>
+          </a:prstGeom>
+          <a:solidFill>
+            <a:srgbClr val="FFD000"/>
+          </a:solidFill>
+          <a:ln>
+            <a:noFill/>
+          </a:ln>
+        </p:spPr>
+        <p:style>
+          <a:lnRef idx="1">
+            <a:schemeClr val="accent1"/>
+          </a:lnRef>
+          <a:fillRef idx="3">
+            <a:schemeClr val="accent1"/>
+          </a:fillRef>
+          <a:effectRef idx="2">
+            <a:schemeClr val="accent1"/>
+          </a:effectRef>
+          <a:fontRef idx="minor">
+            <a:schemeClr val="lt1"/>
+          </a:fontRef>
+        </p:style>
+        <p:txBody>
+          <a:bodyPr rtlCol="0" anchor="ctr" wrap="square"/>
+          <a:lstStyle/>
+          <a:p>
+            <a:pPr algn="ctr"/>
+            <a:r>
+              <a:rPr sz="1300" b="1" i="0">
+                <a:solidFill>
+                  <a:srgbClr val="095292"/>
+                </a:solidFill>
+                <a:latin typeface="Calibri"/>
+              </a:rPr>
+              <a:t>App A</a:t>
+            </a:r>
+          </a:p>
+        </p:txBody>
+      </p:sp>
+      <p:sp>
+        <p:nvSpPr>
+          <p:cNvPr id="12" name="Rounded Rectangle 11"/>
+          <p:cNvSpPr/>
+          <p:nvPr/>
+        </p:nvSpPr>
+        <p:spPr>
+          <a:xfrm>
+            <a:off x="2880360" y="4023360"/>
+            <a:ext cx="1874519" cy="548640"/>
+          </a:xfrm>
+          <a:prstGeom prst="roundRect">
+            <a:avLst>
+              <a:gd name="adj" fmla="val 12000"/>
+            </a:avLst>
+          </a:prstGeom>
+          <a:solidFill>
+            <a:srgbClr val="FFD000"/>
+          </a:solidFill>
+          <a:ln>
+            <a:noFill/>
+          </a:ln>
+        </p:spPr>
+        <p:style>
+          <a:lnRef idx="1">
+            <a:schemeClr val="accent1"/>
+          </a:lnRef>
+          <a:fillRef idx="3">
+            <a:schemeClr val="accent1"/>
+          </a:fillRef>
+          <a:effectRef idx="2">
+            <a:schemeClr val="accent1"/>
+          </a:effectRef>
+          <a:fontRef idx="minor">
+            <a:schemeClr val="lt1"/>
+          </a:fontRef>
+        </p:style>
+        <p:txBody>
+          <a:bodyPr rtlCol="0" anchor="ctr" wrap="square"/>
+          <a:lstStyle/>
+          <a:p>
+            <a:pPr algn="ctr"/>
+            <a:r>
+              <a:rPr sz="1300" b="1" i="0">
+                <a:solidFill>
+                  <a:srgbClr val="095292"/>
+                </a:solidFill>
+                <a:latin typeface="Calibri"/>
+              </a:rPr>
+              <a:t>App B</a:t>
+            </a:r>
+          </a:p>
+        </p:txBody>
+      </p:sp>
+      <p:sp>
+        <p:nvSpPr>
+          <p:cNvPr id="13" name="Rounded Rectangle 12"/>
+          <p:cNvSpPr/>
+          <p:nvPr/>
+        </p:nvSpPr>
+        <p:spPr>
+          <a:xfrm>
+            <a:off x="7315200" y="1417320"/>
+            <a:ext cx="3931920" cy="457200"/>
+          </a:xfrm>
+          <a:prstGeom prst="roundRect">
+            <a:avLst>
+              <a:gd name="adj" fmla="val 12000"/>
+            </a:avLst>
+          </a:prstGeom>
+          <a:solidFill>
+            <a:srgbClr val="095292"/>
+          </a:solidFill>
+          <a:ln>
+            <a:noFill/>
+          </a:ln>
+        </p:spPr>
+        <p:style>
+          <a:lnRef idx="1">
+            <a:schemeClr val="accent1"/>
+          </a:lnRef>
+          <a:fillRef idx="3">
+            <a:schemeClr val="accent1"/>
+          </a:fillRef>
+          <a:effectRef idx="2">
+            <a:schemeClr val="accent1"/>
+          </a:effectRef>
+          <a:fontRef idx="minor">
+            <a:schemeClr val="lt1"/>
+          </a:fontRef>
+        </p:style>
+        <p:txBody>
+          <a:bodyPr rtlCol="0" anchor="ctr" wrap="square"/>
+          <a:lstStyle/>
+          <a:p>
+            <a:pPr algn="ctr"/>
+            <a:r>
+              <a:rPr sz="1200" b="1" i="0">
+                <a:solidFill>
+                  <a:srgbClr val="FFFFFF"/>
+                </a:solidFill>
+                <a:latin typeface="Calibri"/>
+              </a:rPr>
+              <a:t>Contenedores</a:t>
+            </a:r>
+          </a:p>
+        </p:txBody>
+      </p:sp>
+      <p:sp>
+        <p:nvSpPr>
+          <p:cNvPr id="14" name="Rounded Rectangle 13"/>
+          <p:cNvSpPr/>
+          <p:nvPr/>
+        </p:nvSpPr>
+        <p:spPr>
+          <a:xfrm>
+            <a:off x="7315200" y="2057400"/>
+            <a:ext cx="3931920" cy="594360"/>
+          </a:xfrm>
+          <a:prstGeom prst="roundRect">
+            <a:avLst>
+              <a:gd name="adj" fmla="val 12000"/>
+            </a:avLst>
+          </a:prstGeom>
+          <a:solidFill>
+            <a:srgbClr val="333333"/>
+          </a:solidFill>
+          <a:ln>
+            <a:noFill/>
+          </a:ln>
+        </p:spPr>
+        <p:style>
+          <a:lnRef idx="1">
+            <a:schemeClr val="accent1"/>
+          </a:lnRef>
+          <a:fillRef idx="3">
+            <a:schemeClr val="accent1"/>
+          </a:fillRef>
+          <a:effectRef idx="2">
+            <a:schemeClr val="accent1"/>
+          </a:effectRef>
+          <a:fontRef idx="minor">
+            <a:schemeClr val="lt1"/>
+          </a:fontRef>
+        </p:style>
+        <p:txBody>
+          <a:bodyPr rtlCol="0" anchor="ctr" wrap="square"/>
+          <a:lstStyle/>
+          <a:p>
+            <a:pPr algn="ctr"/>
+            <a:r>
+              <a:rPr sz="1300" b="1" i="0">
+                <a:solidFill>
+                  <a:srgbClr val="FFFFFF"/>
+                </a:solidFill>
+                <a:latin typeface="Calibri"/>
+              </a:rPr>
+              <a:t>Hardware físico</a:t>
+            </a:r>
+          </a:p>
+        </p:txBody>
+      </p:sp>
+      <p:sp>
+        <p:nvSpPr>
+          <p:cNvPr id="15" name="Rounded Rectangle 14"/>
+          <p:cNvSpPr/>
+          <p:nvPr/>
+        </p:nvSpPr>
+        <p:spPr>
+          <a:xfrm>
+            <a:off x="7315200" y="2697480"/>
+            <a:ext cx="3931920" cy="594360"/>
+          </a:xfrm>
+          <a:prstGeom prst="roundRect">
+            <a:avLst>
+              <a:gd name="adj" fmla="val 12000"/>
+            </a:avLst>
+          </a:prstGeom>
+          <a:solidFill>
+            <a:srgbClr val="269CCB"/>
+          </a:solidFill>
+          <a:ln>
+            <a:noFill/>
+          </a:ln>
+        </p:spPr>
+        <p:style>
+          <a:lnRef idx="1">
+            <a:schemeClr val="accent1"/>
+          </a:lnRef>
+          <a:fillRef idx="3">
+            <a:schemeClr val="accent1"/>
+          </a:fillRef>
+          <a:effectRef idx="2">
+            <a:schemeClr val="accent1"/>
+          </a:effectRef>
+          <a:fontRef idx="minor">
+            <a:schemeClr val="lt1"/>
+          </a:fontRef>
+        </p:style>
+        <p:txBody>
+          <a:bodyPr rtlCol="0" anchor="ctr" wrap="square"/>
+          <a:lstStyle/>
+          <a:p>
+            <a:pPr algn="ctr"/>
+            <a:r>
+              <a:rPr sz="1050" b="1" i="0">
+                <a:solidFill>
+                  <a:srgbClr val="FFFFFF"/>
+                </a:solidFill>
+                <a:latin typeface="Calibri"/>
+              </a:rPr>
+              <a:t>SO anfitrión + motor de contenedores (kernel compartido)</a:t>
+            </a:r>
+          </a:p>
+        </p:txBody>
+      </p:sp>
+      <p:sp>
+        <p:nvSpPr>
+          <p:cNvPr id="16" name="Rounded Rectangle 15"/>
+          <p:cNvSpPr/>
+          <p:nvPr/>
+        </p:nvSpPr>
+        <p:spPr>
+          <a:xfrm>
+            <a:off x="7315200" y="3337560"/>
+            <a:ext cx="1874519" cy="640080"/>
+          </a:xfrm>
+          <a:prstGeom prst="roundRect">
+            <a:avLst>
+              <a:gd name="adj" fmla="val 12000"/>
+            </a:avLst>
+          </a:prstGeom>
+          <a:solidFill>
+            <a:srgbClr val="FFD000"/>
+          </a:solidFill>
+          <a:ln>
+            <a:noFill/>
+          </a:ln>
+        </p:spPr>
+        <p:style>
+          <a:lnRef idx="1">
+            <a:schemeClr val="accent1"/>
+          </a:lnRef>
+          <a:fillRef idx="3">
+            <a:schemeClr val="accent1"/>
+          </a:fillRef>
+          <a:effectRef idx="2">
+            <a:schemeClr val="accent1"/>
+          </a:effectRef>
+          <a:fontRef idx="minor">
+            <a:schemeClr val="lt1"/>
+          </a:fontRef>
+        </p:style>
+        <p:txBody>
+          <a:bodyPr rtlCol="0" anchor="ctr" wrap="square"/>
+          <a:lstStyle/>
+          <a:p>
+            <a:pPr algn="ctr"/>
+            <a:r>
+              <a:rPr sz="1100" b="1" i="0">
+                <a:solidFill>
+                  <a:srgbClr val="095292"/>
+                </a:solidFill>
+                <a:latin typeface="Calibri"/>
+              </a:rPr>
+              <a:t>Contenedor A
+(App A)</a:t>
+            </a:r>
+          </a:p>
+        </p:txBody>
+      </p:sp>
+      <p:sp>
+        <p:nvSpPr>
+          <p:cNvPr id="17" name="Rounded Rectangle 16"/>
+          <p:cNvSpPr/>
+          <p:nvPr/>
+        </p:nvSpPr>
+        <p:spPr>
+          <a:xfrm>
+            <a:off x="9372600" y="3337560"/>
+            <a:ext cx="1874519" cy="640080"/>
+          </a:xfrm>
+          <a:prstGeom prst="roundRect">
+            <a:avLst>
+              <a:gd name="adj" fmla="val 12000"/>
+            </a:avLst>
+          </a:prstGeom>
+          <a:solidFill>
+            <a:srgbClr val="FFD000"/>
+          </a:solidFill>
+          <a:ln>
+            <a:noFill/>
+          </a:ln>
+        </p:spPr>
+        <p:style>
+          <a:lnRef idx="1">
+            <a:schemeClr val="accent1"/>
+          </a:lnRef>
+          <a:fillRef idx="3">
+            <a:schemeClr val="accent1"/>
+          </a:fillRef>
+          <a:effectRef idx="2">
+            <a:schemeClr val="accent1"/>
+          </a:effectRef>
+          <a:fontRef idx="minor">
+            <a:schemeClr val="lt1"/>
+          </a:fontRef>
+        </p:style>
+        <p:txBody>
+          <a:bodyPr rtlCol="0" anchor="ctr" wrap="square"/>
+          <a:lstStyle/>
+          <a:p>
+            <a:pPr algn="ctr"/>
+            <a:r>
+              <a:rPr sz="1100" b="1" i="0">
+                <a:solidFill>
+                  <a:srgbClr val="095292"/>
+                </a:solidFill>
+                <a:latin typeface="Calibri"/>
+              </a:rPr>
+              <a:t>Contenedor B
+(App B)</a:t>
+            </a:r>
+          </a:p>
+        </p:txBody>
+      </p:sp>
+      <p:sp>
+        <p:nvSpPr>
+          <p:cNvPr id="18" name="TextBox 17"/>
           <p:cNvSpPr txBox="1"/>
           <p:nvPr/>
         </p:nvSpPr>
         <p:spPr>
           <a:xfrm>
-            <a:off x="6393027" y="1353312"/>
-            <a:ext cx="5204307" cy="365760"/>
-          </a:xfrm>
-          <a:prstGeom prst="rect">
-            <a:avLst/>
-          </a:prstGeom>
-          <a:noFill/>
-        </p:spPr>
-        <p:txBody>
-          <a:bodyPr wrap="square" anchor="ctr"/>
-          <a:lstStyle/>
-          <a:p>
-            <a:pPr algn="ctr"/>
-            <a:r>
-              <a:rPr sz="1600" b="1" i="0">
-                <a:solidFill>
-                  <a:srgbClr val="FFFFFF"/>
-                </a:solidFill>
-                <a:latin typeface="Calibri"/>
-              </a:rPr>
-              <a:t>Contenedor</a:t>
-            </a:r>
-          </a:p>
-        </p:txBody>
-      </p:sp>
-      <p:sp>
-        <p:nvSpPr>
-          <p:cNvPr id="12" name="TextBox 11"/>
-          <p:cNvSpPr txBox="1"/>
-          <p:nvPr/>
-        </p:nvSpPr>
-        <p:spPr>
-          <a:xfrm>
-            <a:off x="6420459" y="1901952"/>
-            <a:ext cx="5158587" cy="4498848"/>
+            <a:off x="457200" y="6263640"/>
+            <a:ext cx="11277295" cy="411480"/>
           </a:xfrm>
           <a:prstGeom prst="rect">
             <a:avLst/>
@@ -9423,119 +10376,21 @@
           </a:bodyPr>
           <a:lstStyle/>
           <a:p>
-            <a:pPr>
-              <a:spcAft>
-                <a:spcPts val="800"/>
-              </a:spcAft>
-            </a:pPr>
-            <a:r>
-              <a:rPr sz="1500" b="0" i="0">
-                <a:solidFill>
-                  <a:srgbClr val="333333"/>
-                </a:solidFill>
-                <a:latin typeface="Calibri"/>
-              </a:rPr>
-              <a:t>–   </a:t>
-            </a:r>
-            <a:r>
-              <a:rPr sz="1500" b="1" i="0">
-                <a:solidFill>
-                  <a:srgbClr val="333333"/>
-                </a:solidFill>
-                <a:latin typeface="Calibri"/>
-              </a:rPr>
-              <a:t>Comparte el kernel</a:t>
-            </a:r>
-            <a:r>
-              <a:rPr sz="1500" b="0" i="0">
-                <a:solidFill>
-                  <a:srgbClr val="333333"/>
-                </a:solidFill>
-                <a:latin typeface="Calibri"/>
-              </a:rPr>
-              <a:t> del anfitrion</a:t>
-            </a:r>
-          </a:p>
-          <a:p>
-            <a:pPr>
-              <a:spcAft>
-                <a:spcPts val="800"/>
-              </a:spcAft>
-            </a:pPr>
-            <a:r>
-              <a:rPr sz="1500" b="0" i="0">
-                <a:solidFill>
-                  <a:srgbClr val="333333"/>
-                </a:solidFill>
-                <a:latin typeface="Calibri"/>
-              </a:rPr>
-              <a:t>–   Empaqueta solo app + dependencias</a:t>
-            </a:r>
-          </a:p>
-          <a:p>
-            <a:pPr>
-              <a:spcAft>
-                <a:spcPts val="800"/>
-              </a:spcAft>
-            </a:pPr>
-            <a:r>
-              <a:rPr sz="1500" b="0" i="0">
-                <a:solidFill>
-                  <a:srgbClr val="333333"/>
-                </a:solidFill>
-                <a:latin typeface="Calibri"/>
-              </a:rPr>
-              <a:t>–   Arranque en </a:t>
-            </a:r>
-            <a:r>
-              <a:rPr sz="1500" b="1" i="0">
-                <a:solidFill>
-                  <a:srgbClr val="333333"/>
-                </a:solidFill>
-                <a:latin typeface="Calibri"/>
-              </a:rPr>
-              <a:t>segundos</a:t>
-            </a:r>
-            <a:r>
-              <a:rPr sz="1500" b="0" i="0">
-                <a:solidFill>
-                  <a:srgbClr val="333333"/>
-                </a:solidFill>
-                <a:latin typeface="Calibri"/>
-              </a:rPr>
-              <a:t>, tamaño en </a:t>
-            </a:r>
-            <a:r>
-              <a:rPr sz="1500" b="1" i="0">
-                <a:solidFill>
-                  <a:srgbClr val="333333"/>
-                </a:solidFill>
-                <a:latin typeface="Calibri"/>
-              </a:rPr>
-              <a:t>MB</a:t>
-            </a:r>
-          </a:p>
-          <a:p>
-            <a:pPr>
-              <a:spcAft>
-                <a:spcPts val="800"/>
-              </a:spcAft>
-            </a:pPr>
-            <a:r>
-              <a:rPr sz="1500" b="0" i="0">
-                <a:solidFill>
-                  <a:srgbClr val="333333"/>
-                </a:solidFill>
-                <a:latin typeface="Calibri"/>
-              </a:rPr>
-              <a:t>–   Util para desplegar el mismo servicio muchas veces</a:t>
-            </a:r>
-          </a:p>
-        </p:txBody>
-      </p:sp>
-      <p:sp>
-        <p:nvSpPr>
-          <p:cNvPr id="13" name="TextBox 12"/>
+            <a:r>
+              <a:rPr sz="1100" b="0" i="1">
+                <a:solidFill>
+                  <a:srgbClr val="666666"/>
+                </a:solidFill>
+                <a:latin typeface="Calibri"/>
+              </a:rPr>
+              <a:t>VM: cada instancia carga un SO completo (aislamiento fuerte, más pesado). Contenedor: comparte el kernel del anfitrión y solo empaqueta app + dependencias (arranca en segundos, pesa MB no GB).</a:t>
+            </a:r>
+          </a:p>
+        </p:txBody>
+      </p:sp>
+      <p:sp>
+        <p:nvSpPr>
+          <p:cNvPr id="19" name="TextBox 18"/>
           <p:cNvSpPr txBox="1"/>
           <p:nvPr/>
         </p:nvSpPr>

--- a/Arquitectura de Sistemas Computacionales/Clases/Clase 3 - Virtualizacion y contenedores/Presentacion.pptx
+++ b/Arquitectura de Sistemas Computacionales/Clases/Clase 3 - Virtualizacion y contenedores/Presentacion.pptx
@@ -5912,7 +5912,7 @@
               </a:spcAft>
             </a:pPr>
             <a:r>
-              <a:rPr sz="1600" b="1" i="0">
+              <a:rPr sz="2000" b="1" i="0">
                 <a:solidFill>
                   <a:srgbClr val="333333"/>
                 </a:solidFill>
@@ -5921,7 +5921,7 @@
               <a:t>1.</a:t>
             </a:r>
             <a:r>
-              <a:rPr sz="1600" b="0" i="0">
+              <a:rPr sz="2000" b="0" i="0">
                 <a:solidFill>
                   <a:srgbClr val="333333"/>
                 </a:solidFill>
@@ -5937,7 +5937,7 @@
               </a:spcAft>
             </a:pPr>
             <a:r>
-              <a:rPr sz="1600" b="0" i="0">
+              <a:rPr sz="2000" b="0" i="0">
                 <a:solidFill>
                   <a:srgbClr val="333333"/>
                 </a:solidFill>
@@ -5946,7 +5946,7 @@
               <a:t>–   </a:t>
             </a:r>
             <a:r>
-              <a:rPr sz="1600" b="1" i="0">
+              <a:rPr sz="2000" b="1" i="0">
                 <a:solidFill>
                   <a:srgbClr val="333333"/>
                 </a:solidFill>
@@ -5955,7 +5955,7 @@
               <a:t>2.</a:t>
             </a:r>
             <a:r>
-              <a:rPr sz="1600" b="0" i="0">
+              <a:rPr sz="2000" b="0" i="0">
                 <a:solidFill>
                   <a:srgbClr val="333333"/>
                 </a:solidFill>
@@ -5971,7 +5971,7 @@
               </a:spcAft>
             </a:pPr>
             <a:r>
-              <a:rPr sz="1600" b="0" i="0">
+              <a:rPr sz="2000" b="0" i="0">
                 <a:solidFill>
                   <a:srgbClr val="333333"/>
                 </a:solidFill>
@@ -5980,7 +5980,7 @@
               <a:t>–   </a:t>
             </a:r>
             <a:r>
-              <a:rPr sz="1600" b="1" i="0">
+              <a:rPr sz="2000" b="1" i="0">
                 <a:solidFill>
                   <a:srgbClr val="333333"/>
                 </a:solidFill>
@@ -5989,7 +5989,7 @@
               <a:t>3.</a:t>
             </a:r>
             <a:r>
-              <a:rPr sz="1600" b="0" i="0">
+              <a:rPr sz="2000" b="0" i="0">
                 <a:solidFill>
                   <a:srgbClr val="333333"/>
                 </a:solidFill>
@@ -6005,7 +6005,7 @@
               </a:spcAft>
             </a:pPr>
             <a:r>
-              <a:rPr sz="1600" b="0" i="0">
+              <a:rPr sz="2000" b="0" i="0">
                 <a:solidFill>
                   <a:srgbClr val="333333"/>
                 </a:solidFill>
@@ -6014,7 +6014,7 @@
               <a:t>–   </a:t>
             </a:r>
             <a:r>
-              <a:rPr sz="1600" b="1" i="0">
+              <a:rPr sz="2000" b="1" i="0">
                 <a:solidFill>
                   <a:srgbClr val="333333"/>
                 </a:solidFill>
@@ -6023,7 +6023,7 @@
               <a:t>4.</a:t>
             </a:r>
             <a:r>
-              <a:rPr sz="1600" b="0" i="0">
+              <a:rPr sz="2000" b="0" i="0">
                 <a:solidFill>
                   <a:srgbClr val="333333"/>
                 </a:solidFill>
@@ -7070,7 +7070,7 @@
               </a:spcAft>
             </a:pPr>
             <a:r>
-              <a:rPr sz="1600" b="0" i="0">
+              <a:rPr sz="2000" b="0" i="0">
                 <a:solidFill>
                   <a:srgbClr val="333333"/>
                 </a:solidFill>
@@ -7079,7 +7079,7 @@
               <a:t>–   </a:t>
             </a:r>
             <a:r>
-              <a:rPr sz="1600" b="1" i="0">
+              <a:rPr sz="2000" b="1" i="0">
                 <a:solidFill>
                   <a:srgbClr val="333333"/>
                 </a:solidFill>
@@ -7088,7 +7088,7 @@
               <a:t>0–10</a:t>
             </a:r>
             <a:r>
-              <a:rPr sz="1600" b="0" i="0">
+              <a:rPr sz="2000" b="0" i="0">
                 <a:solidFill>
                   <a:srgbClr val="333333"/>
                 </a:solidFill>
@@ -7104,7 +7104,7 @@
               </a:spcAft>
             </a:pPr>
             <a:r>
-              <a:rPr sz="1600" b="1" i="0">
+              <a:rPr sz="2000" b="1" i="0">
                 <a:solidFill>
                   <a:srgbClr val="333333"/>
                 </a:solidFill>
@@ -7113,7 +7113,7 @@
               <a:t>10–40</a:t>
             </a:r>
             <a:r>
-              <a:rPr sz="1600" b="0" i="0">
+              <a:rPr sz="2000" b="0" i="0">
                 <a:solidFill>
                   <a:srgbClr val="333333"/>
                 </a:solidFill>
@@ -7129,7 +7129,7 @@
               </a:spcAft>
             </a:pPr>
             <a:r>
-              <a:rPr sz="1600" b="0" i="0">
+              <a:rPr sz="2000" b="0" i="0">
                 <a:solidFill>
                   <a:srgbClr val="333333"/>
                 </a:solidFill>
@@ -7138,7 +7138,7 @@
               <a:t>–   </a:t>
             </a:r>
             <a:r>
-              <a:rPr sz="1600" b="1" i="0">
+              <a:rPr sz="2000" b="1" i="0">
                 <a:solidFill>
                   <a:srgbClr val="333333"/>
                 </a:solidFill>
@@ -7147,7 +7147,7 @@
               <a:t>40–100</a:t>
             </a:r>
             <a:r>
-              <a:rPr sz="1600" b="0" i="0">
+              <a:rPr sz="2000" b="0" i="0">
                 <a:solidFill>
                   <a:srgbClr val="333333"/>
                 </a:solidFill>
@@ -7163,7 +7163,7 @@
               </a:spcAft>
             </a:pPr>
             <a:r>
-              <a:rPr sz="1600" b="1" i="0">
+              <a:rPr sz="2000" b="1" i="0">
                 <a:solidFill>
                   <a:srgbClr val="333333"/>
                 </a:solidFill>
@@ -7172,7 +7172,7 @@
               <a:t>100–115</a:t>
             </a:r>
             <a:r>
-              <a:rPr sz="1600" b="0" i="0">
+              <a:rPr sz="2000" b="0" i="0">
                 <a:solidFill>
                   <a:srgbClr val="333333"/>
                 </a:solidFill>
@@ -7188,7 +7188,7 @@
               </a:spcAft>
             </a:pPr>
             <a:r>
-              <a:rPr sz="1600" b="1" i="0">
+              <a:rPr sz="2000" b="1" i="0">
                 <a:solidFill>
                   <a:srgbClr val="333333"/>
                 </a:solidFill>
@@ -7197,7 +7197,7 @@
               <a:t>115–120</a:t>
             </a:r>
             <a:r>
-              <a:rPr sz="1600" b="0" i="0">
+              <a:rPr sz="2000" b="0" i="0">
                 <a:solidFill>
                   <a:srgbClr val="333333"/>
                 </a:solidFill>
@@ -7417,7 +7417,7 @@
               </a:spcAft>
             </a:pPr>
             <a:r>
-              <a:rPr sz="1600" b="0" i="0">
+              <a:rPr sz="2000" b="0" i="0">
                 <a:solidFill>
                   <a:srgbClr val="333333"/>
                 </a:solidFill>
@@ -7433,7 +7433,7 @@
               </a:spcAft>
             </a:pPr>
             <a:r>
-              <a:rPr sz="1600" b="0" i="0">
+              <a:rPr sz="2000" b="0" i="0">
                 <a:solidFill>
                   <a:srgbClr val="333333"/>
                 </a:solidFill>
@@ -7442,7 +7442,7 @@
               <a:t>–   Ejecutar un contenedor en lab de </a:t>
             </a:r>
             <a:r>
-              <a:rPr sz="1600" b="1" i="0">
+              <a:rPr sz="2000" b="1" i="0">
                 <a:solidFill>
                   <a:srgbClr val="333333"/>
                 </a:solidFill>
@@ -7451,7 +7451,7 @@
               <a:t>navegador</a:t>
             </a:r>
             <a:r>
-              <a:rPr sz="1600" b="0" i="0">
+              <a:rPr sz="2000" b="0" i="0">
                 <a:solidFill>
                   <a:srgbClr val="333333"/>
                 </a:solidFill>
@@ -7467,7 +7467,7 @@
               </a:spcAft>
             </a:pPr>
             <a:r>
-              <a:rPr sz="1600" b="0" i="0">
+              <a:rPr sz="2000" b="0" i="0">
                 <a:solidFill>
                   <a:srgbClr val="333333"/>
                 </a:solidFill>
@@ -7476,7 +7476,7 @@
               <a:t>–   Publicar el puerto y verificar el servicio con un </a:t>
             </a:r>
             <a:r>
-              <a:rPr sz="1600" b="1" i="0">
+              <a:rPr sz="2000" b="1" i="0">
                 <a:solidFill>
                   <a:srgbClr val="333333"/>
                 </a:solidFill>
@@ -7485,7 +7485,7 @@
               <a:t>endpoint de salud</a:t>
             </a:r>
             <a:r>
-              <a:rPr sz="1600" b="0" i="0">
+              <a:rPr sz="2000" b="0" i="0">
                 <a:solidFill>
                   <a:srgbClr val="333333"/>
                 </a:solidFill>
@@ -7501,7 +7501,7 @@
               </a:spcAft>
             </a:pPr>
             <a:r>
-              <a:rPr sz="1600" b="0" i="0">
+              <a:rPr sz="2000" b="0" i="0">
                 <a:solidFill>
                   <a:srgbClr val="333333"/>
                 </a:solidFill>
@@ -7721,7 +7721,7 @@
               </a:spcAft>
             </a:pPr>
             <a:r>
-              <a:rPr sz="1600" b="0" i="0">
+              <a:rPr sz="2000" b="0" i="0">
                 <a:solidFill>
                   <a:srgbClr val="333333"/>
                 </a:solidFill>
@@ -7730,7 +7730,7 @@
               <a:t>–   </a:t>
             </a:r>
             <a:r>
-              <a:rPr sz="1600" b="1" i="0">
+              <a:rPr sz="2000" b="1" i="0">
                 <a:solidFill>
                   <a:srgbClr val="333333"/>
                 </a:solidFill>
@@ -7739,7 +7739,7 @@
               <a:t>Entregable:</a:t>
             </a:r>
             <a:r>
-              <a:rPr sz="1600" b="0" i="0">
+              <a:rPr sz="2000" b="0" i="0">
                 <a:solidFill>
                   <a:srgbClr val="333333"/>
                 </a:solidFill>
@@ -7755,7 +7755,7 @@
               </a:spcAft>
             </a:pPr>
             <a:r>
-              <a:rPr sz="1600" b="0" i="0">
+              <a:rPr sz="2000" b="0" i="0">
                 <a:solidFill>
                   <a:srgbClr val="333333"/>
                 </a:solidFill>
@@ -7764,7 +7764,7 @@
               <a:t>–   Herramienta: </a:t>
             </a:r>
             <a:r>
-              <a:rPr sz="1600" b="1" i="0">
+              <a:rPr sz="2000" b="1" i="0">
                 <a:solidFill>
                   <a:srgbClr val="333333"/>
                 </a:solidFill>
@@ -7780,7 +7780,7 @@
               </a:spcAft>
             </a:pPr>
             <a:r>
-              <a:rPr sz="1600" b="0" i="0">
+              <a:rPr sz="2000" b="0" i="0">
                 <a:solidFill>
                   <a:srgbClr val="333333"/>
                 </a:solidFill>
@@ -7789,7 +7789,7 @@
               <a:t>–   Todo lo que construyan hoy entra al </a:t>
             </a:r>
             <a:r>
-              <a:rPr sz="1600" b="1" i="0">
+              <a:rPr sz="2000" b="1" i="0">
                 <a:solidFill>
                   <a:srgbClr val="333333"/>
                 </a:solidFill>
@@ -7798,7 +7798,7 @@
               <a:t>informe/repo del PI</a:t>
             </a:r>
             <a:r>
-              <a:rPr sz="1600" b="0" i="0">
+              <a:rPr sz="2000" b="0" i="0">
                 <a:solidFill>
                   <a:srgbClr val="333333"/>
                 </a:solidFill>
@@ -7814,7 +7814,7 @@
               </a:spcAft>
             </a:pPr>
             <a:r>
-              <a:rPr sz="1600" b="0" i="0">
+              <a:rPr sz="2000" b="0" i="0">
                 <a:solidFill>
                   <a:srgbClr val="333333"/>
                 </a:solidFill>
@@ -8034,7 +8034,7 @@
               </a:spcAft>
             </a:pPr>
             <a:r>
-              <a:rPr sz="1600" b="0" i="0">
+              <a:rPr sz="2000" b="0" i="0">
                 <a:solidFill>
                   <a:srgbClr val="333333"/>
                 </a:solidFill>
@@ -8050,7 +8050,7 @@
               </a:spcAft>
             </a:pPr>
             <a:r>
-              <a:rPr sz="1600" b="0" i="0">
+              <a:rPr sz="2000" b="0" i="0">
                 <a:solidFill>
                   <a:srgbClr val="333333"/>
                 </a:solidFill>
@@ -8066,7 +8066,7 @@
               </a:spcAft>
             </a:pPr>
             <a:r>
-              <a:rPr sz="1600" b="0" i="0">
+              <a:rPr sz="2000" b="0" i="0">
                 <a:solidFill>
                   <a:srgbClr val="333333"/>
                 </a:solidFill>
@@ -8082,7 +8082,7 @@
               </a:spcAft>
             </a:pPr>
             <a:r>
-              <a:rPr sz="1600" b="0" i="0">
+              <a:rPr sz="2000" b="0" i="0">
                 <a:solidFill>
                   <a:srgbClr val="333333"/>
                 </a:solidFill>
@@ -8091,7 +8091,7 @@
               <a:t>–   CloudLite: contenerizamos al menos </a:t>
             </a:r>
             <a:r>
-              <a:rPr sz="1600" b="1" i="0">
+              <a:rPr sz="2000" b="1" i="0">
                 <a:solidFill>
                   <a:srgbClr val="333333"/>
                 </a:solidFill>
@@ -8100,7 +8100,7 @@
               <a:t>un</a:t>
             </a:r>
             <a:r>
-              <a:rPr sz="1600" b="0" i="0">
+              <a:rPr sz="2000" b="0" i="0">
                 <a:solidFill>
                   <a:srgbClr val="333333"/>
                 </a:solidFill>
@@ -8320,7 +8320,7 @@
               </a:spcAft>
             </a:pPr>
             <a:r>
-              <a:rPr sz="1600" b="0" i="0">
+              <a:rPr sz="2000" b="0" i="0">
                 <a:solidFill>
                   <a:srgbClr val="333333"/>
                 </a:solidFill>
@@ -8329,7 +8329,7 @@
               <a:t>–   Abrir </a:t>
             </a:r>
             <a:r>
-              <a:rPr sz="1600" b="1" i="0">
+              <a:rPr sz="2000" b="1" i="0">
                 <a:solidFill>
                   <a:srgbClr val="333333"/>
                 </a:solidFill>
@@ -8338,7 +8338,7 @@
               <a:t>Killercoda</a:t>
             </a:r>
             <a:r>
-              <a:rPr sz="1600" b="0" i="0">
+              <a:rPr sz="2000" b="0" i="0">
                 <a:solidFill>
                   <a:srgbClr val="333333"/>
                 </a:solidFill>
@@ -8354,7 +8354,7 @@
               </a:spcAft>
             </a:pPr>
             <a:r>
-              <a:rPr sz="1600" b="0" i="0">
+              <a:rPr sz="2000" b="0" i="0">
                 <a:solidFill>
                   <a:srgbClr val="333333"/>
                 </a:solidFill>
@@ -8363,7 +8363,7 @@
               <a:t>–   «docker run» de un nginx/hello y luego </a:t>
             </a:r>
             <a:r>
-              <a:rPr sz="1600" b="1" i="0">
+              <a:rPr sz="2000" b="1" i="0">
                 <a:solidFill>
                   <a:srgbClr val="333333"/>
                 </a:solidFill>
@@ -8372,7 +8372,7 @@
               <a:t>su</a:t>
             </a:r>
             <a:r>
-              <a:rPr sz="1600" b="0" i="0">
+              <a:rPr sz="2000" b="0" i="0">
                 <a:solidFill>
                   <a:srgbClr val="333333"/>
                 </a:solidFill>
@@ -8388,7 +8388,7 @@
               </a:spcAft>
             </a:pPr>
             <a:r>
-              <a:rPr sz="1600" b="0" i="0">
+              <a:rPr sz="2000" b="0" i="0">
                 <a:solidFill>
                   <a:srgbClr val="333333"/>
                 </a:solidFill>
@@ -8404,7 +8404,7 @@
               </a:spcAft>
             </a:pPr>
             <a:r>
-              <a:rPr sz="1600" b="0" i="0">
+              <a:rPr sz="2000" b="0" i="0">
                 <a:solidFill>
                   <a:srgbClr val="333333"/>
                 </a:solidFill>
@@ -8413,7 +8413,7 @@
               <a:t>–   </a:t>
             </a:r>
             <a:r>
-              <a:rPr sz="1600" b="1" i="0">
+              <a:rPr sz="2000" b="1" i="0">
                 <a:solidFill>
                   <a:srgbClr val="333333"/>
                 </a:solidFill>
@@ -8422,7 +8422,7 @@
               <a:t>La sesión caduca a 1 h:</a:t>
             </a:r>
             <a:r>
-              <a:rPr sz="1600" b="0" i="0">
+              <a:rPr sz="2000" b="0" i="0">
                 <a:solidFill>
                   <a:srgbClr val="333333"/>
                 </a:solidFill>
@@ -8431,7 +8431,7 @@
               <a:t> el Dockerfile se escribe en </a:t>
             </a:r>
             <a:r>
-              <a:rPr sz="1600" b="1" i="0">
+              <a:rPr sz="2000" b="1" i="0">
                 <a:solidFill>
                   <a:srgbClr val="333333"/>
                 </a:solidFill>
@@ -8440,7 +8440,7 @@
               <a:t>tu</a:t>
             </a:r>
             <a:r>
-              <a:rPr sz="1600" b="0" i="0">
+              <a:rPr sz="2000" b="0" i="0">
                 <a:solidFill>
                   <a:srgbClr val="333333"/>
                 </a:solidFill>
@@ -8456,7 +8456,7 @@
               </a:spcAft>
             </a:pPr>
             <a:r>
-              <a:rPr sz="1600" b="0" i="0">
+              <a:rPr sz="2000" b="0" i="0">
                 <a:solidFill>
                   <a:srgbClr val="333333"/>
                 </a:solidFill>
@@ -8465,7 +8465,7 @@
               <a:t>–   Si Killercoda no carga: </a:t>
             </a:r>
             <a:r>
-              <a:rPr sz="1600" b="1" i="0">
+              <a:rPr sz="2000" b="1" i="0">
                 <a:solidFill>
                   <a:srgbClr val="333333"/>
                 </a:solidFill>
@@ -8474,7 +8474,7 @@
               <a:t>LabEx Docker Playground</a:t>
             </a:r>
             <a:r>
-              <a:rPr sz="1600" b="0" i="0">
+              <a:rPr sz="2000" b="0" i="0">
                 <a:solidFill>
                   <a:srgbClr val="333333"/>
                 </a:solidFill>
@@ -8483,7 +8483,7 @@
               <a:t> como alterna (misma hora de sesión, pero solo </a:t>
             </a:r>
             <a:r>
-              <a:rPr sz="1600" b="1" i="0">
+              <a:rPr sz="2000" b="1" i="0">
                 <a:solidFill>
                   <a:srgbClr val="333333"/>
                 </a:solidFill>
@@ -8492,7 +8492,7 @@
               <a:t>3 al día</a:t>
             </a:r>
             <a:r>
-              <a:rPr sz="1600" b="0" i="0">
+              <a:rPr sz="2000" b="0" i="0">
                 <a:solidFill>
                   <a:srgbClr val="333333"/>
                 </a:solidFill>
@@ -8736,7 +8736,7 @@
               </a:spcAft>
             </a:pPr>
             <a:r>
-              <a:rPr sz="1600" b="0" i="0">
+              <a:rPr sz="2000" b="0" i="0">
                 <a:solidFill>
                   <a:srgbClr val="333333"/>
                 </a:solidFill>
@@ -8745,7 +8745,7 @@
               <a:t>–   Siete instrucciones: </a:t>
             </a:r>
             <a:r>
-              <a:rPr sz="1600" b="1" i="0">
+              <a:rPr sz="2000" b="1" i="0">
                 <a:solidFill>
                   <a:srgbClr val="333333"/>
                 </a:solidFill>
@@ -8754,7 +8754,7 @@
               <a:t>FROM · WORKDIR · COPY</a:t>
             </a:r>
             <a:r>
-              <a:rPr sz="1600" b="0" i="0">
+              <a:rPr sz="2000" b="0" i="0">
                 <a:solidFill>
                   <a:srgbClr val="333333"/>
                 </a:solidFill>
@@ -8763,7 +8763,7 @@
               <a:t> de dependencias </a:t>
             </a:r>
             <a:r>
-              <a:rPr sz="1600" b="1" i="0">
+              <a:rPr sz="2000" b="1" i="0">
                 <a:solidFill>
                   <a:srgbClr val="333333"/>
                 </a:solidFill>
@@ -8772,7 +8772,7 @@
               <a:t>· RUN · COPY</a:t>
             </a:r>
             <a:r>
-              <a:rPr sz="1600" b="0" i="0">
+              <a:rPr sz="2000" b="0" i="0">
                 <a:solidFill>
                   <a:srgbClr val="333333"/>
                 </a:solidFill>
@@ -8781,7 +8781,7 @@
               <a:t> del código </a:t>
             </a:r>
             <a:r>
-              <a:rPr sz="1600" b="1" i="0">
+              <a:rPr sz="2000" b="1" i="0">
                 <a:solidFill>
                   <a:srgbClr val="333333"/>
                 </a:solidFill>
@@ -8790,7 +8790,7 @@
               <a:t>· EXPOSE · CMD</a:t>
             </a:r>
             <a:r>
-              <a:rPr sz="1600" b="0" i="0">
+              <a:rPr sz="2000" b="0" i="0">
                 <a:solidFill>
                   <a:srgbClr val="333333"/>
                 </a:solidFill>
@@ -8806,7 +8806,7 @@
               </a:spcAft>
             </a:pPr>
             <a:r>
-              <a:rPr sz="1600" b="0" i="0">
+              <a:rPr sz="2000" b="0" i="0">
                 <a:solidFill>
                   <a:srgbClr val="333333"/>
                 </a:solidFill>
@@ -8815,7 +8815,7 @@
               <a:t>–   «FROM» con </a:t>
             </a:r>
             <a:r>
-              <a:rPr sz="1600" b="1" i="0">
+              <a:rPr sz="2000" b="1" i="0">
                 <a:solidFill>
                   <a:srgbClr val="333333"/>
                 </a:solidFill>
@@ -8824,7 +8824,7 @@
               <a:t>etiqueta fija</a:t>
             </a:r>
             <a:r>
-              <a:rPr sz="1600" b="0" i="0">
+              <a:rPr sz="2000" b="0" i="0">
                 <a:solidFill>
                   <a:srgbClr val="333333"/>
                 </a:solidFill>
@@ -8840,7 +8840,7 @@
               </a:spcAft>
             </a:pPr>
             <a:r>
-              <a:rPr sz="1600" b="0" i="0">
+              <a:rPr sz="2000" b="0" i="0">
                 <a:solidFill>
                   <a:srgbClr val="333333"/>
                 </a:solidFill>
@@ -8849,7 +8849,7 @@
               <a:t>–   Dependencias </a:t>
             </a:r>
             <a:r>
-              <a:rPr sz="1600" b="1" i="0">
+              <a:rPr sz="2000" b="1" i="0">
                 <a:solidFill>
                   <a:srgbClr val="333333"/>
                 </a:solidFill>
@@ -8858,7 +8858,7 @@
               <a:t>antes</a:t>
             </a:r>
             <a:r>
-              <a:rPr sz="1600" b="0" i="0">
+              <a:rPr sz="2000" b="0" i="0">
                 <a:solidFill>
                   <a:srgbClr val="333333"/>
                 </a:solidFill>
@@ -8874,7 +8874,7 @@
               </a:spcAft>
             </a:pPr>
             <a:r>
-              <a:rPr sz="1600" b="0" i="0">
+              <a:rPr sz="2000" b="0" i="0">
                 <a:solidFill>
                   <a:srgbClr val="333333"/>
                 </a:solidFill>
@@ -8883,7 +8883,7 @@
               <a:t>–   </a:t>
             </a:r>
             <a:r>
-              <a:rPr sz="1600" b="1" i="0">
+              <a:rPr sz="2000" b="1" i="0">
                 <a:solidFill>
                   <a:srgbClr val="333333"/>
                 </a:solidFill>
@@ -8892,7 +8892,7 @@
               <a:t>Nunca un secreto en la imagen:</a:t>
             </a:r>
             <a:r>
-              <a:rPr sz="1600" b="0" i="0">
+              <a:rPr sz="2000" b="0" i="0">
                 <a:solidFill>
                   <a:srgbClr val="333333"/>
                 </a:solidFill>
@@ -8908,7 +8908,7 @@
               </a:spcAft>
             </a:pPr>
             <a:r>
-              <a:rPr sz="1600" b="0" i="0">
+              <a:rPr sz="2000" b="0" i="0">
                 <a:solidFill>
                   <a:srgbClr val="333333"/>
                 </a:solidFill>
@@ -8917,7 +8917,7 @@
               <a:t>–   Si haces «COPY . .», va con un </a:t>
             </a:r>
             <a:r>
-              <a:rPr sz="1600" b="1" i="0">
+              <a:rPr sz="2000" b="1" i="0">
                 <a:solidFill>
                   <a:srgbClr val="333333"/>
                 </a:solidFill>
@@ -8926,7 +8926,7 @@
               <a:t>«.dockerignore»</a:t>
             </a:r>
             <a:r>
-              <a:rPr sz="1600" b="0" i="0">
+              <a:rPr sz="2000" b="0" i="0">
                 <a:solidFill>
                   <a:srgbClr val="333333"/>
                 </a:solidFill>
@@ -8942,7 +8942,7 @@
               </a:spcAft>
             </a:pPr>
             <a:r>
-              <a:rPr sz="1600" b="0" i="0">
+              <a:rPr sz="2000" b="0" i="0">
                 <a:solidFill>
                   <a:srgbClr val="333333"/>
                 </a:solidFill>
@@ -8951,7 +8951,7 @@
               <a:t>–   «EXPOSE» </a:t>
             </a:r>
             <a:r>
-              <a:rPr sz="1600" b="1" i="0">
+              <a:rPr sz="2000" b="1" i="0">
                 <a:solidFill>
                   <a:srgbClr val="333333"/>
                 </a:solidFill>
@@ -8960,7 +8960,7 @@
               <a:t>documenta</a:t>
             </a:r>
             <a:r>
-              <a:rPr sz="1600" b="0" i="0">
+              <a:rPr sz="2000" b="0" i="0">
                 <a:solidFill>
                   <a:srgbClr val="333333"/>
                 </a:solidFill>
@@ -9180,7 +9180,7 @@
               </a:spcAft>
             </a:pPr>
             <a:r>
-              <a:rPr sz="1600" b="0" i="0">
+              <a:rPr sz="2000" b="0" i="0">
                 <a:solidFill>
                   <a:srgbClr val="333333"/>
                 </a:solidFill>
@@ -9189,7 +9189,7 @@
               <a:t>–   </a:t>
             </a:r>
             <a:r>
-              <a:rPr sz="1600" b="1" i="0">
+              <a:rPr sz="2000" b="1" i="0">
                 <a:solidFill>
                   <a:srgbClr val="333333"/>
                 </a:solidFill>
@@ -9198,7 +9198,7 @@
               <a:t>Construir:</a:t>
             </a:r>
             <a:r>
-              <a:rPr sz="1600" b="0" i="0">
+              <a:rPr sz="2000" b="0" i="0">
                 <a:solidFill>
                   <a:srgbClr val="333333"/>
                 </a:solidFill>
@@ -9207,7 +9207,7 @@
               <a:t> «docker build -t cloudlite-api:0.1.0 .» — nombre </a:t>
             </a:r>
             <a:r>
-              <a:rPr sz="1600" b="1" i="0">
+              <a:rPr sz="2000" b="1" i="0">
                 <a:solidFill>
                   <a:srgbClr val="333333"/>
                 </a:solidFill>
@@ -9216,7 +9216,7 @@
               <a:t>y</a:t>
             </a:r>
             <a:r>
-              <a:rPr sz="1600" b="0" i="0">
+              <a:rPr sz="2000" b="0" i="0">
                 <a:solidFill>
                   <a:srgbClr val="333333"/>
                 </a:solidFill>
@@ -9232,7 +9232,7 @@
               </a:spcAft>
             </a:pPr>
             <a:r>
-              <a:rPr sz="1600" b="0" i="0">
+              <a:rPr sz="2000" b="0" i="0">
                 <a:solidFill>
                   <a:srgbClr val="333333"/>
                 </a:solidFill>
@@ -9241,7 +9241,7 @@
               <a:t>–   </a:t>
             </a:r>
             <a:r>
-              <a:rPr sz="1600" b="1" i="0">
+              <a:rPr sz="2000" b="1" i="0">
                 <a:solidFill>
                   <a:srgbClr val="333333"/>
                 </a:solidFill>
@@ -9250,7 +9250,7 @@
               <a:t>Correr:</a:t>
             </a:r>
             <a:r>
-              <a:rPr sz="1600" b="0" i="0">
+              <a:rPr sz="2000" b="0" i="0">
                 <a:solidFill>
                   <a:srgbClr val="333333"/>
                 </a:solidFill>
@@ -9266,7 +9266,7 @@
               </a:spcAft>
             </a:pPr>
             <a:r>
-              <a:rPr sz="1600" b="0" i="0">
+              <a:rPr sz="2000" b="0" i="0">
                 <a:solidFill>
                   <a:srgbClr val="333333"/>
                 </a:solidFill>
@@ -9275,7 +9275,7 @@
               <a:t>–   En «-p 8081:8080» la </a:t>
             </a:r>
             <a:r>
-              <a:rPr sz="1600" b="1" i="0">
+              <a:rPr sz="2000" b="1" i="0">
                 <a:solidFill>
                   <a:srgbClr val="333333"/>
                 </a:solidFill>
@@ -9284,7 +9284,7 @@
               <a:t>izquierda es el anfitrión</a:t>
             </a:r>
             <a:r>
-              <a:rPr sz="1600" b="0" i="0">
+              <a:rPr sz="2000" b="0" i="0">
                 <a:solidFill>
                   <a:srgbClr val="333333"/>
                 </a:solidFill>
@@ -9293,7 +9293,7 @@
               <a:t> (por donde entras tú) y la </a:t>
             </a:r>
             <a:r>
-              <a:rPr sz="1600" b="1" i="0">
+              <a:rPr sz="2000" b="1" i="0">
                 <a:solidFill>
                   <a:srgbClr val="333333"/>
                 </a:solidFill>
@@ -9302,7 +9302,7 @@
               <a:t>derecha es el contenedor</a:t>
             </a:r>
             <a:r>
-              <a:rPr sz="1600" b="0" i="0">
+              <a:rPr sz="2000" b="0" i="0">
                 <a:solidFill>
                   <a:srgbClr val="333333"/>
                 </a:solidFill>
@@ -9318,7 +9318,7 @@
               </a:spcAft>
             </a:pPr>
             <a:r>
-              <a:rPr sz="1600" b="0" i="0">
+              <a:rPr sz="2000" b="0" i="0">
                 <a:solidFill>
                   <a:srgbClr val="333333"/>
                 </a:solidFill>
@@ -9327,7 +9327,7 @@
               <a:t>–   </a:t>
             </a:r>
             <a:r>
-              <a:rPr sz="1600" b="1" i="0">
+              <a:rPr sz="2000" b="1" i="0">
                 <a:solidFill>
                   <a:srgbClr val="333333"/>
                 </a:solidFill>
@@ -9336,7 +9336,7 @@
               <a:t>Si los inviertes,</a:t>
             </a:r>
             <a:r>
-              <a:rPr sz="1600" b="0" i="0">
+              <a:rPr sz="2000" b="0" i="0">
                 <a:solidFill>
                   <a:srgbClr val="333333"/>
                 </a:solidFill>
@@ -9345,7 +9345,7 @@
               <a:t> «docker ps» muestra el contenedor </a:t>
             </a:r>
             <a:r>
-              <a:rPr sz="1600" b="1" i="0">
+              <a:rPr sz="2000" b="1" i="0">
                 <a:solidFill>
                   <a:srgbClr val="333333"/>
                 </a:solidFill>
@@ -9354,7 +9354,7 @@
               <a:t>Up</a:t>
             </a:r>
             <a:r>
-              <a:rPr sz="1600" b="0" i="0">
+              <a:rPr sz="2000" b="0" i="0">
                 <a:solidFill>
                   <a:srgbClr val="333333"/>
                 </a:solidFill>
@@ -9370,7 +9370,7 @@
               </a:spcAft>
             </a:pPr>
             <a:r>
-              <a:rPr sz="1600" b="0" i="0">
+              <a:rPr sz="2000" b="0" i="0">
                 <a:solidFill>
                   <a:srgbClr val="333333"/>
                 </a:solidFill>
@@ -9379,7 +9379,7 @@
               <a:t>–   </a:t>
             </a:r>
             <a:r>
-              <a:rPr sz="1600" b="1" i="0">
+              <a:rPr sz="2000" b="1" i="0">
                 <a:solidFill>
                   <a:srgbClr val="333333"/>
                 </a:solidFill>
@@ -9388,7 +9388,7 @@
               <a:t>Verificar:</a:t>
             </a:r>
             <a:r>
-              <a:rPr sz="1600" b="0" i="0">
+              <a:rPr sz="2000" b="0" i="0">
                 <a:solidFill>
                   <a:srgbClr val="333333"/>
                 </a:solidFill>
@@ -9397,7 +9397,7 @@
               <a:t> el contrato de salud son </a:t>
             </a:r>
             <a:r>
-              <a:rPr sz="1600" b="1" i="0">
+              <a:rPr sz="2000" b="1" i="0">
                 <a:solidFill>
                   <a:srgbClr val="333333"/>
                 </a:solidFill>
@@ -9406,7 +9406,7 @@
               <a:t>tres</a:t>
             </a:r>
             <a:r>
-              <a:rPr sz="1600" b="0" i="0">
+              <a:rPr sz="2000" b="0" i="0">
                 <a:solidFill>
                   <a:srgbClr val="333333"/>
                 </a:solidFill>
@@ -9415,7 +9415,7 @@
               <a:t> datos — </a:t>
             </a:r>
             <a:r>
-              <a:rPr sz="1600" b="1" i="0">
+              <a:rPr sz="2000" b="1" i="0">
                 <a:solidFill>
                   <a:srgbClr val="333333"/>
                 </a:solidFill>
@@ -9424,7 +9424,7 @@
               <a:t>ruta</a:t>
             </a:r>
             <a:r>
-              <a:rPr sz="1600" b="0" i="0">
+              <a:rPr sz="2000" b="0" i="0">
                 <a:solidFill>
                   <a:srgbClr val="333333"/>
                 </a:solidFill>
@@ -9433,7 +9433,7 @@
               <a:t> («GET /health»), </a:t>
             </a:r>
             <a:r>
-              <a:rPr sz="1600" b="1" i="0">
+              <a:rPr sz="2000" b="1" i="0">
                 <a:solidFill>
                   <a:srgbClr val="333333"/>
                 </a:solidFill>
@@ -9442,7 +9442,7 @@
               <a:t>código</a:t>
             </a:r>
             <a:r>
-              <a:rPr sz="1600" b="0" i="0">
+              <a:rPr sz="2000" b="0" i="0">
                 <a:solidFill>
                   <a:srgbClr val="333333"/>
                 </a:solidFill>
@@ -9451,7 +9451,7 @@
               <a:t> («200» vivo · «503» sin base) y </a:t>
             </a:r>
             <a:r>
-              <a:rPr sz="1600" b="1" i="0">
+              <a:rPr sz="2000" b="1" i="0">
                 <a:solidFill>
                   <a:srgbClr val="333333"/>
                 </a:solidFill>
@@ -9460,7 +9460,7 @@
               <a:t>cuerpo</a:t>
             </a:r>
             <a:r>
-              <a:rPr sz="1600" b="0" i="0">
+              <a:rPr sz="2000" b="0" i="0">
                 <a:solidFill>
                   <a:srgbClr val="333333"/>
                 </a:solidFill>
@@ -9476,7 +9476,7 @@
               </a:spcAft>
             </a:pPr>
             <a:r>
-              <a:rPr sz="1600" b="0" i="0">
+              <a:rPr sz="2000" b="0" i="0">
                 <a:solidFill>
                   <a:srgbClr val="333333"/>
                 </a:solidFill>

--- a/Arquitectura de Sistemas Computacionales/Clases/Clase 3 - Virtualizacion y contenedores/Presentacion.pptx
+++ b/Arquitectura de Sistemas Computacionales/Clases/Clase 3 - Virtualizacion y contenedores/Presentacion.pptx
@@ -4488,7 +4488,7 @@
                 </a:solidFill>
                 <a:latin typeface="Calibri"/>
               </a:rPr>
-              <a:t>COPY . .                     # el codigo despues: cambia en cada commit</a:t>
+              <a:t>COPY..                     # el codigo despues: cambia en cada commit</a:t>
             </a:r>
           </a:p>
           <a:p>
@@ -4568,7 +4568,7 @@
                 </a:solidFill>
                 <a:latin typeface="Calibri"/>
               </a:rPr>
-              <a:t># Sin el, el COPY . . de arriba se lleva el .env a las capas de la imagen.</a:t>
+              <a:t># Sin el, el COPY.. de arriba se lleva el .env a las capas de la imagen.</a:t>
             </a:r>
           </a:p>
           <a:p>
@@ -4667,7 +4667,7 @@
                 </a:solidFill>
                 <a:latin typeface="Calibri"/>
               </a:rPr>
-              <a:t>EXPOSE, CMD y el «-p» del run llevan el MISMO puerto. Y el «COPY . .» solo es seguro con «.dockerignore» al lado.</a:t>
+              <a:t>EXPOSE, CMD y el «-p» del run llevan el MISMO puerto. Y el «COPY. .» solo es seguro con «.dockerignore» al lado.</a:t>
             </a:r>
           </a:p>
         </p:txBody>
@@ -5682,7 +5682,7 @@
                 </a:solidFill>
                 <a:latin typeface="Calibri"/>
               </a:rPr>
-              <a:t>ExamLab</a:t>
+              <a:t>la plataforma del curso</a:t>
             </a:r>
           </a:p>
           <a:p>
@@ -6486,7 +6486,7 @@
                 </a:solidFill>
                 <a:latin typeface="Calibri"/>
               </a:rPr>
-              <a:t>Subir evidencias al paquete CloudLite (Drive/repo) y a ExamLab (https://uniaj.examlab.workers.dev/) domingo 23:59.</a:t>
+              <a:t>Subir evidencias al paquete CloudLite (Drive/repo) y a la plataforma del curso en la fecha que indique el docente.</a:t>
             </a:r>
           </a:p>
         </p:txBody>
@@ -7203,7 +7203,7 @@
                 </a:solidFill>
                 <a:latin typeface="Calibri"/>
               </a:rPr>
-              <a:t> Cierre: criterio de éxito + plazo domingo 23:59.</a:t>
+              <a:t> Cierre: criterio de éxito + plazo en la fecha que indique el docente.</a:t>
             </a:r>
           </a:p>
         </p:txBody>
@@ -7820,7 +7820,7 @@
                 </a:solidFill>
                 <a:latin typeface="Calibri"/>
               </a:rPr>
-              <a:t>–   Individual por defecto · el docente puede autorizar equipos de 2–3; la entrega en ExamLab siempre es individual.</a:t>
+              <a:t>–   Individual por defecto · el docente puede autorizar equipos de 2–3; la entrega en la plataforma del curso siempre es individual.</a:t>
             </a:r>
           </a:p>
         </p:txBody>
@@ -8914,7 +8914,7 @@
                 </a:solidFill>
                 <a:latin typeface="Calibri"/>
               </a:rPr>
-              <a:t>–   Si haces «COPY . .», va con un </a:t>
+              <a:t>–   Si haces «COPY. .», va con un </a:t>
             </a:r>
             <a:r>
               <a:rPr sz="2000" b="1" i="0">

--- a/Arquitectura de Sistemas Computacionales/Clases/Clase 3 - Virtualizacion y contenedores/Presentacion.pptx
+++ b/Arquitectura de Sistemas Computacionales/Clases/Clase 3 - Virtualizacion y contenedores/Presentacion.pptx
@@ -3578,7 +3578,7 @@
                 </a:solidFill>
                 <a:latin typeface="Calibri"/>
               </a:rPr>
-              <a:t>Maquina virtual vs contenedor — que cambia de verdad</a:t>
+              <a:t>Dockerfile minimo del stub CloudLite</a:t>
             </a:r>
           </a:p>
         </p:txBody>
@@ -3592,7 +3592,7 @@
         <p:spPr>
           <a:xfrm>
             <a:off x="457200" y="1261872"/>
-            <a:ext cx="5478627" cy="5093208"/>
+            <a:ext cx="11277295" cy="4773168"/>
           </a:xfrm>
           <a:prstGeom prst="roundRect">
             <a:avLst>
@@ -3600,7 +3600,7 @@
             </a:avLst>
           </a:prstGeom>
           <a:solidFill>
-            <a:srgbClr val="FBE4E4"/>
+            <a:srgbClr val="1E2A38"/>
           </a:solidFill>
           <a:ln>
             <a:noFill/>
@@ -3637,260 +3637,7 @@
         <p:spPr>
           <a:xfrm>
             <a:off x="457200" y="1261872"/>
-            <a:ext cx="5478627" cy="502920"/>
-          </a:xfrm>
-          <a:prstGeom prst="rect">
-            <a:avLst/>
-          </a:prstGeom>
-          <a:solidFill>
-            <a:srgbClr val="A02030"/>
-          </a:solidFill>
-          <a:ln>
-            <a:noFill/>
-          </a:ln>
-        </p:spPr>
-        <p:style>
-          <a:lnRef idx="1">
-            <a:schemeClr val="accent1"/>
-          </a:lnRef>
-          <a:fillRef idx="3">
-            <a:schemeClr val="accent1"/>
-          </a:fillRef>
-          <a:effectRef idx="2">
-            <a:schemeClr val="accent1"/>
-          </a:effectRef>
-          <a:fontRef idx="minor">
-            <a:schemeClr val="lt1"/>
-          </a:fontRef>
-        </p:style>
-        <p:txBody>
-          <a:bodyPr rtlCol="0" anchor="ctr"/>
-          <a:lstStyle/>
-          <a:p>
-            <a:pPr algn="ctr"/>
-          </a:p>
-        </p:txBody>
-      </p:sp>
-      <p:sp>
-        <p:nvSpPr>
-          <p:cNvPr id="7" name="TextBox 6"/>
-          <p:cNvSpPr txBox="1"/>
-          <p:nvPr/>
-        </p:nvSpPr>
-        <p:spPr>
-          <a:xfrm>
-            <a:off x="594360" y="1353312"/>
-            <a:ext cx="5204307" cy="365760"/>
-          </a:xfrm>
-          <a:prstGeom prst="rect">
-            <a:avLst/>
-          </a:prstGeom>
-          <a:noFill/>
-        </p:spPr>
-        <p:txBody>
-          <a:bodyPr wrap="square" anchor="ctr"/>
-          <a:lstStyle/>
-          <a:p>
-            <a:pPr algn="ctr"/>
-            <a:r>
-              <a:rPr sz="1600" b="1" i="0">
-                <a:solidFill>
-                  <a:srgbClr val="FFFFFF"/>
-                </a:solidFill>
-                <a:latin typeface="Calibri"/>
-              </a:rPr>
-              <a:t>Maquina virtual</a:t>
-            </a:r>
-          </a:p>
-        </p:txBody>
-      </p:sp>
-      <p:sp>
-        <p:nvSpPr>
-          <p:cNvPr id="8" name="TextBox 7"/>
-          <p:cNvSpPr txBox="1"/>
-          <p:nvPr/>
-        </p:nvSpPr>
-        <p:spPr>
-          <a:xfrm>
-            <a:off x="621792" y="1901952"/>
-            <a:ext cx="5158587" cy="4498848"/>
-          </a:xfrm>
-          <a:prstGeom prst="rect">
-            <a:avLst/>
-          </a:prstGeom>
-          <a:noFill/>
-        </p:spPr>
-        <p:txBody>
-          <a:bodyPr wrap="square">
-            <a:spAutoFit/>
-          </a:bodyPr>
-          <a:lstStyle/>
-          <a:p>
-            <a:pPr>
-              <a:spcAft>
-                <a:spcPts val="800"/>
-              </a:spcAft>
-            </a:pPr>
-            <a:r>
-              <a:rPr sz="1500" b="0" i="0">
-                <a:solidFill>
-                  <a:srgbClr val="333333"/>
-                </a:solidFill>
-                <a:latin typeface="Calibri"/>
-              </a:rPr>
-              <a:t>–   Cada instancia trae un </a:t>
-            </a:r>
-            <a:r>
-              <a:rPr sz="1500" b="1" i="0">
-                <a:solidFill>
-                  <a:srgbClr val="333333"/>
-                </a:solidFill>
-                <a:latin typeface="Calibri"/>
-              </a:rPr>
-              <a:t>SO completo</a:t>
-            </a:r>
-            <a:r>
-              <a:rPr sz="1500" b="0" i="0">
-                <a:solidFill>
-                  <a:srgbClr val="333333"/>
-                </a:solidFill>
-                <a:latin typeface="Calibri"/>
-              </a:rPr>
-              <a:t> (kernel propio)</a:t>
-            </a:r>
-          </a:p>
-          <a:p>
-            <a:pPr>
-              <a:spcAft>
-                <a:spcPts val="800"/>
-              </a:spcAft>
-            </a:pPr>
-            <a:r>
-              <a:rPr sz="1500" b="0" i="0">
-                <a:solidFill>
-                  <a:srgbClr val="333333"/>
-                </a:solidFill>
-                <a:latin typeface="Calibri"/>
-              </a:rPr>
-              <a:t>–   Aislamiento fuerte a nivel de hardware virtual</a:t>
-            </a:r>
-          </a:p>
-          <a:p>
-            <a:pPr>
-              <a:spcAft>
-                <a:spcPts val="800"/>
-              </a:spcAft>
-            </a:pPr>
-            <a:r>
-              <a:rPr sz="1500" b="0" i="0">
-                <a:solidFill>
-                  <a:srgbClr val="333333"/>
-                </a:solidFill>
-                <a:latin typeface="Calibri"/>
-              </a:rPr>
-              <a:t>–   Arranque en </a:t>
-            </a:r>
-            <a:r>
-              <a:rPr sz="1500" b="1" i="0">
-                <a:solidFill>
-                  <a:srgbClr val="333333"/>
-                </a:solidFill>
-                <a:latin typeface="Calibri"/>
-              </a:rPr>
-              <a:t>minutos</a:t>
-            </a:r>
-            <a:r>
-              <a:rPr sz="1500" b="0" i="0">
-                <a:solidFill>
-                  <a:srgbClr val="333333"/>
-                </a:solidFill>
-                <a:latin typeface="Calibri"/>
-              </a:rPr>
-              <a:t>, tamaño en </a:t>
-            </a:r>
-            <a:r>
-              <a:rPr sz="1500" b="1" i="0">
-                <a:solidFill>
-                  <a:srgbClr val="333333"/>
-                </a:solidFill>
-                <a:latin typeface="Calibri"/>
-              </a:rPr>
-              <a:t>GB</a:t>
-            </a:r>
-          </a:p>
-          <a:p>
-            <a:pPr>
-              <a:spcAft>
-                <a:spcPts val="800"/>
-              </a:spcAft>
-            </a:pPr>
-            <a:r>
-              <a:rPr sz="1500" b="0" i="0">
-                <a:solidFill>
-                  <a:srgbClr val="333333"/>
-                </a:solidFill>
-                <a:latin typeface="Calibri"/>
-              </a:rPr>
-              <a:t>–   Util cuando se necesitan SO distintos</a:t>
-            </a:r>
-          </a:p>
-        </p:txBody>
-      </p:sp>
-      <p:sp>
-        <p:nvSpPr>
-          <p:cNvPr id="9" name="Rounded Rectangle 8"/>
-          <p:cNvSpPr/>
-          <p:nvPr/>
-        </p:nvSpPr>
-        <p:spPr>
-          <a:xfrm>
-            <a:off x="6255867" y="1261872"/>
-            <a:ext cx="5478627" cy="5093208"/>
-          </a:xfrm>
-          <a:prstGeom prst="roundRect">
-            <a:avLst>
-              <a:gd name="adj" fmla="val 12000"/>
-            </a:avLst>
-          </a:prstGeom>
-          <a:solidFill>
-            <a:srgbClr val="E8F4FA"/>
-          </a:solidFill>
-          <a:ln>
-            <a:noFill/>
-          </a:ln>
-        </p:spPr>
-        <p:style>
-          <a:lnRef idx="1">
-            <a:schemeClr val="accent1"/>
-          </a:lnRef>
-          <a:fillRef idx="3">
-            <a:schemeClr val="accent1"/>
-          </a:fillRef>
-          <a:effectRef idx="2">
-            <a:schemeClr val="accent1"/>
-          </a:effectRef>
-          <a:fontRef idx="minor">
-            <a:schemeClr val="lt1"/>
-          </a:fontRef>
-        </p:style>
-        <p:txBody>
-          <a:bodyPr rtlCol="0" anchor="ctr"/>
-          <a:lstStyle/>
-          <a:p>
-            <a:pPr algn="ctr"/>
-          </a:p>
-        </p:txBody>
-      </p:sp>
-      <p:sp>
-        <p:nvSpPr>
-          <p:cNvPr id="10" name="Rectangle 9"/>
-          <p:cNvSpPr/>
-          <p:nvPr/>
-        </p:nvSpPr>
-        <p:spPr>
-          <a:xfrm>
-            <a:off x="6255867" y="1261872"/>
-            <a:ext cx="5478627" cy="502920"/>
+            <a:ext cx="11277295" cy="320040"/>
           </a:xfrm>
           <a:prstGeom prst="rect">
             <a:avLst/>
@@ -3926,14 +3673,14 @@
       </p:sp>
       <p:sp>
         <p:nvSpPr>
-          <p:cNvPr id="11" name="TextBox 10"/>
+          <p:cNvPr id="7" name="TextBox 6"/>
           <p:cNvSpPr txBox="1"/>
           <p:nvPr/>
         </p:nvSpPr>
         <p:spPr>
           <a:xfrm>
-            <a:off x="6393027" y="1353312"/>
-            <a:ext cx="5204307" cy="365760"/>
+            <a:off x="685800" y="1307592"/>
+            <a:ext cx="10820095" cy="256032"/>
           </a:xfrm>
           <a:prstGeom prst="rect">
             <a:avLst/>
@@ -3944,29 +3691,28 @@
           <a:bodyPr wrap="square" anchor="ctr"/>
           <a:lstStyle/>
           <a:p>
-            <a:pPr algn="ctr"/>
-            <a:r>
-              <a:rPr sz="1600" b="1" i="0">
-                <a:solidFill>
-                  <a:srgbClr val="FFFFFF"/>
-                </a:solidFill>
-                <a:latin typeface="Calibri"/>
-              </a:rPr>
-              <a:t>Contenedor</a:t>
-            </a:r>
-          </a:p>
-        </p:txBody>
-      </p:sp>
-      <p:sp>
-        <p:nvSpPr>
-          <p:cNvPr id="12" name="TextBox 11"/>
+            <a:r>
+              <a:rPr sz="1000" b="1" i="0">
+                <a:solidFill>
+                  <a:srgbClr val="269CCB"/>
+                </a:solidFill>
+                <a:latin typeface="Calibri"/>
+              </a:rPr>
+              <a:t>● ● ●</a:t>
+            </a:r>
+          </a:p>
+        </p:txBody>
+      </p:sp>
+      <p:sp>
+        <p:nvSpPr>
+          <p:cNvPr id="8" name="TextBox 7"/>
           <p:cNvSpPr txBox="1"/>
           <p:nvPr/>
         </p:nvSpPr>
         <p:spPr>
           <a:xfrm>
-            <a:off x="6420459" y="1901952"/>
-            <a:ext cx="5158587" cy="4498848"/>
+            <a:off x="777240" y="1719072"/>
+            <a:ext cx="10637215" cy="4133087"/>
           </a:xfrm>
           <a:prstGeom prst="rect">
             <a:avLst/>
@@ -3981,117 +3727,267 @@
           <a:p>
             <a:pPr>
               <a:spcAft>
-                <a:spcPts val="800"/>
+                <a:spcPts val="400"/>
               </a:spcAft>
             </a:pPr>
             <a:r>
-              <a:rPr sz="1500" b="0" i="0">
-                <a:solidFill>
-                  <a:srgbClr val="333333"/>
-                </a:solidFill>
-                <a:latin typeface="Calibri"/>
-              </a:rPr>
-              <a:t>–   </a:t>
-            </a:r>
-            <a:r>
-              <a:rPr sz="1500" b="1" i="0">
-                <a:solidFill>
-                  <a:srgbClr val="333333"/>
-                </a:solidFill>
-                <a:latin typeface="Calibri"/>
-              </a:rPr>
-              <a:t>Comparte el kernel</a:t>
-            </a:r>
-            <a:r>
-              <a:rPr sz="1500" b="0" i="0">
-                <a:solidFill>
-                  <a:srgbClr val="333333"/>
-                </a:solidFill>
-                <a:latin typeface="Calibri"/>
-              </a:rPr>
-              <a:t> del anfitrion</a:t>
+              <a:rPr sz="1400" b="0" i="0">
+                <a:solidFill>
+                  <a:srgbClr val="FFFFFF"/>
+                </a:solidFill>
+                <a:latin typeface="Calibri"/>
+              </a:rPr>
+              <a:t>FROM node:20-alpine          # base ligera y etiqueta FIJA: nunca latest</a:t>
             </a:r>
           </a:p>
           <a:p>
             <a:pPr>
               <a:spcAft>
-                <a:spcPts val="800"/>
+                <a:spcPts val="400"/>
               </a:spcAft>
             </a:pPr>
             <a:r>
-              <a:rPr sz="1500" b="0" i="0">
-                <a:solidFill>
-                  <a:srgbClr val="333333"/>
-                </a:solidFill>
-                <a:latin typeface="Calibri"/>
-              </a:rPr>
-              <a:t>–   Empaqueta solo app + dependencias</a:t>
+              <a:rPr sz="1400" b="0" i="0">
+                <a:solidFill>
+                  <a:srgbClr val="FFFFFF"/>
+                </a:solidFill>
+                <a:latin typeface="Calibri"/>
+              </a:rPr>
+              <a:t>WORKDIR /app</a:t>
             </a:r>
           </a:p>
           <a:p>
             <a:pPr>
               <a:spcAft>
-                <a:spcPts val="800"/>
+                <a:spcPts val="400"/>
               </a:spcAft>
             </a:pPr>
             <a:r>
-              <a:rPr sz="1500" b="0" i="0">
-                <a:solidFill>
-                  <a:srgbClr val="333333"/>
-                </a:solidFill>
-                <a:latin typeface="Calibri"/>
-              </a:rPr>
-              <a:t>–   Arranque en </a:t>
-            </a:r>
-            <a:r>
-              <a:rPr sz="1500" b="1" i="0">
-                <a:solidFill>
-                  <a:srgbClr val="333333"/>
-                </a:solidFill>
-                <a:latin typeface="Calibri"/>
-              </a:rPr>
-              <a:t>segundos</a:t>
-            </a:r>
-            <a:r>
-              <a:rPr sz="1500" b="0" i="0">
-                <a:solidFill>
-                  <a:srgbClr val="333333"/>
-                </a:solidFill>
-                <a:latin typeface="Calibri"/>
-              </a:rPr>
-              <a:t>, tamaño en </a:t>
-            </a:r>
-            <a:r>
-              <a:rPr sz="1500" b="1" i="0">
-                <a:solidFill>
-                  <a:srgbClr val="333333"/>
-                </a:solidFill>
-                <a:latin typeface="Calibri"/>
-              </a:rPr>
-              <a:t>MB</a:t>
+              <a:rPr sz="1400" b="0" i="0">
+                <a:solidFill>
+                  <a:srgbClr val="FFFFFF"/>
+                </a:solidFill>
+                <a:latin typeface="Calibri"/>
+              </a:rPr>
+              <a:t>COPY package*.json ./        # dependencias PRIMERO: cambian poco</a:t>
             </a:r>
           </a:p>
           <a:p>
             <a:pPr>
               <a:spcAft>
-                <a:spcPts val="800"/>
+                <a:spcPts val="400"/>
               </a:spcAft>
             </a:pPr>
             <a:r>
-              <a:rPr sz="1500" b="0" i="0">
-                <a:solidFill>
-                  <a:srgbClr val="333333"/>
-                </a:solidFill>
-                <a:latin typeface="Calibri"/>
-              </a:rPr>
-              <a:t>–   Util para desplegar el mismo servicio muchas veces</a:t>
-            </a:r>
-          </a:p>
-        </p:txBody>
-      </p:sp>
-      <p:sp>
-        <p:nvSpPr>
-          <p:cNvPr id="13" name="TextBox 12"/>
+              <a:rPr sz="1400" b="0" i="0">
+                <a:solidFill>
+                  <a:srgbClr val="FFFFFF"/>
+                </a:solidFill>
+                <a:latin typeface="Calibri"/>
+              </a:rPr>
+              <a:t>RUN npm ci --omit=dev        # se instalan DENTRO de la imagen</a:t>
+            </a:r>
+          </a:p>
+          <a:p>
+            <a:pPr>
+              <a:spcAft>
+                <a:spcPts val="400"/>
+              </a:spcAft>
+            </a:pPr>
+            <a:r>
+              <a:rPr sz="1400" b="0" i="0">
+                <a:solidFill>
+                  <a:srgbClr val="FFFFFF"/>
+                </a:solidFill>
+                <a:latin typeface="Calibri"/>
+              </a:rPr>
+              <a:t>COPY..                     # el codigo despues: cambia en cada commit</a:t>
+            </a:r>
+          </a:p>
+          <a:p>
+            <a:pPr>
+              <a:spcAft>
+                <a:spcPts val="400"/>
+              </a:spcAft>
+            </a:pPr>
+            <a:r>
+              <a:rPr sz="1400" b="0" i="0">
+                <a:solidFill>
+                  <a:srgbClr val="FFFFFF"/>
+                </a:solidFill>
+                <a:latin typeface="Calibri"/>
+              </a:rPr>
+              <a:t>EXPOSE 8080                  # documenta el puerto; NO lo publica</a:t>
+            </a:r>
+          </a:p>
+          <a:p>
+            <a:pPr>
+              <a:spcAft>
+                <a:spcPts val="400"/>
+              </a:spcAft>
+            </a:pPr>
+            <a:r>
+              <a:rPr sz="1400" b="0" i="0">
+                <a:solidFill>
+                  <a:srgbClr val="FFFFFF"/>
+                </a:solidFill>
+                <a:latin typeface="Calibri"/>
+              </a:rPr>
+              <a:t>CMD ["node", "server.js"]    # UN proceso principal por contenedor</a:t>
+            </a:r>
+          </a:p>
+          <a:p>
+            <a:pPr>
+              <a:spcAft>
+                <a:spcPts val="400"/>
+              </a:spcAft>
+            </a:pPr>
+            <a:r>
+              <a:rPr sz="1400" b="0" i="0">
+                <a:solidFill>
+                  <a:srgbClr val="FFFFFF"/>
+                </a:solidFill>
+                <a:latin typeface="Calibri"/>
+              </a:rPr>
+              <a:t/>
+            </a:r>
+          </a:p>
+          <a:p>
+            <a:pPr>
+              <a:spcAft>
+                <a:spcPts val="400"/>
+              </a:spcAft>
+            </a:pPr>
+            <a:r>
+              <a:rPr sz="1400" b="0" i="0">
+                <a:solidFill>
+                  <a:srgbClr val="FFFFFF"/>
+                </a:solidFill>
+                <a:latin typeface="Calibri"/>
+              </a:rPr>
+              <a:t># .dockerignore  &lt;- archivo aparte, en la misma carpeta que el Dockerfile.</a:t>
+            </a:r>
+          </a:p>
+          <a:p>
+            <a:pPr>
+              <a:spcAft>
+                <a:spcPts val="400"/>
+              </a:spcAft>
+            </a:pPr>
+            <a:r>
+              <a:rPr sz="1400" b="0" i="0">
+                <a:solidFill>
+                  <a:srgbClr val="FFFFFF"/>
+                </a:solidFill>
+                <a:latin typeface="Calibri"/>
+              </a:rPr>
+              <a:t># Sin el, el COPY.. de arriba se lleva el .env a las capas de la imagen.</a:t>
+            </a:r>
+          </a:p>
+          <a:p>
+            <a:pPr>
+              <a:spcAft>
+                <a:spcPts val="400"/>
+              </a:spcAft>
+            </a:pPr>
+            <a:r>
+              <a:rPr sz="1400" b="0" i="0">
+                <a:solidFill>
+                  <a:srgbClr val="FFFFFF"/>
+                </a:solidFill>
+                <a:latin typeface="Calibri"/>
+              </a:rPr>
+              <a:t>node_modules</a:t>
+            </a:r>
+          </a:p>
+          <a:p>
+            <a:pPr>
+              <a:spcAft>
+                <a:spcPts val="400"/>
+              </a:spcAft>
+            </a:pPr>
+            <a:r>
+              <a:rPr sz="1400" b="0" i="0">
+                <a:solidFill>
+                  <a:srgbClr val="FFFFFF"/>
+                </a:solidFill>
+                <a:latin typeface="Calibri"/>
+              </a:rPr>
+              <a:t>.env</a:t>
+            </a:r>
+          </a:p>
+          <a:p>
+            <a:pPr>
+              <a:spcAft>
+                <a:spcPts val="400"/>
+              </a:spcAft>
+            </a:pPr>
+            <a:r>
+              <a:rPr sz="1400" b="0" i="0">
+                <a:solidFill>
+                  <a:srgbClr val="FFFFFF"/>
+                </a:solidFill>
+                <a:latin typeface="Calibri"/>
+              </a:rPr>
+              <a:t>.env.*</a:t>
+            </a:r>
+          </a:p>
+          <a:p>
+            <a:pPr>
+              <a:spcAft>
+                <a:spcPts val="400"/>
+              </a:spcAft>
+            </a:pPr>
+            <a:r>
+              <a:rPr sz="1400" b="0" i="0">
+                <a:solidFill>
+                  <a:srgbClr val="FFFFFF"/>
+                </a:solidFill>
+                <a:latin typeface="Calibri"/>
+              </a:rPr>
+              <a:t>.git</a:t>
+            </a:r>
+          </a:p>
+        </p:txBody>
+      </p:sp>
+      <p:sp>
+        <p:nvSpPr>
+          <p:cNvPr id="9" name="TextBox 8"/>
+          <p:cNvSpPr txBox="1"/>
+          <p:nvPr/>
+        </p:nvSpPr>
+        <p:spPr>
+          <a:xfrm>
+            <a:off x="457200" y="6080760"/>
+            <a:ext cx="11277295" cy="320040"/>
+          </a:xfrm>
+          <a:prstGeom prst="rect">
+            <a:avLst/>
+          </a:prstGeom>
+          <a:noFill/>
+        </p:spPr>
+        <p:txBody>
+          <a:bodyPr wrap="square">
+            <a:spAutoFit/>
+          </a:bodyPr>
+          <a:lstStyle/>
+          <a:p>
+            <a:pPr algn="ctr"/>
+            <a:r>
+              <a:rPr sz="1200" b="0" i="1">
+                <a:solidFill>
+                  <a:srgbClr val="666666"/>
+                </a:solidFill>
+                <a:latin typeface="Calibri"/>
+              </a:rPr>
+              <a:t>EXPOSE, CMD y el «-p» del run llevan el MISMO puerto. Y el «COPY. .» solo es seguro con «.dockerignore» al lado.</a:t>
+            </a:r>
+          </a:p>
+        </p:txBody>
+      </p:sp>
+      <p:sp>
+        <p:nvSpPr>
+          <p:cNvPr id="10" name="TextBox 9"/>
           <p:cNvSpPr txBox="1"/>
           <p:nvPr/>
         </p:nvSpPr>
@@ -4159,7 +4055,7 @@
         <p:spPr>
           <a:xfrm>
             <a:off x="0" y="0"/>
-            <a:ext cx="12191695" cy="960120"/>
+            <a:ext cx="12191695" cy="1170432"/>
           </a:xfrm>
           <a:prstGeom prst="rect">
             <a:avLst/>
@@ -4201,7 +4097,7 @@
         </p:nvSpPr>
         <p:spPr>
           <a:xfrm>
-            <a:off x="0" y="960120"/>
+            <a:off x="0" y="1170432"/>
             <a:ext cx="12191695" cy="41148"/>
           </a:xfrm>
           <a:prstGeom prst="rect">
@@ -4245,7 +4141,7 @@
         <p:spPr>
           <a:xfrm>
             <a:off x="457200" y="164592"/>
-            <a:ext cx="11277295" cy="502920"/>
+            <a:ext cx="11277295" cy="384048"/>
           </a:xfrm>
           <a:prstGeom prst="rect">
             <a:avLst/>
@@ -4265,21 +4161,55 @@
                 </a:solidFill>
                 <a:latin typeface="Calibri"/>
               </a:rPr>
-              <a:t>Dockerfile minimo del stub CloudLite</a:t>
-            </a:r>
-          </a:p>
-        </p:txBody>
-      </p:sp>
-      <p:sp>
-        <p:nvSpPr>
-          <p:cNvPr id="5" name="Rounded Rectangle 4"/>
+              <a:t>Herramientas de hoy</a:t>
+            </a:r>
+          </a:p>
+        </p:txBody>
+      </p:sp>
+      <p:sp>
+        <p:nvSpPr>
+          <p:cNvPr id="5" name="TextBox 4"/>
+          <p:cNvSpPr txBox="1"/>
+          <p:nvPr/>
+        </p:nvSpPr>
+        <p:spPr>
+          <a:xfrm>
+            <a:off x="457200" y="566928"/>
+            <a:ext cx="11277295" cy="411480"/>
+          </a:xfrm>
+          <a:prstGeom prst="rect">
+            <a:avLst/>
+          </a:prstGeom>
+          <a:noFill/>
+        </p:spPr>
+        <p:txBody>
+          <a:bodyPr wrap="square">
+            <a:spAutoFit/>
+          </a:bodyPr>
+          <a:lstStyle/>
+          <a:p>
+            <a:r>
+              <a:rPr sz="1400" b="0" i="0">
+                <a:solidFill>
+                  <a:srgbClr val="B8D8EE"/>
+                </a:solidFill>
+                <a:latin typeface="Calibri"/>
+              </a:rPr>
+              <a:t>Gratis · navegador o free tier · sin cuenta de pago</a:t>
+            </a:r>
+          </a:p>
+        </p:txBody>
+      </p:sp>
+      <p:sp>
+        <p:nvSpPr>
+          <p:cNvPr id="6" name="Rounded Rectangle 5"/>
           <p:cNvSpPr/>
           <p:nvPr/>
         </p:nvSpPr>
         <p:spPr>
           <a:xfrm>
-            <a:off x="457200" y="1261872"/>
-            <a:ext cx="11277295" cy="4773168"/>
+            <a:off x="457200" y="1591056"/>
+            <a:ext cx="3624986" cy="2299716"/>
           </a:xfrm>
           <a:prstGeom prst="roundRect">
             <a:avLst>
@@ -4287,7 +4217,7 @@
             </a:avLst>
           </a:prstGeom>
           <a:solidFill>
-            <a:srgbClr val="1E2A38"/>
+            <a:srgbClr val="F2F2F2"/>
           </a:solidFill>
           <a:ln>
             <a:noFill/>
@@ -4317,14 +4247,14 @@
       </p:sp>
       <p:sp>
         <p:nvSpPr>
-          <p:cNvPr id="6" name="Rectangle 5"/>
+          <p:cNvPr id="7" name="Rectangle 6"/>
           <p:cNvSpPr/>
           <p:nvPr/>
         </p:nvSpPr>
         <p:spPr>
           <a:xfrm>
-            <a:off x="457200" y="1261872"/>
-            <a:ext cx="11277295" cy="320040"/>
+            <a:off x="457200" y="1591056"/>
+            <a:ext cx="3624986" cy="64008"/>
           </a:xfrm>
           <a:prstGeom prst="rect">
             <a:avLst/>
@@ -4360,14 +4290,81 @@
       </p:sp>
       <p:sp>
         <p:nvSpPr>
-          <p:cNvPr id="7" name="TextBox 6"/>
+          <p:cNvPr id="8" name="Rectangle 7"/>
+          <p:cNvSpPr/>
+          <p:nvPr/>
+        </p:nvSpPr>
+        <p:spPr>
+          <a:xfrm>
+            <a:off x="457200" y="1655064"/>
+            <a:ext cx="3624986" cy="27432"/>
+          </a:xfrm>
+          <a:prstGeom prst="rect">
+            <a:avLst/>
+          </a:prstGeom>
+          <a:solidFill>
+            <a:srgbClr val="FFD000"/>
+          </a:solidFill>
+          <a:ln>
+            <a:noFill/>
+          </a:ln>
+        </p:spPr>
+        <p:style>
+          <a:lnRef idx="1">
+            <a:schemeClr val="accent1"/>
+          </a:lnRef>
+          <a:fillRef idx="3">
+            <a:schemeClr val="accent1"/>
+          </a:fillRef>
+          <a:effectRef idx="2">
+            <a:schemeClr val="accent1"/>
+          </a:effectRef>
+          <a:fontRef idx="minor">
+            <a:schemeClr val="lt1"/>
+          </a:fontRef>
+        </p:style>
+        <p:txBody>
+          <a:bodyPr rtlCol="0" anchor="ctr"/>
+          <a:lstStyle/>
+          <a:p>
+            <a:pPr algn="ctr"/>
+          </a:p>
+        </p:txBody>
+      </p:sp>
+      <p:pic>
+        <p:nvPicPr>
+          <p:cNvPr id="9" name="Picture 8" descr="killercoda.png"/>
+          <p:cNvPicPr>
+            <a:picLocks noChangeAspect="1"/>
+          </p:cNvPicPr>
+          <p:nvPr/>
+        </p:nvPicPr>
+        <p:blipFill>
+          <a:blip r:embed="rId2"/>
+          <a:stretch>
+            <a:fillRect/>
+          </a:stretch>
+        </p:blipFill>
+        <p:spPr>
+          <a:xfrm>
+            <a:off x="1659331" y="1847087"/>
+            <a:ext cx="1220724" cy="1220724"/>
+          </a:xfrm>
+          <a:prstGeom prst="rect">
+            <a:avLst/>
+          </a:prstGeom>
+        </p:spPr>
+      </p:pic>
+      <p:sp>
+        <p:nvSpPr>
+          <p:cNvPr id="10" name="TextBox 9"/>
           <p:cNvSpPr txBox="1"/>
           <p:nvPr/>
         </p:nvSpPr>
         <p:spPr>
           <a:xfrm>
-            <a:off x="685800" y="1307592"/>
-            <a:ext cx="10820095" cy="256032"/>
+            <a:off x="530352" y="3159251"/>
+            <a:ext cx="3478682" cy="621792"/>
           </a:xfrm>
           <a:prstGeom prst="rect">
             <a:avLst/>
@@ -4375,31 +4372,203 @@
           <a:noFill/>
         </p:spPr>
         <p:txBody>
-          <a:bodyPr wrap="square" anchor="ctr"/>
-          <a:lstStyle/>
-          <a:p>
-            <a:r>
-              <a:rPr sz="1000" b="1" i="0">
-                <a:solidFill>
-                  <a:srgbClr val="269CCB"/>
-                </a:solidFill>
-                <a:latin typeface="Calibri"/>
-              </a:rPr>
-              <a:t>● ● ●</a:t>
-            </a:r>
-          </a:p>
-        </p:txBody>
-      </p:sp>
-      <p:sp>
-        <p:nvSpPr>
-          <p:cNvPr id="8" name="TextBox 7"/>
+          <a:bodyPr wrap="square" anchor="t"/>
+          <a:lstStyle/>
+          <a:p>
+            <a:pPr algn="ctr"/>
+            <a:r>
+              <a:rPr sz="1300" b="1" i="0">
+                <a:solidFill>
+                  <a:srgbClr val="095292"/>
+                </a:solidFill>
+                <a:latin typeface="Calibri"/>
+              </a:rPr>
+              <a:t>Killercoda</a:t>
+            </a:r>
+          </a:p>
+          <a:p>
+            <a:pPr algn="ctr">
+              <a:spcBef>
+                <a:spcPts val="200"/>
+              </a:spcBef>
+            </a:pPr>
+            <a:r>
+              <a:rPr sz="1000" b="0" i="0">
+                <a:solidFill>
+                  <a:srgbClr val="666666"/>
+                </a:solidFill>
+                <a:latin typeface="Calibri"/>
+              </a:rPr>
+              <a:t>Lab del dia · sesion 1 h</a:t>
+            </a:r>
+          </a:p>
+        </p:txBody>
+      </p:sp>
+      <p:sp>
+        <p:nvSpPr>
+          <p:cNvPr id="11" name="Rounded Rectangle 10"/>
+          <p:cNvSpPr/>
+          <p:nvPr/>
+        </p:nvSpPr>
+        <p:spPr>
+          <a:xfrm>
+            <a:off x="4283354" y="1591056"/>
+            <a:ext cx="3624986" cy="2299716"/>
+          </a:xfrm>
+          <a:prstGeom prst="roundRect">
+            <a:avLst>
+              <a:gd name="adj" fmla="val 12000"/>
+            </a:avLst>
+          </a:prstGeom>
+          <a:solidFill>
+            <a:srgbClr val="F2F2F2"/>
+          </a:solidFill>
+          <a:ln>
+            <a:noFill/>
+          </a:ln>
+        </p:spPr>
+        <p:style>
+          <a:lnRef idx="1">
+            <a:schemeClr val="accent1"/>
+          </a:lnRef>
+          <a:fillRef idx="3">
+            <a:schemeClr val="accent1"/>
+          </a:fillRef>
+          <a:effectRef idx="2">
+            <a:schemeClr val="accent1"/>
+          </a:effectRef>
+          <a:fontRef idx="minor">
+            <a:schemeClr val="lt1"/>
+          </a:fontRef>
+        </p:style>
+        <p:txBody>
+          <a:bodyPr rtlCol="0" anchor="ctr"/>
+          <a:lstStyle/>
+          <a:p>
+            <a:pPr algn="ctr"/>
+          </a:p>
+        </p:txBody>
+      </p:sp>
+      <p:sp>
+        <p:nvSpPr>
+          <p:cNvPr id="12" name="Rectangle 11"/>
+          <p:cNvSpPr/>
+          <p:nvPr/>
+        </p:nvSpPr>
+        <p:spPr>
+          <a:xfrm>
+            <a:off x="4283354" y="1591056"/>
+            <a:ext cx="3624986" cy="64008"/>
+          </a:xfrm>
+          <a:prstGeom prst="rect">
+            <a:avLst/>
+          </a:prstGeom>
+          <a:solidFill>
+            <a:srgbClr val="095292"/>
+          </a:solidFill>
+          <a:ln>
+            <a:noFill/>
+          </a:ln>
+        </p:spPr>
+        <p:style>
+          <a:lnRef idx="1">
+            <a:schemeClr val="accent1"/>
+          </a:lnRef>
+          <a:fillRef idx="3">
+            <a:schemeClr val="accent1"/>
+          </a:fillRef>
+          <a:effectRef idx="2">
+            <a:schemeClr val="accent1"/>
+          </a:effectRef>
+          <a:fontRef idx="minor">
+            <a:schemeClr val="lt1"/>
+          </a:fontRef>
+        </p:style>
+        <p:txBody>
+          <a:bodyPr rtlCol="0" anchor="ctr"/>
+          <a:lstStyle/>
+          <a:p>
+            <a:pPr algn="ctr"/>
+          </a:p>
+        </p:txBody>
+      </p:sp>
+      <p:sp>
+        <p:nvSpPr>
+          <p:cNvPr id="13" name="Rectangle 12"/>
+          <p:cNvSpPr/>
+          <p:nvPr/>
+        </p:nvSpPr>
+        <p:spPr>
+          <a:xfrm>
+            <a:off x="4283354" y="1655064"/>
+            <a:ext cx="3624986" cy="27432"/>
+          </a:xfrm>
+          <a:prstGeom prst="rect">
+            <a:avLst/>
+          </a:prstGeom>
+          <a:solidFill>
+            <a:srgbClr val="FFD000"/>
+          </a:solidFill>
+          <a:ln>
+            <a:noFill/>
+          </a:ln>
+        </p:spPr>
+        <p:style>
+          <a:lnRef idx="1">
+            <a:schemeClr val="accent1"/>
+          </a:lnRef>
+          <a:fillRef idx="3">
+            <a:schemeClr val="accent1"/>
+          </a:fillRef>
+          <a:effectRef idx="2">
+            <a:schemeClr val="accent1"/>
+          </a:effectRef>
+          <a:fontRef idx="minor">
+            <a:schemeClr val="lt1"/>
+          </a:fontRef>
+        </p:style>
+        <p:txBody>
+          <a:bodyPr rtlCol="0" anchor="ctr"/>
+          <a:lstStyle/>
+          <a:p>
+            <a:pPr algn="ctr"/>
+          </a:p>
+        </p:txBody>
+      </p:sp>
+      <p:pic>
+        <p:nvPicPr>
+          <p:cNvPr id="14" name="Picture 13" descr="labex.png"/>
+          <p:cNvPicPr>
+            <a:picLocks noChangeAspect="1"/>
+          </p:cNvPicPr>
+          <p:nvPr/>
+        </p:nvPicPr>
+        <p:blipFill>
+          <a:blip r:embed="rId3"/>
+          <a:stretch>
+            <a:fillRect/>
+          </a:stretch>
+        </p:blipFill>
+        <p:spPr>
+          <a:xfrm>
+            <a:off x="5485485" y="1847087"/>
+            <a:ext cx="1220724" cy="1220724"/>
+          </a:xfrm>
+          <a:prstGeom prst="rect">
+            <a:avLst/>
+          </a:prstGeom>
+        </p:spPr>
+      </p:pic>
+      <p:sp>
+        <p:nvSpPr>
+          <p:cNvPr id="15" name="TextBox 14"/>
           <p:cNvSpPr txBox="1"/>
           <p:nvPr/>
         </p:nvSpPr>
         <p:spPr>
           <a:xfrm>
-            <a:off x="777240" y="1719072"/>
-            <a:ext cx="10637215" cy="4133087"/>
+            <a:off x="4356506" y="3159251"/>
+            <a:ext cx="3478682" cy="621792"/>
           </a:xfrm>
           <a:prstGeom prst="rect">
             <a:avLst/>
@@ -4407,274 +4576,449 @@
           <a:noFill/>
         </p:spPr>
         <p:txBody>
-          <a:bodyPr wrap="square">
-            <a:spAutoFit/>
-          </a:bodyPr>
-          <a:lstStyle/>
-          <a:p>
-            <a:pPr>
-              <a:spcAft>
-                <a:spcPts val="400"/>
-              </a:spcAft>
+          <a:bodyPr wrap="square" anchor="t"/>
+          <a:lstStyle/>
+          <a:p>
+            <a:pPr algn="ctr"/>
+            <a:r>
+              <a:rPr sz="1300" b="1" i="0">
+                <a:solidFill>
+                  <a:srgbClr val="095292"/>
+                </a:solidFill>
+                <a:latin typeface="Calibri"/>
+              </a:rPr>
+              <a:t>LabEx Docker Playground</a:t>
+            </a:r>
+          </a:p>
+          <a:p>
+            <a:pPr algn="ctr">
+              <a:spcBef>
+                <a:spcPts val="200"/>
+              </a:spcBef>
             </a:pPr>
             <a:r>
-              <a:rPr sz="1400" b="0" i="0">
-                <a:solidFill>
-                  <a:srgbClr val="FFFFFF"/>
-                </a:solidFill>
-                <a:latin typeface="Calibri"/>
-              </a:rPr>
-              <a:t>FROM node:20-alpine          # base ligera y etiqueta FIJA: nunca latest</a:t>
-            </a:r>
-          </a:p>
-          <a:p>
-            <a:pPr>
-              <a:spcAft>
-                <a:spcPts val="400"/>
-              </a:spcAft>
+              <a:rPr sz="1000" b="0" i="0">
+                <a:solidFill>
+                  <a:srgbClr val="666666"/>
+                </a:solidFill>
+                <a:latin typeface="Calibri"/>
+              </a:rPr>
+              <a:t>Alterna · 3 al dia</a:t>
+            </a:r>
+          </a:p>
+        </p:txBody>
+      </p:sp>
+      <p:sp>
+        <p:nvSpPr>
+          <p:cNvPr id="16" name="Rounded Rectangle 15"/>
+          <p:cNvSpPr/>
+          <p:nvPr/>
+        </p:nvSpPr>
+        <p:spPr>
+          <a:xfrm>
+            <a:off x="8109508" y="1591056"/>
+            <a:ext cx="3624986" cy="2299716"/>
+          </a:xfrm>
+          <a:prstGeom prst="roundRect">
+            <a:avLst>
+              <a:gd name="adj" fmla="val 12000"/>
+            </a:avLst>
+          </a:prstGeom>
+          <a:solidFill>
+            <a:srgbClr val="F2F2F2"/>
+          </a:solidFill>
+          <a:ln>
+            <a:noFill/>
+          </a:ln>
+        </p:spPr>
+        <p:style>
+          <a:lnRef idx="1">
+            <a:schemeClr val="accent1"/>
+          </a:lnRef>
+          <a:fillRef idx="3">
+            <a:schemeClr val="accent1"/>
+          </a:fillRef>
+          <a:effectRef idx="2">
+            <a:schemeClr val="accent1"/>
+          </a:effectRef>
+          <a:fontRef idx="minor">
+            <a:schemeClr val="lt1"/>
+          </a:fontRef>
+        </p:style>
+        <p:txBody>
+          <a:bodyPr rtlCol="0" anchor="ctr"/>
+          <a:lstStyle/>
+          <a:p>
+            <a:pPr algn="ctr"/>
+          </a:p>
+        </p:txBody>
+      </p:sp>
+      <p:sp>
+        <p:nvSpPr>
+          <p:cNvPr id="17" name="Rectangle 16"/>
+          <p:cNvSpPr/>
+          <p:nvPr/>
+        </p:nvSpPr>
+        <p:spPr>
+          <a:xfrm>
+            <a:off x="8109508" y="1591056"/>
+            <a:ext cx="3624986" cy="64008"/>
+          </a:xfrm>
+          <a:prstGeom prst="rect">
+            <a:avLst/>
+          </a:prstGeom>
+          <a:solidFill>
+            <a:srgbClr val="095292"/>
+          </a:solidFill>
+          <a:ln>
+            <a:noFill/>
+          </a:ln>
+        </p:spPr>
+        <p:style>
+          <a:lnRef idx="1">
+            <a:schemeClr val="accent1"/>
+          </a:lnRef>
+          <a:fillRef idx="3">
+            <a:schemeClr val="accent1"/>
+          </a:fillRef>
+          <a:effectRef idx="2">
+            <a:schemeClr val="accent1"/>
+          </a:effectRef>
+          <a:fontRef idx="minor">
+            <a:schemeClr val="lt1"/>
+          </a:fontRef>
+        </p:style>
+        <p:txBody>
+          <a:bodyPr rtlCol="0" anchor="ctr"/>
+          <a:lstStyle/>
+          <a:p>
+            <a:pPr algn="ctr"/>
+          </a:p>
+        </p:txBody>
+      </p:sp>
+      <p:sp>
+        <p:nvSpPr>
+          <p:cNvPr id="18" name="Rectangle 17"/>
+          <p:cNvSpPr/>
+          <p:nvPr/>
+        </p:nvSpPr>
+        <p:spPr>
+          <a:xfrm>
+            <a:off x="8109508" y="1655064"/>
+            <a:ext cx="3624986" cy="27432"/>
+          </a:xfrm>
+          <a:prstGeom prst="rect">
+            <a:avLst/>
+          </a:prstGeom>
+          <a:solidFill>
+            <a:srgbClr val="FFD000"/>
+          </a:solidFill>
+          <a:ln>
+            <a:noFill/>
+          </a:ln>
+        </p:spPr>
+        <p:style>
+          <a:lnRef idx="1">
+            <a:schemeClr val="accent1"/>
+          </a:lnRef>
+          <a:fillRef idx="3">
+            <a:schemeClr val="accent1"/>
+          </a:fillRef>
+          <a:effectRef idx="2">
+            <a:schemeClr val="accent1"/>
+          </a:effectRef>
+          <a:fontRef idx="minor">
+            <a:schemeClr val="lt1"/>
+          </a:fontRef>
+        </p:style>
+        <p:txBody>
+          <a:bodyPr rtlCol="0" anchor="ctr"/>
+          <a:lstStyle/>
+          <a:p>
+            <a:pPr algn="ctr"/>
+          </a:p>
+        </p:txBody>
+      </p:sp>
+      <p:pic>
+        <p:nvPicPr>
+          <p:cNvPr id="19" name="Picture 18" descr="google_docs.png"/>
+          <p:cNvPicPr>
+            <a:picLocks noChangeAspect="1"/>
+          </p:cNvPicPr>
+          <p:nvPr/>
+        </p:nvPicPr>
+        <p:blipFill>
+          <a:blip r:embed="rId4"/>
+          <a:stretch>
+            <a:fillRect/>
+          </a:stretch>
+        </p:blipFill>
+        <p:spPr>
+          <a:xfrm>
+            <a:off x="9311640" y="1847087"/>
+            <a:ext cx="1220724" cy="1220724"/>
+          </a:xfrm>
+          <a:prstGeom prst="rect">
+            <a:avLst/>
+          </a:prstGeom>
+        </p:spPr>
+      </p:pic>
+      <p:sp>
+        <p:nvSpPr>
+          <p:cNvPr id="20" name="TextBox 19"/>
+          <p:cNvSpPr txBox="1"/>
+          <p:nvPr/>
+        </p:nvSpPr>
+        <p:spPr>
+          <a:xfrm>
+            <a:off x="8182660" y="3159251"/>
+            <a:ext cx="3478682" cy="621792"/>
+          </a:xfrm>
+          <a:prstGeom prst="rect">
+            <a:avLst/>
+          </a:prstGeom>
+          <a:noFill/>
+        </p:spPr>
+        <p:txBody>
+          <a:bodyPr wrap="square" anchor="t"/>
+          <a:lstStyle/>
+          <a:p>
+            <a:pPr algn="ctr"/>
+            <a:r>
+              <a:rPr sz="1300" b="1" i="0">
+                <a:solidFill>
+                  <a:srgbClr val="095292"/>
+                </a:solidFill>
+                <a:latin typeface="Calibri"/>
+              </a:rPr>
+              <a:t>Google Docs</a:t>
+            </a:r>
+          </a:p>
+          <a:p>
+            <a:pPr algn="ctr">
+              <a:spcBef>
+                <a:spcPts val="200"/>
+              </a:spcBef>
             </a:pPr>
             <a:r>
-              <a:rPr sz="1400" b="0" i="0">
-                <a:solidFill>
-                  <a:srgbClr val="FFFFFF"/>
-                </a:solidFill>
-                <a:latin typeface="Calibri"/>
-              </a:rPr>
-              <a:t>WORKDIR /app</a:t>
-            </a:r>
-          </a:p>
-          <a:p>
-            <a:pPr>
-              <a:spcAft>
-                <a:spcPts val="400"/>
-              </a:spcAft>
+              <a:rPr sz="1000" b="0" i="0">
+                <a:solidFill>
+                  <a:srgbClr val="666666"/>
+                </a:solidFill>
+                <a:latin typeface="Calibri"/>
+              </a:rPr>
+              <a:t>Informe PI</a:t>
+            </a:r>
+          </a:p>
+        </p:txBody>
+      </p:sp>
+      <p:sp>
+        <p:nvSpPr>
+          <p:cNvPr id="21" name="Rounded Rectangle 20"/>
+          <p:cNvSpPr/>
+          <p:nvPr/>
+        </p:nvSpPr>
+        <p:spPr>
+          <a:xfrm>
+            <a:off x="4283354" y="4055364"/>
+            <a:ext cx="3624986" cy="2299716"/>
+          </a:xfrm>
+          <a:prstGeom prst="roundRect">
+            <a:avLst>
+              <a:gd name="adj" fmla="val 12000"/>
+            </a:avLst>
+          </a:prstGeom>
+          <a:solidFill>
+            <a:srgbClr val="F2F2F2"/>
+          </a:solidFill>
+          <a:ln>
+            <a:noFill/>
+          </a:ln>
+        </p:spPr>
+        <p:style>
+          <a:lnRef idx="1">
+            <a:schemeClr val="accent1"/>
+          </a:lnRef>
+          <a:fillRef idx="3">
+            <a:schemeClr val="accent1"/>
+          </a:fillRef>
+          <a:effectRef idx="2">
+            <a:schemeClr val="accent1"/>
+          </a:effectRef>
+          <a:fontRef idx="minor">
+            <a:schemeClr val="lt1"/>
+          </a:fontRef>
+        </p:style>
+        <p:txBody>
+          <a:bodyPr rtlCol="0" anchor="ctr"/>
+          <a:lstStyle/>
+          <a:p>
+            <a:pPr algn="ctr"/>
+          </a:p>
+        </p:txBody>
+      </p:sp>
+      <p:sp>
+        <p:nvSpPr>
+          <p:cNvPr id="22" name="Rectangle 21"/>
+          <p:cNvSpPr/>
+          <p:nvPr/>
+        </p:nvSpPr>
+        <p:spPr>
+          <a:xfrm>
+            <a:off x="4283354" y="4055364"/>
+            <a:ext cx="3624986" cy="64008"/>
+          </a:xfrm>
+          <a:prstGeom prst="rect">
+            <a:avLst/>
+          </a:prstGeom>
+          <a:solidFill>
+            <a:srgbClr val="095292"/>
+          </a:solidFill>
+          <a:ln>
+            <a:noFill/>
+          </a:ln>
+        </p:spPr>
+        <p:style>
+          <a:lnRef idx="1">
+            <a:schemeClr val="accent1"/>
+          </a:lnRef>
+          <a:fillRef idx="3">
+            <a:schemeClr val="accent1"/>
+          </a:fillRef>
+          <a:effectRef idx="2">
+            <a:schemeClr val="accent1"/>
+          </a:effectRef>
+          <a:fontRef idx="minor">
+            <a:schemeClr val="lt1"/>
+          </a:fontRef>
+        </p:style>
+        <p:txBody>
+          <a:bodyPr rtlCol="0" anchor="ctr"/>
+          <a:lstStyle/>
+          <a:p>
+            <a:pPr algn="ctr"/>
+          </a:p>
+        </p:txBody>
+      </p:sp>
+      <p:sp>
+        <p:nvSpPr>
+          <p:cNvPr id="23" name="Rectangle 22"/>
+          <p:cNvSpPr/>
+          <p:nvPr/>
+        </p:nvSpPr>
+        <p:spPr>
+          <a:xfrm>
+            <a:off x="4283354" y="4119372"/>
+            <a:ext cx="3624986" cy="27432"/>
+          </a:xfrm>
+          <a:prstGeom prst="rect">
+            <a:avLst/>
+          </a:prstGeom>
+          <a:solidFill>
+            <a:srgbClr val="FFD000"/>
+          </a:solidFill>
+          <a:ln>
+            <a:noFill/>
+          </a:ln>
+        </p:spPr>
+        <p:style>
+          <a:lnRef idx="1">
+            <a:schemeClr val="accent1"/>
+          </a:lnRef>
+          <a:fillRef idx="3">
+            <a:schemeClr val="accent1"/>
+          </a:fillRef>
+          <a:effectRef idx="2">
+            <a:schemeClr val="accent1"/>
+          </a:effectRef>
+          <a:fontRef idx="minor">
+            <a:schemeClr val="lt1"/>
+          </a:fontRef>
+        </p:style>
+        <p:txBody>
+          <a:bodyPr rtlCol="0" anchor="ctr"/>
+          <a:lstStyle/>
+          <a:p>
+            <a:pPr algn="ctr"/>
+          </a:p>
+        </p:txBody>
+      </p:sp>
+      <p:pic>
+        <p:nvPicPr>
+          <p:cNvPr id="24" name="Picture 23" descr="examlab.png"/>
+          <p:cNvPicPr>
+            <a:picLocks noChangeAspect="1"/>
+          </p:cNvPicPr>
+          <p:nvPr/>
+        </p:nvPicPr>
+        <p:blipFill>
+          <a:blip r:embed="rId5"/>
+          <a:stretch>
+            <a:fillRect/>
+          </a:stretch>
+        </p:blipFill>
+        <p:spPr>
+          <a:xfrm>
+            <a:off x="5485485" y="4311396"/>
+            <a:ext cx="1220724" cy="1220724"/>
+          </a:xfrm>
+          <a:prstGeom prst="rect">
+            <a:avLst/>
+          </a:prstGeom>
+        </p:spPr>
+      </p:pic>
+      <p:sp>
+        <p:nvSpPr>
+          <p:cNvPr id="25" name="TextBox 24"/>
+          <p:cNvSpPr txBox="1"/>
+          <p:nvPr/>
+        </p:nvSpPr>
+        <p:spPr>
+          <a:xfrm>
+            <a:off x="4356506" y="5623560"/>
+            <a:ext cx="3478682" cy="621792"/>
+          </a:xfrm>
+          <a:prstGeom prst="rect">
+            <a:avLst/>
+          </a:prstGeom>
+          <a:noFill/>
+        </p:spPr>
+        <p:txBody>
+          <a:bodyPr wrap="square" anchor="t"/>
+          <a:lstStyle/>
+          <a:p>
+            <a:pPr algn="ctr"/>
+            <a:r>
+              <a:rPr sz="1300" b="1" i="0">
+                <a:solidFill>
+                  <a:srgbClr val="095292"/>
+                </a:solidFill>
+                <a:latin typeface="Calibri"/>
+              </a:rPr>
+              <a:t>la plataforma del curso</a:t>
+            </a:r>
+          </a:p>
+          <a:p>
+            <a:pPr algn="ctr">
+              <a:spcBef>
+                <a:spcPts val="200"/>
+              </a:spcBef>
             </a:pPr>
             <a:r>
-              <a:rPr sz="1400" b="0" i="0">
-                <a:solidFill>
-                  <a:srgbClr val="FFFFFF"/>
-                </a:solidFill>
-                <a:latin typeface="Calibri"/>
-              </a:rPr>
-              <a:t>COPY package*.json ./        # dependencias PRIMERO: cambian poco</a:t>
-            </a:r>
-          </a:p>
-          <a:p>
-            <a:pPr>
-              <a:spcAft>
-                <a:spcPts val="400"/>
-              </a:spcAft>
-            </a:pPr>
-            <a:r>
-              <a:rPr sz="1400" b="0" i="0">
-                <a:solidFill>
-                  <a:srgbClr val="FFFFFF"/>
-                </a:solidFill>
-                <a:latin typeface="Calibri"/>
-              </a:rPr>
-              <a:t>RUN npm ci --omit=dev        # se instalan DENTRO de la imagen</a:t>
-            </a:r>
-          </a:p>
-          <a:p>
-            <a:pPr>
-              <a:spcAft>
-                <a:spcPts val="400"/>
-              </a:spcAft>
-            </a:pPr>
-            <a:r>
-              <a:rPr sz="1400" b="0" i="0">
-                <a:solidFill>
-                  <a:srgbClr val="FFFFFF"/>
-                </a:solidFill>
-                <a:latin typeface="Calibri"/>
-              </a:rPr>
-              <a:t>COPY..                     # el codigo despues: cambia en cada commit</a:t>
-            </a:r>
-          </a:p>
-          <a:p>
-            <a:pPr>
-              <a:spcAft>
-                <a:spcPts val="400"/>
-              </a:spcAft>
-            </a:pPr>
-            <a:r>
-              <a:rPr sz="1400" b="0" i="0">
-                <a:solidFill>
-                  <a:srgbClr val="FFFFFF"/>
-                </a:solidFill>
-                <a:latin typeface="Calibri"/>
-              </a:rPr>
-              <a:t>EXPOSE 8080                  # documenta el puerto; NO lo publica</a:t>
-            </a:r>
-          </a:p>
-          <a:p>
-            <a:pPr>
-              <a:spcAft>
-                <a:spcPts val="400"/>
-              </a:spcAft>
-            </a:pPr>
-            <a:r>
-              <a:rPr sz="1400" b="0" i="0">
-                <a:solidFill>
-                  <a:srgbClr val="FFFFFF"/>
-                </a:solidFill>
-                <a:latin typeface="Calibri"/>
-              </a:rPr>
-              <a:t>CMD ["node", "server.js"]    # UN proceso principal por contenedor</a:t>
-            </a:r>
-          </a:p>
-          <a:p>
-            <a:pPr>
-              <a:spcAft>
-                <a:spcPts val="400"/>
-              </a:spcAft>
-            </a:pPr>
-            <a:r>
-              <a:rPr sz="1400" b="0" i="0">
-                <a:solidFill>
-                  <a:srgbClr val="FFFFFF"/>
-                </a:solidFill>
-                <a:latin typeface="Calibri"/>
-              </a:rPr>
-              <a:t/>
-            </a:r>
-          </a:p>
-          <a:p>
-            <a:pPr>
-              <a:spcAft>
-                <a:spcPts val="400"/>
-              </a:spcAft>
-            </a:pPr>
-            <a:r>
-              <a:rPr sz="1400" b="0" i="0">
-                <a:solidFill>
-                  <a:srgbClr val="FFFFFF"/>
-                </a:solidFill>
-                <a:latin typeface="Calibri"/>
-              </a:rPr>
-              <a:t># .dockerignore  &lt;- archivo aparte, en la misma carpeta que el Dockerfile.</a:t>
-            </a:r>
-          </a:p>
-          <a:p>
-            <a:pPr>
-              <a:spcAft>
-                <a:spcPts val="400"/>
-              </a:spcAft>
-            </a:pPr>
-            <a:r>
-              <a:rPr sz="1400" b="0" i="0">
-                <a:solidFill>
-                  <a:srgbClr val="FFFFFF"/>
-                </a:solidFill>
-                <a:latin typeface="Calibri"/>
-              </a:rPr>
-              <a:t># Sin el, el COPY.. de arriba se lleva el .env a las capas de la imagen.</a:t>
-            </a:r>
-          </a:p>
-          <a:p>
-            <a:pPr>
-              <a:spcAft>
-                <a:spcPts val="400"/>
-              </a:spcAft>
-            </a:pPr>
-            <a:r>
-              <a:rPr sz="1400" b="0" i="0">
-                <a:solidFill>
-                  <a:srgbClr val="FFFFFF"/>
-                </a:solidFill>
-                <a:latin typeface="Calibri"/>
-              </a:rPr>
-              <a:t>node_modules</a:t>
-            </a:r>
-          </a:p>
-          <a:p>
-            <a:pPr>
-              <a:spcAft>
-                <a:spcPts val="400"/>
-              </a:spcAft>
-            </a:pPr>
-            <a:r>
-              <a:rPr sz="1400" b="0" i="0">
-                <a:solidFill>
-                  <a:srgbClr val="FFFFFF"/>
-                </a:solidFill>
-                <a:latin typeface="Calibri"/>
-              </a:rPr>
-              <a:t>.env</a:t>
-            </a:r>
-          </a:p>
-          <a:p>
-            <a:pPr>
-              <a:spcAft>
-                <a:spcPts val="400"/>
-              </a:spcAft>
-            </a:pPr>
-            <a:r>
-              <a:rPr sz="1400" b="0" i="0">
-                <a:solidFill>
-                  <a:srgbClr val="FFFFFF"/>
-                </a:solidFill>
-                <a:latin typeface="Calibri"/>
-              </a:rPr>
-              <a:t>.env.*</a:t>
-            </a:r>
-          </a:p>
-          <a:p>
-            <a:pPr>
-              <a:spcAft>
-                <a:spcPts val="400"/>
-              </a:spcAft>
-            </a:pPr>
-            <a:r>
-              <a:rPr sz="1400" b="0" i="0">
-                <a:solidFill>
-                  <a:srgbClr val="FFFFFF"/>
-                </a:solidFill>
-                <a:latin typeface="Calibri"/>
-              </a:rPr>
-              <a:t>.git</a:t>
-            </a:r>
-          </a:p>
-        </p:txBody>
-      </p:sp>
-      <p:sp>
-        <p:nvSpPr>
-          <p:cNvPr id="9" name="TextBox 8"/>
-          <p:cNvSpPr txBox="1"/>
-          <p:nvPr/>
-        </p:nvSpPr>
-        <p:spPr>
-          <a:xfrm>
-            <a:off x="457200" y="6080760"/>
-            <a:ext cx="11277295" cy="320040"/>
-          </a:xfrm>
-          <a:prstGeom prst="rect">
-            <a:avLst/>
-          </a:prstGeom>
-          <a:noFill/>
-        </p:spPr>
-        <p:txBody>
-          <a:bodyPr wrap="square">
-            <a:spAutoFit/>
-          </a:bodyPr>
-          <a:lstStyle/>
-          <a:p>
-            <a:pPr algn="ctr"/>
-            <a:r>
-              <a:rPr sz="1200" b="0" i="1">
+              <a:rPr sz="1000" b="0" i="0">
                 <a:solidFill>
                   <a:srgbClr val="666666"/>
                 </a:solidFill>
                 <a:latin typeface="Calibri"/>
               </a:rPr>
-              <a:t>EXPOSE, CMD y el «-p» del run llevan el MISMO puerto. Y el «COPY. .» solo es seguro con «.dockerignore» al lado.</a:t>
-            </a:r>
-          </a:p>
-        </p:txBody>
-      </p:sp>
-      <p:sp>
-        <p:nvSpPr>
-          <p:cNvPr id="10" name="TextBox 9"/>
+              <a:t>Donde se entrega</a:t>
+            </a:r>
+          </a:p>
+        </p:txBody>
+      </p:sp>
+      <p:sp>
+        <p:nvSpPr>
+          <p:cNvPr id="26" name="TextBox 25"/>
           <p:cNvSpPr txBox="1"/>
           <p:nvPr/>
         </p:nvSpPr>
@@ -4742,7 +5086,7 @@
         <p:spPr>
           <a:xfrm>
             <a:off x="0" y="0"/>
-            <a:ext cx="12191695" cy="1170432"/>
+            <a:ext cx="12191695" cy="960120"/>
           </a:xfrm>
           <a:prstGeom prst="rect">
             <a:avLst/>
@@ -4784,7 +5128,7 @@
         </p:nvSpPr>
         <p:spPr>
           <a:xfrm>
-            <a:off x="0" y="1170432"/>
+            <a:off x="0" y="960120"/>
             <a:ext cx="12191695" cy="41148"/>
           </a:xfrm>
           <a:prstGeom prst="rect">
@@ -4828,7 +5172,7 @@
         <p:spPr>
           <a:xfrm>
             <a:off x="457200" y="164592"/>
-            <a:ext cx="11277295" cy="384048"/>
+            <a:ext cx="11277295" cy="502920"/>
           </a:xfrm>
           <a:prstGeom prst="rect">
             <a:avLst/>
@@ -4848,7 +5192,7 @@
                 </a:solidFill>
                 <a:latin typeface="Calibri"/>
               </a:rPr>
-              <a:t>Herramientas de hoy</a:t>
+              <a:t>PI CloudLite — entregable de hoy</a:t>
             </a:r>
           </a:p>
         </p:txBody>
@@ -4861,8 +5205,8 @@
         </p:nvSpPr>
         <p:spPr>
           <a:xfrm>
-            <a:off x="457200" y="566928"/>
-            <a:ext cx="11277295" cy="411480"/>
+            <a:off x="457200" y="1170432"/>
+            <a:ext cx="11277295" cy="5230368"/>
           </a:xfrm>
           <a:prstGeom prst="rect">
             <a:avLst/>
@@ -4875,837 +5219,119 @@
           </a:bodyPr>
           <a:lstStyle/>
           <a:p>
-            <a:r>
-              <a:rPr sz="1400" b="0" i="0">
-                <a:solidFill>
-                  <a:srgbClr val="B8D8EE"/>
-                </a:solidFill>
-                <a:latin typeface="Calibri"/>
-              </a:rPr>
-              <a:t>Gratis · navegador o free tier · sin cuenta de pago</a:t>
-            </a:r>
-          </a:p>
-        </p:txBody>
-      </p:sp>
-      <p:sp>
-        <p:nvSpPr>
-          <p:cNvPr id="6" name="Rounded Rectangle 5"/>
-          <p:cNvSpPr/>
-          <p:nvPr/>
-        </p:nvSpPr>
-        <p:spPr>
-          <a:xfrm>
-            <a:off x="457200" y="1591056"/>
-            <a:ext cx="3624986" cy="2299716"/>
-          </a:xfrm>
-          <a:prstGeom prst="roundRect">
-            <a:avLst>
-              <a:gd name="adj" fmla="val 12000"/>
-            </a:avLst>
-          </a:prstGeom>
-          <a:solidFill>
-            <a:srgbClr val="F2F2F2"/>
-          </a:solidFill>
-          <a:ln>
-            <a:noFill/>
-          </a:ln>
-        </p:spPr>
-        <p:style>
-          <a:lnRef idx="1">
-            <a:schemeClr val="accent1"/>
-          </a:lnRef>
-          <a:fillRef idx="3">
-            <a:schemeClr val="accent1"/>
-          </a:fillRef>
-          <a:effectRef idx="2">
-            <a:schemeClr val="accent1"/>
-          </a:effectRef>
-          <a:fontRef idx="minor">
-            <a:schemeClr val="lt1"/>
-          </a:fontRef>
-        </p:style>
-        <p:txBody>
-          <a:bodyPr rtlCol="0" anchor="ctr"/>
-          <a:lstStyle/>
-          <a:p>
-            <a:pPr algn="ctr"/>
-          </a:p>
-        </p:txBody>
-      </p:sp>
-      <p:sp>
-        <p:nvSpPr>
-          <p:cNvPr id="7" name="Rectangle 6"/>
-          <p:cNvSpPr/>
-          <p:nvPr/>
-        </p:nvSpPr>
-        <p:spPr>
-          <a:xfrm>
-            <a:off x="457200" y="1591056"/>
-            <a:ext cx="3624986" cy="64008"/>
-          </a:xfrm>
-          <a:prstGeom prst="rect">
-            <a:avLst/>
-          </a:prstGeom>
-          <a:solidFill>
-            <a:srgbClr val="095292"/>
-          </a:solidFill>
-          <a:ln>
-            <a:noFill/>
-          </a:ln>
-        </p:spPr>
-        <p:style>
-          <a:lnRef idx="1">
-            <a:schemeClr val="accent1"/>
-          </a:lnRef>
-          <a:fillRef idx="3">
-            <a:schemeClr val="accent1"/>
-          </a:fillRef>
-          <a:effectRef idx="2">
-            <a:schemeClr val="accent1"/>
-          </a:effectRef>
-          <a:fontRef idx="minor">
-            <a:schemeClr val="lt1"/>
-          </a:fontRef>
-        </p:style>
-        <p:txBody>
-          <a:bodyPr rtlCol="0" anchor="ctr"/>
-          <a:lstStyle/>
-          <a:p>
-            <a:pPr algn="ctr"/>
-          </a:p>
-        </p:txBody>
-      </p:sp>
-      <p:sp>
-        <p:nvSpPr>
-          <p:cNvPr id="8" name="Rectangle 7"/>
-          <p:cNvSpPr/>
-          <p:nvPr/>
-        </p:nvSpPr>
-        <p:spPr>
-          <a:xfrm>
-            <a:off x="457200" y="1655064"/>
-            <a:ext cx="3624986" cy="27432"/>
-          </a:xfrm>
-          <a:prstGeom prst="rect">
-            <a:avLst/>
-          </a:prstGeom>
-          <a:solidFill>
-            <a:srgbClr val="FFD000"/>
-          </a:solidFill>
-          <a:ln>
-            <a:noFill/>
-          </a:ln>
-        </p:spPr>
-        <p:style>
-          <a:lnRef idx="1">
-            <a:schemeClr val="accent1"/>
-          </a:lnRef>
-          <a:fillRef idx="3">
-            <a:schemeClr val="accent1"/>
-          </a:fillRef>
-          <a:effectRef idx="2">
-            <a:schemeClr val="accent1"/>
-          </a:effectRef>
-          <a:fontRef idx="minor">
-            <a:schemeClr val="lt1"/>
-          </a:fontRef>
-        </p:style>
-        <p:txBody>
-          <a:bodyPr rtlCol="0" anchor="ctr"/>
-          <a:lstStyle/>
-          <a:p>
-            <a:pPr algn="ctr"/>
-          </a:p>
-        </p:txBody>
-      </p:sp>
-      <p:pic>
-        <p:nvPicPr>
-          <p:cNvPr id="9" name="Picture 8" descr="killercoda.png"/>
-          <p:cNvPicPr>
-            <a:picLocks noChangeAspect="1"/>
-          </p:cNvPicPr>
-          <p:nvPr/>
-        </p:nvPicPr>
-        <p:blipFill>
-          <a:blip r:embed="rId2"/>
-          <a:stretch>
-            <a:fillRect/>
-          </a:stretch>
-        </p:blipFill>
-        <p:spPr>
-          <a:xfrm>
-            <a:off x="1659331" y="1847087"/>
-            <a:ext cx="1220724" cy="1220724"/>
-          </a:xfrm>
-          <a:prstGeom prst="rect">
-            <a:avLst/>
-          </a:prstGeom>
-        </p:spPr>
-      </p:pic>
-      <p:sp>
-        <p:nvSpPr>
-          <p:cNvPr id="10" name="TextBox 9"/>
-          <p:cNvSpPr txBox="1"/>
-          <p:nvPr/>
-        </p:nvSpPr>
-        <p:spPr>
-          <a:xfrm>
-            <a:off x="530352" y="3159251"/>
-            <a:ext cx="3478682" cy="621792"/>
-          </a:xfrm>
-          <a:prstGeom prst="rect">
-            <a:avLst/>
-          </a:prstGeom>
-          <a:noFill/>
-        </p:spPr>
-        <p:txBody>
-          <a:bodyPr wrap="square" anchor="t"/>
-          <a:lstStyle/>
-          <a:p>
-            <a:pPr algn="ctr"/>
-            <a:r>
-              <a:rPr sz="1300" b="1" i="0">
-                <a:solidFill>
-                  <a:srgbClr val="095292"/>
-                </a:solidFill>
-                <a:latin typeface="Calibri"/>
-              </a:rPr>
-              <a:t>Killercoda</a:t>
-            </a:r>
-          </a:p>
-          <a:p>
-            <a:pPr algn="ctr">
-              <a:spcBef>
-                <a:spcPts val="200"/>
-              </a:spcBef>
+            <a:pPr>
+              <a:spcAft>
+                <a:spcPts val="800"/>
+              </a:spcAft>
             </a:pPr>
             <a:r>
-              <a:rPr sz="1000" b="0" i="0">
-                <a:solidFill>
-                  <a:srgbClr val="666666"/>
-                </a:solidFill>
-                <a:latin typeface="Calibri"/>
-              </a:rPr>
-              <a:t>Lab del dia · sesion 1 h</a:t>
-            </a:r>
-          </a:p>
-        </p:txBody>
-      </p:sp>
-      <p:sp>
-        <p:nvSpPr>
-          <p:cNvPr id="11" name="Rounded Rectangle 10"/>
-          <p:cNvSpPr/>
-          <p:nvPr/>
-        </p:nvSpPr>
-        <p:spPr>
-          <a:xfrm>
-            <a:off x="4283354" y="1591056"/>
-            <a:ext cx="3624986" cy="2299716"/>
-          </a:xfrm>
-          <a:prstGeom prst="roundRect">
-            <a:avLst>
-              <a:gd name="adj" fmla="val 12000"/>
-            </a:avLst>
-          </a:prstGeom>
-          <a:solidFill>
-            <a:srgbClr val="F2F2F2"/>
-          </a:solidFill>
-          <a:ln>
-            <a:noFill/>
-          </a:ln>
-        </p:spPr>
-        <p:style>
-          <a:lnRef idx="1">
-            <a:schemeClr val="accent1"/>
-          </a:lnRef>
-          <a:fillRef idx="3">
-            <a:schemeClr val="accent1"/>
-          </a:fillRef>
-          <a:effectRef idx="2">
-            <a:schemeClr val="accent1"/>
-          </a:effectRef>
-          <a:fontRef idx="minor">
-            <a:schemeClr val="lt1"/>
-          </a:fontRef>
-        </p:style>
-        <p:txBody>
-          <a:bodyPr rtlCol="0" anchor="ctr"/>
-          <a:lstStyle/>
-          <a:p>
-            <a:pPr algn="ctr"/>
-          </a:p>
-        </p:txBody>
-      </p:sp>
-      <p:sp>
-        <p:nvSpPr>
-          <p:cNvPr id="12" name="Rectangle 11"/>
-          <p:cNvSpPr/>
-          <p:nvPr/>
-        </p:nvSpPr>
-        <p:spPr>
-          <a:xfrm>
-            <a:off x="4283354" y="1591056"/>
-            <a:ext cx="3624986" cy="64008"/>
-          </a:xfrm>
-          <a:prstGeom prst="rect">
-            <a:avLst/>
-          </a:prstGeom>
-          <a:solidFill>
-            <a:srgbClr val="095292"/>
-          </a:solidFill>
-          <a:ln>
-            <a:noFill/>
-          </a:ln>
-        </p:spPr>
-        <p:style>
-          <a:lnRef idx="1">
-            <a:schemeClr val="accent1"/>
-          </a:lnRef>
-          <a:fillRef idx="3">
-            <a:schemeClr val="accent1"/>
-          </a:fillRef>
-          <a:effectRef idx="2">
-            <a:schemeClr val="accent1"/>
-          </a:effectRef>
-          <a:fontRef idx="minor">
-            <a:schemeClr val="lt1"/>
-          </a:fontRef>
-        </p:style>
-        <p:txBody>
-          <a:bodyPr rtlCol="0" anchor="ctr"/>
-          <a:lstStyle/>
-          <a:p>
-            <a:pPr algn="ctr"/>
-          </a:p>
-        </p:txBody>
-      </p:sp>
-      <p:sp>
-        <p:nvSpPr>
-          <p:cNvPr id="13" name="Rectangle 12"/>
-          <p:cNvSpPr/>
-          <p:nvPr/>
-        </p:nvSpPr>
-        <p:spPr>
-          <a:xfrm>
-            <a:off x="4283354" y="1655064"/>
-            <a:ext cx="3624986" cy="27432"/>
-          </a:xfrm>
-          <a:prstGeom prst="rect">
-            <a:avLst/>
-          </a:prstGeom>
-          <a:solidFill>
-            <a:srgbClr val="FFD000"/>
-          </a:solidFill>
-          <a:ln>
-            <a:noFill/>
-          </a:ln>
-        </p:spPr>
-        <p:style>
-          <a:lnRef idx="1">
-            <a:schemeClr val="accent1"/>
-          </a:lnRef>
-          <a:fillRef idx="3">
-            <a:schemeClr val="accent1"/>
-          </a:fillRef>
-          <a:effectRef idx="2">
-            <a:schemeClr val="accent1"/>
-          </a:effectRef>
-          <a:fontRef idx="minor">
-            <a:schemeClr val="lt1"/>
-          </a:fontRef>
-        </p:style>
-        <p:txBody>
-          <a:bodyPr rtlCol="0" anchor="ctr"/>
-          <a:lstStyle/>
-          <a:p>
-            <a:pPr algn="ctr"/>
-          </a:p>
-        </p:txBody>
-      </p:sp>
-      <p:pic>
-        <p:nvPicPr>
-          <p:cNvPr id="14" name="Picture 13" descr="labex.png"/>
-          <p:cNvPicPr>
-            <a:picLocks noChangeAspect="1"/>
-          </p:cNvPicPr>
-          <p:nvPr/>
-        </p:nvPicPr>
-        <p:blipFill>
-          <a:blip r:embed="rId3"/>
-          <a:stretch>
-            <a:fillRect/>
-          </a:stretch>
-        </p:blipFill>
-        <p:spPr>
-          <a:xfrm>
-            <a:off x="5485485" y="1847087"/>
-            <a:ext cx="1220724" cy="1220724"/>
-          </a:xfrm>
-          <a:prstGeom prst="rect">
-            <a:avLst/>
-          </a:prstGeom>
-        </p:spPr>
-      </p:pic>
-      <p:sp>
-        <p:nvSpPr>
-          <p:cNvPr id="15" name="TextBox 14"/>
-          <p:cNvSpPr txBox="1"/>
-          <p:nvPr/>
-        </p:nvSpPr>
-        <p:spPr>
-          <a:xfrm>
-            <a:off x="4356506" y="3159251"/>
-            <a:ext cx="3478682" cy="621792"/>
-          </a:xfrm>
-          <a:prstGeom prst="rect">
-            <a:avLst/>
-          </a:prstGeom>
-          <a:noFill/>
-        </p:spPr>
-        <p:txBody>
-          <a:bodyPr wrap="square" anchor="t"/>
-          <a:lstStyle/>
-          <a:p>
-            <a:pPr algn="ctr"/>
-            <a:r>
-              <a:rPr sz="1300" b="1" i="0">
-                <a:solidFill>
-                  <a:srgbClr val="095292"/>
-                </a:solidFill>
-                <a:latin typeface="Calibri"/>
-              </a:rPr>
-              <a:t>LabEx Docker Playground</a:t>
-            </a:r>
-          </a:p>
-          <a:p>
-            <a:pPr algn="ctr">
-              <a:spcBef>
-                <a:spcPts val="200"/>
-              </a:spcBef>
+              <a:rPr sz="2000" b="0" i="0">
+                <a:solidFill>
+                  <a:srgbClr val="333333"/>
+                </a:solidFill>
+                <a:latin typeface="Calibri"/>
+              </a:rPr>
+              <a:t>–   </a:t>
+            </a:r>
+            <a:r>
+              <a:rPr sz="2000" b="1" i="0">
+                <a:solidFill>
+                  <a:srgbClr val="333333"/>
+                </a:solidFill>
+                <a:latin typeface="Calibri"/>
+              </a:rPr>
+              <a:t>Entregable:</a:t>
+            </a:r>
+            <a:r>
+              <a:rPr sz="2000" b="0" i="0">
+                <a:solidFill>
+                  <a:srgbClr val="333333"/>
+                </a:solidFill>
+                <a:latin typeface="Calibri"/>
+              </a:rPr>
+              <a:t> Dockerfile del stub + bitácora de 5 comandos con la salida real + captura del lab</a:t>
+            </a:r>
+          </a:p>
+          <a:p>
+            <a:pPr>
+              <a:spcAft>
+                <a:spcPts val="800"/>
+              </a:spcAft>
             </a:pPr>
             <a:r>
-              <a:rPr sz="1000" b="0" i="0">
-                <a:solidFill>
-                  <a:srgbClr val="666666"/>
-                </a:solidFill>
-                <a:latin typeface="Calibri"/>
-              </a:rPr>
-              <a:t>Alterna · 3 al dia</a:t>
-            </a:r>
-          </a:p>
-        </p:txBody>
-      </p:sp>
-      <p:sp>
-        <p:nvSpPr>
-          <p:cNvPr id="16" name="Rounded Rectangle 15"/>
-          <p:cNvSpPr/>
-          <p:nvPr/>
-        </p:nvSpPr>
-        <p:spPr>
-          <a:xfrm>
-            <a:off x="8109508" y="1591056"/>
-            <a:ext cx="3624986" cy="2299716"/>
-          </a:xfrm>
-          <a:prstGeom prst="roundRect">
-            <a:avLst>
-              <a:gd name="adj" fmla="val 12000"/>
-            </a:avLst>
-          </a:prstGeom>
-          <a:solidFill>
-            <a:srgbClr val="F2F2F2"/>
-          </a:solidFill>
-          <a:ln>
-            <a:noFill/>
-          </a:ln>
-        </p:spPr>
-        <p:style>
-          <a:lnRef idx="1">
-            <a:schemeClr val="accent1"/>
-          </a:lnRef>
-          <a:fillRef idx="3">
-            <a:schemeClr val="accent1"/>
-          </a:fillRef>
-          <a:effectRef idx="2">
-            <a:schemeClr val="accent1"/>
-          </a:effectRef>
-          <a:fontRef idx="minor">
-            <a:schemeClr val="lt1"/>
-          </a:fontRef>
-        </p:style>
-        <p:txBody>
-          <a:bodyPr rtlCol="0" anchor="ctr"/>
-          <a:lstStyle/>
-          <a:p>
-            <a:pPr algn="ctr"/>
-          </a:p>
-        </p:txBody>
-      </p:sp>
-      <p:sp>
-        <p:nvSpPr>
-          <p:cNvPr id="17" name="Rectangle 16"/>
-          <p:cNvSpPr/>
-          <p:nvPr/>
-        </p:nvSpPr>
-        <p:spPr>
-          <a:xfrm>
-            <a:off x="8109508" y="1591056"/>
-            <a:ext cx="3624986" cy="64008"/>
-          </a:xfrm>
-          <a:prstGeom prst="rect">
-            <a:avLst/>
-          </a:prstGeom>
-          <a:solidFill>
-            <a:srgbClr val="095292"/>
-          </a:solidFill>
-          <a:ln>
-            <a:noFill/>
-          </a:ln>
-        </p:spPr>
-        <p:style>
-          <a:lnRef idx="1">
-            <a:schemeClr val="accent1"/>
-          </a:lnRef>
-          <a:fillRef idx="3">
-            <a:schemeClr val="accent1"/>
-          </a:fillRef>
-          <a:effectRef idx="2">
-            <a:schemeClr val="accent1"/>
-          </a:effectRef>
-          <a:fontRef idx="minor">
-            <a:schemeClr val="lt1"/>
-          </a:fontRef>
-        </p:style>
-        <p:txBody>
-          <a:bodyPr rtlCol="0" anchor="ctr"/>
-          <a:lstStyle/>
-          <a:p>
-            <a:pPr algn="ctr"/>
-          </a:p>
-        </p:txBody>
-      </p:sp>
-      <p:sp>
-        <p:nvSpPr>
-          <p:cNvPr id="18" name="Rectangle 17"/>
-          <p:cNvSpPr/>
-          <p:nvPr/>
-        </p:nvSpPr>
-        <p:spPr>
-          <a:xfrm>
-            <a:off x="8109508" y="1655064"/>
-            <a:ext cx="3624986" cy="27432"/>
-          </a:xfrm>
-          <a:prstGeom prst="rect">
-            <a:avLst/>
-          </a:prstGeom>
-          <a:solidFill>
-            <a:srgbClr val="FFD000"/>
-          </a:solidFill>
-          <a:ln>
-            <a:noFill/>
-          </a:ln>
-        </p:spPr>
-        <p:style>
-          <a:lnRef idx="1">
-            <a:schemeClr val="accent1"/>
-          </a:lnRef>
-          <a:fillRef idx="3">
-            <a:schemeClr val="accent1"/>
-          </a:fillRef>
-          <a:effectRef idx="2">
-            <a:schemeClr val="accent1"/>
-          </a:effectRef>
-          <a:fontRef idx="minor">
-            <a:schemeClr val="lt1"/>
-          </a:fontRef>
-        </p:style>
-        <p:txBody>
-          <a:bodyPr rtlCol="0" anchor="ctr"/>
-          <a:lstStyle/>
-          <a:p>
-            <a:pPr algn="ctr"/>
-          </a:p>
-        </p:txBody>
-      </p:sp>
-      <p:pic>
-        <p:nvPicPr>
-          <p:cNvPr id="19" name="Picture 18" descr="google_docs.png"/>
-          <p:cNvPicPr>
-            <a:picLocks noChangeAspect="1"/>
-          </p:cNvPicPr>
-          <p:nvPr/>
-        </p:nvPicPr>
-        <p:blipFill>
-          <a:blip r:embed="rId4"/>
-          <a:stretch>
-            <a:fillRect/>
-          </a:stretch>
-        </p:blipFill>
-        <p:spPr>
-          <a:xfrm>
-            <a:off x="9311640" y="1847087"/>
-            <a:ext cx="1220724" cy="1220724"/>
-          </a:xfrm>
-          <a:prstGeom prst="rect">
-            <a:avLst/>
-          </a:prstGeom>
-        </p:spPr>
-      </p:pic>
-      <p:sp>
-        <p:nvSpPr>
-          <p:cNvPr id="20" name="TextBox 19"/>
-          <p:cNvSpPr txBox="1"/>
-          <p:nvPr/>
-        </p:nvSpPr>
-        <p:spPr>
-          <a:xfrm>
-            <a:off x="8182660" y="3159251"/>
-            <a:ext cx="3478682" cy="621792"/>
-          </a:xfrm>
-          <a:prstGeom prst="rect">
-            <a:avLst/>
-          </a:prstGeom>
-          <a:noFill/>
-        </p:spPr>
-        <p:txBody>
-          <a:bodyPr wrap="square" anchor="t"/>
-          <a:lstStyle/>
-          <a:p>
-            <a:pPr algn="ctr"/>
-            <a:r>
-              <a:rPr sz="1300" b="1" i="0">
-                <a:solidFill>
-                  <a:srgbClr val="095292"/>
-                </a:solidFill>
-                <a:latin typeface="Calibri"/>
-              </a:rPr>
-              <a:t>Google Docs</a:t>
-            </a:r>
-          </a:p>
-          <a:p>
-            <a:pPr algn="ctr">
-              <a:spcBef>
-                <a:spcPts val="200"/>
-              </a:spcBef>
+              <a:rPr sz="2000" b="0" i="0">
+                <a:solidFill>
+                  <a:srgbClr val="333333"/>
+                </a:solidFill>
+                <a:latin typeface="Calibri"/>
+              </a:rPr>
+              <a:t>–   Herramienta: </a:t>
+            </a:r>
+            <a:r>
+              <a:rPr sz="2000" b="1" i="0">
+                <a:solidFill>
+                  <a:srgbClr val="333333"/>
+                </a:solidFill>
+                <a:latin typeface="Calibri"/>
+              </a:rPr>
+              <a:t>Killercoda · alterna si no carga: LabEx Docker Playground</a:t>
+            </a:r>
+          </a:p>
+          <a:p>
+            <a:pPr>
+              <a:spcAft>
+                <a:spcPts val="800"/>
+              </a:spcAft>
             </a:pPr>
             <a:r>
-              <a:rPr sz="1000" b="0" i="0">
-                <a:solidFill>
-                  <a:srgbClr val="666666"/>
-                </a:solidFill>
-                <a:latin typeface="Calibri"/>
-              </a:rPr>
-              <a:t>Informe PI</a:t>
-            </a:r>
-          </a:p>
-        </p:txBody>
-      </p:sp>
-      <p:sp>
-        <p:nvSpPr>
-          <p:cNvPr id="21" name="Rounded Rectangle 20"/>
-          <p:cNvSpPr/>
-          <p:nvPr/>
-        </p:nvSpPr>
-        <p:spPr>
-          <a:xfrm>
-            <a:off x="4283354" y="4055364"/>
-            <a:ext cx="3624986" cy="2299716"/>
-          </a:xfrm>
-          <a:prstGeom prst="roundRect">
-            <a:avLst>
-              <a:gd name="adj" fmla="val 12000"/>
-            </a:avLst>
-          </a:prstGeom>
-          <a:solidFill>
-            <a:srgbClr val="F2F2F2"/>
-          </a:solidFill>
-          <a:ln>
-            <a:noFill/>
-          </a:ln>
-        </p:spPr>
-        <p:style>
-          <a:lnRef idx="1">
-            <a:schemeClr val="accent1"/>
-          </a:lnRef>
-          <a:fillRef idx="3">
-            <a:schemeClr val="accent1"/>
-          </a:fillRef>
-          <a:effectRef idx="2">
-            <a:schemeClr val="accent1"/>
-          </a:effectRef>
-          <a:fontRef idx="minor">
-            <a:schemeClr val="lt1"/>
-          </a:fontRef>
-        </p:style>
-        <p:txBody>
-          <a:bodyPr rtlCol="0" anchor="ctr"/>
-          <a:lstStyle/>
-          <a:p>
-            <a:pPr algn="ctr"/>
-          </a:p>
-        </p:txBody>
-      </p:sp>
-      <p:sp>
-        <p:nvSpPr>
-          <p:cNvPr id="22" name="Rectangle 21"/>
-          <p:cNvSpPr/>
-          <p:nvPr/>
-        </p:nvSpPr>
-        <p:spPr>
-          <a:xfrm>
-            <a:off x="4283354" y="4055364"/>
-            <a:ext cx="3624986" cy="64008"/>
-          </a:xfrm>
-          <a:prstGeom prst="rect">
-            <a:avLst/>
-          </a:prstGeom>
-          <a:solidFill>
-            <a:srgbClr val="095292"/>
-          </a:solidFill>
-          <a:ln>
-            <a:noFill/>
-          </a:ln>
-        </p:spPr>
-        <p:style>
-          <a:lnRef idx="1">
-            <a:schemeClr val="accent1"/>
-          </a:lnRef>
-          <a:fillRef idx="3">
-            <a:schemeClr val="accent1"/>
-          </a:fillRef>
-          <a:effectRef idx="2">
-            <a:schemeClr val="accent1"/>
-          </a:effectRef>
-          <a:fontRef idx="minor">
-            <a:schemeClr val="lt1"/>
-          </a:fontRef>
-        </p:style>
-        <p:txBody>
-          <a:bodyPr rtlCol="0" anchor="ctr"/>
-          <a:lstStyle/>
-          <a:p>
-            <a:pPr algn="ctr"/>
-          </a:p>
-        </p:txBody>
-      </p:sp>
-      <p:sp>
-        <p:nvSpPr>
-          <p:cNvPr id="23" name="Rectangle 22"/>
-          <p:cNvSpPr/>
-          <p:nvPr/>
-        </p:nvSpPr>
-        <p:spPr>
-          <a:xfrm>
-            <a:off x="4283354" y="4119372"/>
-            <a:ext cx="3624986" cy="27432"/>
-          </a:xfrm>
-          <a:prstGeom prst="rect">
-            <a:avLst/>
-          </a:prstGeom>
-          <a:solidFill>
-            <a:srgbClr val="FFD000"/>
-          </a:solidFill>
-          <a:ln>
-            <a:noFill/>
-          </a:ln>
-        </p:spPr>
-        <p:style>
-          <a:lnRef idx="1">
-            <a:schemeClr val="accent1"/>
-          </a:lnRef>
-          <a:fillRef idx="3">
-            <a:schemeClr val="accent1"/>
-          </a:fillRef>
-          <a:effectRef idx="2">
-            <a:schemeClr val="accent1"/>
-          </a:effectRef>
-          <a:fontRef idx="minor">
-            <a:schemeClr val="lt1"/>
-          </a:fontRef>
-        </p:style>
-        <p:txBody>
-          <a:bodyPr rtlCol="0" anchor="ctr"/>
-          <a:lstStyle/>
-          <a:p>
-            <a:pPr algn="ctr"/>
-          </a:p>
-        </p:txBody>
-      </p:sp>
-      <p:pic>
-        <p:nvPicPr>
-          <p:cNvPr id="24" name="Picture 23" descr="examlab.png"/>
-          <p:cNvPicPr>
-            <a:picLocks noChangeAspect="1"/>
-          </p:cNvPicPr>
-          <p:nvPr/>
-        </p:nvPicPr>
-        <p:blipFill>
-          <a:blip r:embed="rId5"/>
-          <a:stretch>
-            <a:fillRect/>
-          </a:stretch>
-        </p:blipFill>
-        <p:spPr>
-          <a:xfrm>
-            <a:off x="5485485" y="4311396"/>
-            <a:ext cx="1220724" cy="1220724"/>
-          </a:xfrm>
-          <a:prstGeom prst="rect">
-            <a:avLst/>
-          </a:prstGeom>
-        </p:spPr>
-      </p:pic>
-      <p:sp>
-        <p:nvSpPr>
-          <p:cNvPr id="25" name="TextBox 24"/>
-          <p:cNvSpPr txBox="1"/>
-          <p:nvPr/>
-        </p:nvSpPr>
-        <p:spPr>
-          <a:xfrm>
-            <a:off x="4356506" y="5623560"/>
-            <a:ext cx="3478682" cy="621792"/>
-          </a:xfrm>
-          <a:prstGeom prst="rect">
-            <a:avLst/>
-          </a:prstGeom>
-          <a:noFill/>
-        </p:spPr>
-        <p:txBody>
-          <a:bodyPr wrap="square" anchor="t"/>
-          <a:lstStyle/>
-          <a:p>
-            <a:pPr algn="ctr"/>
-            <a:r>
-              <a:rPr sz="1300" b="1" i="0">
-                <a:solidFill>
-                  <a:srgbClr val="095292"/>
-                </a:solidFill>
-                <a:latin typeface="Calibri"/>
-              </a:rPr>
-              <a:t>la plataforma del curso</a:t>
-            </a:r>
-          </a:p>
-          <a:p>
-            <a:pPr algn="ctr">
-              <a:spcBef>
-                <a:spcPts val="200"/>
-              </a:spcBef>
+              <a:rPr sz="2000" b="0" i="0">
+                <a:solidFill>
+                  <a:srgbClr val="333333"/>
+                </a:solidFill>
+                <a:latin typeface="Calibri"/>
+              </a:rPr>
+              <a:t>–   Todo lo que construyan hoy entra al </a:t>
+            </a:r>
+            <a:r>
+              <a:rPr sz="2000" b="1" i="0">
+                <a:solidFill>
+                  <a:srgbClr val="333333"/>
+                </a:solidFill>
+                <a:latin typeface="Calibri"/>
+              </a:rPr>
+              <a:t>informe/repo del PI</a:t>
+            </a:r>
+            <a:r>
+              <a:rPr sz="2000" b="0" i="0">
+                <a:solidFill>
+                  <a:srgbClr val="333333"/>
+                </a:solidFill>
+                <a:latin typeface="Calibri"/>
+              </a:rPr>
+              <a:t> (no es lab suelto).</a:t>
+            </a:r>
+          </a:p>
+          <a:p>
+            <a:pPr>
+              <a:spcAft>
+                <a:spcPts val="800"/>
+              </a:spcAft>
             </a:pPr>
             <a:r>
-              <a:rPr sz="1000" b="0" i="0">
-                <a:solidFill>
-                  <a:srgbClr val="666666"/>
-                </a:solidFill>
-                <a:latin typeface="Calibri"/>
-              </a:rPr>
-              <a:t>Donde se entrega</a:t>
-            </a:r>
-          </a:p>
-        </p:txBody>
-      </p:sp>
-      <p:sp>
-        <p:nvSpPr>
-          <p:cNvPr id="26" name="TextBox 25"/>
+              <a:rPr sz="2000" b="0" i="0">
+                <a:solidFill>
+                  <a:srgbClr val="333333"/>
+                </a:solidFill>
+                <a:latin typeface="Calibri"/>
+              </a:rPr>
+              <a:t>–   Individual por defecto · el docente puede autorizar equipos de 2–3; la entrega en la plataforma del curso siempre es individual.</a:t>
+            </a:r>
+          </a:p>
+        </p:txBody>
+      </p:sp>
+      <p:sp>
+        <p:nvSpPr>
+          <p:cNvPr id="6" name="TextBox 5"/>
           <p:cNvSpPr txBox="1"/>
           <p:nvPr/>
         </p:nvSpPr>
@@ -5879,7 +5505,7 @@
                 </a:solidFill>
                 <a:latin typeface="Calibri"/>
               </a:rPr>
-              <a:t>Taller PI (paso a paso)</a:t>
+              <a:t>Manos a la obra (paso a paso)</a:t>
             </a:r>
           </a:p>
         </p:txBody>
@@ -7153,7 +6779,7 @@
                 </a:solidFill>
                 <a:latin typeface="Calibri"/>
               </a:rPr>
-              <a:t> Taller guiado PI (demo en vivo + avance individual).</a:t>
+              <a:t> Trabajo guiado del PI (demo en vivo + avance individual).</a:t>
             </a:r>
           </a:p>
           <a:p>
@@ -7688,7 +7314,7 @@
                 </a:solidFill>
                 <a:latin typeface="Calibri"/>
               </a:rPr>
-              <a:t>PI CloudLite — entregable de hoy</a:t>
+              <a:t>VM vs contenedor</a:t>
             </a:r>
           </a:p>
         </p:txBody>
@@ -7727,25 +7353,7 @@
                 </a:solidFill>
                 <a:latin typeface="Calibri"/>
               </a:rPr>
-              <a:t>–   </a:t>
-            </a:r>
-            <a:r>
-              <a:rPr sz="2000" b="1" i="0">
-                <a:solidFill>
-                  <a:srgbClr val="333333"/>
-                </a:solidFill>
-                <a:latin typeface="Calibri"/>
-              </a:rPr>
-              <a:t>Entregable:</a:t>
-            </a:r>
-            <a:r>
-              <a:rPr sz="2000" b="0" i="0">
-                <a:solidFill>
-                  <a:srgbClr val="333333"/>
-                </a:solidFill>
-                <a:latin typeface="Calibri"/>
-              </a:rPr>
-              <a:t> Dockerfile del stub + bitácora de 5 comandos con la salida real + captura del lab</a:t>
+              <a:t>–   VM: hipervisor + SO completo → aislamiento fuerte, más pesado.</a:t>
             </a:r>
           </a:p>
           <a:p>
@@ -7761,16 +7369,7 @@
                 </a:solidFill>
                 <a:latin typeface="Calibri"/>
               </a:rPr>
-              <a:t>–   Herramienta: </a:t>
-            </a:r>
-            <a:r>
-              <a:rPr sz="2000" b="1" i="0">
-                <a:solidFill>
-                  <a:srgbClr val="333333"/>
-                </a:solidFill>
-                <a:latin typeface="Calibri"/>
-              </a:rPr>
-              <a:t>Killercoda · alterna si no carga: LabEx Docker Playground</a:t>
+              <a:t>–   Contenedor: comparte kernel del host → portable y rápido para demos.</a:t>
             </a:r>
           </a:p>
           <a:p>
@@ -7786,25 +7385,7 @@
                 </a:solidFill>
                 <a:latin typeface="Calibri"/>
               </a:rPr>
-              <a:t>–   Todo lo que construyan hoy entra al </a:t>
-            </a:r>
-            <a:r>
-              <a:rPr sz="2000" b="1" i="0">
-                <a:solidFill>
-                  <a:srgbClr val="333333"/>
-                </a:solidFill>
-                <a:latin typeface="Calibri"/>
-              </a:rPr>
-              <a:t>informe/repo del PI</a:t>
-            </a:r>
-            <a:r>
-              <a:rPr sz="2000" b="0" i="0">
-                <a:solidFill>
-                  <a:srgbClr val="333333"/>
-                </a:solidFill>
-                <a:latin typeface="Calibri"/>
-              </a:rPr>
-              <a:t> (no es lab suelto).</a:t>
+              <a:t>–   Imagen = capas inmutables; contenedor = instancia en ejecución.</a:t>
             </a:r>
           </a:p>
           <a:p>
@@ -7820,7 +7401,25 @@
                 </a:solidFill>
                 <a:latin typeface="Calibri"/>
               </a:rPr>
-              <a:t>–   Individual por defecto · el docente puede autorizar equipos de 2–3; la entrega en la plataforma del curso siempre es individual.</a:t>
+              <a:t>–   CloudLite: contenerizamos al menos </a:t>
+            </a:r>
+            <a:r>
+              <a:rPr sz="2000" b="1" i="0">
+                <a:solidFill>
+                  <a:srgbClr val="333333"/>
+                </a:solidFill>
+                <a:latin typeface="Calibri"/>
+              </a:rPr>
+              <a:t>un</a:t>
+            </a:r>
+            <a:r>
+              <a:rPr sz="2000" b="0" i="0">
+                <a:solidFill>
+                  <a:srgbClr val="333333"/>
+                </a:solidFill>
+                <a:latin typeface="Calibri"/>
+              </a:rPr>
+              <a:t> servicio (API stub o front estático).</a:t>
             </a:r>
           </a:p>
         </p:txBody>
@@ -8001,7 +7600,7 @@
                 </a:solidFill>
                 <a:latin typeface="Calibri"/>
               </a:rPr>
-              <a:t>VM vs contenedor</a:t>
+              <a:t>Lab en navegador (pasos demo)</a:t>
             </a:r>
           </a:p>
         </p:txBody>
@@ -8040,7 +7639,25 @@
                 </a:solidFill>
                 <a:latin typeface="Calibri"/>
               </a:rPr>
-              <a:t>–   VM: hipervisor + SO completo → aislamiento fuerte, más pesado.</a:t>
+              <a:t>–   Abrir </a:t>
+            </a:r>
+            <a:r>
+              <a:rPr sz="2000" b="1" i="0">
+                <a:solidFill>
+                  <a:srgbClr val="333333"/>
+                </a:solidFill>
+                <a:latin typeface="Calibri"/>
+              </a:rPr>
+              <a:t>Killercoda</a:t>
+            </a:r>
+            <a:r>
+              <a:rPr sz="2000" b="0" i="0">
+                <a:solidFill>
+                  <a:srgbClr val="333333"/>
+                </a:solidFill>
+                <a:latin typeface="Calibri"/>
+              </a:rPr>
+              <a:t> (killercoda.com, escenario Ubuntu) con cuenta gratuita.</a:t>
             </a:r>
           </a:p>
           <a:p>
@@ -8056,7 +7673,25 @@
                 </a:solidFill>
                 <a:latin typeface="Calibri"/>
               </a:rPr>
-              <a:t>–   Contenedor: comparte kernel del host → portable y rápido para demos.</a:t>
+              <a:t>–   «docker run» de un nginx/hello y luego </a:t>
+            </a:r>
+            <a:r>
+              <a:rPr sz="2000" b="1" i="0">
+                <a:solidFill>
+                  <a:srgbClr val="333333"/>
+                </a:solidFill>
+                <a:latin typeface="Calibri"/>
+              </a:rPr>
+              <a:t>su</a:t>
+            </a:r>
+            <a:r>
+              <a:rPr sz="2000" b="0" i="0">
+                <a:solidFill>
+                  <a:srgbClr val="333333"/>
+                </a:solidFill>
+                <a:latin typeface="Calibri"/>
+              </a:rPr>
+              <a:t> imagen stub.</a:t>
             </a:r>
           </a:p>
           <a:p>
@@ -8072,7 +7707,7 @@
                 </a:solidFill>
                 <a:latin typeface="Calibri"/>
               </a:rPr>
-              <a:t>–   Imagen = capas inmutables; contenedor = instancia en ejecución.</a:t>
+              <a:t>–   «docker ps» con el contenedor arriba.</a:t>
             </a:r>
           </a:p>
           <a:p>
@@ -8088,7 +7723,7 @@
                 </a:solidFill>
                 <a:latin typeface="Calibri"/>
               </a:rPr>
-              <a:t>–   CloudLite: contenerizamos al menos </a:t>
+              <a:t>–   </a:t>
             </a:r>
             <a:r>
               <a:rPr sz="2000" b="1" i="0">
@@ -8097,7 +7732,7 @@
                 </a:solidFill>
                 <a:latin typeface="Calibri"/>
               </a:rPr>
-              <a:t>un</a:t>
+              <a:t>La sesión caduca a 1 h:</a:t>
             </a:r>
             <a:r>
               <a:rPr sz="2000" b="0" i="0">
@@ -8106,7 +7741,77 @@
                 </a:solidFill>
                 <a:latin typeface="Calibri"/>
               </a:rPr>
-              <a:t> servicio (API stub o front estático).</a:t>
+              <a:t> el Dockerfile se escribe en </a:t>
+            </a:r>
+            <a:r>
+              <a:rPr sz="2000" b="1" i="0">
+                <a:solidFill>
+                  <a:srgbClr val="333333"/>
+                </a:solidFill>
+                <a:latin typeface="Calibri"/>
+              </a:rPr>
+              <a:t>tu</a:t>
+            </a:r>
+            <a:r>
+              <a:rPr sz="2000" b="0" i="0">
+                <a:solidFill>
+                  <a:srgbClr val="333333"/>
+                </a:solidFill>
+                <a:latin typeface="Calibri"/>
+              </a:rPr>
+              <a:t> carpeta del PI y se pega en el lab, nunca al contrario. Guarda capturas antes de cerrar.</a:t>
+            </a:r>
+          </a:p>
+          <a:p>
+            <a:pPr>
+              <a:spcAft>
+                <a:spcPts val="800"/>
+              </a:spcAft>
+            </a:pPr>
+            <a:r>
+              <a:rPr sz="2000" b="0" i="0">
+                <a:solidFill>
+                  <a:srgbClr val="333333"/>
+                </a:solidFill>
+                <a:latin typeface="Calibri"/>
+              </a:rPr>
+              <a:t>–   Si Killercoda no carga: </a:t>
+            </a:r>
+            <a:r>
+              <a:rPr sz="2000" b="1" i="0">
+                <a:solidFill>
+                  <a:srgbClr val="333333"/>
+                </a:solidFill>
+                <a:latin typeface="Calibri"/>
+              </a:rPr>
+              <a:t>LabEx Docker Playground</a:t>
+            </a:r>
+            <a:r>
+              <a:rPr sz="2000" b="0" i="0">
+                <a:solidFill>
+                  <a:srgbClr val="333333"/>
+                </a:solidFill>
+                <a:latin typeface="Calibri"/>
+              </a:rPr>
+              <a:t> como alterna (misma hora de sesión, pero solo </a:t>
+            </a:r>
+            <a:r>
+              <a:rPr sz="2000" b="1" i="0">
+                <a:solidFill>
+                  <a:srgbClr val="333333"/>
+                </a:solidFill>
+                <a:latin typeface="Calibri"/>
+              </a:rPr>
+              <a:t>3 al día</a:t>
+            </a:r>
+            <a:r>
+              <a:rPr sz="2000" b="0" i="0">
+                <a:solidFill>
+                  <a:srgbClr val="333333"/>
+                </a:solidFill>
+                <a:latin typeface="Calibri"/>
+              </a:rPr>
+              <a:t> en el plan gratuito).</a:t>
             </a:r>
           </a:p>
         </p:txBody>
@@ -8146,6 +7851,30 @@
           </a:p>
         </p:txBody>
       </p:sp>
+      <p:pic>
+        <p:nvPicPr>
+          <p:cNvPr id="7" name="Picture 6" descr="salida-docker-ps.png"/>
+          <p:cNvPicPr>
+            <a:picLocks noChangeAspect="1"/>
+          </p:cNvPicPr>
+          <p:nvPr/>
+        </p:nvPicPr>
+        <p:blipFill>
+          <a:blip r:embed="rId2"/>
+          <a:stretch>
+            <a:fillRect/>
+          </a:stretch>
+        </p:blipFill>
+        <p:spPr>
+          <a:xfrm>
+            <a:off x="8625535" y="5457008"/>
+            <a:ext cx="3108960" cy="943791"/>
+          </a:xfrm>
+          <a:prstGeom prst="rect">
+            <a:avLst/>
+          </a:prstGeom>
+        </p:spPr>
+      </p:pic>
     </p:spTree>
   </p:cSld>
   <p:clrMapOvr>
@@ -8287,7 +8016,7 @@
                 </a:solidFill>
                 <a:latin typeface="Calibri"/>
               </a:rPr>
-              <a:t>Lab en navegador (pasos demo)</a:t>
+              <a:t>Dockerfile mínimo para el stub</a:t>
             </a:r>
           </a:p>
         </p:txBody>
@@ -8326,7 +8055,7 @@
                 </a:solidFill>
                 <a:latin typeface="Calibri"/>
               </a:rPr>
-              <a:t>–   Abrir </a:t>
+              <a:t>–   Siete instrucciones: </a:t>
             </a:r>
             <a:r>
               <a:rPr sz="2000" b="1" i="0">
@@ -8335,7 +8064,7 @@
                 </a:solidFill>
                 <a:latin typeface="Calibri"/>
               </a:rPr>
-              <a:t>Killercoda</a:t>
+              <a:t>FROM · WORKDIR · COPY</a:t>
             </a:r>
             <a:r>
               <a:rPr sz="2000" b="0" i="0">
@@ -8344,7 +8073,43 @@
                 </a:solidFill>
                 <a:latin typeface="Calibri"/>
               </a:rPr>
-              <a:t> (killercoda.com, escenario Ubuntu) con cuenta gratuita.</a:t>
+              <a:t> de dependencias </a:t>
+            </a:r>
+            <a:r>
+              <a:rPr sz="2000" b="1" i="0">
+                <a:solidFill>
+                  <a:srgbClr val="333333"/>
+                </a:solidFill>
+                <a:latin typeface="Calibri"/>
+              </a:rPr>
+              <a:t>· RUN · COPY</a:t>
+            </a:r>
+            <a:r>
+              <a:rPr sz="2000" b="0" i="0">
+                <a:solidFill>
+                  <a:srgbClr val="333333"/>
+                </a:solidFill>
+                <a:latin typeface="Calibri"/>
+              </a:rPr>
+              <a:t> del código </a:t>
+            </a:r>
+            <a:r>
+              <a:rPr sz="2000" b="1" i="0">
+                <a:solidFill>
+                  <a:srgbClr val="333333"/>
+                </a:solidFill>
+                <a:latin typeface="Calibri"/>
+              </a:rPr>
+              <a:t>· EXPOSE · CMD</a:t>
+            </a:r>
+            <a:r>
+              <a:rPr sz="2000" b="0" i="0">
+                <a:solidFill>
+                  <a:srgbClr val="333333"/>
+                </a:solidFill>
+                <a:latin typeface="Calibri"/>
+              </a:rPr>
+              <a:t>.</a:t>
             </a:r>
           </a:p>
           <a:p>
@@ -8360,7 +8125,7 @@
                 </a:solidFill>
                 <a:latin typeface="Calibri"/>
               </a:rPr>
-              <a:t>–   «docker run» de un nginx/hello y luego </a:t>
+              <a:t>–   «FROM» con </a:t>
             </a:r>
             <a:r>
               <a:rPr sz="2000" b="1" i="0">
@@ -8369,7 +8134,7 @@
                 </a:solidFill>
                 <a:latin typeface="Calibri"/>
               </a:rPr>
-              <a:t>su</a:t>
+              <a:t>etiqueta fija</a:t>
             </a:r>
             <a:r>
               <a:rPr sz="2000" b="0" i="0">
@@ -8378,7 +8143,7 @@
                 </a:solidFill>
                 <a:latin typeface="Calibri"/>
               </a:rPr>
-              <a:t> imagen stub.</a:t>
+              <a:t> («node:20-alpine», «python:3.12-slim»): con «latest», la imagen de hoy no es la de mañana.</a:t>
             </a:r>
           </a:p>
           <a:p>
@@ -8394,7 +8159,25 @@
                 </a:solidFill>
                 <a:latin typeface="Calibri"/>
               </a:rPr>
-              <a:t>–   «docker ps» con el contenedor arriba.</a:t>
+              <a:t>–   Dependencias </a:t>
+            </a:r>
+            <a:r>
+              <a:rPr sz="2000" b="1" i="0">
+                <a:solidFill>
+                  <a:srgbClr val="333333"/>
+                </a:solidFill>
+                <a:latin typeface="Calibri"/>
+              </a:rPr>
+              <a:t>antes</a:t>
+            </a:r>
+            <a:r>
+              <a:rPr sz="2000" b="0" i="0">
+                <a:solidFill>
+                  <a:srgbClr val="333333"/>
+                </a:solidFill>
+                <a:latin typeface="Calibri"/>
+              </a:rPr>
+              <a:t> que el código: así cambiar una línea no reinstala nada (es la caché por capas).</a:t>
             </a:r>
           </a:p>
           <a:p>
@@ -8419,7 +8202,7 @@
                 </a:solidFill>
                 <a:latin typeface="Calibri"/>
               </a:rPr>
-              <a:t>La sesión caduca a 1 h:</a:t>
+              <a:t>Nunca un secreto en la imagen:</a:t>
             </a:r>
             <a:r>
               <a:rPr sz="2000" b="0" i="0">
@@ -8428,25 +8211,7 @@
                 </a:solidFill>
                 <a:latin typeface="Calibri"/>
               </a:rPr>
-              <a:t> el Dockerfile se escribe en </a:t>
-            </a:r>
-            <a:r>
-              <a:rPr sz="2000" b="1" i="0">
-                <a:solidFill>
-                  <a:srgbClr val="333333"/>
-                </a:solidFill>
-                <a:latin typeface="Calibri"/>
-              </a:rPr>
-              <a:t>tu</a:t>
-            </a:r>
-            <a:r>
-              <a:rPr sz="2000" b="0" i="0">
-                <a:solidFill>
-                  <a:srgbClr val="333333"/>
-                </a:solidFill>
-                <a:latin typeface="Calibri"/>
-              </a:rPr>
-              <a:t> carpeta del PI y se pega en el lab, nunca al contrario. Guarda capturas antes de cerrar.</a:t>
+              <a:t> las capas se acumulan y «docker history» las lee aunque el archivo se borre después.</a:t>
             </a:r>
           </a:p>
           <a:p>
@@ -8462,7 +8227,7 @@
                 </a:solidFill>
                 <a:latin typeface="Calibri"/>
               </a:rPr>
-              <a:t>–   Si Killercoda no carga: </a:t>
+              <a:t>–   Si haces «COPY. .», va con un </a:t>
             </a:r>
             <a:r>
               <a:rPr sz="2000" b="1" i="0">
@@ -8471,7 +8236,7 @@
                 </a:solidFill>
                 <a:latin typeface="Calibri"/>
               </a:rPr>
-              <a:t>LabEx Docker Playground</a:t>
+              <a:t>«.dockerignore»</a:t>
             </a:r>
             <a:r>
               <a:rPr sz="2000" b="0" i="0">
@@ -8480,7 +8245,23 @@
                 </a:solidFill>
                 <a:latin typeface="Calibri"/>
               </a:rPr>
-              <a:t> como alterna (misma hora de sesión, pero solo </a:t>
+              <a:t> al lado («.env», «node_modules», «.git») — y se menciona en la entrega.</a:t>
+            </a:r>
+          </a:p>
+          <a:p>
+            <a:pPr>
+              <a:spcAft>
+                <a:spcPts val="800"/>
+              </a:spcAft>
+            </a:pPr>
+            <a:r>
+              <a:rPr sz="2000" b="0" i="0">
+                <a:solidFill>
+                  <a:srgbClr val="333333"/>
+                </a:solidFill>
+                <a:latin typeface="Calibri"/>
+              </a:rPr>
+              <a:t>–   «EXPOSE» </a:t>
             </a:r>
             <a:r>
               <a:rPr sz="2000" b="1" i="0">
@@ -8489,7 +8270,7 @@
                 </a:solidFill>
                 <a:latin typeface="Calibri"/>
               </a:rPr>
-              <a:t>3 al día</a:t>
+              <a:t>documenta</a:t>
             </a:r>
             <a:r>
               <a:rPr sz="2000" b="0" i="0">
@@ -8498,7 +8279,7 @@
                 </a:solidFill>
                 <a:latin typeface="Calibri"/>
               </a:rPr>
-              <a:t> en el plan gratuito).</a:t>
+              <a:t>, no publica. Publicar es el «-p» del «docker run».</a:t>
             </a:r>
           </a:p>
         </p:txBody>
@@ -8538,30 +8319,6 @@
           </a:p>
         </p:txBody>
       </p:sp>
-      <p:pic>
-        <p:nvPicPr>
-          <p:cNvPr id="7" name="Picture 6" descr="salida-docker-ps.png"/>
-          <p:cNvPicPr>
-            <a:picLocks noChangeAspect="1"/>
-          </p:cNvPicPr>
-          <p:nvPr/>
-        </p:nvPicPr>
-        <p:blipFill>
-          <a:blip r:embed="rId2"/>
-          <a:stretch>
-            <a:fillRect/>
-          </a:stretch>
-        </p:blipFill>
-        <p:spPr>
-          <a:xfrm>
-            <a:off x="8625535" y="5457008"/>
-            <a:ext cx="3108960" cy="943791"/>
-          </a:xfrm>
-          <a:prstGeom prst="rect">
-            <a:avLst/>
-          </a:prstGeom>
-        </p:spPr>
-      </p:pic>
     </p:spTree>
   </p:cSld>
   <p:clrMapOvr>
@@ -8703,7 +8460,7 @@
                 </a:solidFill>
                 <a:latin typeface="Calibri"/>
               </a:rPr>
-              <a:t>Dockerfile mínimo para el stub</a:t>
+              <a:t>Construir, correr y verificar el contenedor</a:t>
             </a:r>
           </a:p>
         </p:txBody>
@@ -8742,7 +8499,7 @@
                 </a:solidFill>
                 <a:latin typeface="Calibri"/>
               </a:rPr>
-              <a:t>–   Siete instrucciones: </a:t>
+              <a:t>–   </a:t>
             </a:r>
             <a:r>
               <a:rPr sz="2000" b="1" i="0">
@@ -8751,7 +8508,7 @@
                 </a:solidFill>
                 <a:latin typeface="Calibri"/>
               </a:rPr>
-              <a:t>FROM · WORKDIR · COPY</a:t>
+              <a:t>Construir:</a:t>
             </a:r>
             <a:r>
               <a:rPr sz="2000" b="0" i="0">
@@ -8760,7 +8517,7 @@
                 </a:solidFill>
                 <a:latin typeface="Calibri"/>
               </a:rPr>
-              <a:t> de dependencias </a:t>
+              <a:t> «docker build -t cloudlite-api:0.1.0 .» — nombre </a:t>
             </a:r>
             <a:r>
               <a:rPr sz="2000" b="1" i="0">
@@ -8769,7 +8526,7 @@
                 </a:solidFill>
                 <a:latin typeface="Calibri"/>
               </a:rPr>
-              <a:t>· RUN · COPY</a:t>
+              <a:t>y</a:t>
             </a:r>
             <a:r>
               <a:rPr sz="2000" b="0" i="0">
@@ -8778,25 +8535,7 @@
                 </a:solidFill>
                 <a:latin typeface="Calibri"/>
               </a:rPr>
-              <a:t> del código </a:t>
-            </a:r>
-            <a:r>
-              <a:rPr sz="2000" b="1" i="0">
-                <a:solidFill>
-                  <a:srgbClr val="333333"/>
-                </a:solidFill>
-                <a:latin typeface="Calibri"/>
-              </a:rPr>
-              <a:t>· EXPOSE · CMD</a:t>
-            </a:r>
-            <a:r>
-              <a:rPr sz="2000" b="0" i="0">
-                <a:solidFill>
-                  <a:srgbClr val="333333"/>
-                </a:solidFill>
-                <a:latin typeface="Calibri"/>
-              </a:rPr>
-              <a:t>.</a:t>
+              <a:t> etiqueta; sin etiqueta vale la mitad.</a:t>
             </a:r>
           </a:p>
           <a:p>
@@ -8812,7 +8551,7 @@
                 </a:solidFill>
                 <a:latin typeface="Calibri"/>
               </a:rPr>
-              <a:t>–   «FROM» con </a:t>
+              <a:t>–   </a:t>
             </a:r>
             <a:r>
               <a:rPr sz="2000" b="1" i="0">
@@ -8821,7 +8560,7 @@
                 </a:solidFill>
                 <a:latin typeface="Calibri"/>
               </a:rPr>
-              <a:t>etiqueta fija</a:t>
+              <a:t>Correr:</a:t>
             </a:r>
             <a:r>
               <a:rPr sz="2000" b="0" i="0">
@@ -8830,7 +8569,7 @@
                 </a:solidFill>
                 <a:latin typeface="Calibri"/>
               </a:rPr>
-              <a:t> («node:20-alpine», «python:3.12-slim»): con «latest», la imagen de hoy no es la de mañana.</a:t>
+              <a:t> «docker run -d -p 8081:8080 --name api cloudlite-api:0.1.0».</a:t>
             </a:r>
           </a:p>
           <a:p>
@@ -8846,7 +8585,7 @@
                 </a:solidFill>
                 <a:latin typeface="Calibri"/>
               </a:rPr>
-              <a:t>–   Dependencias </a:t>
+              <a:t>–   En «-p 8081:8080» la </a:t>
             </a:r>
             <a:r>
               <a:rPr sz="2000" b="1" i="0">
@@ -8855,7 +8594,7 @@
                 </a:solidFill>
                 <a:latin typeface="Calibri"/>
               </a:rPr>
-              <a:t>antes</a:t>
+              <a:t>izquierda es el anfitrión</a:t>
             </a:r>
             <a:r>
               <a:rPr sz="2000" b="0" i="0">
@@ -8864,7 +8603,25 @@
                 </a:solidFill>
                 <a:latin typeface="Calibri"/>
               </a:rPr>
-              <a:t> que el código: así cambiar una línea no reinstala nada (es la caché por capas).</a:t>
+              <a:t> (por donde entras tú) y la </a:t>
+            </a:r>
+            <a:r>
+              <a:rPr sz="2000" b="1" i="0">
+                <a:solidFill>
+                  <a:srgbClr val="333333"/>
+                </a:solidFill>
+                <a:latin typeface="Calibri"/>
+              </a:rPr>
+              <a:t>derecha es el contenedor</a:t>
+            </a:r>
+            <a:r>
+              <a:rPr sz="2000" b="0" i="0">
+                <a:solidFill>
+                  <a:srgbClr val="333333"/>
+                </a:solidFill>
+                <a:latin typeface="Calibri"/>
+              </a:rPr>
+              <a:t> (la del «EXPOSE»).</a:t>
             </a:r>
           </a:p>
           <a:p>
@@ -8889,7 +8646,7 @@
                 </a:solidFill>
                 <a:latin typeface="Calibri"/>
               </a:rPr>
-              <a:t>Nunca un secreto en la imagen:</a:t>
+              <a:t>Si los inviertes,</a:t>
             </a:r>
             <a:r>
               <a:rPr sz="2000" b="0" i="0">
@@ -8898,7 +8655,25 @@
                 </a:solidFill>
                 <a:latin typeface="Calibri"/>
               </a:rPr>
-              <a:t> las capas se acumulan y «docker history» las lee aunque el archivo se borre después.</a:t>
+              <a:t> «docker ps» muestra el contenedor </a:t>
+            </a:r>
+            <a:r>
+              <a:rPr sz="2000" b="1" i="0">
+                <a:solidFill>
+                  <a:srgbClr val="333333"/>
+                </a:solidFill>
+                <a:latin typeface="Calibri"/>
+              </a:rPr>
+              <a:t>Up</a:t>
+            </a:r>
+            <a:r>
+              <a:rPr sz="2000" b="0" i="0">
+                <a:solidFill>
+                  <a:srgbClr val="333333"/>
+                </a:solidFill>
+                <a:latin typeface="Calibri"/>
+              </a:rPr>
+              <a:t> y la petición muere sin respuesta: el síntoma no dice la causa.</a:t>
             </a:r>
           </a:p>
           <a:p>
@@ -8914,7 +8689,7 @@
                 </a:solidFill>
                 <a:latin typeface="Calibri"/>
               </a:rPr>
-              <a:t>–   Si haces «COPY. .», va con un </a:t>
+              <a:t>–   </a:t>
             </a:r>
             <a:r>
               <a:rPr sz="2000" b="1" i="0">
@@ -8923,7 +8698,7 @@
                 </a:solidFill>
                 <a:latin typeface="Calibri"/>
               </a:rPr>
-              <a:t>«.dockerignore»</a:t>
+              <a:t>Verificar:</a:t>
             </a:r>
             <a:r>
               <a:rPr sz="2000" b="0" i="0">
@@ -8932,7 +8707,79 @@
                 </a:solidFill>
                 <a:latin typeface="Calibri"/>
               </a:rPr>
-              <a:t> al lado («.env», «node_modules», «.git») — y se menciona en la entrega.</a:t>
+              <a:t> el contrato de salud son </a:t>
+            </a:r>
+            <a:r>
+              <a:rPr sz="2000" b="1" i="0">
+                <a:solidFill>
+                  <a:srgbClr val="333333"/>
+                </a:solidFill>
+                <a:latin typeface="Calibri"/>
+              </a:rPr>
+              <a:t>tres</a:t>
+            </a:r>
+            <a:r>
+              <a:rPr sz="2000" b="0" i="0">
+                <a:solidFill>
+                  <a:srgbClr val="333333"/>
+                </a:solidFill>
+                <a:latin typeface="Calibri"/>
+              </a:rPr>
+              <a:t> datos — </a:t>
+            </a:r>
+            <a:r>
+              <a:rPr sz="2000" b="1" i="0">
+                <a:solidFill>
+                  <a:srgbClr val="333333"/>
+                </a:solidFill>
+                <a:latin typeface="Calibri"/>
+              </a:rPr>
+              <a:t>ruta</a:t>
+            </a:r>
+            <a:r>
+              <a:rPr sz="2000" b="0" i="0">
+                <a:solidFill>
+                  <a:srgbClr val="333333"/>
+                </a:solidFill>
+                <a:latin typeface="Calibri"/>
+              </a:rPr>
+              <a:t> («GET /health»), </a:t>
+            </a:r>
+            <a:r>
+              <a:rPr sz="2000" b="1" i="0">
+                <a:solidFill>
+                  <a:srgbClr val="333333"/>
+                </a:solidFill>
+                <a:latin typeface="Calibri"/>
+              </a:rPr>
+              <a:t>código</a:t>
+            </a:r>
+            <a:r>
+              <a:rPr sz="2000" b="0" i="0">
+                <a:solidFill>
+                  <a:srgbClr val="333333"/>
+                </a:solidFill>
+                <a:latin typeface="Calibri"/>
+              </a:rPr>
+              <a:t> («200» vivo · «503» sin base) y </a:t>
+            </a:r>
+            <a:r>
+              <a:rPr sz="2000" b="1" i="0">
+                <a:solidFill>
+                  <a:srgbClr val="333333"/>
+                </a:solidFill>
+                <a:latin typeface="Calibri"/>
+              </a:rPr>
+              <a:t>cuerpo</a:t>
+            </a:r>
+            <a:r>
+              <a:rPr sz="2000" b="0" i="0">
+                <a:solidFill>
+                  <a:srgbClr val="333333"/>
+                </a:solidFill>
+                <a:latin typeface="Calibri"/>
+              </a:rPr>
+              <a:t> con su formato.</a:t>
             </a:r>
           </a:p>
           <a:p>
@@ -8948,25 +8795,7 @@
                 </a:solidFill>
                 <a:latin typeface="Calibri"/>
               </a:rPr>
-              <a:t>–   «EXPOSE» </a:t>
-            </a:r>
-            <a:r>
-              <a:rPr sz="2000" b="1" i="0">
-                <a:solidFill>
-                  <a:srgbClr val="333333"/>
-                </a:solidFill>
-                <a:latin typeface="Calibri"/>
-              </a:rPr>
-              <a:t>documenta</a:t>
-            </a:r>
-            <a:r>
-              <a:rPr sz="2000" b="0" i="0">
-                <a:solidFill>
-                  <a:srgbClr val="333333"/>
-                </a:solidFill>
-                <a:latin typeface="Calibri"/>
-              </a:rPr>
-              <a:t>, no publica. Publicar es el «-p» del «docker run».</a:t>
+              <a:t>–   Un «200» con cuerpo vacío no distingue «vivo» de «vivo pero roto»: el cuerpo lleva al menos un campo verificable.</a:t>
             </a:r>
           </a:p>
         </p:txBody>
@@ -9041,7 +8870,7 @@
         <p:spPr>
           <a:xfrm>
             <a:off x="0" y="0"/>
-            <a:ext cx="12191695" cy="960120"/>
+            <a:ext cx="12191695" cy="1170432"/>
           </a:xfrm>
           <a:prstGeom prst="rect">
             <a:avLst/>
@@ -9083,7 +8912,7 @@
         </p:nvSpPr>
         <p:spPr>
           <a:xfrm>
-            <a:off x="0" y="960120"/>
+            <a:off x="0" y="1170432"/>
             <a:ext cx="12191695" cy="41148"/>
           </a:xfrm>
           <a:prstGeom prst="rect">
@@ -9127,7 +8956,7 @@
         <p:spPr>
           <a:xfrm>
             <a:off x="457200" y="164592"/>
-            <a:ext cx="11277295" cy="502920"/>
+            <a:ext cx="11277295" cy="384048"/>
           </a:xfrm>
           <a:prstGeom prst="rect">
             <a:avLst/>
@@ -9147,7 +8976,7 @@
                 </a:solidFill>
                 <a:latin typeface="Calibri"/>
               </a:rPr>
-              <a:t>Construir, correr y verificar el contenedor</a:t>
+              <a:t>Máquinas virtuales vs. contenedores</a:t>
             </a:r>
           </a:p>
         </p:txBody>
@@ -9160,8 +8989,8 @@
         </p:nvSpPr>
         <p:spPr>
           <a:xfrm>
-            <a:off x="457200" y="1170432"/>
-            <a:ext cx="11277295" cy="5230368"/>
+            <a:off x="457200" y="566928"/>
+            <a:ext cx="11277295" cy="411480"/>
           </a:xfrm>
           <a:prstGeom prst="rect">
             <a:avLst/>
@@ -9174,322 +9003,707 @@
           </a:bodyPr>
           <a:lstStyle/>
           <a:p>
-            <a:pPr>
-              <a:spcAft>
-                <a:spcPts val="800"/>
-              </a:spcAft>
-            </a:pPr>
-            <a:r>
-              <a:rPr sz="2000" b="0" i="0">
-                <a:solidFill>
-                  <a:srgbClr val="333333"/>
-                </a:solidFill>
-                <a:latin typeface="Calibri"/>
-              </a:rPr>
-              <a:t>–   </a:t>
-            </a:r>
-            <a:r>
-              <a:rPr sz="2000" b="1" i="0">
-                <a:solidFill>
-                  <a:srgbClr val="333333"/>
-                </a:solidFill>
-                <a:latin typeface="Calibri"/>
-              </a:rPr>
-              <a:t>Construir:</a:t>
-            </a:r>
-            <a:r>
-              <a:rPr sz="2000" b="0" i="0">
-                <a:solidFill>
-                  <a:srgbClr val="333333"/>
-                </a:solidFill>
-                <a:latin typeface="Calibri"/>
-              </a:rPr>
-              <a:t> «docker build -t cloudlite-api:0.1.0 .» — nombre </a:t>
-            </a:r>
-            <a:r>
-              <a:rPr sz="2000" b="1" i="0">
-                <a:solidFill>
-                  <a:srgbClr val="333333"/>
-                </a:solidFill>
-                <a:latin typeface="Calibri"/>
-              </a:rPr>
-              <a:t>y</a:t>
-            </a:r>
-            <a:r>
-              <a:rPr sz="2000" b="0" i="0">
-                <a:solidFill>
-                  <a:srgbClr val="333333"/>
-                </a:solidFill>
-                <a:latin typeface="Calibri"/>
-              </a:rPr>
-              <a:t> etiqueta; sin etiqueta vale la mitad.</a:t>
-            </a:r>
-          </a:p>
-          <a:p>
-            <a:pPr>
-              <a:spcAft>
-                <a:spcPts val="800"/>
-              </a:spcAft>
-            </a:pPr>
-            <a:r>
-              <a:rPr sz="2000" b="0" i="0">
-                <a:solidFill>
-                  <a:srgbClr val="333333"/>
-                </a:solidFill>
-                <a:latin typeface="Calibri"/>
-              </a:rPr>
-              <a:t>–   </a:t>
-            </a:r>
-            <a:r>
-              <a:rPr sz="2000" b="1" i="0">
-                <a:solidFill>
-                  <a:srgbClr val="333333"/>
-                </a:solidFill>
-                <a:latin typeface="Calibri"/>
-              </a:rPr>
-              <a:t>Correr:</a:t>
-            </a:r>
-            <a:r>
-              <a:rPr sz="2000" b="0" i="0">
-                <a:solidFill>
-                  <a:srgbClr val="333333"/>
-                </a:solidFill>
-                <a:latin typeface="Calibri"/>
-              </a:rPr>
-              <a:t> «docker run -d -p 8081:8080 --name api cloudlite-api:0.1.0».</a:t>
-            </a:r>
-          </a:p>
-          <a:p>
-            <a:pPr>
-              <a:spcAft>
-                <a:spcPts val="800"/>
-              </a:spcAft>
-            </a:pPr>
-            <a:r>
-              <a:rPr sz="2000" b="0" i="0">
-                <a:solidFill>
-                  <a:srgbClr val="333333"/>
-                </a:solidFill>
-                <a:latin typeface="Calibri"/>
-              </a:rPr>
-              <a:t>–   En «-p 8081:8080» la </a:t>
-            </a:r>
-            <a:r>
-              <a:rPr sz="2000" b="1" i="0">
-                <a:solidFill>
-                  <a:srgbClr val="333333"/>
-                </a:solidFill>
-                <a:latin typeface="Calibri"/>
-              </a:rPr>
-              <a:t>izquierda es el anfitrión</a:t>
-            </a:r>
-            <a:r>
-              <a:rPr sz="2000" b="0" i="0">
-                <a:solidFill>
-                  <a:srgbClr val="333333"/>
-                </a:solidFill>
-                <a:latin typeface="Calibri"/>
-              </a:rPr>
-              <a:t> (por donde entras tú) y la </a:t>
-            </a:r>
-            <a:r>
-              <a:rPr sz="2000" b="1" i="0">
-                <a:solidFill>
-                  <a:srgbClr val="333333"/>
-                </a:solidFill>
-                <a:latin typeface="Calibri"/>
-              </a:rPr>
-              <a:t>derecha es el contenedor</a:t>
-            </a:r>
-            <a:r>
-              <a:rPr sz="2000" b="0" i="0">
-                <a:solidFill>
-                  <a:srgbClr val="333333"/>
-                </a:solidFill>
-                <a:latin typeface="Calibri"/>
-              </a:rPr>
-              <a:t> (la del «EXPOSE»).</a:t>
-            </a:r>
-          </a:p>
-          <a:p>
-            <a:pPr>
-              <a:spcAft>
-                <a:spcPts val="800"/>
-              </a:spcAft>
-            </a:pPr>
-            <a:r>
-              <a:rPr sz="2000" b="0" i="0">
-                <a:solidFill>
-                  <a:srgbClr val="333333"/>
-                </a:solidFill>
-                <a:latin typeface="Calibri"/>
-              </a:rPr>
-              <a:t>–   </a:t>
-            </a:r>
-            <a:r>
-              <a:rPr sz="2000" b="1" i="0">
-                <a:solidFill>
-                  <a:srgbClr val="333333"/>
-                </a:solidFill>
-                <a:latin typeface="Calibri"/>
-              </a:rPr>
-              <a:t>Si los inviertes,</a:t>
-            </a:r>
-            <a:r>
-              <a:rPr sz="2000" b="0" i="0">
-                <a:solidFill>
-                  <a:srgbClr val="333333"/>
-                </a:solidFill>
-                <a:latin typeface="Calibri"/>
-              </a:rPr>
-              <a:t> «docker ps» muestra el contenedor </a:t>
-            </a:r>
-            <a:r>
-              <a:rPr sz="2000" b="1" i="0">
-                <a:solidFill>
-                  <a:srgbClr val="333333"/>
-                </a:solidFill>
-                <a:latin typeface="Calibri"/>
-              </a:rPr>
-              <a:t>Up</a:t>
-            </a:r>
-            <a:r>
-              <a:rPr sz="2000" b="0" i="0">
-                <a:solidFill>
-                  <a:srgbClr val="333333"/>
-                </a:solidFill>
-                <a:latin typeface="Calibri"/>
-              </a:rPr>
-              <a:t> y la petición muere sin respuesta: el síntoma no dice la causa.</a:t>
-            </a:r>
-          </a:p>
-          <a:p>
-            <a:pPr>
-              <a:spcAft>
-                <a:spcPts val="800"/>
-              </a:spcAft>
-            </a:pPr>
-            <a:r>
-              <a:rPr sz="2000" b="0" i="0">
-                <a:solidFill>
-                  <a:srgbClr val="333333"/>
-                </a:solidFill>
-                <a:latin typeface="Calibri"/>
-              </a:rPr>
-              <a:t>–   </a:t>
-            </a:r>
-            <a:r>
-              <a:rPr sz="2000" b="1" i="0">
-                <a:solidFill>
-                  <a:srgbClr val="333333"/>
-                </a:solidFill>
-                <a:latin typeface="Calibri"/>
-              </a:rPr>
-              <a:t>Verificar:</a:t>
-            </a:r>
-            <a:r>
-              <a:rPr sz="2000" b="0" i="0">
-                <a:solidFill>
-                  <a:srgbClr val="333333"/>
-                </a:solidFill>
-                <a:latin typeface="Calibri"/>
-              </a:rPr>
-              <a:t> el contrato de salud son </a:t>
-            </a:r>
-            <a:r>
-              <a:rPr sz="2000" b="1" i="0">
-                <a:solidFill>
-                  <a:srgbClr val="333333"/>
-                </a:solidFill>
-                <a:latin typeface="Calibri"/>
-              </a:rPr>
-              <a:t>tres</a:t>
-            </a:r>
-            <a:r>
-              <a:rPr sz="2000" b="0" i="0">
-                <a:solidFill>
-                  <a:srgbClr val="333333"/>
-                </a:solidFill>
-                <a:latin typeface="Calibri"/>
-              </a:rPr>
-              <a:t> datos — </a:t>
-            </a:r>
-            <a:r>
-              <a:rPr sz="2000" b="1" i="0">
-                <a:solidFill>
-                  <a:srgbClr val="333333"/>
-                </a:solidFill>
-                <a:latin typeface="Calibri"/>
-              </a:rPr>
-              <a:t>ruta</a:t>
-            </a:r>
-            <a:r>
-              <a:rPr sz="2000" b="0" i="0">
-                <a:solidFill>
-                  <a:srgbClr val="333333"/>
-                </a:solidFill>
-                <a:latin typeface="Calibri"/>
-              </a:rPr>
-              <a:t> («GET /health»), </a:t>
-            </a:r>
-            <a:r>
-              <a:rPr sz="2000" b="1" i="0">
-                <a:solidFill>
-                  <a:srgbClr val="333333"/>
-                </a:solidFill>
-                <a:latin typeface="Calibri"/>
-              </a:rPr>
-              <a:t>código</a:t>
-            </a:r>
-            <a:r>
-              <a:rPr sz="2000" b="0" i="0">
-                <a:solidFill>
-                  <a:srgbClr val="333333"/>
-                </a:solidFill>
-                <a:latin typeface="Calibri"/>
-              </a:rPr>
-              <a:t> («200» vivo · «503» sin base) y </a:t>
-            </a:r>
-            <a:r>
-              <a:rPr sz="2000" b="1" i="0">
-                <a:solidFill>
-                  <a:srgbClr val="333333"/>
-                </a:solidFill>
-                <a:latin typeface="Calibri"/>
-              </a:rPr>
-              <a:t>cuerpo</a:t>
-            </a:r>
-            <a:r>
-              <a:rPr sz="2000" b="0" i="0">
-                <a:solidFill>
-                  <a:srgbClr val="333333"/>
-                </a:solidFill>
-                <a:latin typeface="Calibri"/>
-              </a:rPr>
-              <a:t> con su formato.</a:t>
-            </a:r>
-          </a:p>
-          <a:p>
-            <a:pPr>
-              <a:spcAft>
-                <a:spcPts val="800"/>
-              </a:spcAft>
-            </a:pPr>
-            <a:r>
-              <a:rPr sz="2000" b="0" i="0">
-                <a:solidFill>
-                  <a:srgbClr val="333333"/>
-                </a:solidFill>
-                <a:latin typeface="Calibri"/>
-              </a:rPr>
-              <a:t>–   Un «200» con cuerpo vacío no distingue «vivo» de «vivo pero roto»: el cuerpo lleva al menos un campo verificable.</a:t>
-            </a:r>
-          </a:p>
-        </p:txBody>
-      </p:sp>
-      <p:sp>
-        <p:nvSpPr>
-          <p:cNvPr id="6" name="TextBox 5"/>
+            <a:r>
+              <a:rPr sz="1400" b="0" i="0">
+                <a:solidFill>
+                  <a:srgbClr val="B8D8EE"/>
+                </a:solidFill>
+                <a:latin typeface="Calibri"/>
+              </a:rPr>
+              <a:t>Misma capacidad de cómputo, distinto nivel de aislamiento</a:t>
+            </a:r>
+          </a:p>
+        </p:txBody>
+      </p:sp>
+      <p:sp>
+        <p:nvSpPr>
+          <p:cNvPr id="6" name="Rounded Rectangle 5"/>
+          <p:cNvSpPr/>
+          <p:nvPr/>
+        </p:nvSpPr>
+        <p:spPr>
+          <a:xfrm>
+            <a:off x="822960" y="1417320"/>
+            <a:ext cx="3931920" cy="457200"/>
+          </a:xfrm>
+          <a:prstGeom prst="roundRect">
+            <a:avLst>
+              <a:gd name="adj" fmla="val 12000"/>
+            </a:avLst>
+          </a:prstGeom>
+          <a:solidFill>
+            <a:srgbClr val="095292"/>
+          </a:solidFill>
+          <a:ln>
+            <a:noFill/>
+          </a:ln>
+        </p:spPr>
+        <p:style>
+          <a:lnRef idx="1">
+            <a:schemeClr val="accent1"/>
+          </a:lnRef>
+          <a:fillRef idx="3">
+            <a:schemeClr val="accent1"/>
+          </a:fillRef>
+          <a:effectRef idx="2">
+            <a:schemeClr val="accent1"/>
+          </a:effectRef>
+          <a:fontRef idx="minor">
+            <a:schemeClr val="lt1"/>
+          </a:fontRef>
+        </p:style>
+        <p:txBody>
+          <a:bodyPr rtlCol="0" anchor="ctr" wrap="square"/>
+          <a:lstStyle/>
+          <a:p>
+            <a:pPr algn="ctr"/>
+            <a:r>
+              <a:rPr sz="1200" b="1" i="0">
+                <a:solidFill>
+                  <a:srgbClr val="FFFFFF"/>
+                </a:solidFill>
+                <a:latin typeface="Calibri"/>
+              </a:rPr>
+              <a:t>Máquinas virtuales</a:t>
+            </a:r>
+          </a:p>
+        </p:txBody>
+      </p:sp>
+      <p:sp>
+        <p:nvSpPr>
+          <p:cNvPr id="7" name="Rounded Rectangle 6"/>
+          <p:cNvSpPr/>
+          <p:nvPr/>
+        </p:nvSpPr>
+        <p:spPr>
+          <a:xfrm>
+            <a:off x="822960" y="2057400"/>
+            <a:ext cx="3931920" cy="594360"/>
+          </a:xfrm>
+          <a:prstGeom prst="roundRect">
+            <a:avLst>
+              <a:gd name="adj" fmla="val 12000"/>
+            </a:avLst>
+          </a:prstGeom>
+          <a:solidFill>
+            <a:srgbClr val="333333"/>
+          </a:solidFill>
+          <a:ln>
+            <a:noFill/>
+          </a:ln>
+        </p:spPr>
+        <p:style>
+          <a:lnRef idx="1">
+            <a:schemeClr val="accent1"/>
+          </a:lnRef>
+          <a:fillRef idx="3">
+            <a:schemeClr val="accent1"/>
+          </a:fillRef>
+          <a:effectRef idx="2">
+            <a:schemeClr val="accent1"/>
+          </a:effectRef>
+          <a:fontRef idx="minor">
+            <a:schemeClr val="lt1"/>
+          </a:fontRef>
+        </p:style>
+        <p:txBody>
+          <a:bodyPr rtlCol="0" anchor="ctr" wrap="square"/>
+          <a:lstStyle/>
+          <a:p>
+            <a:pPr algn="ctr"/>
+            <a:r>
+              <a:rPr sz="1300" b="1" i="0">
+                <a:solidFill>
+                  <a:srgbClr val="FFFFFF"/>
+                </a:solidFill>
+                <a:latin typeface="Calibri"/>
+              </a:rPr>
+              <a:t>Hardware físico</a:t>
+            </a:r>
+          </a:p>
+        </p:txBody>
+      </p:sp>
+      <p:sp>
+        <p:nvSpPr>
+          <p:cNvPr id="8" name="Rounded Rectangle 7"/>
+          <p:cNvSpPr/>
+          <p:nvPr/>
+        </p:nvSpPr>
+        <p:spPr>
+          <a:xfrm>
+            <a:off x="822960" y="2697480"/>
+            <a:ext cx="3931920" cy="594360"/>
+          </a:xfrm>
+          <a:prstGeom prst="roundRect">
+            <a:avLst>
+              <a:gd name="adj" fmla="val 12000"/>
+            </a:avLst>
+          </a:prstGeom>
+          <a:solidFill>
+            <a:srgbClr val="269CCB"/>
+          </a:solidFill>
+          <a:ln>
+            <a:noFill/>
+          </a:ln>
+        </p:spPr>
+        <p:style>
+          <a:lnRef idx="1">
+            <a:schemeClr val="accent1"/>
+          </a:lnRef>
+          <a:fillRef idx="3">
+            <a:schemeClr val="accent1"/>
+          </a:fillRef>
+          <a:effectRef idx="2">
+            <a:schemeClr val="accent1"/>
+          </a:effectRef>
+          <a:fontRef idx="minor">
+            <a:schemeClr val="lt1"/>
+          </a:fontRef>
+        </p:style>
+        <p:txBody>
+          <a:bodyPr rtlCol="0" anchor="ctr" wrap="square"/>
+          <a:lstStyle/>
+          <a:p>
+            <a:pPr algn="ctr"/>
+            <a:r>
+              <a:rPr sz="1300" b="1" i="0">
+                <a:solidFill>
+                  <a:srgbClr val="FFFFFF"/>
+                </a:solidFill>
+                <a:latin typeface="Calibri"/>
+              </a:rPr>
+              <a:t>Hipervisor</a:t>
+            </a:r>
+          </a:p>
+        </p:txBody>
+      </p:sp>
+      <p:sp>
+        <p:nvSpPr>
+          <p:cNvPr id="9" name="Rounded Rectangle 8"/>
+          <p:cNvSpPr/>
+          <p:nvPr/>
+        </p:nvSpPr>
+        <p:spPr>
+          <a:xfrm>
+            <a:off x="822960" y="3337560"/>
+            <a:ext cx="1874519" cy="640080"/>
+          </a:xfrm>
+          <a:prstGeom prst="roundRect">
+            <a:avLst>
+              <a:gd name="adj" fmla="val 12000"/>
+            </a:avLst>
+          </a:prstGeom>
+          <a:solidFill>
+            <a:srgbClr val="269CCB"/>
+          </a:solidFill>
+          <a:ln>
+            <a:noFill/>
+          </a:ln>
+        </p:spPr>
+        <p:style>
+          <a:lnRef idx="1">
+            <a:schemeClr val="accent1"/>
+          </a:lnRef>
+          <a:fillRef idx="3">
+            <a:schemeClr val="accent1"/>
+          </a:fillRef>
+          <a:effectRef idx="2">
+            <a:schemeClr val="accent1"/>
+          </a:effectRef>
+          <a:fontRef idx="minor">
+            <a:schemeClr val="lt1"/>
+          </a:fontRef>
+        </p:style>
+        <p:txBody>
+          <a:bodyPr rtlCol="0" anchor="ctr" wrap="square"/>
+          <a:lstStyle/>
+          <a:p>
+            <a:pPr algn="ctr"/>
+            <a:r>
+              <a:rPr sz="1100" b="1" i="0">
+                <a:solidFill>
+                  <a:srgbClr val="FFFFFF"/>
+                </a:solidFill>
+                <a:latin typeface="Calibri"/>
+              </a:rPr>
+              <a:t>SO invitado A
+(completo)</a:t>
+            </a:r>
+          </a:p>
+        </p:txBody>
+      </p:sp>
+      <p:sp>
+        <p:nvSpPr>
+          <p:cNvPr id="10" name="Rounded Rectangle 9"/>
+          <p:cNvSpPr/>
+          <p:nvPr/>
+        </p:nvSpPr>
+        <p:spPr>
+          <a:xfrm>
+            <a:off x="2880360" y="3337560"/>
+            <a:ext cx="1874519" cy="640080"/>
+          </a:xfrm>
+          <a:prstGeom prst="roundRect">
+            <a:avLst>
+              <a:gd name="adj" fmla="val 12000"/>
+            </a:avLst>
+          </a:prstGeom>
+          <a:solidFill>
+            <a:srgbClr val="269CCB"/>
+          </a:solidFill>
+          <a:ln>
+            <a:noFill/>
+          </a:ln>
+        </p:spPr>
+        <p:style>
+          <a:lnRef idx="1">
+            <a:schemeClr val="accent1"/>
+          </a:lnRef>
+          <a:fillRef idx="3">
+            <a:schemeClr val="accent1"/>
+          </a:fillRef>
+          <a:effectRef idx="2">
+            <a:schemeClr val="accent1"/>
+          </a:effectRef>
+          <a:fontRef idx="minor">
+            <a:schemeClr val="lt1"/>
+          </a:fontRef>
+        </p:style>
+        <p:txBody>
+          <a:bodyPr rtlCol="0" anchor="ctr" wrap="square"/>
+          <a:lstStyle/>
+          <a:p>
+            <a:pPr algn="ctr"/>
+            <a:r>
+              <a:rPr sz="1100" b="1" i="0">
+                <a:solidFill>
+                  <a:srgbClr val="FFFFFF"/>
+                </a:solidFill>
+                <a:latin typeface="Calibri"/>
+              </a:rPr>
+              <a:t>SO invitado B
+(completo)</a:t>
+            </a:r>
+          </a:p>
+        </p:txBody>
+      </p:sp>
+      <p:sp>
+        <p:nvSpPr>
+          <p:cNvPr id="11" name="Rounded Rectangle 10"/>
+          <p:cNvSpPr/>
+          <p:nvPr/>
+        </p:nvSpPr>
+        <p:spPr>
+          <a:xfrm>
+            <a:off x="822960" y="4023360"/>
+            <a:ext cx="1874519" cy="548640"/>
+          </a:xfrm>
+          <a:prstGeom prst="roundRect">
+            <a:avLst>
+              <a:gd name="adj" fmla="val 12000"/>
+            </a:avLst>
+          </a:prstGeom>
+          <a:solidFill>
+            <a:srgbClr val="FFD000"/>
+          </a:solidFill>
+          <a:ln>
+            <a:noFill/>
+          </a:ln>
+        </p:spPr>
+        <p:style>
+          <a:lnRef idx="1">
+            <a:schemeClr val="accent1"/>
+          </a:lnRef>
+          <a:fillRef idx="3">
+            <a:schemeClr val="accent1"/>
+          </a:fillRef>
+          <a:effectRef idx="2">
+            <a:schemeClr val="accent1"/>
+          </a:effectRef>
+          <a:fontRef idx="minor">
+            <a:schemeClr val="lt1"/>
+          </a:fontRef>
+        </p:style>
+        <p:txBody>
+          <a:bodyPr rtlCol="0" anchor="ctr" wrap="square"/>
+          <a:lstStyle/>
+          <a:p>
+            <a:pPr algn="ctr"/>
+            <a:r>
+              <a:rPr sz="1300" b="1" i="0">
+                <a:solidFill>
+                  <a:srgbClr val="095292"/>
+                </a:solidFill>
+                <a:latin typeface="Calibri"/>
+              </a:rPr>
+              <a:t>App A</a:t>
+            </a:r>
+          </a:p>
+        </p:txBody>
+      </p:sp>
+      <p:sp>
+        <p:nvSpPr>
+          <p:cNvPr id="12" name="Rounded Rectangle 11"/>
+          <p:cNvSpPr/>
+          <p:nvPr/>
+        </p:nvSpPr>
+        <p:spPr>
+          <a:xfrm>
+            <a:off x="2880360" y="4023360"/>
+            <a:ext cx="1874519" cy="548640"/>
+          </a:xfrm>
+          <a:prstGeom prst="roundRect">
+            <a:avLst>
+              <a:gd name="adj" fmla="val 12000"/>
+            </a:avLst>
+          </a:prstGeom>
+          <a:solidFill>
+            <a:srgbClr val="FFD000"/>
+          </a:solidFill>
+          <a:ln>
+            <a:noFill/>
+          </a:ln>
+        </p:spPr>
+        <p:style>
+          <a:lnRef idx="1">
+            <a:schemeClr val="accent1"/>
+          </a:lnRef>
+          <a:fillRef idx="3">
+            <a:schemeClr val="accent1"/>
+          </a:fillRef>
+          <a:effectRef idx="2">
+            <a:schemeClr val="accent1"/>
+          </a:effectRef>
+          <a:fontRef idx="minor">
+            <a:schemeClr val="lt1"/>
+          </a:fontRef>
+        </p:style>
+        <p:txBody>
+          <a:bodyPr rtlCol="0" anchor="ctr" wrap="square"/>
+          <a:lstStyle/>
+          <a:p>
+            <a:pPr algn="ctr"/>
+            <a:r>
+              <a:rPr sz="1300" b="1" i="0">
+                <a:solidFill>
+                  <a:srgbClr val="095292"/>
+                </a:solidFill>
+                <a:latin typeface="Calibri"/>
+              </a:rPr>
+              <a:t>App B</a:t>
+            </a:r>
+          </a:p>
+        </p:txBody>
+      </p:sp>
+      <p:sp>
+        <p:nvSpPr>
+          <p:cNvPr id="13" name="Rounded Rectangle 12"/>
+          <p:cNvSpPr/>
+          <p:nvPr/>
+        </p:nvSpPr>
+        <p:spPr>
+          <a:xfrm>
+            <a:off x="7315200" y="1417320"/>
+            <a:ext cx="3931920" cy="457200"/>
+          </a:xfrm>
+          <a:prstGeom prst="roundRect">
+            <a:avLst>
+              <a:gd name="adj" fmla="val 12000"/>
+            </a:avLst>
+          </a:prstGeom>
+          <a:solidFill>
+            <a:srgbClr val="095292"/>
+          </a:solidFill>
+          <a:ln>
+            <a:noFill/>
+          </a:ln>
+        </p:spPr>
+        <p:style>
+          <a:lnRef idx="1">
+            <a:schemeClr val="accent1"/>
+          </a:lnRef>
+          <a:fillRef idx="3">
+            <a:schemeClr val="accent1"/>
+          </a:fillRef>
+          <a:effectRef idx="2">
+            <a:schemeClr val="accent1"/>
+          </a:effectRef>
+          <a:fontRef idx="minor">
+            <a:schemeClr val="lt1"/>
+          </a:fontRef>
+        </p:style>
+        <p:txBody>
+          <a:bodyPr rtlCol="0" anchor="ctr" wrap="square"/>
+          <a:lstStyle/>
+          <a:p>
+            <a:pPr algn="ctr"/>
+            <a:r>
+              <a:rPr sz="1200" b="1" i="0">
+                <a:solidFill>
+                  <a:srgbClr val="FFFFFF"/>
+                </a:solidFill>
+                <a:latin typeface="Calibri"/>
+              </a:rPr>
+              <a:t>Contenedores</a:t>
+            </a:r>
+          </a:p>
+        </p:txBody>
+      </p:sp>
+      <p:sp>
+        <p:nvSpPr>
+          <p:cNvPr id="14" name="Rounded Rectangle 13"/>
+          <p:cNvSpPr/>
+          <p:nvPr/>
+        </p:nvSpPr>
+        <p:spPr>
+          <a:xfrm>
+            <a:off x="7315200" y="2057400"/>
+            <a:ext cx="3931920" cy="594360"/>
+          </a:xfrm>
+          <a:prstGeom prst="roundRect">
+            <a:avLst>
+              <a:gd name="adj" fmla="val 12000"/>
+            </a:avLst>
+          </a:prstGeom>
+          <a:solidFill>
+            <a:srgbClr val="333333"/>
+          </a:solidFill>
+          <a:ln>
+            <a:noFill/>
+          </a:ln>
+        </p:spPr>
+        <p:style>
+          <a:lnRef idx="1">
+            <a:schemeClr val="accent1"/>
+          </a:lnRef>
+          <a:fillRef idx="3">
+            <a:schemeClr val="accent1"/>
+          </a:fillRef>
+          <a:effectRef idx="2">
+            <a:schemeClr val="accent1"/>
+          </a:effectRef>
+          <a:fontRef idx="minor">
+            <a:schemeClr val="lt1"/>
+          </a:fontRef>
+        </p:style>
+        <p:txBody>
+          <a:bodyPr rtlCol="0" anchor="ctr" wrap="square"/>
+          <a:lstStyle/>
+          <a:p>
+            <a:pPr algn="ctr"/>
+            <a:r>
+              <a:rPr sz="1300" b="1" i="0">
+                <a:solidFill>
+                  <a:srgbClr val="FFFFFF"/>
+                </a:solidFill>
+                <a:latin typeface="Calibri"/>
+              </a:rPr>
+              <a:t>Hardware físico</a:t>
+            </a:r>
+          </a:p>
+        </p:txBody>
+      </p:sp>
+      <p:sp>
+        <p:nvSpPr>
+          <p:cNvPr id="15" name="Rounded Rectangle 14"/>
+          <p:cNvSpPr/>
+          <p:nvPr/>
+        </p:nvSpPr>
+        <p:spPr>
+          <a:xfrm>
+            <a:off x="7315200" y="2697480"/>
+            <a:ext cx="3931920" cy="594360"/>
+          </a:xfrm>
+          <a:prstGeom prst="roundRect">
+            <a:avLst>
+              <a:gd name="adj" fmla="val 12000"/>
+            </a:avLst>
+          </a:prstGeom>
+          <a:solidFill>
+            <a:srgbClr val="269CCB"/>
+          </a:solidFill>
+          <a:ln>
+            <a:noFill/>
+          </a:ln>
+        </p:spPr>
+        <p:style>
+          <a:lnRef idx="1">
+            <a:schemeClr val="accent1"/>
+          </a:lnRef>
+          <a:fillRef idx="3">
+            <a:schemeClr val="accent1"/>
+          </a:fillRef>
+          <a:effectRef idx="2">
+            <a:schemeClr val="accent1"/>
+          </a:effectRef>
+          <a:fontRef idx="minor">
+            <a:schemeClr val="lt1"/>
+          </a:fontRef>
+        </p:style>
+        <p:txBody>
+          <a:bodyPr rtlCol="0" anchor="ctr" wrap="square"/>
+          <a:lstStyle/>
+          <a:p>
+            <a:pPr algn="ctr"/>
+            <a:r>
+              <a:rPr sz="1050" b="1" i="0">
+                <a:solidFill>
+                  <a:srgbClr val="FFFFFF"/>
+                </a:solidFill>
+                <a:latin typeface="Calibri"/>
+              </a:rPr>
+              <a:t>SO anfitrión + motor de contenedores (kernel compartido)</a:t>
+            </a:r>
+          </a:p>
+        </p:txBody>
+      </p:sp>
+      <p:sp>
+        <p:nvSpPr>
+          <p:cNvPr id="16" name="Rounded Rectangle 15"/>
+          <p:cNvSpPr/>
+          <p:nvPr/>
+        </p:nvSpPr>
+        <p:spPr>
+          <a:xfrm>
+            <a:off x="7315200" y="3337560"/>
+            <a:ext cx="1874519" cy="640080"/>
+          </a:xfrm>
+          <a:prstGeom prst="roundRect">
+            <a:avLst>
+              <a:gd name="adj" fmla="val 12000"/>
+            </a:avLst>
+          </a:prstGeom>
+          <a:solidFill>
+            <a:srgbClr val="FFD000"/>
+          </a:solidFill>
+          <a:ln>
+            <a:noFill/>
+          </a:ln>
+        </p:spPr>
+        <p:style>
+          <a:lnRef idx="1">
+            <a:schemeClr val="accent1"/>
+          </a:lnRef>
+          <a:fillRef idx="3">
+            <a:schemeClr val="accent1"/>
+          </a:fillRef>
+          <a:effectRef idx="2">
+            <a:schemeClr val="accent1"/>
+          </a:effectRef>
+          <a:fontRef idx="minor">
+            <a:schemeClr val="lt1"/>
+          </a:fontRef>
+        </p:style>
+        <p:txBody>
+          <a:bodyPr rtlCol="0" anchor="ctr" wrap="square"/>
+          <a:lstStyle/>
+          <a:p>
+            <a:pPr algn="ctr"/>
+            <a:r>
+              <a:rPr sz="1100" b="1" i="0">
+                <a:solidFill>
+                  <a:srgbClr val="095292"/>
+                </a:solidFill>
+                <a:latin typeface="Calibri"/>
+              </a:rPr>
+              <a:t>Contenedor A
+(App A)</a:t>
+            </a:r>
+          </a:p>
+        </p:txBody>
+      </p:sp>
+      <p:sp>
+        <p:nvSpPr>
+          <p:cNvPr id="17" name="Rounded Rectangle 16"/>
+          <p:cNvSpPr/>
+          <p:nvPr/>
+        </p:nvSpPr>
+        <p:spPr>
+          <a:xfrm>
+            <a:off x="9372600" y="3337560"/>
+            <a:ext cx="1874519" cy="640080"/>
+          </a:xfrm>
+          <a:prstGeom prst="roundRect">
+            <a:avLst>
+              <a:gd name="adj" fmla="val 12000"/>
+            </a:avLst>
+          </a:prstGeom>
+          <a:solidFill>
+            <a:srgbClr val="FFD000"/>
+          </a:solidFill>
+          <a:ln>
+            <a:noFill/>
+          </a:ln>
+        </p:spPr>
+        <p:style>
+          <a:lnRef idx="1">
+            <a:schemeClr val="accent1"/>
+          </a:lnRef>
+          <a:fillRef idx="3">
+            <a:schemeClr val="accent1"/>
+          </a:fillRef>
+          <a:effectRef idx="2">
+            <a:schemeClr val="accent1"/>
+          </a:effectRef>
+          <a:fontRef idx="minor">
+            <a:schemeClr val="lt1"/>
+          </a:fontRef>
+        </p:style>
+        <p:txBody>
+          <a:bodyPr rtlCol="0" anchor="ctr" wrap="square"/>
+          <a:lstStyle/>
+          <a:p>
+            <a:pPr algn="ctr"/>
+            <a:r>
+              <a:rPr sz="1100" b="1" i="0">
+                <a:solidFill>
+                  <a:srgbClr val="095292"/>
+                </a:solidFill>
+                <a:latin typeface="Calibri"/>
+              </a:rPr>
+              <a:t>Contenedor B
+(App B)</a:t>
+            </a:r>
+          </a:p>
+        </p:txBody>
+      </p:sp>
+      <p:sp>
+        <p:nvSpPr>
+          <p:cNvPr id="18" name="TextBox 17"/>
+          <p:cNvSpPr txBox="1"/>
+          <p:nvPr/>
+        </p:nvSpPr>
+        <p:spPr>
+          <a:xfrm>
+            <a:off x="457200" y="6263640"/>
+            <a:ext cx="11277295" cy="411480"/>
+          </a:xfrm>
+          <a:prstGeom prst="rect">
+            <a:avLst/>
+          </a:prstGeom>
+          <a:noFill/>
+        </p:spPr>
+        <p:txBody>
+          <a:bodyPr wrap="square">
+            <a:spAutoFit/>
+          </a:bodyPr>
+          <a:lstStyle/>
+          <a:p>
+            <a:r>
+              <a:rPr sz="1100" b="0" i="1">
+                <a:solidFill>
+                  <a:srgbClr val="666666"/>
+                </a:solidFill>
+                <a:latin typeface="Calibri"/>
+              </a:rPr>
+              <a:t>VM: cada instancia carga un SO completo (aislamiento fuerte, más pesado). Contenedor: comparte el kernel del anfitrión y solo empaqueta app + dependencias (arranca en segundos, pesa MB no GB).</a:t>
+            </a:r>
+          </a:p>
+        </p:txBody>
+      </p:sp>
+      <p:sp>
+        <p:nvSpPr>
+          <p:cNvPr id="19" name="TextBox 18"/>
           <p:cNvSpPr txBox="1"/>
           <p:nvPr/>
         </p:nvSpPr>
@@ -9557,7 +9771,7 @@
         <p:spPr>
           <a:xfrm>
             <a:off x="0" y="0"/>
-            <a:ext cx="12191695" cy="1170432"/>
+            <a:ext cx="12191695" cy="960120"/>
           </a:xfrm>
           <a:prstGeom prst="rect">
             <a:avLst/>
@@ -9599,7 +9813,7 @@
         </p:nvSpPr>
         <p:spPr>
           <a:xfrm>
-            <a:off x="0" y="1170432"/>
+            <a:off x="0" y="960120"/>
             <a:ext cx="12191695" cy="41148"/>
           </a:xfrm>
           <a:prstGeom prst="rect">
@@ -9643,7 +9857,7 @@
         <p:spPr>
           <a:xfrm>
             <a:off x="457200" y="164592"/>
-            <a:ext cx="11277295" cy="384048"/>
+            <a:ext cx="11277295" cy="502920"/>
           </a:xfrm>
           <a:prstGeom prst="rect">
             <a:avLst/>
@@ -9663,60 +9877,322 @@
                 </a:solidFill>
                 <a:latin typeface="Calibri"/>
               </a:rPr>
-              <a:t>Máquinas virtuales vs. contenedores</a:t>
-            </a:r>
-          </a:p>
-        </p:txBody>
-      </p:sp>
-      <p:sp>
-        <p:nvSpPr>
-          <p:cNvPr id="5" name="TextBox 4"/>
-          <p:cNvSpPr txBox="1"/>
-          <p:nvPr/>
-        </p:nvSpPr>
-        <p:spPr>
-          <a:xfrm>
-            <a:off x="457200" y="566928"/>
-            <a:ext cx="11277295" cy="411480"/>
-          </a:xfrm>
-          <a:prstGeom prst="rect">
-            <a:avLst/>
-          </a:prstGeom>
-          <a:noFill/>
-        </p:spPr>
-        <p:txBody>
-          <a:bodyPr wrap="square">
-            <a:spAutoFit/>
-          </a:bodyPr>
-          <a:lstStyle/>
-          <a:p>
-            <a:r>
-              <a:rPr sz="1400" b="0" i="0">
-                <a:solidFill>
-                  <a:srgbClr val="B8D8EE"/>
-                </a:solidFill>
-                <a:latin typeface="Calibri"/>
-              </a:rPr>
-              <a:t>Misma capacidad de cómputo, distinto nivel de aislamiento</a:t>
-            </a:r>
-          </a:p>
-        </p:txBody>
-      </p:sp>
-      <p:sp>
-        <p:nvSpPr>
-          <p:cNvPr id="6" name="Rounded Rectangle 5"/>
+              <a:t>Maquina virtual vs contenedor — que cambia de verdad</a:t>
+            </a:r>
+          </a:p>
+        </p:txBody>
+      </p:sp>
+      <p:sp>
+        <p:nvSpPr>
+          <p:cNvPr id="5" name="Rounded Rectangle 4"/>
           <p:cNvSpPr/>
           <p:nvPr/>
         </p:nvSpPr>
         <p:spPr>
           <a:xfrm>
-            <a:off x="822960" y="1417320"/>
-            <a:ext cx="3931920" cy="457200"/>
+            <a:off x="457200" y="1261872"/>
+            <a:ext cx="5478627" cy="5093208"/>
           </a:xfrm>
           <a:prstGeom prst="roundRect">
             <a:avLst>
               <a:gd name="adj" fmla="val 12000"/>
             </a:avLst>
+          </a:prstGeom>
+          <a:solidFill>
+            <a:srgbClr val="FBE4E4"/>
+          </a:solidFill>
+          <a:ln>
+            <a:noFill/>
+          </a:ln>
+        </p:spPr>
+        <p:style>
+          <a:lnRef idx="1">
+            <a:schemeClr val="accent1"/>
+          </a:lnRef>
+          <a:fillRef idx="3">
+            <a:schemeClr val="accent1"/>
+          </a:fillRef>
+          <a:effectRef idx="2">
+            <a:schemeClr val="accent1"/>
+          </a:effectRef>
+          <a:fontRef idx="minor">
+            <a:schemeClr val="lt1"/>
+          </a:fontRef>
+        </p:style>
+        <p:txBody>
+          <a:bodyPr rtlCol="0" anchor="ctr"/>
+          <a:lstStyle/>
+          <a:p>
+            <a:pPr algn="ctr"/>
+          </a:p>
+        </p:txBody>
+      </p:sp>
+      <p:sp>
+        <p:nvSpPr>
+          <p:cNvPr id="6" name="Rectangle 5"/>
+          <p:cNvSpPr/>
+          <p:nvPr/>
+        </p:nvSpPr>
+        <p:spPr>
+          <a:xfrm>
+            <a:off x="457200" y="1261872"/>
+            <a:ext cx="5478627" cy="502920"/>
+          </a:xfrm>
+          <a:prstGeom prst="rect">
+            <a:avLst/>
+          </a:prstGeom>
+          <a:solidFill>
+            <a:srgbClr val="A02030"/>
+          </a:solidFill>
+          <a:ln>
+            <a:noFill/>
+          </a:ln>
+        </p:spPr>
+        <p:style>
+          <a:lnRef idx="1">
+            <a:schemeClr val="accent1"/>
+          </a:lnRef>
+          <a:fillRef idx="3">
+            <a:schemeClr val="accent1"/>
+          </a:fillRef>
+          <a:effectRef idx="2">
+            <a:schemeClr val="accent1"/>
+          </a:effectRef>
+          <a:fontRef idx="minor">
+            <a:schemeClr val="lt1"/>
+          </a:fontRef>
+        </p:style>
+        <p:txBody>
+          <a:bodyPr rtlCol="0" anchor="ctr"/>
+          <a:lstStyle/>
+          <a:p>
+            <a:pPr algn="ctr"/>
+          </a:p>
+        </p:txBody>
+      </p:sp>
+      <p:sp>
+        <p:nvSpPr>
+          <p:cNvPr id="7" name="TextBox 6"/>
+          <p:cNvSpPr txBox="1"/>
+          <p:nvPr/>
+        </p:nvSpPr>
+        <p:spPr>
+          <a:xfrm>
+            <a:off x="594360" y="1353312"/>
+            <a:ext cx="5204307" cy="365760"/>
+          </a:xfrm>
+          <a:prstGeom prst="rect">
+            <a:avLst/>
+          </a:prstGeom>
+          <a:noFill/>
+        </p:spPr>
+        <p:txBody>
+          <a:bodyPr wrap="square" anchor="ctr"/>
+          <a:lstStyle/>
+          <a:p>
+            <a:pPr algn="ctr"/>
+            <a:r>
+              <a:rPr sz="1600" b="1" i="0">
+                <a:solidFill>
+                  <a:srgbClr val="FFFFFF"/>
+                </a:solidFill>
+                <a:latin typeface="Calibri"/>
+              </a:rPr>
+              <a:t>Maquina virtual</a:t>
+            </a:r>
+          </a:p>
+        </p:txBody>
+      </p:sp>
+      <p:sp>
+        <p:nvSpPr>
+          <p:cNvPr id="8" name="TextBox 7"/>
+          <p:cNvSpPr txBox="1"/>
+          <p:nvPr/>
+        </p:nvSpPr>
+        <p:spPr>
+          <a:xfrm>
+            <a:off x="621792" y="1901952"/>
+            <a:ext cx="5158587" cy="4498848"/>
+          </a:xfrm>
+          <a:prstGeom prst="rect">
+            <a:avLst/>
+          </a:prstGeom>
+          <a:noFill/>
+        </p:spPr>
+        <p:txBody>
+          <a:bodyPr wrap="square">
+            <a:spAutoFit/>
+          </a:bodyPr>
+          <a:lstStyle/>
+          <a:p>
+            <a:pPr>
+              <a:spcAft>
+                <a:spcPts val="800"/>
+              </a:spcAft>
+            </a:pPr>
+            <a:r>
+              <a:rPr sz="1500" b="0" i="0">
+                <a:solidFill>
+                  <a:srgbClr val="333333"/>
+                </a:solidFill>
+                <a:latin typeface="Calibri"/>
+              </a:rPr>
+              <a:t>–   Cada instancia trae un </a:t>
+            </a:r>
+            <a:r>
+              <a:rPr sz="1500" b="1" i="0">
+                <a:solidFill>
+                  <a:srgbClr val="333333"/>
+                </a:solidFill>
+                <a:latin typeface="Calibri"/>
+              </a:rPr>
+              <a:t>SO completo</a:t>
+            </a:r>
+            <a:r>
+              <a:rPr sz="1500" b="0" i="0">
+                <a:solidFill>
+                  <a:srgbClr val="333333"/>
+                </a:solidFill>
+                <a:latin typeface="Calibri"/>
+              </a:rPr>
+              <a:t> (kernel propio)</a:t>
+            </a:r>
+          </a:p>
+          <a:p>
+            <a:pPr>
+              <a:spcAft>
+                <a:spcPts val="800"/>
+              </a:spcAft>
+            </a:pPr>
+            <a:r>
+              <a:rPr sz="1500" b="0" i="0">
+                <a:solidFill>
+                  <a:srgbClr val="333333"/>
+                </a:solidFill>
+                <a:latin typeface="Calibri"/>
+              </a:rPr>
+              <a:t>–   Aislamiento fuerte a nivel de hardware virtual</a:t>
+            </a:r>
+          </a:p>
+          <a:p>
+            <a:pPr>
+              <a:spcAft>
+                <a:spcPts val="800"/>
+              </a:spcAft>
+            </a:pPr>
+            <a:r>
+              <a:rPr sz="1500" b="0" i="0">
+                <a:solidFill>
+                  <a:srgbClr val="333333"/>
+                </a:solidFill>
+                <a:latin typeface="Calibri"/>
+              </a:rPr>
+              <a:t>–   Arranque en </a:t>
+            </a:r>
+            <a:r>
+              <a:rPr sz="1500" b="1" i="0">
+                <a:solidFill>
+                  <a:srgbClr val="333333"/>
+                </a:solidFill>
+                <a:latin typeface="Calibri"/>
+              </a:rPr>
+              <a:t>minutos</a:t>
+            </a:r>
+            <a:r>
+              <a:rPr sz="1500" b="0" i="0">
+                <a:solidFill>
+                  <a:srgbClr val="333333"/>
+                </a:solidFill>
+                <a:latin typeface="Calibri"/>
+              </a:rPr>
+              <a:t>, tamaño en </a:t>
+            </a:r>
+            <a:r>
+              <a:rPr sz="1500" b="1" i="0">
+                <a:solidFill>
+                  <a:srgbClr val="333333"/>
+                </a:solidFill>
+                <a:latin typeface="Calibri"/>
+              </a:rPr>
+              <a:t>GB</a:t>
+            </a:r>
+          </a:p>
+          <a:p>
+            <a:pPr>
+              <a:spcAft>
+                <a:spcPts val="800"/>
+              </a:spcAft>
+            </a:pPr>
+            <a:r>
+              <a:rPr sz="1500" b="0" i="0">
+                <a:solidFill>
+                  <a:srgbClr val="333333"/>
+                </a:solidFill>
+                <a:latin typeface="Calibri"/>
+              </a:rPr>
+              <a:t>–   Util cuando se necesitan SO distintos</a:t>
+            </a:r>
+          </a:p>
+        </p:txBody>
+      </p:sp>
+      <p:sp>
+        <p:nvSpPr>
+          <p:cNvPr id="9" name="Rounded Rectangle 8"/>
+          <p:cNvSpPr/>
+          <p:nvPr/>
+        </p:nvSpPr>
+        <p:spPr>
+          <a:xfrm>
+            <a:off x="6255867" y="1261872"/>
+            <a:ext cx="5478627" cy="5093208"/>
+          </a:xfrm>
+          <a:prstGeom prst="roundRect">
+            <a:avLst>
+              <a:gd name="adj" fmla="val 12000"/>
+            </a:avLst>
+          </a:prstGeom>
+          <a:solidFill>
+            <a:srgbClr val="E8F4FA"/>
+          </a:solidFill>
+          <a:ln>
+            <a:noFill/>
+          </a:ln>
+        </p:spPr>
+        <p:style>
+          <a:lnRef idx="1">
+            <a:schemeClr val="accent1"/>
+          </a:lnRef>
+          <a:fillRef idx="3">
+            <a:schemeClr val="accent1"/>
+          </a:fillRef>
+          <a:effectRef idx="2">
+            <a:schemeClr val="accent1"/>
+          </a:effectRef>
+          <a:fontRef idx="minor">
+            <a:schemeClr val="lt1"/>
+          </a:fontRef>
+        </p:style>
+        <p:txBody>
+          <a:bodyPr rtlCol="0" anchor="ctr"/>
+          <a:lstStyle/>
+          <a:p>
+            <a:pPr algn="ctr"/>
+          </a:p>
+        </p:txBody>
+      </p:sp>
+      <p:sp>
+        <p:nvSpPr>
+          <p:cNvPr id="10" name="Rectangle 9"/>
+          <p:cNvSpPr/>
+          <p:nvPr/>
+        </p:nvSpPr>
+        <p:spPr>
+          <a:xfrm>
+            <a:off x="6255867" y="1261872"/>
+            <a:ext cx="5478627" cy="502920"/>
+          </a:xfrm>
+          <a:prstGeom prst="rect">
+            <a:avLst/>
           </a:prstGeom>
           <a:solidFill>
             <a:srgbClr val="095292"/>
@@ -9740,630 +10216,56 @@
           </a:fontRef>
         </p:style>
         <p:txBody>
-          <a:bodyPr rtlCol="0" anchor="ctr" wrap="square"/>
+          <a:bodyPr rtlCol="0" anchor="ctr"/>
           <a:lstStyle/>
           <a:p>
             <a:pPr algn="ctr"/>
-            <a:r>
-              <a:rPr sz="1200" b="1" i="0">
+          </a:p>
+        </p:txBody>
+      </p:sp>
+      <p:sp>
+        <p:nvSpPr>
+          <p:cNvPr id="11" name="TextBox 10"/>
+          <p:cNvSpPr txBox="1"/>
+          <p:nvPr/>
+        </p:nvSpPr>
+        <p:spPr>
+          <a:xfrm>
+            <a:off x="6393027" y="1353312"/>
+            <a:ext cx="5204307" cy="365760"/>
+          </a:xfrm>
+          <a:prstGeom prst="rect">
+            <a:avLst/>
+          </a:prstGeom>
+          <a:noFill/>
+        </p:spPr>
+        <p:txBody>
+          <a:bodyPr wrap="square" anchor="ctr"/>
+          <a:lstStyle/>
+          <a:p>
+            <a:pPr algn="ctr"/>
+            <a:r>
+              <a:rPr sz="1600" b="1" i="0">
                 <a:solidFill>
                   <a:srgbClr val="FFFFFF"/>
                 </a:solidFill>
                 <a:latin typeface="Calibri"/>
               </a:rPr>
-              <a:t>Máquinas virtuales</a:t>
-            </a:r>
-          </a:p>
-        </p:txBody>
-      </p:sp>
-      <p:sp>
-        <p:nvSpPr>
-          <p:cNvPr id="7" name="Rounded Rectangle 6"/>
-          <p:cNvSpPr/>
-          <p:nvPr/>
-        </p:nvSpPr>
-        <p:spPr>
-          <a:xfrm>
-            <a:off x="822960" y="2057400"/>
-            <a:ext cx="3931920" cy="594360"/>
-          </a:xfrm>
-          <a:prstGeom prst="roundRect">
-            <a:avLst>
-              <a:gd name="adj" fmla="val 12000"/>
-            </a:avLst>
-          </a:prstGeom>
-          <a:solidFill>
-            <a:srgbClr val="333333"/>
-          </a:solidFill>
-          <a:ln>
-            <a:noFill/>
-          </a:ln>
-        </p:spPr>
-        <p:style>
-          <a:lnRef idx="1">
-            <a:schemeClr val="accent1"/>
-          </a:lnRef>
-          <a:fillRef idx="3">
-            <a:schemeClr val="accent1"/>
-          </a:fillRef>
-          <a:effectRef idx="2">
-            <a:schemeClr val="accent1"/>
-          </a:effectRef>
-          <a:fontRef idx="minor">
-            <a:schemeClr val="lt1"/>
-          </a:fontRef>
-        </p:style>
-        <p:txBody>
-          <a:bodyPr rtlCol="0" anchor="ctr" wrap="square"/>
-          <a:lstStyle/>
-          <a:p>
-            <a:pPr algn="ctr"/>
-            <a:r>
-              <a:rPr sz="1300" b="1" i="0">
-                <a:solidFill>
-                  <a:srgbClr val="FFFFFF"/>
-                </a:solidFill>
-                <a:latin typeface="Calibri"/>
-              </a:rPr>
-              <a:t>Hardware físico</a:t>
-            </a:r>
-          </a:p>
-        </p:txBody>
-      </p:sp>
-      <p:sp>
-        <p:nvSpPr>
-          <p:cNvPr id="8" name="Rounded Rectangle 7"/>
-          <p:cNvSpPr/>
-          <p:nvPr/>
-        </p:nvSpPr>
-        <p:spPr>
-          <a:xfrm>
-            <a:off x="822960" y="2697480"/>
-            <a:ext cx="3931920" cy="594360"/>
-          </a:xfrm>
-          <a:prstGeom prst="roundRect">
-            <a:avLst>
-              <a:gd name="adj" fmla="val 12000"/>
-            </a:avLst>
-          </a:prstGeom>
-          <a:solidFill>
-            <a:srgbClr val="269CCB"/>
-          </a:solidFill>
-          <a:ln>
-            <a:noFill/>
-          </a:ln>
-        </p:spPr>
-        <p:style>
-          <a:lnRef idx="1">
-            <a:schemeClr val="accent1"/>
-          </a:lnRef>
-          <a:fillRef idx="3">
-            <a:schemeClr val="accent1"/>
-          </a:fillRef>
-          <a:effectRef idx="2">
-            <a:schemeClr val="accent1"/>
-          </a:effectRef>
-          <a:fontRef idx="minor">
-            <a:schemeClr val="lt1"/>
-          </a:fontRef>
-        </p:style>
-        <p:txBody>
-          <a:bodyPr rtlCol="0" anchor="ctr" wrap="square"/>
-          <a:lstStyle/>
-          <a:p>
-            <a:pPr algn="ctr"/>
-            <a:r>
-              <a:rPr sz="1300" b="1" i="0">
-                <a:solidFill>
-                  <a:srgbClr val="FFFFFF"/>
-                </a:solidFill>
-                <a:latin typeface="Calibri"/>
-              </a:rPr>
-              <a:t>Hipervisor</a:t>
-            </a:r>
-          </a:p>
-        </p:txBody>
-      </p:sp>
-      <p:sp>
-        <p:nvSpPr>
-          <p:cNvPr id="9" name="Rounded Rectangle 8"/>
-          <p:cNvSpPr/>
-          <p:nvPr/>
-        </p:nvSpPr>
-        <p:spPr>
-          <a:xfrm>
-            <a:off x="822960" y="3337560"/>
-            <a:ext cx="1874519" cy="640080"/>
-          </a:xfrm>
-          <a:prstGeom prst="roundRect">
-            <a:avLst>
-              <a:gd name="adj" fmla="val 12000"/>
-            </a:avLst>
-          </a:prstGeom>
-          <a:solidFill>
-            <a:srgbClr val="269CCB"/>
-          </a:solidFill>
-          <a:ln>
-            <a:noFill/>
-          </a:ln>
-        </p:spPr>
-        <p:style>
-          <a:lnRef idx="1">
-            <a:schemeClr val="accent1"/>
-          </a:lnRef>
-          <a:fillRef idx="3">
-            <a:schemeClr val="accent1"/>
-          </a:fillRef>
-          <a:effectRef idx="2">
-            <a:schemeClr val="accent1"/>
-          </a:effectRef>
-          <a:fontRef idx="minor">
-            <a:schemeClr val="lt1"/>
-          </a:fontRef>
-        </p:style>
-        <p:txBody>
-          <a:bodyPr rtlCol="0" anchor="ctr" wrap="square"/>
-          <a:lstStyle/>
-          <a:p>
-            <a:pPr algn="ctr"/>
-            <a:r>
-              <a:rPr sz="1100" b="1" i="0">
-                <a:solidFill>
-                  <a:srgbClr val="FFFFFF"/>
-                </a:solidFill>
-                <a:latin typeface="Calibri"/>
-              </a:rPr>
-              <a:t>SO invitado A
-(completo)</a:t>
-            </a:r>
-          </a:p>
-        </p:txBody>
-      </p:sp>
-      <p:sp>
-        <p:nvSpPr>
-          <p:cNvPr id="10" name="Rounded Rectangle 9"/>
-          <p:cNvSpPr/>
-          <p:nvPr/>
-        </p:nvSpPr>
-        <p:spPr>
-          <a:xfrm>
-            <a:off x="2880360" y="3337560"/>
-            <a:ext cx="1874519" cy="640080"/>
-          </a:xfrm>
-          <a:prstGeom prst="roundRect">
-            <a:avLst>
-              <a:gd name="adj" fmla="val 12000"/>
-            </a:avLst>
-          </a:prstGeom>
-          <a:solidFill>
-            <a:srgbClr val="269CCB"/>
-          </a:solidFill>
-          <a:ln>
-            <a:noFill/>
-          </a:ln>
-        </p:spPr>
-        <p:style>
-          <a:lnRef idx="1">
-            <a:schemeClr val="accent1"/>
-          </a:lnRef>
-          <a:fillRef idx="3">
-            <a:schemeClr val="accent1"/>
-          </a:fillRef>
-          <a:effectRef idx="2">
-            <a:schemeClr val="accent1"/>
-          </a:effectRef>
-          <a:fontRef idx="minor">
-            <a:schemeClr val="lt1"/>
-          </a:fontRef>
-        </p:style>
-        <p:txBody>
-          <a:bodyPr rtlCol="0" anchor="ctr" wrap="square"/>
-          <a:lstStyle/>
-          <a:p>
-            <a:pPr algn="ctr"/>
-            <a:r>
-              <a:rPr sz="1100" b="1" i="0">
-                <a:solidFill>
-                  <a:srgbClr val="FFFFFF"/>
-                </a:solidFill>
-                <a:latin typeface="Calibri"/>
-              </a:rPr>
-              <a:t>SO invitado B
-(completo)</a:t>
-            </a:r>
-          </a:p>
-        </p:txBody>
-      </p:sp>
-      <p:sp>
-        <p:nvSpPr>
-          <p:cNvPr id="11" name="Rounded Rectangle 10"/>
-          <p:cNvSpPr/>
-          <p:nvPr/>
-        </p:nvSpPr>
-        <p:spPr>
-          <a:xfrm>
-            <a:off x="822960" y="4023360"/>
-            <a:ext cx="1874519" cy="548640"/>
-          </a:xfrm>
-          <a:prstGeom prst="roundRect">
-            <a:avLst>
-              <a:gd name="adj" fmla="val 12000"/>
-            </a:avLst>
-          </a:prstGeom>
-          <a:solidFill>
-            <a:srgbClr val="FFD000"/>
-          </a:solidFill>
-          <a:ln>
-            <a:noFill/>
-          </a:ln>
-        </p:spPr>
-        <p:style>
-          <a:lnRef idx="1">
-            <a:schemeClr val="accent1"/>
-          </a:lnRef>
-          <a:fillRef idx="3">
-            <a:schemeClr val="accent1"/>
-          </a:fillRef>
-          <a:effectRef idx="2">
-            <a:schemeClr val="accent1"/>
-          </a:effectRef>
-          <a:fontRef idx="minor">
-            <a:schemeClr val="lt1"/>
-          </a:fontRef>
-        </p:style>
-        <p:txBody>
-          <a:bodyPr rtlCol="0" anchor="ctr" wrap="square"/>
-          <a:lstStyle/>
-          <a:p>
-            <a:pPr algn="ctr"/>
-            <a:r>
-              <a:rPr sz="1300" b="1" i="0">
-                <a:solidFill>
-                  <a:srgbClr val="095292"/>
-                </a:solidFill>
-                <a:latin typeface="Calibri"/>
-              </a:rPr>
-              <a:t>App A</a:t>
-            </a:r>
-          </a:p>
-        </p:txBody>
-      </p:sp>
-      <p:sp>
-        <p:nvSpPr>
-          <p:cNvPr id="12" name="Rounded Rectangle 11"/>
-          <p:cNvSpPr/>
-          <p:nvPr/>
-        </p:nvSpPr>
-        <p:spPr>
-          <a:xfrm>
-            <a:off x="2880360" y="4023360"/>
-            <a:ext cx="1874519" cy="548640"/>
-          </a:xfrm>
-          <a:prstGeom prst="roundRect">
-            <a:avLst>
-              <a:gd name="adj" fmla="val 12000"/>
-            </a:avLst>
-          </a:prstGeom>
-          <a:solidFill>
-            <a:srgbClr val="FFD000"/>
-          </a:solidFill>
-          <a:ln>
-            <a:noFill/>
-          </a:ln>
-        </p:spPr>
-        <p:style>
-          <a:lnRef idx="1">
-            <a:schemeClr val="accent1"/>
-          </a:lnRef>
-          <a:fillRef idx="3">
-            <a:schemeClr val="accent1"/>
-          </a:fillRef>
-          <a:effectRef idx="2">
-            <a:schemeClr val="accent1"/>
-          </a:effectRef>
-          <a:fontRef idx="minor">
-            <a:schemeClr val="lt1"/>
-          </a:fontRef>
-        </p:style>
-        <p:txBody>
-          <a:bodyPr rtlCol="0" anchor="ctr" wrap="square"/>
-          <a:lstStyle/>
-          <a:p>
-            <a:pPr algn="ctr"/>
-            <a:r>
-              <a:rPr sz="1300" b="1" i="0">
-                <a:solidFill>
-                  <a:srgbClr val="095292"/>
-                </a:solidFill>
-                <a:latin typeface="Calibri"/>
-              </a:rPr>
-              <a:t>App B</a:t>
-            </a:r>
-          </a:p>
-        </p:txBody>
-      </p:sp>
-      <p:sp>
-        <p:nvSpPr>
-          <p:cNvPr id="13" name="Rounded Rectangle 12"/>
-          <p:cNvSpPr/>
-          <p:nvPr/>
-        </p:nvSpPr>
-        <p:spPr>
-          <a:xfrm>
-            <a:off x="7315200" y="1417320"/>
-            <a:ext cx="3931920" cy="457200"/>
-          </a:xfrm>
-          <a:prstGeom prst="roundRect">
-            <a:avLst>
-              <a:gd name="adj" fmla="val 12000"/>
-            </a:avLst>
-          </a:prstGeom>
-          <a:solidFill>
-            <a:srgbClr val="095292"/>
-          </a:solidFill>
-          <a:ln>
-            <a:noFill/>
-          </a:ln>
-        </p:spPr>
-        <p:style>
-          <a:lnRef idx="1">
-            <a:schemeClr val="accent1"/>
-          </a:lnRef>
-          <a:fillRef idx="3">
-            <a:schemeClr val="accent1"/>
-          </a:fillRef>
-          <a:effectRef idx="2">
-            <a:schemeClr val="accent1"/>
-          </a:effectRef>
-          <a:fontRef idx="minor">
-            <a:schemeClr val="lt1"/>
-          </a:fontRef>
-        </p:style>
-        <p:txBody>
-          <a:bodyPr rtlCol="0" anchor="ctr" wrap="square"/>
-          <a:lstStyle/>
-          <a:p>
-            <a:pPr algn="ctr"/>
-            <a:r>
-              <a:rPr sz="1200" b="1" i="0">
-                <a:solidFill>
-                  <a:srgbClr val="FFFFFF"/>
-                </a:solidFill>
-                <a:latin typeface="Calibri"/>
-              </a:rPr>
-              <a:t>Contenedores</a:t>
-            </a:r>
-          </a:p>
-        </p:txBody>
-      </p:sp>
-      <p:sp>
-        <p:nvSpPr>
-          <p:cNvPr id="14" name="Rounded Rectangle 13"/>
-          <p:cNvSpPr/>
-          <p:nvPr/>
-        </p:nvSpPr>
-        <p:spPr>
-          <a:xfrm>
-            <a:off x="7315200" y="2057400"/>
-            <a:ext cx="3931920" cy="594360"/>
-          </a:xfrm>
-          <a:prstGeom prst="roundRect">
-            <a:avLst>
-              <a:gd name="adj" fmla="val 12000"/>
-            </a:avLst>
-          </a:prstGeom>
-          <a:solidFill>
-            <a:srgbClr val="333333"/>
-          </a:solidFill>
-          <a:ln>
-            <a:noFill/>
-          </a:ln>
-        </p:spPr>
-        <p:style>
-          <a:lnRef idx="1">
-            <a:schemeClr val="accent1"/>
-          </a:lnRef>
-          <a:fillRef idx="3">
-            <a:schemeClr val="accent1"/>
-          </a:fillRef>
-          <a:effectRef idx="2">
-            <a:schemeClr val="accent1"/>
-          </a:effectRef>
-          <a:fontRef idx="minor">
-            <a:schemeClr val="lt1"/>
-          </a:fontRef>
-        </p:style>
-        <p:txBody>
-          <a:bodyPr rtlCol="0" anchor="ctr" wrap="square"/>
-          <a:lstStyle/>
-          <a:p>
-            <a:pPr algn="ctr"/>
-            <a:r>
-              <a:rPr sz="1300" b="1" i="0">
-                <a:solidFill>
-                  <a:srgbClr val="FFFFFF"/>
-                </a:solidFill>
-                <a:latin typeface="Calibri"/>
-              </a:rPr>
-              <a:t>Hardware físico</a:t>
-            </a:r>
-          </a:p>
-        </p:txBody>
-      </p:sp>
-      <p:sp>
-        <p:nvSpPr>
-          <p:cNvPr id="15" name="Rounded Rectangle 14"/>
-          <p:cNvSpPr/>
-          <p:nvPr/>
-        </p:nvSpPr>
-        <p:spPr>
-          <a:xfrm>
-            <a:off x="7315200" y="2697480"/>
-            <a:ext cx="3931920" cy="594360"/>
-          </a:xfrm>
-          <a:prstGeom prst="roundRect">
-            <a:avLst>
-              <a:gd name="adj" fmla="val 12000"/>
-            </a:avLst>
-          </a:prstGeom>
-          <a:solidFill>
-            <a:srgbClr val="269CCB"/>
-          </a:solidFill>
-          <a:ln>
-            <a:noFill/>
-          </a:ln>
-        </p:spPr>
-        <p:style>
-          <a:lnRef idx="1">
-            <a:schemeClr val="accent1"/>
-          </a:lnRef>
-          <a:fillRef idx="3">
-            <a:schemeClr val="accent1"/>
-          </a:fillRef>
-          <a:effectRef idx="2">
-            <a:schemeClr val="accent1"/>
-          </a:effectRef>
-          <a:fontRef idx="minor">
-            <a:schemeClr val="lt1"/>
-          </a:fontRef>
-        </p:style>
-        <p:txBody>
-          <a:bodyPr rtlCol="0" anchor="ctr" wrap="square"/>
-          <a:lstStyle/>
-          <a:p>
-            <a:pPr algn="ctr"/>
-            <a:r>
-              <a:rPr sz="1050" b="1" i="0">
-                <a:solidFill>
-                  <a:srgbClr val="FFFFFF"/>
-                </a:solidFill>
-                <a:latin typeface="Calibri"/>
-              </a:rPr>
-              <a:t>SO anfitrión + motor de contenedores (kernel compartido)</a:t>
-            </a:r>
-          </a:p>
-        </p:txBody>
-      </p:sp>
-      <p:sp>
-        <p:nvSpPr>
-          <p:cNvPr id="16" name="Rounded Rectangle 15"/>
-          <p:cNvSpPr/>
-          <p:nvPr/>
-        </p:nvSpPr>
-        <p:spPr>
-          <a:xfrm>
-            <a:off x="7315200" y="3337560"/>
-            <a:ext cx="1874519" cy="640080"/>
-          </a:xfrm>
-          <a:prstGeom prst="roundRect">
-            <a:avLst>
-              <a:gd name="adj" fmla="val 12000"/>
-            </a:avLst>
-          </a:prstGeom>
-          <a:solidFill>
-            <a:srgbClr val="FFD000"/>
-          </a:solidFill>
-          <a:ln>
-            <a:noFill/>
-          </a:ln>
-        </p:spPr>
-        <p:style>
-          <a:lnRef idx="1">
-            <a:schemeClr val="accent1"/>
-          </a:lnRef>
-          <a:fillRef idx="3">
-            <a:schemeClr val="accent1"/>
-          </a:fillRef>
-          <a:effectRef idx="2">
-            <a:schemeClr val="accent1"/>
-          </a:effectRef>
-          <a:fontRef idx="minor">
-            <a:schemeClr val="lt1"/>
-          </a:fontRef>
-        </p:style>
-        <p:txBody>
-          <a:bodyPr rtlCol="0" anchor="ctr" wrap="square"/>
-          <a:lstStyle/>
-          <a:p>
-            <a:pPr algn="ctr"/>
-            <a:r>
-              <a:rPr sz="1100" b="1" i="0">
-                <a:solidFill>
-                  <a:srgbClr val="095292"/>
-                </a:solidFill>
-                <a:latin typeface="Calibri"/>
-              </a:rPr>
-              <a:t>Contenedor A
-(App A)</a:t>
-            </a:r>
-          </a:p>
-        </p:txBody>
-      </p:sp>
-      <p:sp>
-        <p:nvSpPr>
-          <p:cNvPr id="17" name="Rounded Rectangle 16"/>
-          <p:cNvSpPr/>
-          <p:nvPr/>
-        </p:nvSpPr>
-        <p:spPr>
-          <a:xfrm>
-            <a:off x="9372600" y="3337560"/>
-            <a:ext cx="1874519" cy="640080"/>
-          </a:xfrm>
-          <a:prstGeom prst="roundRect">
-            <a:avLst>
-              <a:gd name="adj" fmla="val 12000"/>
-            </a:avLst>
-          </a:prstGeom>
-          <a:solidFill>
-            <a:srgbClr val="FFD000"/>
-          </a:solidFill>
-          <a:ln>
-            <a:noFill/>
-          </a:ln>
-        </p:spPr>
-        <p:style>
-          <a:lnRef idx="1">
-            <a:schemeClr val="accent1"/>
-          </a:lnRef>
-          <a:fillRef idx="3">
-            <a:schemeClr val="accent1"/>
-          </a:fillRef>
-          <a:effectRef idx="2">
-            <a:schemeClr val="accent1"/>
-          </a:effectRef>
-          <a:fontRef idx="minor">
-            <a:schemeClr val="lt1"/>
-          </a:fontRef>
-        </p:style>
-        <p:txBody>
-          <a:bodyPr rtlCol="0" anchor="ctr" wrap="square"/>
-          <a:lstStyle/>
-          <a:p>
-            <a:pPr algn="ctr"/>
-            <a:r>
-              <a:rPr sz="1100" b="1" i="0">
-                <a:solidFill>
-                  <a:srgbClr val="095292"/>
-                </a:solidFill>
-                <a:latin typeface="Calibri"/>
-              </a:rPr>
-              <a:t>Contenedor B
-(App B)</a:t>
-            </a:r>
-          </a:p>
-        </p:txBody>
-      </p:sp>
-      <p:sp>
-        <p:nvSpPr>
-          <p:cNvPr id="18" name="TextBox 17"/>
+              <a:t>Contenedor</a:t>
+            </a:r>
+          </a:p>
+        </p:txBody>
+      </p:sp>
+      <p:sp>
+        <p:nvSpPr>
+          <p:cNvPr id="12" name="TextBox 11"/>
           <p:cNvSpPr txBox="1"/>
           <p:nvPr/>
         </p:nvSpPr>
         <p:spPr>
           <a:xfrm>
-            <a:off x="457200" y="6263640"/>
-            <a:ext cx="11277295" cy="411480"/>
+            <a:off x="6420459" y="1901952"/>
+            <a:ext cx="5158587" cy="4498848"/>
           </a:xfrm>
           <a:prstGeom prst="rect">
             <a:avLst/>
@@ -10376,21 +10278,119 @@
           </a:bodyPr>
           <a:lstStyle/>
           <a:p>
-            <a:r>
-              <a:rPr sz="1100" b="0" i="1">
-                <a:solidFill>
-                  <a:srgbClr val="666666"/>
-                </a:solidFill>
-                <a:latin typeface="Calibri"/>
-              </a:rPr>
-              <a:t>VM: cada instancia carga un SO completo (aislamiento fuerte, más pesado). Contenedor: comparte el kernel del anfitrión y solo empaqueta app + dependencias (arranca en segundos, pesa MB no GB).</a:t>
-            </a:r>
-          </a:p>
-        </p:txBody>
-      </p:sp>
-      <p:sp>
-        <p:nvSpPr>
-          <p:cNvPr id="19" name="TextBox 18"/>
+            <a:pPr>
+              <a:spcAft>
+                <a:spcPts val="800"/>
+              </a:spcAft>
+            </a:pPr>
+            <a:r>
+              <a:rPr sz="1500" b="0" i="0">
+                <a:solidFill>
+                  <a:srgbClr val="333333"/>
+                </a:solidFill>
+                <a:latin typeface="Calibri"/>
+              </a:rPr>
+              <a:t>–   </a:t>
+            </a:r>
+            <a:r>
+              <a:rPr sz="1500" b="1" i="0">
+                <a:solidFill>
+                  <a:srgbClr val="333333"/>
+                </a:solidFill>
+                <a:latin typeface="Calibri"/>
+              </a:rPr>
+              <a:t>Comparte el kernel</a:t>
+            </a:r>
+            <a:r>
+              <a:rPr sz="1500" b="0" i="0">
+                <a:solidFill>
+                  <a:srgbClr val="333333"/>
+                </a:solidFill>
+                <a:latin typeface="Calibri"/>
+              </a:rPr>
+              <a:t> del anfitrion</a:t>
+            </a:r>
+          </a:p>
+          <a:p>
+            <a:pPr>
+              <a:spcAft>
+                <a:spcPts val="800"/>
+              </a:spcAft>
+            </a:pPr>
+            <a:r>
+              <a:rPr sz="1500" b="0" i="0">
+                <a:solidFill>
+                  <a:srgbClr val="333333"/>
+                </a:solidFill>
+                <a:latin typeface="Calibri"/>
+              </a:rPr>
+              <a:t>–   Empaqueta solo app + dependencias</a:t>
+            </a:r>
+          </a:p>
+          <a:p>
+            <a:pPr>
+              <a:spcAft>
+                <a:spcPts val="800"/>
+              </a:spcAft>
+            </a:pPr>
+            <a:r>
+              <a:rPr sz="1500" b="0" i="0">
+                <a:solidFill>
+                  <a:srgbClr val="333333"/>
+                </a:solidFill>
+                <a:latin typeface="Calibri"/>
+              </a:rPr>
+              <a:t>–   Arranque en </a:t>
+            </a:r>
+            <a:r>
+              <a:rPr sz="1500" b="1" i="0">
+                <a:solidFill>
+                  <a:srgbClr val="333333"/>
+                </a:solidFill>
+                <a:latin typeface="Calibri"/>
+              </a:rPr>
+              <a:t>segundos</a:t>
+            </a:r>
+            <a:r>
+              <a:rPr sz="1500" b="0" i="0">
+                <a:solidFill>
+                  <a:srgbClr val="333333"/>
+                </a:solidFill>
+                <a:latin typeface="Calibri"/>
+              </a:rPr>
+              <a:t>, tamaño en </a:t>
+            </a:r>
+            <a:r>
+              <a:rPr sz="1500" b="1" i="0">
+                <a:solidFill>
+                  <a:srgbClr val="333333"/>
+                </a:solidFill>
+                <a:latin typeface="Calibri"/>
+              </a:rPr>
+              <a:t>MB</a:t>
+            </a:r>
+          </a:p>
+          <a:p>
+            <a:pPr>
+              <a:spcAft>
+                <a:spcPts val="800"/>
+              </a:spcAft>
+            </a:pPr>
+            <a:r>
+              <a:rPr sz="1500" b="0" i="0">
+                <a:solidFill>
+                  <a:srgbClr val="333333"/>
+                </a:solidFill>
+                <a:latin typeface="Calibri"/>
+              </a:rPr>
+              <a:t>–   Util para desplegar el mismo servicio muchas veces</a:t>
+            </a:r>
+          </a:p>
+        </p:txBody>
+      </p:sp>
+      <p:sp>
+        <p:nvSpPr>
+          <p:cNvPr id="13" name="TextBox 12"/>
           <p:cNvSpPr txBox="1"/>
           <p:nvPr/>
         </p:nvSpPr>
